--- a/docs/Presentacion_Calidad_Calculadora.pptx
+++ b/docs/Presentacion_Calidad_Calculadora.pptx
@@ -22,9 +22,10 @@
     <p:sldId id="270" r:id="rId16"/>
     <p:sldId id="271" r:id="rId17"/>
     <p:sldId id="272" r:id="rId18"/>
+    <p:sldId id="273" r:id="rId19"/>
   </p:sldIdLst>
   <p:notesMasterIdLst>
-    <p:notesMasterId r:id="rId19"/>
+    <p:notesMasterId r:id="rId20"/>
   </p:notesMasterIdLst>
   <p:sldSz cx="9144000" cy="5143500"/>
   <p:notesSz cx="5143500" cy="9144000"/>
@@ -123,7 +124,7 @@
   <p:extLst>
     <p:ext uri="{521415D9-36F7-43E2-AB2F-B90AF26B5E84}">
       <p14:sectionLst xmlns:p14="http://schemas.microsoft.com/office/powerpoint/2010/main">
-        <p14:section name="Introducción" id="{a779e83e-71aa-829e-af4b-3a7906831b85}">
+        <p14:section name="Introducción" id="{5623f8cf-67ed-4cc1-12fa-66e543f52603}">
           <p14:sldIdLst>
             <p14:sldId id="256"/>
             <p14:sldId id="257"/>
@@ -132,7 +133,7 @@
             <p14:sldId id="260"/>
           </p14:sldIdLst>
         </p14:section>
-        <p14:section name="Pruebas de aceptación" id="{b54421ee-732d-7f40-4026-c60d1b5bc6bb}">
+        <p14:section name="Pruebas de aceptación" id="{81d5732e-adfd-2134-5700-33907e7f5c18}">
           <p14:sldIdLst>
             <p14:sldId id="261"/>
             <p14:sldId id="262"/>
@@ -140,7 +141,7 @@
             <p14:sldId id="264"/>
           </p14:sldIdLst>
         </p14:section>
-        <p14:section name="SonarCloud" id="{6005eae7-191f-58c0-2cea-7d8affc89eec}">
+        <p14:section name="SonarCloud" id="{0b4e120f-f6c9-ce38-0365-ed448f720cb4}">
           <p14:sldIdLst>
             <p14:sldId id="265"/>
             <p14:sldId id="266"/>
@@ -148,16 +149,17 @@
             <p14:sldId id="268"/>
           </p14:sldIdLst>
         </p14:section>
-        <p14:section name="Integración y estado" id="{83d37204-05ad-e4b1-5a0b-4c7de41e5e77}">
+        <p14:section name="Integración y estado" id="{6345668a-6e85-adfe-e708-07c4d43c770f}">
           <p14:sldIdLst>
             <p14:sldId id="269"/>
             <p14:sldId id="270"/>
+            <p14:sldId id="271"/>
           </p14:sldIdLst>
         </p14:section>
-        <p14:section name="Cierre" id="{79d31cf6-aa95-cd96-7598-ef75b67b812a}">
+        <p14:section name="Cierre" id="{95428c74-0c9a-3941-a059-40138ed7e1e8}">
           <p14:sldIdLst>
-            <p14:sldId id="271"/>
             <p14:sldId id="272"/>
+            <p14:sldId id="273"/>
           </p14:sldIdLst>
         </p14:section>
       </p14:sectionLst>
@@ -239,7 +241,7 @@
                     <c:v>Líneas (JaCoCo)</c:v>
                   </c:pt>
                   <c:pt idx="2">
-                    <c:v>Estimada Sonar</c:v>
+                    <c:v>SonarCloud</c:v>
                   </c:pt>
                   <c:pt idx="3">
                     <c:v>Ramas (JaCoCo)</c:v>
@@ -261,7 +263,7 @@
                   <c:v>91.7</c:v>
                 </c:pt>
                 <c:pt idx="2">
-                  <c:v>87.7</c:v>
+                  <c:v>93.7</c:v>
                 </c:pt>
                 <c:pt idx="3">
                   <c:v>77.6</c:v>
@@ -1406,7 +1408,7 @@
           <a:p>
             <a:r>
               <a:rPr lang="en-US" dirty="0"/>
-              <a:t>Estimación local con lizard sobre el código de producción. Sonar confirmará los valores con el primer análisis; por eso los topes son iniciales y se calibran.</a:t>
+              <a:t>Valores medidos por SonarCloud en el primer análisis (el máximo por método viene de lizard). Los topes dejan margen de crecimiento y se pueden ajustar.</a:t>
             </a:r>
             <a:endParaRPr lang="en-US" dirty="0"/>
           </a:p>
@@ -1670,7 +1672,7 @@
           <a:p>
             <a:r>
               <a:rPr lang="en-US" dirty="0"/>
-              <a:t>Sé transparente: Karate y Sonar se prepararon sin poder ejecutarlos en el entorno de trabajo; los resultados esperados sí se verificaron contra el código real. El gate y el profile propios solo se pueden asignar durante la prueba del plan Team (hasta el 1 de noviembre de 2026).</a:t>
+              <a:t>Valores leídos del proyecto tras la corrida #4 de GitHub Actions (rama main).</a:t>
             </a:r>
             <a:endParaRPr lang="en-US" dirty="0"/>
           </a:p>
@@ -1758,7 +1760,7 @@
           <a:p>
             <a:r>
               <a:rPr lang="en-US" dirty="0"/>
-              <a:t/>
+              <a:t>La corrida de CI ya pasa completa. Queda alinear la rama principal de SonarCloud con `main` y decidir el plan antes de que termine la prueba del plan Team (1 de noviembre de 2026).</a:t>
             </a:r>
             <a:endParaRPr lang="en-US" dirty="0"/>
           </a:p>
@@ -1782,6 +1784,94 @@
             <a:fld id="{F7021451-1387-4CA6-816F-3879F97B5CBC}" type="slidenum">
               <a:rPr lang="en-US"/>
               <a:t>17</a:t>
+            </a:fld>
+            <a:endParaRPr lang="en-US"/>
+          </a:p>
+        </p:txBody>
+      </p:sp>
+    </p:spTree>
+    <p:extLst>
+      <p:ext uri="{BB962C8B-B14F-4D97-AF65-F5344CB8AC3E}">
+        <p14:creationId xmlns:p14="http://schemas.microsoft.com/office/powerpoint/2010/main" val="1024086991"/>
+      </p:ext>
+    </p:extLst>
+  </p:cSld>
+  <p:clrMapOvr>
+    <a:masterClrMapping/>
+  </p:clrMapOvr>
+</p:notes>
+</file>
+
+<file path=ppt/notesSlides/notesSlide18.xml><?xml version="1.0" encoding="utf-8"?>
+<p:notes xmlns:a="http://schemas.openxmlformats.org/drawingml/2006/main" xmlns:r="http://schemas.openxmlformats.org/officeDocument/2006/relationships" xmlns:p="http://schemas.openxmlformats.org/presentationml/2006/main">
+  <p:cSld>
+    <p:spTree>
+      <p:nvGrpSpPr>
+        <p:cNvPr id="1" name=""/>
+        <p:cNvGrpSpPr/>
+        <p:nvPr/>
+      </p:nvGrpSpPr>
+      <p:grpSpPr>
+        <a:xfrm>
+          <a:off x="0" y="0"/>
+          <a:ext cx="0" cy="0"/>
+          <a:chOff x="0" y="0"/>
+          <a:chExt cx="0" cy="0"/>
+        </a:xfrm>
+      </p:grpSpPr>
+      <p:sp>
+        <p:nvSpPr>
+          <p:cNvPr id="2" name="Slide Image Placeholder 1"/>
+          <p:cNvSpPr>
+            <a:spLocks noGrp="1" noRot="1" noChangeAspect="1"/>
+          </p:cNvSpPr>
+          <p:nvPr>
+            <p:ph type="sldImg"/>
+          </p:nvPr>
+        </p:nvSpPr>
+        <p:spPr/>
+      </p:sp>
+      <p:sp>
+        <p:nvSpPr>
+          <p:cNvPr id="3" name="Notes Placeholder 2"/>
+          <p:cNvSpPr>
+            <a:spLocks noGrp="1"/>
+          </p:cNvSpPr>
+          <p:nvPr>
+            <p:ph type="body" idx="1"/>
+          </p:nvPr>
+        </p:nvSpPr>
+        <p:spPr/>
+        <p:txBody>
+          <a:bodyPr/>
+          <a:lstStyle/>
+          <a:p>
+            <a:r>
+              <a:rPr lang="en-US" dirty="0"/>
+              <a:t/>
+            </a:r>
+            <a:endParaRPr lang="en-US" dirty="0"/>
+          </a:p>
+        </p:txBody>
+      </p:sp>
+      <p:sp>
+        <p:nvSpPr>
+          <p:cNvPr id="4" name="Slide Number Placeholder 3"/>
+          <p:cNvSpPr>
+            <a:spLocks noGrp="1"/>
+          </p:cNvSpPr>
+          <p:nvPr>
+            <p:ph type="sldNum" sz="quarter" idx="10"/>
+          </p:nvPr>
+        </p:nvSpPr>
+        <p:spPr/>
+        <p:txBody>
+          <a:bodyPr/>
+          <a:lstStyle/>
+          <a:p>
+            <a:fld id="{F7021451-1387-4CA6-816F-3879F97B5CBC}" type="slidenum">
+              <a:rPr lang="en-US"/>
+              <a:t>18</a:t>
             </a:fld>
             <a:endParaRPr lang="en-US"/>
           </a:p>
@@ -2110,7 +2200,7 @@
           <a:p>
             <a:r>
               <a:rPr lang="en-US" dirty="0"/>
-              <a:t>Datos tomados del README y del último reporte de JaCoCo. La cobertura combinada que calcularía Sonar es ≈ 87,7 % (176 de 192 líneas y 59 de 76 ramas).</a:t>
+              <a:t>Cobertura medida por SonarCloud en el primer análisis: 93,7 %. JaCoCo: instrucciones 93,3 %, líneas 91,7 %, ramas 77,6 %.</a:t>
             </a:r>
             <a:endParaRPr lang="en-US" dirty="0"/>
           </a:p>
@@ -5247,7 +5337,7 @@
                 <a:ea typeface="Calibri" pitchFamily="34" charset="-122"/>
                 <a:cs typeface="Calibri" pitchFamily="34" charset="-120"/>
               </a:rPr>
-              <a:t>119</a:t>
+              <a:t>136</a:t>
             </a:r>
             <a:endParaRPr lang="en-US" sz="4800" dirty="0"/>
           </a:p>
@@ -5286,7 +5376,7 @@
                 <a:ea typeface="Calibri" pitchFamily="34" charset="-122"/>
                 <a:cs typeface="Calibri" pitchFamily="34" charset="-120"/>
               </a:rPr>
-              <a:t>complejidad ciclomática total (estimada)</a:t>
+              <a:t>complejidad ciclomática total (tope 250)</a:t>
             </a:r>
             <a:endParaRPr lang="en-US" sz="1400" dirty="0"/>
           </a:p>
@@ -5352,7 +5442,7 @@
                 <a:ea typeface="Calibri" pitchFamily="34" charset="-122"/>
                 <a:cs typeface="Calibri" pitchFamily="34" charset="-120"/>
               </a:rPr>
-              <a:t>57</a:t>
+              <a:t>83</a:t>
             </a:r>
             <a:endParaRPr lang="en-US" sz="4800" dirty="0"/>
           </a:p>
@@ -5391,7 +5481,7 @@
                 <a:ea typeface="Calibri" pitchFamily="34" charset="-122"/>
                 <a:cs typeface="Calibri" pitchFamily="34" charset="-120"/>
               </a:rPr>
-              <a:t>métodos en 18 clases</a:t>
+              <a:t>complejidad cognitiva total (tope 120)</a:t>
             </a:r>
             <a:endParaRPr lang="en-US" sz="1400" dirty="0"/>
           </a:p>
@@ -5539,7 +5629,7 @@
                 <a:ea typeface="Calibri" pitchFamily="34" charset="-122"/>
                 <a:cs typeface="Calibri" pitchFamily="34" charset="-120"/>
               </a:rPr>
-              <a:t>Tope ciclomático 250 ≈ el doble del valor actual: margen para crecer sin perder control</a:t>
+              <a:t>Tope ciclomático 250: medido 136, margen de crecimiento cercano al 80 %</a:t>
             </a:r>
             <a:endParaRPr lang="en-US" sz="1500" dirty="0"/>
           </a:p>
@@ -5560,7 +5650,7 @@
                 <a:ea typeface="Calibri" pitchFamily="34" charset="-122"/>
                 <a:cs typeface="Calibri" pitchFamily="34" charset="-120"/>
               </a:rPr>
-              <a:t>Tope cognitivo 120 con el mismo criterio</a:t>
+              <a:t>Tope cognitivo 120: medido 83, margen cercano al 45 %</a:t>
             </a:r>
             <a:endParaRPr lang="en-US" sz="1500" dirty="0"/>
           </a:p>
@@ -7568,7 +7658,7 @@
                           <a:ea typeface="Calibri" pitchFamily="34" charset="-122"/>
                           <a:cs typeface="Calibri" pitchFamily="34" charset="-120"/>
                         </a:rPr>
-                        <a:t>Análisis desde Gradle / CI</a:t>
+                        <a:t>Rama principal en SonarCloud (master → main)</a:t>
                       </a:r>
                       <a:endParaRPr lang="en-US" sz="1300" dirty="0">
                         <a:latin typeface="Calibri" charset="0"/>
@@ -7633,7 +7723,7 @@
                           <a:ea typeface="Calibri" pitchFamily="34" charset="-122"/>
                           <a:cs typeface="Calibri" pitchFamily="34" charset="-120"/>
                         </a:rPr>
-                        <a:t>Pendiente</a:t>
+                        <a:t>Por hacer</a:t>
                       </a:r>
                       <a:endParaRPr lang="en-US" sz="1200" dirty="0">
                         <a:latin typeface="Calibri" charset="0"/>
@@ -7681,6 +7771,141 @@
                     </a:lnB>
                     <a:solidFill>
                       <a:srgbClr val="FBEBD0"/>
+                    </a:solidFill>
+                  </a:tcPr>
+                </a:tc>
+              </a:tr>
+              <a:tr h="384048">
+                <a:tc>
+                  <a:txBody>
+                    <a:bodyPr/>
+                    <a:lstStyle/>
+                    <a:p>
+                      <a:pPr indent="0" marL="0">
+                        <a:buNone/>
+                      </a:pPr>
+                      <a:r>
+                        <a:rPr lang="en-US" sz="1300" dirty="0">
+                          <a:solidFill>
+                            <a:srgbClr val="1F2933"/>
+                          </a:solidFill>
+                          <a:latin typeface="Calibri" pitchFamily="34" charset="0"/>
+                          <a:ea typeface="Calibri" pitchFamily="34" charset="-122"/>
+                          <a:cs typeface="Calibri" pitchFamily="34" charset="-120"/>
+                        </a:rPr>
+                        <a:t>Análisis desde Gradle / CI</a:t>
+                      </a:r>
+                      <a:endParaRPr lang="en-US" sz="1300" dirty="0">
+                        <a:latin typeface="Calibri" charset="0"/>
+                        <a:ea typeface="Calibri" charset="0"/>
+                        <a:cs typeface="Calibri" charset="0"/>
+                      </a:endParaRPr>
+                    </a:p>
+                  </a:txBody>
+                  <a:tcPr marL="91440" marR="91440" marT="0" marB="0" anchor="ctr">
+                    <a:lnL w="6350" cap="flat" cmpd="sng" algn="ctr">
+                      <a:solidFill>
+                        <a:srgbClr val="D5D9DD"/>
+                      </a:solidFill>
+                      <a:prstDash val="solid"/>
+                      <a:round/>
+                      <a:headEnd type="none" w="med" len="med"/>
+                      <a:tailEnd type="none" w="med" len="med"/>
+                    </a:lnL>
+                    <a:lnR w="6350" cap="flat" cmpd="sng" algn="ctr">
+                      <a:solidFill>
+                        <a:srgbClr val="D5D9DD"/>
+                      </a:solidFill>
+                      <a:prstDash val="solid"/>
+                      <a:round/>
+                      <a:headEnd type="none" w="med" len="med"/>
+                      <a:tailEnd type="none" w="med" len="med"/>
+                    </a:lnR>
+                    <a:lnT w="6350" cap="flat" cmpd="sng" algn="ctr">
+                      <a:solidFill>
+                        <a:srgbClr val="D5D9DD"/>
+                      </a:solidFill>
+                      <a:prstDash val="solid"/>
+                      <a:round/>
+                      <a:headEnd type="none" w="med" len="med"/>
+                      <a:tailEnd type="none" w="med" len="med"/>
+                    </a:lnT>
+                    <a:lnB w="6350" cap="flat" cmpd="sng" algn="ctr">
+                      <a:solidFill>
+                        <a:srgbClr val="D5D9DD"/>
+                      </a:solidFill>
+                      <a:prstDash val="solid"/>
+                      <a:round/>
+                      <a:headEnd type="none" w="med" len="med"/>
+                      <a:tailEnd type="none" w="med" len="med"/>
+                    </a:lnB>
+                  </a:tcPr>
+                </a:tc>
+                <a:tc>
+                  <a:txBody>
+                    <a:bodyPr/>
+                    <a:lstStyle/>
+                    <a:p>
+                      <a:pPr algn="ctr" indent="0" marL="0">
+                        <a:buNone/>
+                      </a:pPr>
+                      <a:r>
+                        <a:rPr lang="en-US" sz="1200" b="1" dirty="0">
+                          <a:solidFill>
+                            <a:srgbClr val="1B6F65"/>
+                          </a:solidFill>
+                          <a:latin typeface="Calibri" pitchFamily="34" charset="0"/>
+                          <a:ea typeface="Calibri" pitchFamily="34" charset="-122"/>
+                          <a:cs typeface="Calibri" pitchFamily="34" charset="-120"/>
+                        </a:rPr>
+                        <a:t>Listo · CI en verde</a:t>
+                      </a:r>
+                      <a:endParaRPr lang="en-US" sz="1200" dirty="0">
+                        <a:latin typeface="Calibri" charset="0"/>
+                        <a:ea typeface="Calibri" charset="0"/>
+                        <a:cs typeface="Calibri" charset="0"/>
+                      </a:endParaRPr>
+                    </a:p>
+                  </a:txBody>
+                  <a:tcPr marL="91440" marR="91440" marT="0" marB="0" anchor="ctr">
+                    <a:lnL w="6350" cap="flat" cmpd="sng" algn="ctr">
+                      <a:solidFill>
+                        <a:srgbClr val="D5D9DD"/>
+                      </a:solidFill>
+                      <a:prstDash val="solid"/>
+                      <a:round/>
+                      <a:headEnd type="none" w="med" len="med"/>
+                      <a:tailEnd type="none" w="med" len="med"/>
+                    </a:lnL>
+                    <a:lnR w="6350" cap="flat" cmpd="sng" algn="ctr">
+                      <a:solidFill>
+                        <a:srgbClr val="D5D9DD"/>
+                      </a:solidFill>
+                      <a:prstDash val="solid"/>
+                      <a:round/>
+                      <a:headEnd type="none" w="med" len="med"/>
+                      <a:tailEnd type="none" w="med" len="med"/>
+                    </a:lnR>
+                    <a:lnT w="6350" cap="flat" cmpd="sng" algn="ctr">
+                      <a:solidFill>
+                        <a:srgbClr val="D5D9DD"/>
+                      </a:solidFill>
+                      <a:prstDash val="solid"/>
+                      <a:round/>
+                      <a:headEnd type="none" w="med" len="med"/>
+                      <a:tailEnd type="none" w="med" len="med"/>
+                    </a:lnT>
+                    <a:lnB w="6350" cap="flat" cmpd="sng" algn="ctr">
+                      <a:solidFill>
+                        <a:srgbClr val="D5D9DD"/>
+                      </a:solidFill>
+                      <a:prstDash val="solid"/>
+                      <a:round/>
+                      <a:headEnd type="none" w="med" len="med"/>
+                      <a:tailEnd type="none" w="med" len="med"/>
+                    </a:lnB>
+                    <a:solidFill>
+                      <a:srgbClr val="D8F0EC"/>
                     </a:solidFill>
                   </a:tcPr>
                 </a:tc>
@@ -7791,306 +8016,1825 @@
                   <a:schemeClr val="tx2"/>
                 </a:solidFill>
               </a:rPr>
-              <a:t>Límites y próximos pasos</a:t>
+              <a:t>Primer análisis en SonarCloud</a:t>
             </a:r>
             <a:endParaRPr lang="en-US" sz="3200" dirty="0"/>
           </a:p>
         </p:txBody>
       </p:sp>
-      <p:sp>
-        <p:nvSpPr>
-          <p:cNvPr id="4" name="Título límites"/>
-          <p:cNvSpPr txBox="1"/>
-          <p:nvPr/>
-        </p:nvSpPr>
-        <p:spPr>
-          <a:xfrm>
-            <a:off x="457200" y="1325880"/>
-            <a:ext cx="3931920" cy="411480"/>
-          </a:xfrm>
-          <a:prstGeom prst="rect">
-            <a:avLst/>
-          </a:prstGeom>
-          <a:noFill/>
-          <a:ln/>
-        </p:spPr>
-        <p:txBody>
-          <a:bodyPr wrap="square" lIns="0" tIns="0" rIns="0" bIns="0" rtlCol="0" anchor="ctr"/>
-          <a:lstStyle/>
-          <a:p>
-            <a:pPr indent="0" marL="0">
-              <a:buNone/>
-            </a:pPr>
-            <a:r>
-              <a:rPr lang="en-US" sz="2200" b="1" dirty="0">
-                <a:solidFill>
-                  <a:schemeClr val="tx2"/>
-                </a:solidFill>
-                <a:latin typeface="Calibri" pitchFamily="34" charset="0"/>
-                <a:ea typeface="Calibri" pitchFamily="34" charset="-122"/>
-                <a:cs typeface="Calibri" pitchFamily="34" charset="-120"/>
-              </a:rPr>
-              <a:t>Límites actuales</a:t>
-            </a:r>
-            <a:endParaRPr lang="en-US" sz="2200" dirty="0"/>
-          </a:p>
-        </p:txBody>
-      </p:sp>
-      <p:sp>
-        <p:nvSpPr>
-          <p:cNvPr id="5" name="Lista límites"/>
-          <p:cNvSpPr txBox="1"/>
-          <p:nvPr/>
-        </p:nvSpPr>
-        <p:spPr>
-          <a:xfrm>
-            <a:off x="457200" y="1828800"/>
-            <a:ext cx="3931920" cy="2743200"/>
-          </a:xfrm>
-          <a:prstGeom prst="rect">
-            <a:avLst/>
-          </a:prstGeom>
-          <a:noFill/>
-          <a:ln/>
-        </p:spPr>
-        <p:txBody>
-          <a:bodyPr wrap="square" lIns="0" tIns="0" rIns="0" bIns="0" rtlCol="0" anchor="t"/>
-          <a:lstStyle/>
-          <a:p>
-            <a:pPr marL="342900" indent="-342900">
-              <a:spcAft>
-                <a:spcPts val="800"/>
-              </a:spcAft>
-              <a:buSzPct val="100000"/>
-              <a:buChar char="•"/>
-            </a:pPr>
-            <a:r>
-              <a:rPr lang="en-US" sz="1400" dirty="0">
-                <a:solidFill>
-                  <a:schemeClr val="tx1"/>
-                </a:solidFill>
-                <a:latin typeface="Calibri" pitchFamily="34" charset="0"/>
-                <a:ea typeface="Calibri" pitchFamily="34" charset="-122"/>
-                <a:cs typeface="Calibri" pitchFamily="34" charset="-120"/>
-              </a:rPr>
-              <a:t>Karate y Sonar aún sin corrida real en CI (los resultados esperados sí se verificaron: 130 de 130)</a:t>
-            </a:r>
-            <a:endParaRPr lang="en-US" sz="1400" dirty="0"/>
-          </a:p>
-          <a:p>
-            <a:pPr marL="342900" indent="-342900">
-              <a:spcAft>
-                <a:spcPts val="800"/>
-              </a:spcAft>
-              <a:buSzPct val="100000"/>
-              <a:buChar char="•"/>
-            </a:pPr>
-            <a:r>
-              <a:rPr lang="en-US" sz="1400" dirty="0">
-                <a:solidFill>
-                  <a:schemeClr val="tx1"/>
-                </a:solidFill>
-                <a:latin typeface="Calibri" pitchFamily="34" charset="0"/>
-                <a:ea typeface="Calibri" pitchFamily="34" charset="-122"/>
-                <a:cs typeface="Calibri" pitchFamily="34" charset="-120"/>
-              </a:rPr>
-              <a:t>Gate y profile propios: asignados solo durante la prueba del plan Team (hasta el 1 nov.)</a:t>
-            </a:r>
-            <a:endParaRPr lang="en-US" sz="1400" dirty="0"/>
-          </a:p>
-          <a:p>
-            <a:pPr marL="342900" indent="-342900">
-              <a:spcAft>
-                <a:spcPts val="800"/>
-              </a:spcAft>
-              <a:buSzPct val="100000"/>
-              <a:buChar char="•"/>
-            </a:pPr>
-            <a:r>
-              <a:rPr lang="en-US" sz="1400" dirty="0">
-                <a:solidFill>
-                  <a:schemeClr val="tx1"/>
-                </a:solidFill>
-                <a:latin typeface="Calibri" pitchFamily="34" charset="0"/>
-                <a:ea typeface="Calibri" pitchFamily="34" charset="-122"/>
-                <a:cs typeface="Calibri" pitchFamily="34" charset="-120"/>
-              </a:rPr>
-              <a:t>Topes de complejidad total por calibrar</a:t>
-            </a:r>
-            <a:endParaRPr lang="en-US" sz="1400" dirty="0"/>
-          </a:p>
-          <a:p>
-            <a:pPr marL="342900" indent="-342900">
-              <a:spcAft>
-                <a:spcPts val="800"/>
-              </a:spcAft>
-              <a:buSzPct val="100000"/>
-              <a:buChar char="•"/>
-            </a:pPr>
-            <a:r>
-              <a:rPr lang="en-US" sz="1400" dirty="0">
-                <a:solidFill>
-                  <a:schemeClr val="tx1"/>
-                </a:solidFill>
-                <a:latin typeface="Calibri" pitchFamily="34" charset="0"/>
-                <a:ea typeface="Calibri" pitchFamily="34" charset="-122"/>
-                <a:cs typeface="Calibri" pitchFamily="34" charset="-120"/>
-              </a:rPr>
-              <a:t>Ventana Swing sin prueba visual</a:t>
-            </a:r>
-            <a:endParaRPr lang="en-US" sz="1400" dirty="0"/>
-          </a:p>
-        </p:txBody>
-      </p:sp>
-      <p:sp>
-        <p:nvSpPr>
-          <p:cNvPr id="6" name="Título pasos"/>
-          <p:cNvSpPr txBox="1"/>
-          <p:nvPr/>
-        </p:nvSpPr>
-        <p:spPr>
-          <a:xfrm>
-            <a:off x="4754880" y="1325880"/>
-            <a:ext cx="3931920" cy="411480"/>
-          </a:xfrm>
-          <a:prstGeom prst="rect">
-            <a:avLst/>
-          </a:prstGeom>
-          <a:noFill/>
-          <a:ln/>
-        </p:spPr>
-        <p:txBody>
-          <a:bodyPr wrap="square" lIns="0" tIns="0" rIns="0" bIns="0" rtlCol="0" anchor="ctr"/>
-          <a:lstStyle/>
-          <a:p>
-            <a:pPr indent="0" marL="0">
-              <a:buNone/>
-            </a:pPr>
-            <a:r>
-              <a:rPr lang="en-US" sz="2200" b="1" dirty="0">
-                <a:solidFill>
-                  <a:schemeClr val="tx2"/>
-                </a:solidFill>
-                <a:latin typeface="Calibri" pitchFamily="34" charset="0"/>
-                <a:ea typeface="Calibri" pitchFamily="34" charset="-122"/>
-                <a:cs typeface="Calibri" pitchFamily="34" charset="-120"/>
-              </a:rPr>
-              <a:t>Próximos pasos</a:t>
-            </a:r>
-            <a:endParaRPr lang="en-US" sz="2200" dirty="0"/>
-          </a:p>
-        </p:txBody>
-      </p:sp>
-      <p:sp>
-        <p:nvSpPr>
-          <p:cNvPr id="7" name="Lista pasos"/>
-          <p:cNvSpPr txBox="1"/>
-          <p:nvPr/>
-        </p:nvSpPr>
-        <p:spPr>
-          <a:xfrm>
-            <a:off x="4754880" y="1828800"/>
-            <a:ext cx="3931920" cy="2743200"/>
-          </a:xfrm>
-          <a:prstGeom prst="rect">
-            <a:avLst/>
-          </a:prstGeom>
-          <a:noFill/>
-          <a:ln/>
-        </p:spPr>
-        <p:txBody>
-          <a:bodyPr wrap="square" lIns="0" tIns="0" rIns="0" bIns="0" rtlCol="0" anchor="t"/>
-          <a:lstStyle/>
-          <a:p>
-            <a:pPr marL="342900" indent="-342900">
-              <a:spcAft>
-                <a:spcPts val="800"/>
-              </a:spcAft>
-              <a:buSzPct val="100000"/>
-              <a:buFont typeface="+mj-lt"/>
-              <a:buAutoNum type="arabicPeriod" startAt="1"/>
-            </a:pPr>
-            <a:r>
-              <a:rPr lang="en-US" sz="1400" dirty="0">
-                <a:solidFill>
-                  <a:schemeClr val="tx1"/>
-                </a:solidFill>
-                <a:latin typeface="Calibri" pitchFamily="34" charset="0"/>
-                <a:ea typeface="Calibri" pitchFamily="34" charset="-122"/>
-                <a:cs typeface="Calibri" pitchFamily="34" charset="-120"/>
-              </a:rPr>
-              <a:t>Secret SONAR_TOKEN en GitHub (el workflow ya está)</a:t>
-            </a:r>
-            <a:endParaRPr lang="en-US" sz="1400" dirty="0"/>
-          </a:p>
-          <a:p>
-            <a:pPr marL="342900" indent="-342900">
-              <a:spcAft>
-                <a:spcPts val="800"/>
-              </a:spcAft>
-              <a:buSzPct val="100000"/>
-              <a:buFont typeface="+mj-lt"/>
-              <a:buAutoNum type="arabicPeriod" startAt="1"/>
-            </a:pPr>
-            <a:r>
-              <a:rPr lang="en-US" sz="1400" dirty="0">
-                <a:solidFill>
-                  <a:schemeClr val="tx1"/>
-                </a:solidFill>
-                <a:latin typeface="Calibri" pitchFamily="34" charset="0"/>
-                <a:ea typeface="Calibri" pitchFamily="34" charset="-122"/>
-                <a:cs typeface="Calibri" pitchFamily="34" charset="-120"/>
-              </a:rPr>
-              <a:t>./gradlew acceptanceTest</a:t>
-            </a:r>
-            <a:endParaRPr lang="en-US" sz="1400" dirty="0"/>
-          </a:p>
-          <a:p>
-            <a:pPr marL="342900" indent="-342900">
-              <a:spcAft>
-                <a:spcPts val="800"/>
-              </a:spcAft>
-              <a:buSzPct val="100000"/>
-              <a:buFont typeface="+mj-lt"/>
-              <a:buAutoNum type="arabicPeriod" startAt="1"/>
-            </a:pPr>
-            <a:r>
-              <a:rPr lang="en-US" sz="1400" dirty="0">
-                <a:solidFill>
-                  <a:schemeClr val="tx1"/>
-                </a:solidFill>
-                <a:latin typeface="Calibri" pitchFamily="34" charset="0"/>
-                <a:ea typeface="Calibri" pitchFamily="34" charset="-122"/>
-                <a:cs typeface="Calibri" pitchFamily="34" charset="-120"/>
-              </a:rPr>
-              <a:t>Primer análisis y calibrar los topes</a:t>
-            </a:r>
-            <a:endParaRPr lang="en-US" sz="1400" dirty="0"/>
-          </a:p>
-          <a:p>
-            <a:pPr marL="342900" indent="-342900">
-              <a:spcAft>
-                <a:spcPts val="800"/>
-              </a:spcAft>
-              <a:buSzPct val="100000"/>
-              <a:buFont typeface="+mj-lt"/>
-              <a:buAutoNum type="arabicPeriod" startAt="1"/>
-            </a:pPr>
-            <a:r>
-              <a:rPr lang="en-US" sz="1400" dirty="0">
-                <a:solidFill>
-                  <a:schemeClr val="tx1"/>
-                </a:solidFill>
-                <a:latin typeface="Calibri" pitchFamily="34" charset="0"/>
-                <a:ea typeface="Calibri" pitchFamily="34" charset="-122"/>
-                <a:cs typeface="Calibri" pitchFamily="34" charset="-120"/>
-              </a:rPr>
-              <a:t>Antes del 1 nov.: plan de pago o check-metrics.sh en plan gratuito</a:t>
-            </a:r>
-            <a:endParaRPr lang="en-US" sz="1400" dirty="0"/>
-          </a:p>
-        </p:txBody>
-      </p:sp>
+      <p:graphicFrame>
+        <p:nvGraphicFramePr>
+          <p:cNvPr id="17" name="Tabla métricas reales"/>
+          <p:cNvGraphicFramePr>
+            <a:graphicFrameLocks noGrp="1"/>
+          </p:cNvGraphicFramePr>
+          <p:nvPr>
+            <p:extLst>
+              <p:ext uri="{D42A27DB-BD31-4B8C-83A1-F6EECF244321}">
+                <p14:modId xmlns:p14="http://schemas.microsoft.com/office/powerpoint/2010/main" val="1579011935"/>
+              </p:ext>
+            </p:extLst>
+          </p:nvPr>
+        </p:nvGraphicFramePr>
+        <p:xfrm>
+          <a:off x="457200" y="1280160"/>
+          <a:ext cx="8229600" cy="914400"/>
+        </p:xfrm>
+        <a:graphic>
+          <a:graphicData uri="http://schemas.openxmlformats.org/drawingml/2006/table">
+            <a:tbl>
+              <a:tblPr/>
+              <a:tblGrid>
+                <a:gridCol w="3291840"/>
+                <a:gridCol w="1645920"/>
+                <a:gridCol w="3291840"/>
+              </a:tblGrid>
+              <a:tr h="365760">
+                <a:tc>
+                  <a:txBody>
+                    <a:bodyPr/>
+                    <a:lstStyle/>
+                    <a:p>
+                      <a:pPr indent="0" marL="0">
+                        <a:buNone/>
+                      </a:pPr>
+                      <a:r>
+                        <a:rPr lang="en-US" sz="1300" b="1" dirty="0">
+                          <a:solidFill>
+                            <a:srgbClr val="FFFFFF"/>
+                          </a:solidFill>
+                          <a:latin typeface="Calibri" pitchFamily="34" charset="0"/>
+                          <a:ea typeface="Calibri" pitchFamily="34" charset="-122"/>
+                          <a:cs typeface="Calibri" pitchFamily="34" charset="-120"/>
+                        </a:rPr>
+                        <a:t>Métrica</a:t>
+                      </a:r>
+                      <a:endParaRPr lang="en-US" sz="1300" dirty="0">
+                        <a:latin typeface="Calibri" charset="0"/>
+                        <a:ea typeface="Calibri" charset="0"/>
+                        <a:cs typeface="Calibri" charset="0"/>
+                      </a:endParaRPr>
+                    </a:p>
+                  </a:txBody>
+                  <a:tcPr marL="91440" marR="91440" marT="0" marB="0" anchor="ctr">
+                    <a:lnL w="6350" cap="flat" cmpd="sng" algn="ctr">
+                      <a:solidFill>
+                        <a:srgbClr val="D5D9DD"/>
+                      </a:solidFill>
+                      <a:prstDash val="solid"/>
+                      <a:round/>
+                      <a:headEnd type="none" w="med" len="med"/>
+                      <a:tailEnd type="none" w="med" len="med"/>
+                    </a:lnL>
+                    <a:lnR w="6350" cap="flat" cmpd="sng" algn="ctr">
+                      <a:solidFill>
+                        <a:srgbClr val="D5D9DD"/>
+                      </a:solidFill>
+                      <a:prstDash val="solid"/>
+                      <a:round/>
+                      <a:headEnd type="none" w="med" len="med"/>
+                      <a:tailEnd type="none" w="med" len="med"/>
+                    </a:lnR>
+                    <a:lnT w="6350" cap="flat" cmpd="sng" algn="ctr">
+                      <a:solidFill>
+                        <a:srgbClr val="D5D9DD"/>
+                      </a:solidFill>
+                      <a:prstDash val="solid"/>
+                      <a:round/>
+                      <a:headEnd type="none" w="med" len="med"/>
+                      <a:tailEnd type="none" w="med" len="med"/>
+                    </a:lnT>
+                    <a:lnB w="6350" cap="flat" cmpd="sng" algn="ctr">
+                      <a:solidFill>
+                        <a:srgbClr val="D5D9DD"/>
+                      </a:solidFill>
+                      <a:prstDash val="solid"/>
+                      <a:round/>
+                      <a:headEnd type="none" w="med" len="med"/>
+                      <a:tailEnd type="none" w="med" len="med"/>
+                    </a:lnB>
+                    <a:solidFill>
+                      <a:srgbClr val="1F5E8C"/>
+                    </a:solidFill>
+                  </a:tcPr>
+                </a:tc>
+                <a:tc>
+                  <a:txBody>
+                    <a:bodyPr/>
+                    <a:lstStyle/>
+                    <a:p>
+                      <a:pPr indent="0" marL="0">
+                        <a:buNone/>
+                      </a:pPr>
+                      <a:r>
+                        <a:rPr lang="en-US" sz="1300" b="1" dirty="0">
+                          <a:solidFill>
+                            <a:srgbClr val="FFFFFF"/>
+                          </a:solidFill>
+                          <a:latin typeface="Calibri" pitchFamily="34" charset="0"/>
+                          <a:ea typeface="Calibri" pitchFamily="34" charset="-122"/>
+                          <a:cs typeface="Calibri" pitchFamily="34" charset="-120"/>
+                        </a:rPr>
+                        <a:t>Valor</a:t>
+                      </a:r>
+                      <a:endParaRPr lang="en-US" sz="1300" dirty="0">
+                        <a:latin typeface="Calibri" charset="0"/>
+                        <a:ea typeface="Calibri" charset="0"/>
+                        <a:cs typeface="Calibri" charset="0"/>
+                      </a:endParaRPr>
+                    </a:p>
+                  </a:txBody>
+                  <a:tcPr marL="91440" marR="91440" marT="0" marB="0" anchor="ctr">
+                    <a:lnL w="6350" cap="flat" cmpd="sng" algn="ctr">
+                      <a:solidFill>
+                        <a:srgbClr val="D5D9DD"/>
+                      </a:solidFill>
+                      <a:prstDash val="solid"/>
+                      <a:round/>
+                      <a:headEnd type="none" w="med" len="med"/>
+                      <a:tailEnd type="none" w="med" len="med"/>
+                    </a:lnL>
+                    <a:lnR w="6350" cap="flat" cmpd="sng" algn="ctr">
+                      <a:solidFill>
+                        <a:srgbClr val="D5D9DD"/>
+                      </a:solidFill>
+                      <a:prstDash val="solid"/>
+                      <a:round/>
+                      <a:headEnd type="none" w="med" len="med"/>
+                      <a:tailEnd type="none" w="med" len="med"/>
+                    </a:lnR>
+                    <a:lnT w="6350" cap="flat" cmpd="sng" algn="ctr">
+                      <a:solidFill>
+                        <a:srgbClr val="D5D9DD"/>
+                      </a:solidFill>
+                      <a:prstDash val="solid"/>
+                      <a:round/>
+                      <a:headEnd type="none" w="med" len="med"/>
+                      <a:tailEnd type="none" w="med" len="med"/>
+                    </a:lnT>
+                    <a:lnB w="6350" cap="flat" cmpd="sng" algn="ctr">
+                      <a:solidFill>
+                        <a:srgbClr val="D5D9DD"/>
+                      </a:solidFill>
+                      <a:prstDash val="solid"/>
+                      <a:round/>
+                      <a:headEnd type="none" w="med" len="med"/>
+                      <a:tailEnd type="none" w="med" len="med"/>
+                    </a:lnB>
+                    <a:solidFill>
+                      <a:srgbClr val="1F5E8C"/>
+                    </a:solidFill>
+                  </a:tcPr>
+                </a:tc>
+                <a:tc>
+                  <a:txBody>
+                    <a:bodyPr/>
+                    <a:lstStyle/>
+                    <a:p>
+                      <a:pPr indent="0" marL="0">
+                        <a:buNone/>
+                      </a:pPr>
+                      <a:r>
+                        <a:rPr lang="en-US" sz="1300" b="1" dirty="0">
+                          <a:solidFill>
+                            <a:srgbClr val="FFFFFF"/>
+                          </a:solidFill>
+                          <a:latin typeface="Calibri" pitchFamily="34" charset="0"/>
+                          <a:ea typeface="Calibri" pitchFamily="34" charset="-122"/>
+                          <a:cs typeface="Calibri" pitchFamily="34" charset="-120"/>
+                        </a:rPr>
+                        <a:t>Referencia</a:t>
+                      </a:r>
+                      <a:endParaRPr lang="en-US" sz="1300" dirty="0">
+                        <a:latin typeface="Calibri" charset="0"/>
+                        <a:ea typeface="Calibri" charset="0"/>
+                        <a:cs typeface="Calibri" charset="0"/>
+                      </a:endParaRPr>
+                    </a:p>
+                  </a:txBody>
+                  <a:tcPr marL="91440" marR="91440" marT="0" marB="0" anchor="ctr">
+                    <a:lnL w="6350" cap="flat" cmpd="sng" algn="ctr">
+                      <a:solidFill>
+                        <a:srgbClr val="D5D9DD"/>
+                      </a:solidFill>
+                      <a:prstDash val="solid"/>
+                      <a:round/>
+                      <a:headEnd type="none" w="med" len="med"/>
+                      <a:tailEnd type="none" w="med" len="med"/>
+                    </a:lnL>
+                    <a:lnR w="6350" cap="flat" cmpd="sng" algn="ctr">
+                      <a:solidFill>
+                        <a:srgbClr val="D5D9DD"/>
+                      </a:solidFill>
+                      <a:prstDash val="solid"/>
+                      <a:round/>
+                      <a:headEnd type="none" w="med" len="med"/>
+                      <a:tailEnd type="none" w="med" len="med"/>
+                    </a:lnR>
+                    <a:lnT w="6350" cap="flat" cmpd="sng" algn="ctr">
+                      <a:solidFill>
+                        <a:srgbClr val="D5D9DD"/>
+                      </a:solidFill>
+                      <a:prstDash val="solid"/>
+                      <a:round/>
+                      <a:headEnd type="none" w="med" len="med"/>
+                      <a:tailEnd type="none" w="med" len="med"/>
+                    </a:lnT>
+                    <a:lnB w="6350" cap="flat" cmpd="sng" algn="ctr">
+                      <a:solidFill>
+                        <a:srgbClr val="D5D9DD"/>
+                      </a:solidFill>
+                      <a:prstDash val="solid"/>
+                      <a:round/>
+                      <a:headEnd type="none" w="med" len="med"/>
+                      <a:tailEnd type="none" w="med" len="med"/>
+                    </a:lnB>
+                    <a:solidFill>
+                      <a:srgbClr val="1F5E8C"/>
+                    </a:solidFill>
+                  </a:tcPr>
+                </a:tc>
+              </a:tr>
+              <a:tr h="365760">
+                <a:tc>
+                  <a:txBody>
+                    <a:bodyPr/>
+                    <a:lstStyle/>
+                    <a:p>
+                      <a:pPr indent="0" marL="0">
+                        <a:buNone/>
+                      </a:pPr>
+                      <a:r>
+                        <a:rPr lang="en-US" sz="1300" dirty="0">
+                          <a:solidFill>
+                            <a:srgbClr val="1F2933"/>
+                          </a:solidFill>
+                          <a:latin typeface="Calibri" pitchFamily="34" charset="0"/>
+                          <a:ea typeface="Calibri" pitchFamily="34" charset="-122"/>
+                          <a:cs typeface="Calibri" pitchFamily="34" charset="-120"/>
+                        </a:rPr>
+                        <a:t>Líneas de código de producción</a:t>
+                      </a:r>
+                      <a:endParaRPr lang="en-US" sz="1300" dirty="0">
+                        <a:latin typeface="Calibri" charset="0"/>
+                        <a:ea typeface="Calibri" charset="0"/>
+                        <a:cs typeface="Calibri" charset="0"/>
+                      </a:endParaRPr>
+                    </a:p>
+                  </a:txBody>
+                  <a:tcPr marL="91440" marR="91440" marT="0" marB="0" anchor="ctr">
+                    <a:lnL w="6350" cap="flat" cmpd="sng" algn="ctr">
+                      <a:solidFill>
+                        <a:srgbClr val="D5D9DD"/>
+                      </a:solidFill>
+                      <a:prstDash val="solid"/>
+                      <a:round/>
+                      <a:headEnd type="none" w="med" len="med"/>
+                      <a:tailEnd type="none" w="med" len="med"/>
+                    </a:lnL>
+                    <a:lnR w="6350" cap="flat" cmpd="sng" algn="ctr">
+                      <a:solidFill>
+                        <a:srgbClr val="D5D9DD"/>
+                      </a:solidFill>
+                      <a:prstDash val="solid"/>
+                      <a:round/>
+                      <a:headEnd type="none" w="med" len="med"/>
+                      <a:tailEnd type="none" w="med" len="med"/>
+                    </a:lnR>
+                    <a:lnT w="6350" cap="flat" cmpd="sng" algn="ctr">
+                      <a:solidFill>
+                        <a:srgbClr val="D5D9DD"/>
+                      </a:solidFill>
+                      <a:prstDash val="solid"/>
+                      <a:round/>
+                      <a:headEnd type="none" w="med" len="med"/>
+                      <a:tailEnd type="none" w="med" len="med"/>
+                    </a:lnT>
+                    <a:lnB w="6350" cap="flat" cmpd="sng" algn="ctr">
+                      <a:solidFill>
+                        <a:srgbClr val="D5D9DD"/>
+                      </a:solidFill>
+                      <a:prstDash val="solid"/>
+                      <a:round/>
+                      <a:headEnd type="none" w="med" len="med"/>
+                      <a:tailEnd type="none" w="med" len="med"/>
+                    </a:lnB>
+                  </a:tcPr>
+                </a:tc>
+                <a:tc>
+                  <a:txBody>
+                    <a:bodyPr/>
+                    <a:lstStyle/>
+                    <a:p>
+                      <a:pPr indent="0" marL="0">
+                        <a:buNone/>
+                      </a:pPr>
+                      <a:r>
+                        <a:rPr lang="en-US" sz="1300" b="1" dirty="0">
+                          <a:solidFill>
+                            <a:srgbClr val="1F2933"/>
+                          </a:solidFill>
+                          <a:latin typeface="Calibri" pitchFamily="34" charset="0"/>
+                          <a:ea typeface="Calibri" pitchFamily="34" charset="-122"/>
+                          <a:cs typeface="Calibri" pitchFamily="34" charset="-120"/>
+                        </a:rPr>
+                        <a:t>654</a:t>
+                      </a:r>
+                      <a:endParaRPr lang="en-US" sz="1300" dirty="0">
+                        <a:latin typeface="Calibri" charset="0"/>
+                        <a:ea typeface="Calibri" charset="0"/>
+                        <a:cs typeface="Calibri" charset="0"/>
+                      </a:endParaRPr>
+                    </a:p>
+                  </a:txBody>
+                  <a:tcPr marL="91440" marR="91440" marT="0" marB="0" anchor="ctr">
+                    <a:lnL w="6350" cap="flat" cmpd="sng" algn="ctr">
+                      <a:solidFill>
+                        <a:srgbClr val="D5D9DD"/>
+                      </a:solidFill>
+                      <a:prstDash val="solid"/>
+                      <a:round/>
+                      <a:headEnd type="none" w="med" len="med"/>
+                      <a:tailEnd type="none" w="med" len="med"/>
+                    </a:lnL>
+                    <a:lnR w="6350" cap="flat" cmpd="sng" algn="ctr">
+                      <a:solidFill>
+                        <a:srgbClr val="D5D9DD"/>
+                      </a:solidFill>
+                      <a:prstDash val="solid"/>
+                      <a:round/>
+                      <a:headEnd type="none" w="med" len="med"/>
+                      <a:tailEnd type="none" w="med" len="med"/>
+                    </a:lnR>
+                    <a:lnT w="6350" cap="flat" cmpd="sng" algn="ctr">
+                      <a:solidFill>
+                        <a:srgbClr val="D5D9DD"/>
+                      </a:solidFill>
+                      <a:prstDash val="solid"/>
+                      <a:round/>
+                      <a:headEnd type="none" w="med" len="med"/>
+                      <a:tailEnd type="none" w="med" len="med"/>
+                    </a:lnT>
+                    <a:lnB w="6350" cap="flat" cmpd="sng" algn="ctr">
+                      <a:solidFill>
+                        <a:srgbClr val="D5D9DD"/>
+                      </a:solidFill>
+                      <a:prstDash val="solid"/>
+                      <a:round/>
+                      <a:headEnd type="none" w="med" len="med"/>
+                      <a:tailEnd type="none" w="med" len="med"/>
+                    </a:lnB>
+                  </a:tcPr>
+                </a:tc>
+                <a:tc>
+                  <a:txBody>
+                    <a:bodyPr/>
+                    <a:lstStyle/>
+                    <a:p>
+                      <a:pPr indent="0" marL="0">
+                        <a:buNone/>
+                      </a:pPr>
+                      <a:r>
+                        <a:rPr lang="en-US" sz="1300" dirty="0">
+                          <a:solidFill>
+                            <a:srgbClr val="1F2933"/>
+                          </a:solidFill>
+                          <a:latin typeface="Calibri" pitchFamily="34" charset="0"/>
+                          <a:ea typeface="Calibri" pitchFamily="34" charset="-122"/>
+                          <a:cs typeface="Calibri" pitchFamily="34" charset="-120"/>
+                        </a:rPr>
+                        <a:t>medido por SonarCloud</a:t>
+                      </a:r>
+                      <a:endParaRPr lang="en-US" sz="1300" dirty="0">
+                        <a:latin typeface="Calibri" charset="0"/>
+                        <a:ea typeface="Calibri" charset="0"/>
+                        <a:cs typeface="Calibri" charset="0"/>
+                      </a:endParaRPr>
+                    </a:p>
+                  </a:txBody>
+                  <a:tcPr marL="91440" marR="91440" marT="0" marB="0" anchor="ctr">
+                    <a:lnL w="6350" cap="flat" cmpd="sng" algn="ctr">
+                      <a:solidFill>
+                        <a:srgbClr val="D5D9DD"/>
+                      </a:solidFill>
+                      <a:prstDash val="solid"/>
+                      <a:round/>
+                      <a:headEnd type="none" w="med" len="med"/>
+                      <a:tailEnd type="none" w="med" len="med"/>
+                    </a:lnL>
+                    <a:lnR w="6350" cap="flat" cmpd="sng" algn="ctr">
+                      <a:solidFill>
+                        <a:srgbClr val="D5D9DD"/>
+                      </a:solidFill>
+                      <a:prstDash val="solid"/>
+                      <a:round/>
+                      <a:headEnd type="none" w="med" len="med"/>
+                      <a:tailEnd type="none" w="med" len="med"/>
+                    </a:lnR>
+                    <a:lnT w="6350" cap="flat" cmpd="sng" algn="ctr">
+                      <a:solidFill>
+                        <a:srgbClr val="D5D9DD"/>
+                      </a:solidFill>
+                      <a:prstDash val="solid"/>
+                      <a:round/>
+                      <a:headEnd type="none" w="med" len="med"/>
+                      <a:tailEnd type="none" w="med" len="med"/>
+                    </a:lnT>
+                    <a:lnB w="6350" cap="flat" cmpd="sng" algn="ctr">
+                      <a:solidFill>
+                        <a:srgbClr val="D5D9DD"/>
+                      </a:solidFill>
+                      <a:prstDash val="solid"/>
+                      <a:round/>
+                      <a:headEnd type="none" w="med" len="med"/>
+                      <a:tailEnd type="none" w="med" len="med"/>
+                    </a:lnB>
+                  </a:tcPr>
+                </a:tc>
+              </a:tr>
+              <a:tr h="365760">
+                <a:tc>
+                  <a:txBody>
+                    <a:bodyPr/>
+                    <a:lstStyle/>
+                    <a:p>
+                      <a:pPr indent="0" marL="0">
+                        <a:buNone/>
+                      </a:pPr>
+                      <a:r>
+                        <a:rPr lang="en-US" sz="1300" dirty="0">
+                          <a:solidFill>
+                            <a:srgbClr val="1F2933"/>
+                          </a:solidFill>
+                          <a:latin typeface="Calibri" pitchFamily="34" charset="0"/>
+                          <a:ea typeface="Calibri" pitchFamily="34" charset="-122"/>
+                          <a:cs typeface="Calibri" pitchFamily="34" charset="-120"/>
+                        </a:rPr>
+                        <a:t>Pruebas</a:t>
+                      </a:r>
+                      <a:endParaRPr lang="en-US" sz="1300" dirty="0">
+                        <a:latin typeface="Calibri" charset="0"/>
+                        <a:ea typeface="Calibri" charset="0"/>
+                        <a:cs typeface="Calibri" charset="0"/>
+                      </a:endParaRPr>
+                    </a:p>
+                  </a:txBody>
+                  <a:tcPr marL="91440" marR="91440" marT="0" marB="0" anchor="ctr">
+                    <a:lnL w="6350" cap="flat" cmpd="sng" algn="ctr">
+                      <a:solidFill>
+                        <a:srgbClr val="D5D9DD"/>
+                      </a:solidFill>
+                      <a:prstDash val="solid"/>
+                      <a:round/>
+                      <a:headEnd type="none" w="med" len="med"/>
+                      <a:tailEnd type="none" w="med" len="med"/>
+                    </a:lnL>
+                    <a:lnR w="6350" cap="flat" cmpd="sng" algn="ctr">
+                      <a:solidFill>
+                        <a:srgbClr val="D5D9DD"/>
+                      </a:solidFill>
+                      <a:prstDash val="solid"/>
+                      <a:round/>
+                      <a:headEnd type="none" w="med" len="med"/>
+                      <a:tailEnd type="none" w="med" len="med"/>
+                    </a:lnR>
+                    <a:lnT w="6350" cap="flat" cmpd="sng" algn="ctr">
+                      <a:solidFill>
+                        <a:srgbClr val="D5D9DD"/>
+                      </a:solidFill>
+                      <a:prstDash val="solid"/>
+                      <a:round/>
+                      <a:headEnd type="none" w="med" len="med"/>
+                      <a:tailEnd type="none" w="med" len="med"/>
+                    </a:lnT>
+                    <a:lnB w="6350" cap="flat" cmpd="sng" algn="ctr">
+                      <a:solidFill>
+                        <a:srgbClr val="D5D9DD"/>
+                      </a:solidFill>
+                      <a:prstDash val="solid"/>
+                      <a:round/>
+                      <a:headEnd type="none" w="med" len="med"/>
+                      <a:tailEnd type="none" w="med" len="med"/>
+                    </a:lnB>
+                  </a:tcPr>
+                </a:tc>
+                <a:tc>
+                  <a:txBody>
+                    <a:bodyPr/>
+                    <a:lstStyle/>
+                    <a:p>
+                      <a:pPr indent="0" marL="0">
+                        <a:buNone/>
+                      </a:pPr>
+                      <a:r>
+                        <a:rPr lang="en-US" sz="1300" b="1" dirty="0">
+                          <a:solidFill>
+                            <a:srgbClr val="1F2933"/>
+                          </a:solidFill>
+                          <a:latin typeface="Calibri" pitchFamily="34" charset="0"/>
+                          <a:ea typeface="Calibri" pitchFamily="34" charset="-122"/>
+                          <a:cs typeface="Calibri" pitchFamily="34" charset="-120"/>
+                        </a:rPr>
+                        <a:t>87 unitarias · 130 Karate</a:t>
+                      </a:r>
+                      <a:endParaRPr lang="en-US" sz="1300" dirty="0">
+                        <a:latin typeface="Calibri" charset="0"/>
+                        <a:ea typeface="Calibri" charset="0"/>
+                        <a:cs typeface="Calibri" charset="0"/>
+                      </a:endParaRPr>
+                    </a:p>
+                  </a:txBody>
+                  <a:tcPr marL="91440" marR="91440" marT="0" marB="0" anchor="ctr">
+                    <a:lnL w="6350" cap="flat" cmpd="sng" algn="ctr">
+                      <a:solidFill>
+                        <a:srgbClr val="D5D9DD"/>
+                      </a:solidFill>
+                      <a:prstDash val="solid"/>
+                      <a:round/>
+                      <a:headEnd type="none" w="med" len="med"/>
+                      <a:tailEnd type="none" w="med" len="med"/>
+                    </a:lnL>
+                    <a:lnR w="6350" cap="flat" cmpd="sng" algn="ctr">
+                      <a:solidFill>
+                        <a:srgbClr val="D5D9DD"/>
+                      </a:solidFill>
+                      <a:prstDash val="solid"/>
+                      <a:round/>
+                      <a:headEnd type="none" w="med" len="med"/>
+                      <a:tailEnd type="none" w="med" len="med"/>
+                    </a:lnR>
+                    <a:lnT w="6350" cap="flat" cmpd="sng" algn="ctr">
+                      <a:solidFill>
+                        <a:srgbClr val="D5D9DD"/>
+                      </a:solidFill>
+                      <a:prstDash val="solid"/>
+                      <a:round/>
+                      <a:headEnd type="none" w="med" len="med"/>
+                      <a:tailEnd type="none" w="med" len="med"/>
+                    </a:lnT>
+                    <a:lnB w="6350" cap="flat" cmpd="sng" algn="ctr">
+                      <a:solidFill>
+                        <a:srgbClr val="D5D9DD"/>
+                      </a:solidFill>
+                      <a:prstDash val="solid"/>
+                      <a:round/>
+                      <a:headEnd type="none" w="med" len="med"/>
+                      <a:tailEnd type="none" w="med" len="med"/>
+                    </a:lnB>
+                  </a:tcPr>
+                </a:tc>
+                <a:tc>
+                  <a:txBody>
+                    <a:bodyPr/>
+                    <a:lstStyle/>
+                    <a:p>
+                      <a:pPr indent="0" marL="0">
+                        <a:buNone/>
+                      </a:pPr>
+                      <a:r>
+                        <a:rPr lang="en-US" sz="1300" dirty="0">
+                          <a:solidFill>
+                            <a:srgbClr val="1F2933"/>
+                          </a:solidFill>
+                          <a:latin typeface="Calibri" pitchFamily="34" charset="0"/>
+                          <a:ea typeface="Calibri" pitchFamily="34" charset="-122"/>
+                          <a:cs typeface="Calibri" pitchFamily="34" charset="-120"/>
+                        </a:rPr>
+                        <a:t>todas pasan</a:t>
+                      </a:r>
+                      <a:endParaRPr lang="en-US" sz="1300" dirty="0">
+                        <a:latin typeface="Calibri" charset="0"/>
+                        <a:ea typeface="Calibri" charset="0"/>
+                        <a:cs typeface="Calibri" charset="0"/>
+                      </a:endParaRPr>
+                    </a:p>
+                  </a:txBody>
+                  <a:tcPr marL="91440" marR="91440" marT="0" marB="0" anchor="ctr">
+                    <a:lnL w="6350" cap="flat" cmpd="sng" algn="ctr">
+                      <a:solidFill>
+                        <a:srgbClr val="D5D9DD"/>
+                      </a:solidFill>
+                      <a:prstDash val="solid"/>
+                      <a:round/>
+                      <a:headEnd type="none" w="med" len="med"/>
+                      <a:tailEnd type="none" w="med" len="med"/>
+                    </a:lnL>
+                    <a:lnR w="6350" cap="flat" cmpd="sng" algn="ctr">
+                      <a:solidFill>
+                        <a:srgbClr val="D5D9DD"/>
+                      </a:solidFill>
+                      <a:prstDash val="solid"/>
+                      <a:round/>
+                      <a:headEnd type="none" w="med" len="med"/>
+                      <a:tailEnd type="none" w="med" len="med"/>
+                    </a:lnR>
+                    <a:lnT w="6350" cap="flat" cmpd="sng" algn="ctr">
+                      <a:solidFill>
+                        <a:srgbClr val="D5D9DD"/>
+                      </a:solidFill>
+                      <a:prstDash val="solid"/>
+                      <a:round/>
+                      <a:headEnd type="none" w="med" len="med"/>
+                      <a:tailEnd type="none" w="med" len="med"/>
+                    </a:lnT>
+                    <a:lnB w="6350" cap="flat" cmpd="sng" algn="ctr">
+                      <a:solidFill>
+                        <a:srgbClr val="D5D9DD"/>
+                      </a:solidFill>
+                      <a:prstDash val="solid"/>
+                      <a:round/>
+                      <a:headEnd type="none" w="med" len="med"/>
+                      <a:tailEnd type="none" w="med" len="med"/>
+                    </a:lnB>
+                  </a:tcPr>
+                </a:tc>
+              </a:tr>
+              <a:tr h="365760">
+                <a:tc>
+                  <a:txBody>
+                    <a:bodyPr/>
+                    <a:lstStyle/>
+                    <a:p>
+                      <a:pPr indent="0" marL="0">
+                        <a:buNone/>
+                      </a:pPr>
+                      <a:r>
+                        <a:rPr lang="en-US" sz="1300" dirty="0">
+                          <a:solidFill>
+                            <a:srgbClr val="1F2933"/>
+                          </a:solidFill>
+                          <a:latin typeface="Calibri" pitchFamily="34" charset="0"/>
+                          <a:ea typeface="Calibri" pitchFamily="34" charset="-122"/>
+                          <a:cs typeface="Calibri" pitchFamily="34" charset="-120"/>
+                        </a:rPr>
+                        <a:t>Cobertura total</a:t>
+                      </a:r>
+                      <a:endParaRPr lang="en-US" sz="1300" dirty="0">
+                        <a:latin typeface="Calibri" charset="0"/>
+                        <a:ea typeface="Calibri" charset="0"/>
+                        <a:cs typeface="Calibri" charset="0"/>
+                      </a:endParaRPr>
+                    </a:p>
+                  </a:txBody>
+                  <a:tcPr marL="91440" marR="91440" marT="0" marB="0" anchor="ctr">
+                    <a:lnL w="6350" cap="flat" cmpd="sng" algn="ctr">
+                      <a:solidFill>
+                        <a:srgbClr val="D5D9DD"/>
+                      </a:solidFill>
+                      <a:prstDash val="solid"/>
+                      <a:round/>
+                      <a:headEnd type="none" w="med" len="med"/>
+                      <a:tailEnd type="none" w="med" len="med"/>
+                    </a:lnL>
+                    <a:lnR w="6350" cap="flat" cmpd="sng" algn="ctr">
+                      <a:solidFill>
+                        <a:srgbClr val="D5D9DD"/>
+                      </a:solidFill>
+                      <a:prstDash val="solid"/>
+                      <a:round/>
+                      <a:headEnd type="none" w="med" len="med"/>
+                      <a:tailEnd type="none" w="med" len="med"/>
+                    </a:lnR>
+                    <a:lnT w="6350" cap="flat" cmpd="sng" algn="ctr">
+                      <a:solidFill>
+                        <a:srgbClr val="D5D9DD"/>
+                      </a:solidFill>
+                      <a:prstDash val="solid"/>
+                      <a:round/>
+                      <a:headEnd type="none" w="med" len="med"/>
+                      <a:tailEnd type="none" w="med" len="med"/>
+                    </a:lnT>
+                    <a:lnB w="6350" cap="flat" cmpd="sng" algn="ctr">
+                      <a:solidFill>
+                        <a:srgbClr val="D5D9DD"/>
+                      </a:solidFill>
+                      <a:prstDash val="solid"/>
+                      <a:round/>
+                      <a:headEnd type="none" w="med" len="med"/>
+                      <a:tailEnd type="none" w="med" len="med"/>
+                    </a:lnB>
+                  </a:tcPr>
+                </a:tc>
+                <a:tc>
+                  <a:txBody>
+                    <a:bodyPr/>
+                    <a:lstStyle/>
+                    <a:p>
+                      <a:pPr indent="0" marL="0">
+                        <a:buNone/>
+                      </a:pPr>
+                      <a:r>
+                        <a:rPr lang="en-US" sz="1300" b="1" dirty="0">
+                          <a:solidFill>
+                            <a:srgbClr val="1F2933"/>
+                          </a:solidFill>
+                          <a:latin typeface="Calibri" pitchFamily="34" charset="0"/>
+                          <a:ea typeface="Calibri" pitchFamily="34" charset="-122"/>
+                          <a:cs typeface="Calibri" pitchFamily="34" charset="-120"/>
+                        </a:rPr>
+                        <a:t>93,7 %</a:t>
+                      </a:r>
+                      <a:endParaRPr lang="en-US" sz="1300" dirty="0">
+                        <a:latin typeface="Calibri" charset="0"/>
+                        <a:ea typeface="Calibri" charset="0"/>
+                        <a:cs typeface="Calibri" charset="0"/>
+                      </a:endParaRPr>
+                    </a:p>
+                  </a:txBody>
+                  <a:tcPr marL="91440" marR="91440" marT="0" marB="0" anchor="ctr">
+                    <a:lnL w="6350" cap="flat" cmpd="sng" algn="ctr">
+                      <a:solidFill>
+                        <a:srgbClr val="D5D9DD"/>
+                      </a:solidFill>
+                      <a:prstDash val="solid"/>
+                      <a:round/>
+                      <a:headEnd type="none" w="med" len="med"/>
+                      <a:tailEnd type="none" w="med" len="med"/>
+                    </a:lnL>
+                    <a:lnR w="6350" cap="flat" cmpd="sng" algn="ctr">
+                      <a:solidFill>
+                        <a:srgbClr val="D5D9DD"/>
+                      </a:solidFill>
+                      <a:prstDash val="solid"/>
+                      <a:round/>
+                      <a:headEnd type="none" w="med" len="med"/>
+                      <a:tailEnd type="none" w="med" len="med"/>
+                    </a:lnR>
+                    <a:lnT w="6350" cap="flat" cmpd="sng" algn="ctr">
+                      <a:solidFill>
+                        <a:srgbClr val="D5D9DD"/>
+                      </a:solidFill>
+                      <a:prstDash val="solid"/>
+                      <a:round/>
+                      <a:headEnd type="none" w="med" len="med"/>
+                      <a:tailEnd type="none" w="med" len="med"/>
+                    </a:lnT>
+                    <a:lnB w="6350" cap="flat" cmpd="sng" algn="ctr">
+                      <a:solidFill>
+                        <a:srgbClr val="D5D9DD"/>
+                      </a:solidFill>
+                      <a:prstDash val="solid"/>
+                      <a:round/>
+                      <a:headEnd type="none" w="med" len="med"/>
+                      <a:tailEnd type="none" w="med" len="med"/>
+                    </a:lnB>
+                  </a:tcPr>
+                </a:tc>
+                <a:tc>
+                  <a:txBody>
+                    <a:bodyPr/>
+                    <a:lstStyle/>
+                    <a:p>
+                      <a:pPr indent="0" marL="0">
+                        <a:buNone/>
+                      </a:pPr>
+                      <a:r>
+                        <a:rPr lang="en-US" sz="1300" dirty="0">
+                          <a:solidFill>
+                            <a:srgbClr val="1F2933"/>
+                          </a:solidFill>
+                          <a:latin typeface="Calibri" pitchFamily="34" charset="0"/>
+                          <a:ea typeface="Calibri" pitchFamily="34" charset="-122"/>
+                          <a:cs typeface="Calibri" pitchFamily="34" charset="-120"/>
+                        </a:rPr>
+                        <a:t>gate: ≥ 80 %</a:t>
+                      </a:r>
+                      <a:endParaRPr lang="en-US" sz="1300" dirty="0">
+                        <a:latin typeface="Calibri" charset="0"/>
+                        <a:ea typeface="Calibri" charset="0"/>
+                        <a:cs typeface="Calibri" charset="0"/>
+                      </a:endParaRPr>
+                    </a:p>
+                  </a:txBody>
+                  <a:tcPr marL="91440" marR="91440" marT="0" marB="0" anchor="ctr">
+                    <a:lnL w="6350" cap="flat" cmpd="sng" algn="ctr">
+                      <a:solidFill>
+                        <a:srgbClr val="D5D9DD"/>
+                      </a:solidFill>
+                      <a:prstDash val="solid"/>
+                      <a:round/>
+                      <a:headEnd type="none" w="med" len="med"/>
+                      <a:tailEnd type="none" w="med" len="med"/>
+                    </a:lnL>
+                    <a:lnR w="6350" cap="flat" cmpd="sng" algn="ctr">
+                      <a:solidFill>
+                        <a:srgbClr val="D5D9DD"/>
+                      </a:solidFill>
+                      <a:prstDash val="solid"/>
+                      <a:round/>
+                      <a:headEnd type="none" w="med" len="med"/>
+                      <a:tailEnd type="none" w="med" len="med"/>
+                    </a:lnR>
+                    <a:lnT w="6350" cap="flat" cmpd="sng" algn="ctr">
+                      <a:solidFill>
+                        <a:srgbClr val="D5D9DD"/>
+                      </a:solidFill>
+                      <a:prstDash val="solid"/>
+                      <a:round/>
+                      <a:headEnd type="none" w="med" len="med"/>
+                      <a:tailEnd type="none" w="med" len="med"/>
+                    </a:lnT>
+                    <a:lnB w="6350" cap="flat" cmpd="sng" algn="ctr">
+                      <a:solidFill>
+                        <a:srgbClr val="D5D9DD"/>
+                      </a:solidFill>
+                      <a:prstDash val="solid"/>
+                      <a:round/>
+                      <a:headEnd type="none" w="med" len="med"/>
+                      <a:tailEnd type="none" w="med" len="med"/>
+                    </a:lnB>
+                  </a:tcPr>
+                </a:tc>
+              </a:tr>
+              <a:tr h="365760">
+                <a:tc>
+                  <a:txBody>
+                    <a:bodyPr/>
+                    <a:lstStyle/>
+                    <a:p>
+                      <a:pPr indent="0" marL="0">
+                        <a:buNone/>
+                      </a:pPr>
+                      <a:r>
+                        <a:rPr lang="en-US" sz="1300" dirty="0">
+                          <a:solidFill>
+                            <a:srgbClr val="1F2933"/>
+                          </a:solidFill>
+                          <a:latin typeface="Calibri" pitchFamily="34" charset="0"/>
+                          <a:ea typeface="Calibri" pitchFamily="34" charset="-122"/>
+                          <a:cs typeface="Calibri" pitchFamily="34" charset="-120"/>
+                        </a:rPr>
+                        <a:t>Complejidad ciclomática total</a:t>
+                      </a:r>
+                      <a:endParaRPr lang="en-US" sz="1300" dirty="0">
+                        <a:latin typeface="Calibri" charset="0"/>
+                        <a:ea typeface="Calibri" charset="0"/>
+                        <a:cs typeface="Calibri" charset="0"/>
+                      </a:endParaRPr>
+                    </a:p>
+                  </a:txBody>
+                  <a:tcPr marL="91440" marR="91440" marT="0" marB="0" anchor="ctr">
+                    <a:lnL w="6350" cap="flat" cmpd="sng" algn="ctr">
+                      <a:solidFill>
+                        <a:srgbClr val="D5D9DD"/>
+                      </a:solidFill>
+                      <a:prstDash val="solid"/>
+                      <a:round/>
+                      <a:headEnd type="none" w="med" len="med"/>
+                      <a:tailEnd type="none" w="med" len="med"/>
+                    </a:lnL>
+                    <a:lnR w="6350" cap="flat" cmpd="sng" algn="ctr">
+                      <a:solidFill>
+                        <a:srgbClr val="D5D9DD"/>
+                      </a:solidFill>
+                      <a:prstDash val="solid"/>
+                      <a:round/>
+                      <a:headEnd type="none" w="med" len="med"/>
+                      <a:tailEnd type="none" w="med" len="med"/>
+                    </a:lnR>
+                    <a:lnT w="6350" cap="flat" cmpd="sng" algn="ctr">
+                      <a:solidFill>
+                        <a:srgbClr val="D5D9DD"/>
+                      </a:solidFill>
+                      <a:prstDash val="solid"/>
+                      <a:round/>
+                      <a:headEnd type="none" w="med" len="med"/>
+                      <a:tailEnd type="none" w="med" len="med"/>
+                    </a:lnT>
+                    <a:lnB w="6350" cap="flat" cmpd="sng" algn="ctr">
+                      <a:solidFill>
+                        <a:srgbClr val="D5D9DD"/>
+                      </a:solidFill>
+                      <a:prstDash val="solid"/>
+                      <a:round/>
+                      <a:headEnd type="none" w="med" len="med"/>
+                      <a:tailEnd type="none" w="med" len="med"/>
+                    </a:lnB>
+                  </a:tcPr>
+                </a:tc>
+                <a:tc>
+                  <a:txBody>
+                    <a:bodyPr/>
+                    <a:lstStyle/>
+                    <a:p>
+                      <a:pPr indent="0" marL="0">
+                        <a:buNone/>
+                      </a:pPr>
+                      <a:r>
+                        <a:rPr lang="en-US" sz="1300" b="1" dirty="0">
+                          <a:solidFill>
+                            <a:srgbClr val="1F2933"/>
+                          </a:solidFill>
+                          <a:latin typeface="Calibri" pitchFamily="34" charset="0"/>
+                          <a:ea typeface="Calibri" pitchFamily="34" charset="-122"/>
+                          <a:cs typeface="Calibri" pitchFamily="34" charset="-120"/>
+                        </a:rPr>
+                        <a:t>136</a:t>
+                      </a:r>
+                      <a:endParaRPr lang="en-US" sz="1300" dirty="0">
+                        <a:latin typeface="Calibri" charset="0"/>
+                        <a:ea typeface="Calibri" charset="0"/>
+                        <a:cs typeface="Calibri" charset="0"/>
+                      </a:endParaRPr>
+                    </a:p>
+                  </a:txBody>
+                  <a:tcPr marL="91440" marR="91440" marT="0" marB="0" anchor="ctr">
+                    <a:lnL w="6350" cap="flat" cmpd="sng" algn="ctr">
+                      <a:solidFill>
+                        <a:srgbClr val="D5D9DD"/>
+                      </a:solidFill>
+                      <a:prstDash val="solid"/>
+                      <a:round/>
+                      <a:headEnd type="none" w="med" len="med"/>
+                      <a:tailEnd type="none" w="med" len="med"/>
+                    </a:lnL>
+                    <a:lnR w="6350" cap="flat" cmpd="sng" algn="ctr">
+                      <a:solidFill>
+                        <a:srgbClr val="D5D9DD"/>
+                      </a:solidFill>
+                      <a:prstDash val="solid"/>
+                      <a:round/>
+                      <a:headEnd type="none" w="med" len="med"/>
+                      <a:tailEnd type="none" w="med" len="med"/>
+                    </a:lnR>
+                    <a:lnT w="6350" cap="flat" cmpd="sng" algn="ctr">
+                      <a:solidFill>
+                        <a:srgbClr val="D5D9DD"/>
+                      </a:solidFill>
+                      <a:prstDash val="solid"/>
+                      <a:round/>
+                      <a:headEnd type="none" w="med" len="med"/>
+                      <a:tailEnd type="none" w="med" len="med"/>
+                    </a:lnT>
+                    <a:lnB w="6350" cap="flat" cmpd="sng" algn="ctr">
+                      <a:solidFill>
+                        <a:srgbClr val="D5D9DD"/>
+                      </a:solidFill>
+                      <a:prstDash val="solid"/>
+                      <a:round/>
+                      <a:headEnd type="none" w="med" len="med"/>
+                      <a:tailEnd type="none" w="med" len="med"/>
+                    </a:lnB>
+                  </a:tcPr>
+                </a:tc>
+                <a:tc>
+                  <a:txBody>
+                    <a:bodyPr/>
+                    <a:lstStyle/>
+                    <a:p>
+                      <a:pPr indent="0" marL="0">
+                        <a:buNone/>
+                      </a:pPr>
+                      <a:r>
+                        <a:rPr lang="en-US" sz="1300" dirty="0">
+                          <a:solidFill>
+                            <a:srgbClr val="1F2933"/>
+                          </a:solidFill>
+                          <a:latin typeface="Calibri" pitchFamily="34" charset="0"/>
+                          <a:ea typeface="Calibri" pitchFamily="34" charset="-122"/>
+                          <a:cs typeface="Calibri" pitchFamily="34" charset="-120"/>
+                        </a:rPr>
+                        <a:t>gate: ≤ 250</a:t>
+                      </a:r>
+                      <a:endParaRPr lang="en-US" sz="1300" dirty="0">
+                        <a:latin typeface="Calibri" charset="0"/>
+                        <a:ea typeface="Calibri" charset="0"/>
+                        <a:cs typeface="Calibri" charset="0"/>
+                      </a:endParaRPr>
+                    </a:p>
+                  </a:txBody>
+                  <a:tcPr marL="91440" marR="91440" marT="0" marB="0" anchor="ctr">
+                    <a:lnL w="6350" cap="flat" cmpd="sng" algn="ctr">
+                      <a:solidFill>
+                        <a:srgbClr val="D5D9DD"/>
+                      </a:solidFill>
+                      <a:prstDash val="solid"/>
+                      <a:round/>
+                      <a:headEnd type="none" w="med" len="med"/>
+                      <a:tailEnd type="none" w="med" len="med"/>
+                    </a:lnL>
+                    <a:lnR w="6350" cap="flat" cmpd="sng" algn="ctr">
+                      <a:solidFill>
+                        <a:srgbClr val="D5D9DD"/>
+                      </a:solidFill>
+                      <a:prstDash val="solid"/>
+                      <a:round/>
+                      <a:headEnd type="none" w="med" len="med"/>
+                      <a:tailEnd type="none" w="med" len="med"/>
+                    </a:lnR>
+                    <a:lnT w="6350" cap="flat" cmpd="sng" algn="ctr">
+                      <a:solidFill>
+                        <a:srgbClr val="D5D9DD"/>
+                      </a:solidFill>
+                      <a:prstDash val="solid"/>
+                      <a:round/>
+                      <a:headEnd type="none" w="med" len="med"/>
+                      <a:tailEnd type="none" w="med" len="med"/>
+                    </a:lnT>
+                    <a:lnB w="6350" cap="flat" cmpd="sng" algn="ctr">
+                      <a:solidFill>
+                        <a:srgbClr val="D5D9DD"/>
+                      </a:solidFill>
+                      <a:prstDash val="solid"/>
+                      <a:round/>
+                      <a:headEnd type="none" w="med" len="med"/>
+                      <a:tailEnd type="none" w="med" len="med"/>
+                    </a:lnB>
+                  </a:tcPr>
+                </a:tc>
+              </a:tr>
+              <a:tr h="365760">
+                <a:tc>
+                  <a:txBody>
+                    <a:bodyPr/>
+                    <a:lstStyle/>
+                    <a:p>
+                      <a:pPr indent="0" marL="0">
+                        <a:buNone/>
+                      </a:pPr>
+                      <a:r>
+                        <a:rPr lang="en-US" sz="1300" dirty="0">
+                          <a:solidFill>
+                            <a:srgbClr val="1F2933"/>
+                          </a:solidFill>
+                          <a:latin typeface="Calibri" pitchFamily="34" charset="0"/>
+                          <a:ea typeface="Calibri" pitchFamily="34" charset="-122"/>
+                          <a:cs typeface="Calibri" pitchFamily="34" charset="-120"/>
+                        </a:rPr>
+                        <a:t>Complejidad cognitiva total</a:t>
+                      </a:r>
+                      <a:endParaRPr lang="en-US" sz="1300" dirty="0">
+                        <a:latin typeface="Calibri" charset="0"/>
+                        <a:ea typeface="Calibri" charset="0"/>
+                        <a:cs typeface="Calibri" charset="0"/>
+                      </a:endParaRPr>
+                    </a:p>
+                  </a:txBody>
+                  <a:tcPr marL="91440" marR="91440" marT="0" marB="0" anchor="ctr">
+                    <a:lnL w="6350" cap="flat" cmpd="sng" algn="ctr">
+                      <a:solidFill>
+                        <a:srgbClr val="D5D9DD"/>
+                      </a:solidFill>
+                      <a:prstDash val="solid"/>
+                      <a:round/>
+                      <a:headEnd type="none" w="med" len="med"/>
+                      <a:tailEnd type="none" w="med" len="med"/>
+                    </a:lnL>
+                    <a:lnR w="6350" cap="flat" cmpd="sng" algn="ctr">
+                      <a:solidFill>
+                        <a:srgbClr val="D5D9DD"/>
+                      </a:solidFill>
+                      <a:prstDash val="solid"/>
+                      <a:round/>
+                      <a:headEnd type="none" w="med" len="med"/>
+                      <a:tailEnd type="none" w="med" len="med"/>
+                    </a:lnR>
+                    <a:lnT w="6350" cap="flat" cmpd="sng" algn="ctr">
+                      <a:solidFill>
+                        <a:srgbClr val="D5D9DD"/>
+                      </a:solidFill>
+                      <a:prstDash val="solid"/>
+                      <a:round/>
+                      <a:headEnd type="none" w="med" len="med"/>
+                      <a:tailEnd type="none" w="med" len="med"/>
+                    </a:lnT>
+                    <a:lnB w="6350" cap="flat" cmpd="sng" algn="ctr">
+                      <a:solidFill>
+                        <a:srgbClr val="D5D9DD"/>
+                      </a:solidFill>
+                      <a:prstDash val="solid"/>
+                      <a:round/>
+                      <a:headEnd type="none" w="med" len="med"/>
+                      <a:tailEnd type="none" w="med" len="med"/>
+                    </a:lnB>
+                  </a:tcPr>
+                </a:tc>
+                <a:tc>
+                  <a:txBody>
+                    <a:bodyPr/>
+                    <a:lstStyle/>
+                    <a:p>
+                      <a:pPr indent="0" marL="0">
+                        <a:buNone/>
+                      </a:pPr>
+                      <a:r>
+                        <a:rPr lang="en-US" sz="1300" b="1" dirty="0">
+                          <a:solidFill>
+                            <a:srgbClr val="1F2933"/>
+                          </a:solidFill>
+                          <a:latin typeface="Calibri" pitchFamily="34" charset="0"/>
+                          <a:ea typeface="Calibri" pitchFamily="34" charset="-122"/>
+                          <a:cs typeface="Calibri" pitchFamily="34" charset="-120"/>
+                        </a:rPr>
+                        <a:t>83</a:t>
+                      </a:r>
+                      <a:endParaRPr lang="en-US" sz="1300" dirty="0">
+                        <a:latin typeface="Calibri" charset="0"/>
+                        <a:ea typeface="Calibri" charset="0"/>
+                        <a:cs typeface="Calibri" charset="0"/>
+                      </a:endParaRPr>
+                    </a:p>
+                  </a:txBody>
+                  <a:tcPr marL="91440" marR="91440" marT="0" marB="0" anchor="ctr">
+                    <a:lnL w="6350" cap="flat" cmpd="sng" algn="ctr">
+                      <a:solidFill>
+                        <a:srgbClr val="D5D9DD"/>
+                      </a:solidFill>
+                      <a:prstDash val="solid"/>
+                      <a:round/>
+                      <a:headEnd type="none" w="med" len="med"/>
+                      <a:tailEnd type="none" w="med" len="med"/>
+                    </a:lnL>
+                    <a:lnR w="6350" cap="flat" cmpd="sng" algn="ctr">
+                      <a:solidFill>
+                        <a:srgbClr val="D5D9DD"/>
+                      </a:solidFill>
+                      <a:prstDash val="solid"/>
+                      <a:round/>
+                      <a:headEnd type="none" w="med" len="med"/>
+                      <a:tailEnd type="none" w="med" len="med"/>
+                    </a:lnR>
+                    <a:lnT w="6350" cap="flat" cmpd="sng" algn="ctr">
+                      <a:solidFill>
+                        <a:srgbClr val="D5D9DD"/>
+                      </a:solidFill>
+                      <a:prstDash val="solid"/>
+                      <a:round/>
+                      <a:headEnd type="none" w="med" len="med"/>
+                      <a:tailEnd type="none" w="med" len="med"/>
+                    </a:lnT>
+                    <a:lnB w="6350" cap="flat" cmpd="sng" algn="ctr">
+                      <a:solidFill>
+                        <a:srgbClr val="D5D9DD"/>
+                      </a:solidFill>
+                      <a:prstDash val="solid"/>
+                      <a:round/>
+                      <a:headEnd type="none" w="med" len="med"/>
+                      <a:tailEnd type="none" w="med" len="med"/>
+                    </a:lnB>
+                  </a:tcPr>
+                </a:tc>
+                <a:tc>
+                  <a:txBody>
+                    <a:bodyPr/>
+                    <a:lstStyle/>
+                    <a:p>
+                      <a:pPr indent="0" marL="0">
+                        <a:buNone/>
+                      </a:pPr>
+                      <a:r>
+                        <a:rPr lang="en-US" sz="1300" dirty="0">
+                          <a:solidFill>
+                            <a:srgbClr val="1F2933"/>
+                          </a:solidFill>
+                          <a:latin typeface="Calibri" pitchFamily="34" charset="0"/>
+                          <a:ea typeface="Calibri" pitchFamily="34" charset="-122"/>
+                          <a:cs typeface="Calibri" pitchFamily="34" charset="-120"/>
+                        </a:rPr>
+                        <a:t>gate: ≤ 120</a:t>
+                      </a:r>
+                      <a:endParaRPr lang="en-US" sz="1300" dirty="0">
+                        <a:latin typeface="Calibri" charset="0"/>
+                        <a:ea typeface="Calibri" charset="0"/>
+                        <a:cs typeface="Calibri" charset="0"/>
+                      </a:endParaRPr>
+                    </a:p>
+                  </a:txBody>
+                  <a:tcPr marL="91440" marR="91440" marT="0" marB="0" anchor="ctr">
+                    <a:lnL w="6350" cap="flat" cmpd="sng" algn="ctr">
+                      <a:solidFill>
+                        <a:srgbClr val="D5D9DD"/>
+                      </a:solidFill>
+                      <a:prstDash val="solid"/>
+                      <a:round/>
+                      <a:headEnd type="none" w="med" len="med"/>
+                      <a:tailEnd type="none" w="med" len="med"/>
+                    </a:lnL>
+                    <a:lnR w="6350" cap="flat" cmpd="sng" algn="ctr">
+                      <a:solidFill>
+                        <a:srgbClr val="D5D9DD"/>
+                      </a:solidFill>
+                      <a:prstDash val="solid"/>
+                      <a:round/>
+                      <a:headEnd type="none" w="med" len="med"/>
+                      <a:tailEnd type="none" w="med" len="med"/>
+                    </a:lnR>
+                    <a:lnT w="6350" cap="flat" cmpd="sng" algn="ctr">
+                      <a:solidFill>
+                        <a:srgbClr val="D5D9DD"/>
+                      </a:solidFill>
+                      <a:prstDash val="solid"/>
+                      <a:round/>
+                      <a:headEnd type="none" w="med" len="med"/>
+                      <a:tailEnd type="none" w="med" len="med"/>
+                    </a:lnT>
+                    <a:lnB w="6350" cap="flat" cmpd="sng" algn="ctr">
+                      <a:solidFill>
+                        <a:srgbClr val="D5D9DD"/>
+                      </a:solidFill>
+                      <a:prstDash val="solid"/>
+                      <a:round/>
+                      <a:headEnd type="none" w="med" len="med"/>
+                      <a:tailEnd type="none" w="med" len="med"/>
+                    </a:lnB>
+                  </a:tcPr>
+                </a:tc>
+              </a:tr>
+              <a:tr h="365760">
+                <a:tc>
+                  <a:txBody>
+                    <a:bodyPr/>
+                    <a:lstStyle/>
+                    <a:p>
+                      <a:pPr indent="0" marL="0">
+                        <a:buNone/>
+                      </a:pPr>
+                      <a:r>
+                        <a:rPr lang="en-US" sz="1300" dirty="0">
+                          <a:solidFill>
+                            <a:srgbClr val="1F2933"/>
+                          </a:solidFill>
+                          <a:latin typeface="Calibri" pitchFamily="34" charset="0"/>
+                          <a:ea typeface="Calibri" pitchFamily="34" charset="-122"/>
+                          <a:cs typeface="Calibri" pitchFamily="34" charset="-120"/>
+                        </a:rPr>
+                        <a:t>Bugs · vulnerabilidades · code smells</a:t>
+                      </a:r>
+                      <a:endParaRPr lang="en-US" sz="1300" dirty="0">
+                        <a:latin typeface="Calibri" charset="0"/>
+                        <a:ea typeface="Calibri" charset="0"/>
+                        <a:cs typeface="Calibri" charset="0"/>
+                      </a:endParaRPr>
+                    </a:p>
+                  </a:txBody>
+                  <a:tcPr marL="91440" marR="91440" marT="0" marB="0" anchor="ctr">
+                    <a:lnL w="6350" cap="flat" cmpd="sng" algn="ctr">
+                      <a:solidFill>
+                        <a:srgbClr val="D5D9DD"/>
+                      </a:solidFill>
+                      <a:prstDash val="solid"/>
+                      <a:round/>
+                      <a:headEnd type="none" w="med" len="med"/>
+                      <a:tailEnd type="none" w="med" len="med"/>
+                    </a:lnL>
+                    <a:lnR w="6350" cap="flat" cmpd="sng" algn="ctr">
+                      <a:solidFill>
+                        <a:srgbClr val="D5D9DD"/>
+                      </a:solidFill>
+                      <a:prstDash val="solid"/>
+                      <a:round/>
+                      <a:headEnd type="none" w="med" len="med"/>
+                      <a:tailEnd type="none" w="med" len="med"/>
+                    </a:lnR>
+                    <a:lnT w="6350" cap="flat" cmpd="sng" algn="ctr">
+                      <a:solidFill>
+                        <a:srgbClr val="D5D9DD"/>
+                      </a:solidFill>
+                      <a:prstDash val="solid"/>
+                      <a:round/>
+                      <a:headEnd type="none" w="med" len="med"/>
+                      <a:tailEnd type="none" w="med" len="med"/>
+                    </a:lnT>
+                    <a:lnB w="6350" cap="flat" cmpd="sng" algn="ctr">
+                      <a:solidFill>
+                        <a:srgbClr val="D5D9DD"/>
+                      </a:solidFill>
+                      <a:prstDash val="solid"/>
+                      <a:round/>
+                      <a:headEnd type="none" w="med" len="med"/>
+                      <a:tailEnd type="none" w="med" len="med"/>
+                    </a:lnB>
+                  </a:tcPr>
+                </a:tc>
+                <a:tc>
+                  <a:txBody>
+                    <a:bodyPr/>
+                    <a:lstStyle/>
+                    <a:p>
+                      <a:pPr indent="0" marL="0">
+                        <a:buNone/>
+                      </a:pPr>
+                      <a:r>
+                        <a:rPr lang="en-US" sz="1300" b="1" dirty="0">
+                          <a:solidFill>
+                            <a:srgbClr val="1F2933"/>
+                          </a:solidFill>
+                          <a:latin typeface="Calibri" pitchFamily="34" charset="0"/>
+                          <a:ea typeface="Calibri" pitchFamily="34" charset="-122"/>
+                          <a:cs typeface="Calibri" pitchFamily="34" charset="-120"/>
+                        </a:rPr>
+                        <a:t>0 · 0 · 0</a:t>
+                      </a:r>
+                      <a:endParaRPr lang="en-US" sz="1300" dirty="0">
+                        <a:latin typeface="Calibri" charset="0"/>
+                        <a:ea typeface="Calibri" charset="0"/>
+                        <a:cs typeface="Calibri" charset="0"/>
+                      </a:endParaRPr>
+                    </a:p>
+                  </a:txBody>
+                  <a:tcPr marL="91440" marR="91440" marT="0" marB="0" anchor="ctr">
+                    <a:lnL w="6350" cap="flat" cmpd="sng" algn="ctr">
+                      <a:solidFill>
+                        <a:srgbClr val="D5D9DD"/>
+                      </a:solidFill>
+                      <a:prstDash val="solid"/>
+                      <a:round/>
+                      <a:headEnd type="none" w="med" len="med"/>
+                      <a:tailEnd type="none" w="med" len="med"/>
+                    </a:lnL>
+                    <a:lnR w="6350" cap="flat" cmpd="sng" algn="ctr">
+                      <a:solidFill>
+                        <a:srgbClr val="D5D9DD"/>
+                      </a:solidFill>
+                      <a:prstDash val="solid"/>
+                      <a:round/>
+                      <a:headEnd type="none" w="med" len="med"/>
+                      <a:tailEnd type="none" w="med" len="med"/>
+                    </a:lnR>
+                    <a:lnT w="6350" cap="flat" cmpd="sng" algn="ctr">
+                      <a:solidFill>
+                        <a:srgbClr val="D5D9DD"/>
+                      </a:solidFill>
+                      <a:prstDash val="solid"/>
+                      <a:round/>
+                      <a:headEnd type="none" w="med" len="med"/>
+                      <a:tailEnd type="none" w="med" len="med"/>
+                    </a:lnT>
+                    <a:lnB w="6350" cap="flat" cmpd="sng" algn="ctr">
+                      <a:solidFill>
+                        <a:srgbClr val="D5D9DD"/>
+                      </a:solidFill>
+                      <a:prstDash val="solid"/>
+                      <a:round/>
+                      <a:headEnd type="none" w="med" len="med"/>
+                      <a:tailEnd type="none" w="med" len="med"/>
+                    </a:lnB>
+                  </a:tcPr>
+                </a:tc>
+                <a:tc>
+                  <a:txBody>
+                    <a:bodyPr/>
+                    <a:lstStyle/>
+                    <a:p>
+                      <a:pPr indent="0" marL="0">
+                        <a:buNone/>
+                      </a:pPr>
+                      <a:r>
+                        <a:rPr lang="en-US" sz="1300" dirty="0">
+                          <a:solidFill>
+                            <a:srgbClr val="1F2933"/>
+                          </a:solidFill>
+                          <a:latin typeface="Calibri" pitchFamily="34" charset="0"/>
+                          <a:ea typeface="Calibri" pitchFamily="34" charset="-122"/>
+                          <a:cs typeface="Calibri" pitchFamily="34" charset="-120"/>
+                        </a:rPr>
+                        <a:t>gate: 0 issues nuevos</a:t>
+                      </a:r>
+                      <a:endParaRPr lang="en-US" sz="1300" dirty="0">
+                        <a:latin typeface="Calibri" charset="0"/>
+                        <a:ea typeface="Calibri" charset="0"/>
+                        <a:cs typeface="Calibri" charset="0"/>
+                      </a:endParaRPr>
+                    </a:p>
+                  </a:txBody>
+                  <a:tcPr marL="91440" marR="91440" marT="0" marB="0" anchor="ctr">
+                    <a:lnL w="6350" cap="flat" cmpd="sng" algn="ctr">
+                      <a:solidFill>
+                        <a:srgbClr val="D5D9DD"/>
+                      </a:solidFill>
+                      <a:prstDash val="solid"/>
+                      <a:round/>
+                      <a:headEnd type="none" w="med" len="med"/>
+                      <a:tailEnd type="none" w="med" len="med"/>
+                    </a:lnL>
+                    <a:lnR w="6350" cap="flat" cmpd="sng" algn="ctr">
+                      <a:solidFill>
+                        <a:srgbClr val="D5D9DD"/>
+                      </a:solidFill>
+                      <a:prstDash val="solid"/>
+                      <a:round/>
+                      <a:headEnd type="none" w="med" len="med"/>
+                      <a:tailEnd type="none" w="med" len="med"/>
+                    </a:lnR>
+                    <a:lnT w="6350" cap="flat" cmpd="sng" algn="ctr">
+                      <a:solidFill>
+                        <a:srgbClr val="D5D9DD"/>
+                      </a:solidFill>
+                      <a:prstDash val="solid"/>
+                      <a:round/>
+                      <a:headEnd type="none" w="med" len="med"/>
+                      <a:tailEnd type="none" w="med" len="med"/>
+                    </a:lnT>
+                    <a:lnB w="6350" cap="flat" cmpd="sng" algn="ctr">
+                      <a:solidFill>
+                        <a:srgbClr val="D5D9DD"/>
+                      </a:solidFill>
+                      <a:prstDash val="solid"/>
+                      <a:round/>
+                      <a:headEnd type="none" w="med" len="med"/>
+                      <a:tailEnd type="none" w="med" len="med"/>
+                    </a:lnB>
+                  </a:tcPr>
+                </a:tc>
+              </a:tr>
+              <a:tr h="365760">
+                <a:tc>
+                  <a:txBody>
+                    <a:bodyPr/>
+                    <a:lstStyle/>
+                    <a:p>
+                      <a:pPr indent="0" marL="0">
+                        <a:buNone/>
+                      </a:pPr>
+                      <a:r>
+                        <a:rPr lang="en-US" sz="1300" dirty="0">
+                          <a:solidFill>
+                            <a:srgbClr val="1F2933"/>
+                          </a:solidFill>
+                          <a:latin typeface="Calibri" pitchFamily="34" charset="0"/>
+                          <a:ea typeface="Calibri" pitchFamily="34" charset="-122"/>
+                          <a:cs typeface="Calibri" pitchFamily="34" charset="-120"/>
+                        </a:rPr>
+                        <a:t>Duplicación</a:t>
+                      </a:r>
+                      <a:endParaRPr lang="en-US" sz="1300" dirty="0">
+                        <a:latin typeface="Calibri" charset="0"/>
+                        <a:ea typeface="Calibri" charset="0"/>
+                        <a:cs typeface="Calibri" charset="0"/>
+                      </a:endParaRPr>
+                    </a:p>
+                  </a:txBody>
+                  <a:tcPr marL="91440" marR="91440" marT="0" marB="0" anchor="ctr">
+                    <a:lnL w="6350" cap="flat" cmpd="sng" algn="ctr">
+                      <a:solidFill>
+                        <a:srgbClr val="D5D9DD"/>
+                      </a:solidFill>
+                      <a:prstDash val="solid"/>
+                      <a:round/>
+                      <a:headEnd type="none" w="med" len="med"/>
+                      <a:tailEnd type="none" w="med" len="med"/>
+                    </a:lnL>
+                    <a:lnR w="6350" cap="flat" cmpd="sng" algn="ctr">
+                      <a:solidFill>
+                        <a:srgbClr val="D5D9DD"/>
+                      </a:solidFill>
+                      <a:prstDash val="solid"/>
+                      <a:round/>
+                      <a:headEnd type="none" w="med" len="med"/>
+                      <a:tailEnd type="none" w="med" len="med"/>
+                    </a:lnR>
+                    <a:lnT w="6350" cap="flat" cmpd="sng" algn="ctr">
+                      <a:solidFill>
+                        <a:srgbClr val="D5D9DD"/>
+                      </a:solidFill>
+                      <a:prstDash val="solid"/>
+                      <a:round/>
+                      <a:headEnd type="none" w="med" len="med"/>
+                      <a:tailEnd type="none" w="med" len="med"/>
+                    </a:lnT>
+                    <a:lnB w="6350" cap="flat" cmpd="sng" algn="ctr">
+                      <a:solidFill>
+                        <a:srgbClr val="D5D9DD"/>
+                      </a:solidFill>
+                      <a:prstDash val="solid"/>
+                      <a:round/>
+                      <a:headEnd type="none" w="med" len="med"/>
+                      <a:tailEnd type="none" w="med" len="med"/>
+                    </a:lnB>
+                  </a:tcPr>
+                </a:tc>
+                <a:tc>
+                  <a:txBody>
+                    <a:bodyPr/>
+                    <a:lstStyle/>
+                    <a:p>
+                      <a:pPr indent="0" marL="0">
+                        <a:buNone/>
+                      </a:pPr>
+                      <a:r>
+                        <a:rPr lang="en-US" sz="1300" b="1" dirty="0">
+                          <a:solidFill>
+                            <a:srgbClr val="1F2933"/>
+                          </a:solidFill>
+                          <a:latin typeface="Calibri" pitchFamily="34" charset="0"/>
+                          <a:ea typeface="Calibri" pitchFamily="34" charset="-122"/>
+                          <a:cs typeface="Calibri" pitchFamily="34" charset="-120"/>
+                        </a:rPr>
+                        <a:t>0,0 %</a:t>
+                      </a:r>
+                      <a:endParaRPr lang="en-US" sz="1300" dirty="0">
+                        <a:latin typeface="Calibri" charset="0"/>
+                        <a:ea typeface="Calibri" charset="0"/>
+                        <a:cs typeface="Calibri" charset="0"/>
+                      </a:endParaRPr>
+                    </a:p>
+                  </a:txBody>
+                  <a:tcPr marL="91440" marR="91440" marT="0" marB="0" anchor="ctr">
+                    <a:lnL w="6350" cap="flat" cmpd="sng" algn="ctr">
+                      <a:solidFill>
+                        <a:srgbClr val="D5D9DD"/>
+                      </a:solidFill>
+                      <a:prstDash val="solid"/>
+                      <a:round/>
+                      <a:headEnd type="none" w="med" len="med"/>
+                      <a:tailEnd type="none" w="med" len="med"/>
+                    </a:lnL>
+                    <a:lnR w="6350" cap="flat" cmpd="sng" algn="ctr">
+                      <a:solidFill>
+                        <a:srgbClr val="D5D9DD"/>
+                      </a:solidFill>
+                      <a:prstDash val="solid"/>
+                      <a:round/>
+                      <a:headEnd type="none" w="med" len="med"/>
+                      <a:tailEnd type="none" w="med" len="med"/>
+                    </a:lnR>
+                    <a:lnT w="6350" cap="flat" cmpd="sng" algn="ctr">
+                      <a:solidFill>
+                        <a:srgbClr val="D5D9DD"/>
+                      </a:solidFill>
+                      <a:prstDash val="solid"/>
+                      <a:round/>
+                      <a:headEnd type="none" w="med" len="med"/>
+                      <a:tailEnd type="none" w="med" len="med"/>
+                    </a:lnT>
+                    <a:lnB w="6350" cap="flat" cmpd="sng" algn="ctr">
+                      <a:solidFill>
+                        <a:srgbClr val="D5D9DD"/>
+                      </a:solidFill>
+                      <a:prstDash val="solid"/>
+                      <a:round/>
+                      <a:headEnd type="none" w="med" len="med"/>
+                      <a:tailEnd type="none" w="med" len="med"/>
+                    </a:lnB>
+                  </a:tcPr>
+                </a:tc>
+                <a:tc>
+                  <a:txBody>
+                    <a:bodyPr/>
+                    <a:lstStyle/>
+                    <a:p>
+                      <a:pPr indent="0" marL="0">
+                        <a:buNone/>
+                      </a:pPr>
+                      <a:r>
+                        <a:rPr lang="en-US" sz="1300" dirty="0">
+                          <a:solidFill>
+                            <a:srgbClr val="1F2933"/>
+                          </a:solidFill>
+                          <a:latin typeface="Calibri" pitchFamily="34" charset="0"/>
+                          <a:ea typeface="Calibri" pitchFamily="34" charset="-122"/>
+                          <a:cs typeface="Calibri" pitchFamily="34" charset="-120"/>
+                        </a:rPr>
+                        <a:t>gate: ≤ 3 %</a:t>
+                      </a:r>
+                      <a:endParaRPr lang="en-US" sz="1300" dirty="0">
+                        <a:latin typeface="Calibri" charset="0"/>
+                        <a:ea typeface="Calibri" charset="0"/>
+                        <a:cs typeface="Calibri" charset="0"/>
+                      </a:endParaRPr>
+                    </a:p>
+                  </a:txBody>
+                  <a:tcPr marL="91440" marR="91440" marT="0" marB="0" anchor="ctr">
+                    <a:lnL w="6350" cap="flat" cmpd="sng" algn="ctr">
+                      <a:solidFill>
+                        <a:srgbClr val="D5D9DD"/>
+                      </a:solidFill>
+                      <a:prstDash val="solid"/>
+                      <a:round/>
+                      <a:headEnd type="none" w="med" len="med"/>
+                      <a:tailEnd type="none" w="med" len="med"/>
+                    </a:lnL>
+                    <a:lnR w="6350" cap="flat" cmpd="sng" algn="ctr">
+                      <a:solidFill>
+                        <a:srgbClr val="D5D9DD"/>
+                      </a:solidFill>
+                      <a:prstDash val="solid"/>
+                      <a:round/>
+                      <a:headEnd type="none" w="med" len="med"/>
+                      <a:tailEnd type="none" w="med" len="med"/>
+                    </a:lnR>
+                    <a:lnT w="6350" cap="flat" cmpd="sng" algn="ctr">
+                      <a:solidFill>
+                        <a:srgbClr val="D5D9DD"/>
+                      </a:solidFill>
+                      <a:prstDash val="solid"/>
+                      <a:round/>
+                      <a:headEnd type="none" w="med" len="med"/>
+                      <a:tailEnd type="none" w="med" len="med"/>
+                    </a:lnT>
+                    <a:lnB w="6350" cap="flat" cmpd="sng" algn="ctr">
+                      <a:solidFill>
+                        <a:srgbClr val="D5D9DD"/>
+                      </a:solidFill>
+                      <a:prstDash val="solid"/>
+                      <a:round/>
+                      <a:headEnd type="none" w="med" len="med"/>
+                      <a:tailEnd type="none" w="med" len="med"/>
+                    </a:lnB>
+                  </a:tcPr>
+                </a:tc>
+              </a:tr>
+              <a:tr h="365760">
+                <a:tc>
+                  <a:txBody>
+                    <a:bodyPr/>
+                    <a:lstStyle/>
+                    <a:p>
+                      <a:pPr indent="0" marL="0">
+                        <a:buNone/>
+                      </a:pPr>
+                      <a:r>
+                        <a:rPr lang="en-US" sz="1300" dirty="0">
+                          <a:solidFill>
+                            <a:srgbClr val="1F2933"/>
+                          </a:solidFill>
+                          <a:latin typeface="Calibri" pitchFamily="34" charset="0"/>
+                          <a:ea typeface="Calibri" pitchFamily="34" charset="-122"/>
+                          <a:cs typeface="Calibri" pitchFamily="34" charset="-120"/>
+                        </a:rPr>
+                        <a:t>Quality Gate (rama main)</a:t>
+                      </a:r>
+                      <a:endParaRPr lang="en-US" sz="1300" dirty="0">
+                        <a:latin typeface="Calibri" charset="0"/>
+                        <a:ea typeface="Calibri" charset="0"/>
+                        <a:cs typeface="Calibri" charset="0"/>
+                      </a:endParaRPr>
+                    </a:p>
+                  </a:txBody>
+                  <a:tcPr marL="91440" marR="91440" marT="0" marB="0" anchor="ctr">
+                    <a:lnL w="6350" cap="flat" cmpd="sng" algn="ctr">
+                      <a:solidFill>
+                        <a:srgbClr val="D5D9DD"/>
+                      </a:solidFill>
+                      <a:prstDash val="solid"/>
+                      <a:round/>
+                      <a:headEnd type="none" w="med" len="med"/>
+                      <a:tailEnd type="none" w="med" len="med"/>
+                    </a:lnL>
+                    <a:lnR w="6350" cap="flat" cmpd="sng" algn="ctr">
+                      <a:solidFill>
+                        <a:srgbClr val="D5D9DD"/>
+                      </a:solidFill>
+                      <a:prstDash val="solid"/>
+                      <a:round/>
+                      <a:headEnd type="none" w="med" len="med"/>
+                      <a:tailEnd type="none" w="med" len="med"/>
+                    </a:lnR>
+                    <a:lnT w="6350" cap="flat" cmpd="sng" algn="ctr">
+                      <a:solidFill>
+                        <a:srgbClr val="D5D9DD"/>
+                      </a:solidFill>
+                      <a:prstDash val="solid"/>
+                      <a:round/>
+                      <a:headEnd type="none" w="med" len="med"/>
+                      <a:tailEnd type="none" w="med" len="med"/>
+                    </a:lnT>
+                    <a:lnB w="6350" cap="flat" cmpd="sng" algn="ctr">
+                      <a:solidFill>
+                        <a:srgbClr val="D5D9DD"/>
+                      </a:solidFill>
+                      <a:prstDash val="solid"/>
+                      <a:round/>
+                      <a:headEnd type="none" w="med" len="med"/>
+                      <a:tailEnd type="none" w="med" len="med"/>
+                    </a:lnB>
+                  </a:tcPr>
+                </a:tc>
+                <a:tc>
+                  <a:txBody>
+                    <a:bodyPr/>
+                    <a:lstStyle/>
+                    <a:p>
+                      <a:pPr indent="0" marL="0">
+                        <a:buNone/>
+                      </a:pPr>
+                      <a:r>
+                        <a:rPr lang="en-US" sz="1300" b="1" dirty="0">
+                          <a:solidFill>
+                            <a:srgbClr val="1F2933"/>
+                          </a:solidFill>
+                          <a:latin typeface="Calibri" pitchFamily="34" charset="0"/>
+                          <a:ea typeface="Calibri" pitchFamily="34" charset="-122"/>
+                          <a:cs typeface="Calibri" pitchFamily="34" charset="-120"/>
+                        </a:rPr>
+                        <a:t>OK</a:t>
+                      </a:r>
+                      <a:endParaRPr lang="en-US" sz="1300" dirty="0">
+                        <a:latin typeface="Calibri" charset="0"/>
+                        <a:ea typeface="Calibri" charset="0"/>
+                        <a:cs typeface="Calibri" charset="0"/>
+                      </a:endParaRPr>
+                    </a:p>
+                  </a:txBody>
+                  <a:tcPr marL="91440" marR="91440" marT="0" marB="0" anchor="ctr">
+                    <a:lnL w="6350" cap="flat" cmpd="sng" algn="ctr">
+                      <a:solidFill>
+                        <a:srgbClr val="D5D9DD"/>
+                      </a:solidFill>
+                      <a:prstDash val="solid"/>
+                      <a:round/>
+                      <a:headEnd type="none" w="med" len="med"/>
+                      <a:tailEnd type="none" w="med" len="med"/>
+                    </a:lnL>
+                    <a:lnR w="6350" cap="flat" cmpd="sng" algn="ctr">
+                      <a:solidFill>
+                        <a:srgbClr val="D5D9DD"/>
+                      </a:solidFill>
+                      <a:prstDash val="solid"/>
+                      <a:round/>
+                      <a:headEnd type="none" w="med" len="med"/>
+                      <a:tailEnd type="none" w="med" len="med"/>
+                    </a:lnR>
+                    <a:lnT w="6350" cap="flat" cmpd="sng" algn="ctr">
+                      <a:solidFill>
+                        <a:srgbClr val="D5D9DD"/>
+                      </a:solidFill>
+                      <a:prstDash val="solid"/>
+                      <a:round/>
+                      <a:headEnd type="none" w="med" len="med"/>
+                      <a:tailEnd type="none" w="med" len="med"/>
+                    </a:lnT>
+                    <a:lnB w="6350" cap="flat" cmpd="sng" algn="ctr">
+                      <a:solidFill>
+                        <a:srgbClr val="D5D9DD"/>
+                      </a:solidFill>
+                      <a:prstDash val="solid"/>
+                      <a:round/>
+                      <a:headEnd type="none" w="med" len="med"/>
+                      <a:tailEnd type="none" w="med" len="med"/>
+                    </a:lnB>
+                  </a:tcPr>
+                </a:tc>
+                <a:tc>
+                  <a:txBody>
+                    <a:bodyPr/>
+                    <a:lstStyle/>
+                    <a:p>
+                      <a:pPr indent="0" marL="0">
+                        <a:buNone/>
+                      </a:pPr>
+                      <a:r>
+                        <a:rPr lang="en-US" sz="1300" dirty="0">
+                          <a:solidFill>
+                            <a:srgbClr val="1F2933"/>
+                          </a:solidFill>
+                          <a:latin typeface="Calibri" pitchFamily="34" charset="0"/>
+                          <a:ea typeface="Calibri" pitchFamily="34" charset="-122"/>
+                          <a:cs typeface="Calibri" pitchFamily="34" charset="-120"/>
+                        </a:rPr>
+                        <a:t>8 condiciones evaluadas</a:t>
+                      </a:r>
+                      <a:endParaRPr lang="en-US" sz="1300" dirty="0">
+                        <a:latin typeface="Calibri" charset="0"/>
+                        <a:ea typeface="Calibri" charset="0"/>
+                        <a:cs typeface="Calibri" charset="0"/>
+                      </a:endParaRPr>
+                    </a:p>
+                  </a:txBody>
+                  <a:tcPr marL="91440" marR="91440" marT="0" marB="0" anchor="ctr">
+                    <a:lnL w="6350" cap="flat" cmpd="sng" algn="ctr">
+                      <a:solidFill>
+                        <a:srgbClr val="D5D9DD"/>
+                      </a:solidFill>
+                      <a:prstDash val="solid"/>
+                      <a:round/>
+                      <a:headEnd type="none" w="med" len="med"/>
+                      <a:tailEnd type="none" w="med" len="med"/>
+                    </a:lnL>
+                    <a:lnR w="6350" cap="flat" cmpd="sng" algn="ctr">
+                      <a:solidFill>
+                        <a:srgbClr val="D5D9DD"/>
+                      </a:solidFill>
+                      <a:prstDash val="solid"/>
+                      <a:round/>
+                      <a:headEnd type="none" w="med" len="med"/>
+                      <a:tailEnd type="none" w="med" len="med"/>
+                    </a:lnR>
+                    <a:lnT w="6350" cap="flat" cmpd="sng" algn="ctr">
+                      <a:solidFill>
+                        <a:srgbClr val="D5D9DD"/>
+                      </a:solidFill>
+                      <a:prstDash val="solid"/>
+                      <a:round/>
+                      <a:headEnd type="none" w="med" len="med"/>
+                      <a:tailEnd type="none" w="med" len="med"/>
+                    </a:lnT>
+                    <a:lnB w="6350" cap="flat" cmpd="sng" algn="ctr">
+                      <a:solidFill>
+                        <a:srgbClr val="D5D9DD"/>
+                      </a:solidFill>
+                      <a:prstDash val="solid"/>
+                      <a:round/>
+                      <a:headEnd type="none" w="med" len="med"/>
+                      <a:tailEnd type="none" w="med" len="med"/>
+                    </a:lnB>
+                  </a:tcPr>
+                </a:tc>
+              </a:tr>
+            </a:tbl>
+          </a:graphicData>
+        </a:graphic>
+      </p:graphicFrame>
       <p:sp>
         <p:nvSpPr>
           <p:cNvPr id="25" name="Slide Number Placeholder 0"/>
@@ -8171,6 +9915,387 @@
         </p:nvSpPr>
         <p:spPr>
           <a:xfrm>
+            <a:off x="457200" y="320040"/>
+            <a:ext cx="8229600" cy="731520"/>
+          </a:xfrm>
+          <a:prstGeom prst="rect">
+            <a:avLst/>
+          </a:prstGeom>
+          <a:noFill/>
+          <a:ln/>
+        </p:spPr>
+        <p:txBody>
+          <a:bodyPr wrap="square" lIns="0" tIns="0" rIns="0" bIns="0" rtlCol="0" anchor="t"/>
+          <a:lstStyle/>
+          <a:p>
+            <a:pPr algn="l" indent="0" marL="0">
+              <a:buNone/>
+            </a:pPr>
+            <a:r>
+              <a:rPr lang="en-US" sz="3200" b="1" dirty="0">
+                <a:solidFill>
+                  <a:schemeClr val="tx2"/>
+                </a:solidFill>
+              </a:rPr>
+              <a:t>Límites y próximos pasos</a:t>
+            </a:r>
+            <a:endParaRPr lang="en-US" sz="3200" dirty="0"/>
+          </a:p>
+        </p:txBody>
+      </p:sp>
+      <p:sp>
+        <p:nvSpPr>
+          <p:cNvPr id="4" name="Título límites"/>
+          <p:cNvSpPr txBox="1"/>
+          <p:nvPr/>
+        </p:nvSpPr>
+        <p:spPr>
+          <a:xfrm>
+            <a:off x="457200" y="1325880"/>
+            <a:ext cx="3931920" cy="411480"/>
+          </a:xfrm>
+          <a:prstGeom prst="rect">
+            <a:avLst/>
+          </a:prstGeom>
+          <a:noFill/>
+          <a:ln/>
+        </p:spPr>
+        <p:txBody>
+          <a:bodyPr wrap="square" lIns="0" tIns="0" rIns="0" bIns="0" rtlCol="0" anchor="ctr"/>
+          <a:lstStyle/>
+          <a:p>
+            <a:pPr indent="0" marL="0">
+              <a:buNone/>
+            </a:pPr>
+            <a:r>
+              <a:rPr lang="en-US" sz="2200" b="1" dirty="0">
+                <a:solidFill>
+                  <a:schemeClr val="tx2"/>
+                </a:solidFill>
+                <a:latin typeface="Calibri" pitchFamily="34" charset="0"/>
+                <a:ea typeface="Calibri" pitchFamily="34" charset="-122"/>
+                <a:cs typeface="Calibri" pitchFamily="34" charset="-120"/>
+              </a:rPr>
+              <a:t>Límites actuales</a:t>
+            </a:r>
+            <a:endParaRPr lang="en-US" sz="2200" dirty="0"/>
+          </a:p>
+        </p:txBody>
+      </p:sp>
+      <p:sp>
+        <p:nvSpPr>
+          <p:cNvPr id="5" name="Lista límites"/>
+          <p:cNvSpPr txBox="1"/>
+          <p:nvPr/>
+        </p:nvSpPr>
+        <p:spPr>
+          <a:xfrm>
+            <a:off x="457200" y="1828800"/>
+            <a:ext cx="3931920" cy="2743200"/>
+          </a:xfrm>
+          <a:prstGeom prst="rect">
+            <a:avLst/>
+          </a:prstGeom>
+          <a:noFill/>
+          <a:ln/>
+        </p:spPr>
+        <p:txBody>
+          <a:bodyPr wrap="square" lIns="0" tIns="0" rIns="0" bIns="0" rtlCol="0" anchor="t"/>
+          <a:lstStyle/>
+          <a:p>
+            <a:pPr marL="342900" indent="-342900">
+              <a:spcAft>
+                <a:spcPts val="800"/>
+              </a:spcAft>
+              <a:buSzPct val="100000"/>
+              <a:buChar char="•"/>
+            </a:pPr>
+            <a:r>
+              <a:rPr lang="en-US" sz="1400" dirty="0">
+                <a:solidFill>
+                  <a:schemeClr val="tx1"/>
+                </a:solidFill>
+                <a:latin typeface="Calibri" pitchFamily="34" charset="0"/>
+                <a:ea typeface="Calibri" pitchFamily="34" charset="-122"/>
+                <a:cs typeface="Calibri" pitchFamily="34" charset="-120"/>
+              </a:rPr>
+              <a:t>Rama principal de SonarCloud aún es master; el análisis quedó en una rama corta main</a:t>
+            </a:r>
+            <a:endParaRPr lang="en-US" sz="1400" dirty="0"/>
+          </a:p>
+          <a:p>
+            <a:pPr marL="342900" indent="-342900">
+              <a:spcAft>
+                <a:spcPts val="800"/>
+              </a:spcAft>
+              <a:buSzPct val="100000"/>
+              <a:buChar char="•"/>
+            </a:pPr>
+            <a:r>
+              <a:rPr lang="en-US" sz="1400" dirty="0">
+                <a:solidFill>
+                  <a:schemeClr val="tx1"/>
+                </a:solidFill>
+                <a:latin typeface="Calibri" pitchFamily="34" charset="0"/>
+                <a:ea typeface="Calibri" pitchFamily="34" charset="-122"/>
+                <a:cs typeface="Calibri" pitchFamily="34" charset="-120"/>
+              </a:rPr>
+              <a:t>Gate y profile propios: asignados solo durante la prueba del plan Team (hasta el 1 nov.)</a:t>
+            </a:r>
+            <a:endParaRPr lang="en-US" sz="1400" dirty="0"/>
+          </a:p>
+          <a:p>
+            <a:pPr marL="342900" indent="-342900">
+              <a:spcAft>
+                <a:spcPts val="800"/>
+              </a:spcAft>
+              <a:buSzPct val="100000"/>
+              <a:buChar char="•"/>
+            </a:pPr>
+            <a:r>
+              <a:rPr lang="en-US" sz="1400" dirty="0">
+                <a:solidFill>
+                  <a:schemeClr val="tx1"/>
+                </a:solidFill>
+                <a:latin typeface="Calibri" pitchFamily="34" charset="0"/>
+                <a:ea typeface="Calibri" pitchFamily="34" charset="-122"/>
+                <a:cs typeface="Calibri" pitchFamily="34" charset="-120"/>
+              </a:rPr>
+              <a:t>Ventana Swing sin prueba visual</a:t>
+            </a:r>
+            <a:endParaRPr lang="en-US" sz="1400" dirty="0"/>
+          </a:p>
+        </p:txBody>
+      </p:sp>
+      <p:sp>
+        <p:nvSpPr>
+          <p:cNvPr id="6" name="Título pasos"/>
+          <p:cNvSpPr txBox="1"/>
+          <p:nvPr/>
+        </p:nvSpPr>
+        <p:spPr>
+          <a:xfrm>
+            <a:off x="4754880" y="1325880"/>
+            <a:ext cx="3931920" cy="411480"/>
+          </a:xfrm>
+          <a:prstGeom prst="rect">
+            <a:avLst/>
+          </a:prstGeom>
+          <a:noFill/>
+          <a:ln/>
+        </p:spPr>
+        <p:txBody>
+          <a:bodyPr wrap="square" lIns="0" tIns="0" rIns="0" bIns="0" rtlCol="0" anchor="ctr"/>
+          <a:lstStyle/>
+          <a:p>
+            <a:pPr indent="0" marL="0">
+              <a:buNone/>
+            </a:pPr>
+            <a:r>
+              <a:rPr lang="en-US" sz="2200" b="1" dirty="0">
+                <a:solidFill>
+                  <a:schemeClr val="tx2"/>
+                </a:solidFill>
+                <a:latin typeface="Calibri" pitchFamily="34" charset="0"/>
+                <a:ea typeface="Calibri" pitchFamily="34" charset="-122"/>
+                <a:cs typeface="Calibri" pitchFamily="34" charset="-120"/>
+              </a:rPr>
+              <a:t>Próximos pasos</a:t>
+            </a:r>
+            <a:endParaRPr lang="en-US" sz="2200" dirty="0"/>
+          </a:p>
+        </p:txBody>
+      </p:sp>
+      <p:sp>
+        <p:nvSpPr>
+          <p:cNvPr id="7" name="Lista pasos"/>
+          <p:cNvSpPr txBox="1"/>
+          <p:nvPr/>
+        </p:nvSpPr>
+        <p:spPr>
+          <a:xfrm>
+            <a:off x="4754880" y="1828800"/>
+            <a:ext cx="3931920" cy="2743200"/>
+          </a:xfrm>
+          <a:prstGeom prst="rect">
+            <a:avLst/>
+          </a:prstGeom>
+          <a:noFill/>
+          <a:ln/>
+        </p:spPr>
+        <p:txBody>
+          <a:bodyPr wrap="square" lIns="0" tIns="0" rIns="0" bIns="0" rtlCol="0" anchor="t"/>
+          <a:lstStyle/>
+          <a:p>
+            <a:pPr marL="342900" indent="-342900">
+              <a:spcAft>
+                <a:spcPts val="800"/>
+              </a:spcAft>
+              <a:buSzPct val="100000"/>
+              <a:buFont typeface="+mj-lt"/>
+              <a:buAutoNum type="arabicPeriod" startAt="1"/>
+            </a:pPr>
+            <a:r>
+              <a:rPr lang="en-US" sz="1400" dirty="0">
+                <a:solidFill>
+                  <a:schemeClr val="tx1"/>
+                </a:solidFill>
+                <a:latin typeface="Calibri" pitchFamily="34" charset="0"/>
+                <a:ea typeface="Calibri" pitchFamily="34" charset="-122"/>
+                <a:cs typeface="Calibri" pitchFamily="34" charset="-120"/>
+              </a:rPr>
+              <a:t>Borrar la rama corta main y renombrar master a main en SonarCloud</a:t>
+            </a:r>
+            <a:endParaRPr lang="en-US" sz="1400" dirty="0"/>
+          </a:p>
+          <a:p>
+            <a:pPr marL="342900" indent="-342900">
+              <a:spcAft>
+                <a:spcPts val="800"/>
+              </a:spcAft>
+              <a:buSzPct val="100000"/>
+              <a:buFont typeface="+mj-lt"/>
+              <a:buAutoNum type="arabicPeriod" startAt="1"/>
+            </a:pPr>
+            <a:r>
+              <a:rPr lang="en-US" sz="1400" dirty="0">
+                <a:solidFill>
+                  <a:schemeClr val="tx1"/>
+                </a:solidFill>
+                <a:latin typeface="Calibri" pitchFamily="34" charset="0"/>
+                <a:ea typeface="Calibri" pitchFamily="34" charset="-122"/>
+                <a:cs typeface="Calibri" pitchFamily="34" charset="-120"/>
+              </a:rPr>
+              <a:t>Volver a ejecutar el workflow y revisar el gate en la rama principal</a:t>
+            </a:r>
+            <a:endParaRPr lang="en-US" sz="1400" dirty="0"/>
+          </a:p>
+          <a:p>
+            <a:pPr marL="342900" indent="-342900">
+              <a:spcAft>
+                <a:spcPts val="800"/>
+              </a:spcAft>
+              <a:buSzPct val="100000"/>
+              <a:buFont typeface="+mj-lt"/>
+              <a:buAutoNum type="arabicPeriod" startAt="1"/>
+            </a:pPr>
+            <a:r>
+              <a:rPr lang="en-US" sz="1400" dirty="0">
+                <a:solidFill>
+                  <a:schemeClr val="tx1"/>
+                </a:solidFill>
+                <a:latin typeface="Calibri" pitchFamily="34" charset="0"/>
+                <a:ea typeface="Calibri" pitchFamily="34" charset="-122"/>
+                <a:cs typeface="Calibri" pitchFamily="34" charset="-120"/>
+              </a:rPr>
+              <a:t>Antes del 1 nov.: plan de pago o check-metrics.sh en plan gratuito</a:t>
+            </a:r>
+            <a:endParaRPr lang="en-US" sz="1400" dirty="0"/>
+          </a:p>
+          <a:p>
+            <a:pPr marL="342900" indent="-342900">
+              <a:spcAft>
+                <a:spcPts val="800"/>
+              </a:spcAft>
+              <a:buSzPct val="100000"/>
+              <a:buFont typeface="+mj-lt"/>
+              <a:buAutoNum type="arabicPeriod" startAt="1"/>
+            </a:pPr>
+            <a:r>
+              <a:rPr lang="en-US" sz="1400" dirty="0">
+                <a:solidFill>
+                  <a:schemeClr val="tx1"/>
+                </a:solidFill>
+                <a:latin typeface="Calibri" pitchFamily="34" charset="0"/>
+                <a:ea typeface="Calibri" pitchFamily="34" charset="-122"/>
+                <a:cs typeface="Calibri" pitchFamily="34" charset="-120"/>
+              </a:rPr>
+              <a:t>Ajustar los topes de complejidad si se desea</a:t>
+            </a:r>
+            <a:endParaRPr lang="en-US" sz="1400" dirty="0"/>
+          </a:p>
+        </p:txBody>
+      </p:sp>
+      <p:sp>
+        <p:nvSpPr>
+          <p:cNvPr id="25" name="Slide Number Placeholder 0"/>
+          <p:cNvSpPr>
+            <a:spLocks noGrp="1"/>
+          </p:cNvSpPr>
+          <p:nvPr>
+            <p:ph type="sldNum" sz="quarter" idx="4294967295"/>
+          </p:nvPr>
+        </p:nvSpPr>
+        <p:spPr>
+          <a:xfrm>
+            <a:off x="8229600" y="4754880"/>
+            <a:ext cx="457200" cy="274320"/>
+          </a:xfrm>
+          <a:prstGeom prst="rect">
+            <a:avLst/>
+          </a:prstGeom>
+          <a:extLst>
+            <a:ext uri="{C572A759-6A51-4108-AA02-DFA0A04FC94B}">
+              <ma14:wrappingTextBoxFlag xmlns:ma14="http://schemas.microsoft.com/office/mac/drawingml/2011/main" val="0"/>
+            </a:ext>
+          </a:extLst>
+        </p:spPr>
+        <p:txBody>
+          <a:bodyPr/>
+          <a:lstStyle>
+            <a:lvl1pPr>
+              <a:defRPr sz="1000">
+                <a:solidFill>
+                  <a:schemeClr val="accent5"/>
+                </a:solidFill>
+              </a:defRPr>
+            </a:lvl1pPr>
+          </a:lstStyle>
+          <a:p>
+            <a:pPr algn="l"/>
+            <a:fld id="{F7021451-1387-4CA6-816F-3879F97B5CBC}" type="slidenum">
+              <a:rPr b="0" lang="en-US"/>
+              <a:t>17</a:t>
+            </a:fld>
+            <a:endParaRPr lang="en-US"/>
+          </a:p>
+        </p:txBody>
+      </p:sp>
+    </p:spTree>
+  </p:cSld>
+  <p:clrMapOvr>
+    <a:masterClrMapping/>
+  </p:clrMapOvr>
+</p:sld>
+</file>
+
+<file path=ppt/slides/slide18.xml><?xml version="1.0" encoding="utf-8"?>
+<p:sld xmlns:a="http://schemas.openxmlformats.org/drawingml/2006/main" xmlns:r="http://schemas.openxmlformats.org/officeDocument/2006/relationships" xmlns:p="http://schemas.openxmlformats.org/presentationml/2006/main">
+  <p:cSld name="Slide 18">
+    <p:spTree>
+      <p:nvGrpSpPr>
+        <p:cNvPr id="1" name=""/>
+        <p:cNvGrpSpPr/>
+        <p:nvPr/>
+      </p:nvGrpSpPr>
+      <p:grpSpPr>
+        <a:xfrm>
+          <a:off x="0" y="0"/>
+          <a:ext cx="0" cy="0"/>
+          <a:chOff x="0" y="0"/>
+          <a:chExt cx="0" cy="0"/>
+        </a:xfrm>
+      </p:grpSpPr>
+      <p:sp>
+        <p:nvSpPr>
+          <p:cNvPr id="2" name="Text 0"/>
+          <p:cNvSpPr/>
+          <p:nvPr>
+            <p:ph idx="100" type="title" hasCustomPrompt="1"/>
+          </p:nvPr>
+        </p:nvSpPr>
+        <p:spPr>
+          <a:xfrm>
             <a:off x="640080" y="1371600"/>
             <a:ext cx="7863840" cy="914400"/>
           </a:xfrm>
@@ -10689,7 +12814,7 @@
                 <a:ea typeface="Calibri" pitchFamily="34" charset="-122"/>
                 <a:cs typeface="Calibri" pitchFamily="34" charset="-120"/>
               </a:rPr>
-              <a:t>18</a:t>
+              <a:t>68</a:t>
             </a:r>
             <a:endParaRPr lang="en-US" sz="3000" dirty="0"/>
           </a:p>
@@ -10728,7 +12853,7 @@
                 <a:ea typeface="Calibri" pitchFamily="34" charset="-122"/>
                 <a:cs typeface="Calibri" pitchFamily="34" charset="-120"/>
               </a:rPr>
-              <a:t>clases · 57 métodos</a:t>
+              <a:t>funciones en 18 archivos fuente</a:t>
             </a:r>
             <a:endParaRPr lang="en-US" sz="1200" dirty="0"/>
           </a:p>
@@ -10794,7 +12919,7 @@
                 <a:ea typeface="Calibri" pitchFamily="34" charset="-122"/>
                 <a:cs typeface="Calibri" pitchFamily="34" charset="-120"/>
               </a:rPr>
-              <a:t>≈ 660</a:t>
+              <a:t>654</a:t>
             </a:r>
             <a:endParaRPr lang="en-US" sz="3000" dirty="0"/>
           </a:p>

--- a/docs/Presentacion_Calidad_Calculadora.pptx
+++ b/docs/Presentacion_Calidad_Calculadora.pptx
@@ -23,9 +23,16 @@
     <p:sldId id="271" r:id="rId17"/>
     <p:sldId id="272" r:id="rId18"/>
     <p:sldId id="273" r:id="rId19"/>
+    <p:sldId id="274" r:id="rId20"/>
+    <p:sldId id="275" r:id="rId21"/>
+    <p:sldId id="276" r:id="rId22"/>
+    <p:sldId id="277" r:id="rId23"/>
+    <p:sldId id="278" r:id="rId24"/>
+    <p:sldId id="279" r:id="rId25"/>
+    <p:sldId id="280" r:id="rId26"/>
   </p:sldIdLst>
   <p:notesMasterIdLst>
-    <p:notesMasterId r:id="rId20"/>
+    <p:notesMasterId r:id="rId27"/>
   </p:notesMasterIdLst>
   <p:sldSz cx="9144000" cy="5143500"/>
   <p:notesSz cx="5143500" cy="9144000"/>
@@ -124,7 +131,7 @@
   <p:extLst>
     <p:ext uri="{521415D9-36F7-43E2-AB2F-B90AF26B5E84}">
       <p14:sectionLst xmlns:p14="http://schemas.microsoft.com/office/powerpoint/2010/main">
-        <p14:section name="Introducción" id="{5623f8cf-67ed-4cc1-12fa-66e543f52603}">
+        <p14:section name="Introducción" id="{e163dc95-d01b-45d8-a64c-04560e9faec1}">
           <p14:sldIdLst>
             <p14:sldId id="256"/>
             <p14:sldId id="257"/>
@@ -133,7 +140,7 @@
             <p14:sldId id="260"/>
           </p14:sldIdLst>
         </p14:section>
-        <p14:section name="Pruebas de aceptación" id="{81d5732e-adfd-2134-5700-33907e7f5c18}">
+        <p14:section name="Pruebas de aceptación" id="{ef1eb843-0737-f771-302b-3921f1b99b01}">
           <p14:sldIdLst>
             <p14:sldId id="261"/>
             <p14:sldId id="262"/>
@@ -141,25 +148,32 @@
             <p14:sldId id="264"/>
           </p14:sldIdLst>
         </p14:section>
-        <p14:section name="SonarCloud" id="{0b4e120f-f6c9-ce38-0365-ed448f720cb4}">
+        <p14:section name="SonarCloud" id="{bbd30e6b-f205-13e6-7469-7066d0c72f8c}">
           <p14:sldIdLst>
             <p14:sldId id="265"/>
             <p14:sldId id="266"/>
             <p14:sldId id="267"/>
             <p14:sldId id="268"/>
-          </p14:sldIdLst>
-        </p14:section>
-        <p14:section name="Integración y estado" id="{6345668a-6e85-adfe-e708-07c4d43c770f}">
-          <p14:sldIdLst>
             <p14:sldId id="269"/>
             <p14:sldId id="270"/>
             <p14:sldId id="271"/>
           </p14:sldIdLst>
         </p14:section>
-        <p14:section name="Cierre" id="{95428c74-0c9a-3941-a059-40138ed7e1e8}">
+        <p14:section name="Integración y estado" id="{ae0b6107-fcf3-5999-5512-c4dd07fd2e7c}">
           <p14:sldIdLst>
             <p14:sldId id="272"/>
             <p14:sldId id="273"/>
+            <p14:sldId id="274"/>
+            <p14:sldId id="275"/>
+            <p14:sldId id="276"/>
+            <p14:sldId id="277"/>
+            <p14:sldId id="278"/>
+          </p14:sldIdLst>
+        </p14:section>
+        <p14:section name="Cierre" id="{d5dc36ce-fa50-547a-8053-b3950027d955}">
+          <p14:sldIdLst>
+            <p14:sldId id="279"/>
+            <p14:sldId id="280"/>
           </p14:sldIdLst>
         </p14:section>
       </p14:sectionLst>
@@ -1232,7 +1246,7 @@
           <a:p>
             <a:r>
               <a:rPr lang="en-US" dirty="0"/>
-              <a:t>Los perfiles integrados Sonar way son de solo lectura: se copia como “Calculadora Java Profile” (copia de Sonar way comprehensive) y se activan reglas con umbral propio.</a:t>
+              <a:t>Capturas reales de SonarCloud: el gate con sus condiciones y su asignación al proyecto.</a:t>
             </a:r>
             <a:endParaRPr lang="en-US" dirty="0"/>
           </a:p>
@@ -1320,7 +1334,7 @@
           <a:p>
             <a:r>
               <a:rPr lang="en-US" dirty="0"/>
-              <a:t>El Quality Profile reporta como issue cada método que supera el umbral; el Quality Gate falla cuando aparece un issue nuevo (new_violations = 0) o se superan los topes globales.</a:t>
+              <a:t>Los perfiles integrados Sonar way son de solo lectura: se copia como “Calculadora Java Profile” (copia de Sonar way comprehensive) y se activan reglas con umbral propio.</a:t>
             </a:r>
             <a:endParaRPr lang="en-US" dirty="0"/>
           </a:p>
@@ -1408,7 +1422,7 @@
           <a:p>
             <a:r>
               <a:rPr lang="en-US" dirty="0"/>
-              <a:t>Valores medidos por SonarCloud en el primer análisis (el máximo por método viene de lizard). Los topes dejan margen de crecimiento y se pueden ajustar.</a:t>
+              <a:t>Captura real del perfil “Calculadora Java Profile”: copia de Sonar way comprehensive con 660 reglas activas, asociado al proyecto.</a:t>
             </a:r>
             <a:endParaRPr lang="en-US" dirty="0"/>
           </a:p>
@@ -1496,7 +1510,7 @@
           <a:p>
             <a:r>
               <a:rPr lang="en-US" dirty="0"/>
-              <a:t>Workflow de GitHub Actions: .github/workflows/sonarcloud.yml. check-metrics.sh aplica los topes de complejidad y cobertura para cuando termine la prueba del plan Team y el gate propio ya no se pueda asignar.</a:t>
+              <a:t>Reglas java:S3776 (cognitiva, Threshold 15) y java:S1541 (ciclomática, Threshold 10) activas en el perfil propio.</a:t>
             </a:r>
             <a:endParaRPr lang="en-US" dirty="0"/>
           </a:p>
@@ -1584,7 +1598,7 @@
           <a:p>
             <a:r>
               <a:rPr lang="en-US" dirty="0"/>
-              <a:t>Estado de cada elemento. Gate y profile propios están asignados al proyecto mientras dure la prueba del plan Team (hasta el 1 de noviembre de 2026); con el plan gratuito SonarCloud no permite asignarlos.</a:t>
+              <a:t>El Quality Profile reporta como issue cada método que supera el umbral; el Quality Gate falla cuando aparece un issue nuevo (new_violations = 0) o se superan los topes globales.</a:t>
             </a:r>
             <a:endParaRPr lang="en-US" dirty="0"/>
           </a:p>
@@ -1672,7 +1686,7 @@
           <a:p>
             <a:r>
               <a:rPr lang="en-US" dirty="0"/>
-              <a:t>Valores leídos del proyecto tras la corrida #4 de GitHub Actions (rama main).</a:t>
+              <a:t>Valores medidos por SonarCloud en el primer análisis (el máximo por método viene de lizard). Los topes dejan margen de crecimiento y se pueden ajustar.</a:t>
             </a:r>
             <a:endParaRPr lang="en-US" dirty="0"/>
           </a:p>
@@ -1760,7 +1774,7 @@
           <a:p>
             <a:r>
               <a:rPr lang="en-US" dirty="0"/>
-              <a:t>La corrida de CI ya pasa completa. Queda alinear la rama principal de SonarCloud con `main` y decidir el plan antes de que termine la prueba del plan Team (1 de noviembre de 2026).</a:t>
+              <a:t>Workflow de GitHub Actions: .github/workflows/sonarcloud.yml. check-metrics.sh aplica los topes de complejidad y cobertura para cuando termine la prueba del plan Team y el gate propio ya no se pueda asignar.</a:t>
             </a:r>
             <a:endParaRPr lang="en-US" dirty="0"/>
           </a:p>
@@ -1848,7 +1862,7 @@
           <a:p>
             <a:r>
               <a:rPr lang="en-US" dirty="0"/>
-              <a:t/>
+              <a:t>Estado de cada elemento. Gate y profile propios están asignados al proyecto mientras dure la prueba del plan Team (hasta el 1 de noviembre de 2026); con el plan gratuito SonarCloud no permite asignarlos.</a:t>
             </a:r>
             <a:endParaRPr lang="en-US" dirty="0"/>
           </a:p>
@@ -1872,6 +1886,94 @@
             <a:fld id="{F7021451-1387-4CA6-816F-3879F97B5CBC}" type="slidenum">
               <a:rPr lang="en-US"/>
               <a:t>18</a:t>
+            </a:fld>
+            <a:endParaRPr lang="en-US"/>
+          </a:p>
+        </p:txBody>
+      </p:sp>
+    </p:spTree>
+    <p:extLst>
+      <p:ext uri="{BB962C8B-B14F-4D97-AF65-F5344CB8AC3E}">
+        <p14:creationId xmlns:p14="http://schemas.microsoft.com/office/powerpoint/2010/main" val="1024086991"/>
+      </p:ext>
+    </p:extLst>
+  </p:cSld>
+  <p:clrMapOvr>
+    <a:masterClrMapping/>
+  </p:clrMapOvr>
+</p:notes>
+</file>
+
+<file path=ppt/notesSlides/notesSlide19.xml><?xml version="1.0" encoding="utf-8"?>
+<p:notes xmlns:a="http://schemas.openxmlformats.org/drawingml/2006/main" xmlns:r="http://schemas.openxmlformats.org/officeDocument/2006/relationships" xmlns:p="http://schemas.openxmlformats.org/presentationml/2006/main">
+  <p:cSld>
+    <p:spTree>
+      <p:nvGrpSpPr>
+        <p:cNvPr id="1" name=""/>
+        <p:cNvGrpSpPr/>
+        <p:nvPr/>
+      </p:nvGrpSpPr>
+      <p:grpSpPr>
+        <a:xfrm>
+          <a:off x="0" y="0"/>
+          <a:ext cx="0" cy="0"/>
+          <a:chOff x="0" y="0"/>
+          <a:chExt cx="0" cy="0"/>
+        </a:xfrm>
+      </p:grpSpPr>
+      <p:sp>
+        <p:nvSpPr>
+          <p:cNvPr id="2" name="Slide Image Placeholder 1"/>
+          <p:cNvSpPr>
+            <a:spLocks noGrp="1" noRot="1" noChangeAspect="1"/>
+          </p:cNvSpPr>
+          <p:nvPr>
+            <p:ph type="sldImg"/>
+          </p:nvPr>
+        </p:nvSpPr>
+        <p:spPr/>
+      </p:sp>
+      <p:sp>
+        <p:nvSpPr>
+          <p:cNvPr id="3" name="Notes Placeholder 2"/>
+          <p:cNvSpPr>
+            <a:spLocks noGrp="1"/>
+          </p:cNvSpPr>
+          <p:nvPr>
+            <p:ph type="body" idx="1"/>
+          </p:nvPr>
+        </p:nvSpPr>
+        <p:spPr/>
+        <p:txBody>
+          <a:bodyPr/>
+          <a:lstStyle/>
+          <a:p>
+            <a:r>
+              <a:rPr lang="en-US" dirty="0"/>
+              <a:t>Valores leídos del proyecto tras la corrida de GitHub Actions (rama main).</a:t>
+            </a:r>
+            <a:endParaRPr lang="en-US" dirty="0"/>
+          </a:p>
+        </p:txBody>
+      </p:sp>
+      <p:sp>
+        <p:nvSpPr>
+          <p:cNvPr id="4" name="Slide Number Placeholder 3"/>
+          <p:cNvSpPr>
+            <a:spLocks noGrp="1"/>
+          </p:cNvSpPr>
+          <p:nvPr>
+            <p:ph type="sldNum" sz="quarter" idx="10"/>
+          </p:nvPr>
+        </p:nvSpPr>
+        <p:spPr/>
+        <p:txBody>
+          <a:bodyPr/>
+          <a:lstStyle/>
+          <a:p>
+            <a:fld id="{F7021451-1387-4CA6-816F-3879F97B5CBC}" type="slidenum">
+              <a:rPr lang="en-US"/>
+              <a:t>19</a:t>
             </a:fld>
             <a:endParaRPr lang="en-US"/>
           </a:p>
@@ -1960,6 +2062,534 @@
             <a:fld id="{F7021451-1387-4CA6-816F-3879F97B5CBC}" type="slidenum">
               <a:rPr lang="en-US"/>
               <a:t>2</a:t>
+            </a:fld>
+            <a:endParaRPr lang="en-US"/>
+          </a:p>
+        </p:txBody>
+      </p:sp>
+    </p:spTree>
+    <p:extLst>
+      <p:ext uri="{BB962C8B-B14F-4D97-AF65-F5344CB8AC3E}">
+        <p14:creationId xmlns:p14="http://schemas.microsoft.com/office/powerpoint/2010/main" val="1024086991"/>
+      </p:ext>
+    </p:extLst>
+  </p:cSld>
+  <p:clrMapOvr>
+    <a:masterClrMapping/>
+  </p:clrMapOvr>
+</p:notes>
+</file>
+
+<file path=ppt/notesSlides/notesSlide20.xml><?xml version="1.0" encoding="utf-8"?>
+<p:notes xmlns:a="http://schemas.openxmlformats.org/drawingml/2006/main" xmlns:r="http://schemas.openxmlformats.org/officeDocument/2006/relationships" xmlns:p="http://schemas.openxmlformats.org/presentationml/2006/main">
+  <p:cSld>
+    <p:spTree>
+      <p:nvGrpSpPr>
+        <p:cNvPr id="1" name=""/>
+        <p:cNvGrpSpPr/>
+        <p:nvPr/>
+      </p:nvGrpSpPr>
+      <p:grpSpPr>
+        <a:xfrm>
+          <a:off x="0" y="0"/>
+          <a:ext cx="0" cy="0"/>
+          <a:chOff x="0" y="0"/>
+          <a:chExt cx="0" cy="0"/>
+        </a:xfrm>
+      </p:grpSpPr>
+      <p:sp>
+        <p:nvSpPr>
+          <p:cNvPr id="2" name="Slide Image Placeholder 1"/>
+          <p:cNvSpPr>
+            <a:spLocks noGrp="1" noRot="1" noChangeAspect="1"/>
+          </p:cNvSpPr>
+          <p:nvPr>
+            <p:ph type="sldImg"/>
+          </p:nvPr>
+        </p:nvSpPr>
+        <p:spPr/>
+      </p:sp>
+      <p:sp>
+        <p:nvSpPr>
+          <p:cNvPr id="3" name="Notes Placeholder 2"/>
+          <p:cNvSpPr>
+            <a:spLocks noGrp="1"/>
+          </p:cNvSpPr>
+          <p:nvPr>
+            <p:ph type="body" idx="1"/>
+          </p:nvPr>
+        </p:nvSpPr>
+        <p:spPr/>
+        <p:txBody>
+          <a:bodyPr/>
+          <a:lstStyle/>
+          <a:p>
+            <a:r>
+              <a:rPr lang="en-US" dirty="0"/>
+              <a:t>Captura real de la rama main en SonarCloud tras la corrida de GitHub Actions: Quality Gate Passed, cobertura 93,7 %, sin issues y sin duplicación.</a:t>
+            </a:r>
+            <a:endParaRPr lang="en-US" dirty="0"/>
+          </a:p>
+        </p:txBody>
+      </p:sp>
+      <p:sp>
+        <p:nvSpPr>
+          <p:cNvPr id="4" name="Slide Number Placeholder 3"/>
+          <p:cNvSpPr>
+            <a:spLocks noGrp="1"/>
+          </p:cNvSpPr>
+          <p:nvPr>
+            <p:ph type="sldNum" sz="quarter" idx="10"/>
+          </p:nvPr>
+        </p:nvSpPr>
+        <p:spPr/>
+        <p:txBody>
+          <a:bodyPr/>
+          <a:lstStyle/>
+          <a:p>
+            <a:fld id="{F7021451-1387-4CA6-816F-3879F97B5CBC}" type="slidenum">
+              <a:rPr lang="en-US"/>
+              <a:t>20</a:t>
+            </a:fld>
+            <a:endParaRPr lang="en-US"/>
+          </a:p>
+        </p:txBody>
+      </p:sp>
+    </p:spTree>
+    <p:extLst>
+      <p:ext uri="{BB962C8B-B14F-4D97-AF65-F5344CB8AC3E}">
+        <p14:creationId xmlns:p14="http://schemas.microsoft.com/office/powerpoint/2010/main" val="1024086991"/>
+      </p:ext>
+    </p:extLst>
+  </p:cSld>
+  <p:clrMapOvr>
+    <a:masterClrMapping/>
+  </p:clrMapOvr>
+</p:notes>
+</file>
+
+<file path=ppt/notesSlides/notesSlide21.xml><?xml version="1.0" encoding="utf-8"?>
+<p:notes xmlns:a="http://schemas.openxmlformats.org/drawingml/2006/main" xmlns:r="http://schemas.openxmlformats.org/officeDocument/2006/relationships" xmlns:p="http://schemas.openxmlformats.org/presentationml/2006/main">
+  <p:cSld>
+    <p:spTree>
+      <p:nvGrpSpPr>
+        <p:cNvPr id="1" name=""/>
+        <p:cNvGrpSpPr/>
+        <p:nvPr/>
+      </p:nvGrpSpPr>
+      <p:grpSpPr>
+        <a:xfrm>
+          <a:off x="0" y="0"/>
+          <a:ext cx="0" cy="0"/>
+          <a:chOff x="0" y="0"/>
+          <a:chExt cx="0" cy="0"/>
+        </a:xfrm>
+      </p:grpSpPr>
+      <p:sp>
+        <p:nvSpPr>
+          <p:cNvPr id="2" name="Slide Image Placeholder 1"/>
+          <p:cNvSpPr>
+            <a:spLocks noGrp="1" noRot="1" noChangeAspect="1"/>
+          </p:cNvSpPr>
+          <p:nvPr>
+            <p:ph type="sldImg"/>
+          </p:nvPr>
+        </p:nvSpPr>
+        <p:spPr/>
+      </p:sp>
+      <p:sp>
+        <p:nvSpPr>
+          <p:cNvPr id="3" name="Notes Placeholder 2"/>
+          <p:cNvSpPr>
+            <a:spLocks noGrp="1"/>
+          </p:cNvSpPr>
+          <p:nvPr>
+            <p:ph type="body" idx="1"/>
+          </p:nvPr>
+        </p:nvSpPr>
+        <p:spPr/>
+        <p:txBody>
+          <a:bodyPr/>
+          <a:lstStyle/>
+          <a:p>
+            <a:r>
+              <a:rPr lang="en-US" dirty="0"/>
+              <a:t>Corrida del workflow SonarCloud: pruebas unitarias, pruebas de aceptación Karate, análisis, Quality Gate y verificación de umbrales.</a:t>
+            </a:r>
+            <a:endParaRPr lang="en-US" dirty="0"/>
+          </a:p>
+        </p:txBody>
+      </p:sp>
+      <p:sp>
+        <p:nvSpPr>
+          <p:cNvPr id="4" name="Slide Number Placeholder 3"/>
+          <p:cNvSpPr>
+            <a:spLocks noGrp="1"/>
+          </p:cNvSpPr>
+          <p:nvPr>
+            <p:ph type="sldNum" sz="quarter" idx="10"/>
+          </p:nvPr>
+        </p:nvSpPr>
+        <p:spPr/>
+        <p:txBody>
+          <a:bodyPr/>
+          <a:lstStyle/>
+          <a:p>
+            <a:fld id="{F7021451-1387-4CA6-816F-3879F97B5CBC}" type="slidenum">
+              <a:rPr lang="en-US"/>
+              <a:t>21</a:t>
+            </a:fld>
+            <a:endParaRPr lang="en-US"/>
+          </a:p>
+        </p:txBody>
+      </p:sp>
+    </p:spTree>
+    <p:extLst>
+      <p:ext uri="{BB962C8B-B14F-4D97-AF65-F5344CB8AC3E}">
+        <p14:creationId xmlns:p14="http://schemas.microsoft.com/office/powerpoint/2010/main" val="1024086991"/>
+      </p:ext>
+    </p:extLst>
+  </p:cSld>
+  <p:clrMapOvr>
+    <a:masterClrMapping/>
+  </p:clrMapOvr>
+</p:notes>
+</file>
+
+<file path=ppt/notesSlides/notesSlide22.xml><?xml version="1.0" encoding="utf-8"?>
+<p:notes xmlns:a="http://schemas.openxmlformats.org/drawingml/2006/main" xmlns:r="http://schemas.openxmlformats.org/officeDocument/2006/relationships" xmlns:p="http://schemas.openxmlformats.org/presentationml/2006/main">
+  <p:cSld>
+    <p:spTree>
+      <p:nvGrpSpPr>
+        <p:cNvPr id="1" name=""/>
+        <p:cNvGrpSpPr/>
+        <p:nvPr/>
+      </p:nvGrpSpPr>
+      <p:grpSpPr>
+        <a:xfrm>
+          <a:off x="0" y="0"/>
+          <a:ext cx="0" cy="0"/>
+          <a:chOff x="0" y="0"/>
+          <a:chExt cx="0" cy="0"/>
+        </a:xfrm>
+      </p:grpSpPr>
+      <p:sp>
+        <p:nvSpPr>
+          <p:cNvPr id="2" name="Slide Image Placeholder 1"/>
+          <p:cNvSpPr>
+            <a:spLocks noGrp="1" noRot="1" noChangeAspect="1"/>
+          </p:cNvSpPr>
+          <p:nvPr>
+            <p:ph type="sldImg"/>
+          </p:nvPr>
+        </p:nvSpPr>
+        <p:spPr/>
+      </p:sp>
+      <p:sp>
+        <p:nvSpPr>
+          <p:cNvPr id="3" name="Notes Placeholder 2"/>
+          <p:cNvSpPr>
+            <a:spLocks noGrp="1"/>
+          </p:cNvSpPr>
+          <p:nvPr>
+            <p:ph type="body" idx="1"/>
+          </p:nvPr>
+        </p:nvSpPr>
+        <p:spPr/>
+        <p:txBody>
+          <a:bodyPr/>
+          <a:lstStyle/>
+          <a:p>
+            <a:r>
+              <a:rPr lang="en-US" dirty="0"/>
+              <a:t>Dependency risks de SonarCloud: 84 riesgos en 89 dependencias, todas transitivas de Karate en el classpath de las pruebas de aceptación. El código propio tiene 0 vulnerabilidades y 0 hotspots. Se corrigió forzando versiones en build.gradle.</a:t>
+            </a:r>
+            <a:endParaRPr lang="en-US" dirty="0"/>
+          </a:p>
+        </p:txBody>
+      </p:sp>
+      <p:sp>
+        <p:nvSpPr>
+          <p:cNvPr id="4" name="Slide Number Placeholder 3"/>
+          <p:cNvSpPr>
+            <a:spLocks noGrp="1"/>
+          </p:cNvSpPr>
+          <p:nvPr>
+            <p:ph type="sldNum" sz="quarter" idx="10"/>
+          </p:nvPr>
+        </p:nvSpPr>
+        <p:spPr/>
+        <p:txBody>
+          <a:bodyPr/>
+          <a:lstStyle/>
+          <a:p>
+            <a:fld id="{F7021451-1387-4CA6-816F-3879F97B5CBC}" type="slidenum">
+              <a:rPr lang="en-US"/>
+              <a:t>22</a:t>
+            </a:fld>
+            <a:endParaRPr lang="en-US"/>
+          </a:p>
+        </p:txBody>
+      </p:sp>
+    </p:spTree>
+    <p:extLst>
+      <p:ext uri="{BB962C8B-B14F-4D97-AF65-F5344CB8AC3E}">
+        <p14:creationId xmlns:p14="http://schemas.microsoft.com/office/powerpoint/2010/main" val="1024086991"/>
+      </p:ext>
+    </p:extLst>
+  </p:cSld>
+  <p:clrMapOvr>
+    <a:masterClrMapping/>
+  </p:clrMapOvr>
+</p:notes>
+</file>
+
+<file path=ppt/notesSlides/notesSlide23.xml><?xml version="1.0" encoding="utf-8"?>
+<p:notes xmlns:a="http://schemas.openxmlformats.org/drawingml/2006/main" xmlns:r="http://schemas.openxmlformats.org/officeDocument/2006/relationships" xmlns:p="http://schemas.openxmlformats.org/presentationml/2006/main">
+  <p:cSld>
+    <p:spTree>
+      <p:nvGrpSpPr>
+        <p:cNvPr id="1" name=""/>
+        <p:cNvGrpSpPr/>
+        <p:nvPr/>
+      </p:nvGrpSpPr>
+      <p:grpSpPr>
+        <a:xfrm>
+          <a:off x="0" y="0"/>
+          <a:ext cx="0" cy="0"/>
+          <a:chOff x="0" y="0"/>
+          <a:chExt cx="0" cy="0"/>
+        </a:xfrm>
+      </p:grpSpPr>
+      <p:sp>
+        <p:nvSpPr>
+          <p:cNvPr id="2" name="Slide Image Placeholder 1"/>
+          <p:cNvSpPr>
+            <a:spLocks noGrp="1" noRot="1" noChangeAspect="1"/>
+          </p:cNvSpPr>
+          <p:nvPr>
+            <p:ph type="sldImg"/>
+          </p:nvPr>
+        </p:nvSpPr>
+        <p:spPr/>
+      </p:sp>
+      <p:sp>
+        <p:nvSpPr>
+          <p:cNvPr id="3" name="Notes Placeholder 2"/>
+          <p:cNvSpPr>
+            <a:spLocks noGrp="1"/>
+          </p:cNvSpPr>
+          <p:nvPr>
+            <p:ph type="body" idx="1"/>
+          </p:nvPr>
+        </p:nvSpPr>
+        <p:spPr/>
+        <p:txBody>
+          <a:bodyPr/>
+          <a:lstStyle/>
+          <a:p>
+            <a:r>
+              <a:rPr lang="en-US" dirty="0"/>
+              <a:t>Después de la corrida #5, los 84 riesgos de dependencias aparecen como Fixed y el resumen de la rama main muestra 0 Dependency Risks. La tarjeta Coverage dice not enough lines porque ese análisis no cambió líneas de código (solo mide código nuevo).</a:t>
+            </a:r>
+            <a:endParaRPr lang="en-US" dirty="0"/>
+          </a:p>
+        </p:txBody>
+      </p:sp>
+      <p:sp>
+        <p:nvSpPr>
+          <p:cNvPr id="4" name="Slide Number Placeholder 3"/>
+          <p:cNvSpPr>
+            <a:spLocks noGrp="1"/>
+          </p:cNvSpPr>
+          <p:nvPr>
+            <p:ph type="sldNum" sz="quarter" idx="10"/>
+          </p:nvPr>
+        </p:nvSpPr>
+        <p:spPr/>
+        <p:txBody>
+          <a:bodyPr/>
+          <a:lstStyle/>
+          <a:p>
+            <a:fld id="{F7021451-1387-4CA6-816F-3879F97B5CBC}" type="slidenum">
+              <a:rPr lang="en-US"/>
+              <a:t>23</a:t>
+            </a:fld>
+            <a:endParaRPr lang="en-US"/>
+          </a:p>
+        </p:txBody>
+      </p:sp>
+    </p:spTree>
+    <p:extLst>
+      <p:ext uri="{BB962C8B-B14F-4D97-AF65-F5344CB8AC3E}">
+        <p14:creationId xmlns:p14="http://schemas.microsoft.com/office/powerpoint/2010/main" val="1024086991"/>
+      </p:ext>
+    </p:extLst>
+  </p:cSld>
+  <p:clrMapOvr>
+    <a:masterClrMapping/>
+  </p:clrMapOvr>
+</p:notes>
+</file>
+
+<file path=ppt/notesSlides/notesSlide24.xml><?xml version="1.0" encoding="utf-8"?>
+<p:notes xmlns:a="http://schemas.openxmlformats.org/drawingml/2006/main" xmlns:r="http://schemas.openxmlformats.org/officeDocument/2006/relationships" xmlns:p="http://schemas.openxmlformats.org/presentationml/2006/main">
+  <p:cSld>
+    <p:spTree>
+      <p:nvGrpSpPr>
+        <p:cNvPr id="1" name=""/>
+        <p:cNvGrpSpPr/>
+        <p:nvPr/>
+      </p:nvGrpSpPr>
+      <p:grpSpPr>
+        <a:xfrm>
+          <a:off x="0" y="0"/>
+          <a:ext cx="0" cy="0"/>
+          <a:chOff x="0" y="0"/>
+          <a:chExt cx="0" cy="0"/>
+        </a:xfrm>
+      </p:grpSpPr>
+      <p:sp>
+        <p:nvSpPr>
+          <p:cNvPr id="2" name="Slide Image Placeholder 1"/>
+          <p:cNvSpPr>
+            <a:spLocks noGrp="1" noRot="1" noChangeAspect="1"/>
+          </p:cNvSpPr>
+          <p:nvPr>
+            <p:ph type="sldImg"/>
+          </p:nvPr>
+        </p:nvSpPr>
+        <p:spPr/>
+      </p:sp>
+      <p:sp>
+        <p:nvSpPr>
+          <p:cNvPr id="3" name="Notes Placeholder 2"/>
+          <p:cNvSpPr>
+            <a:spLocks noGrp="1"/>
+          </p:cNvSpPr>
+          <p:nvPr>
+            <p:ph type="body" idx="1"/>
+          </p:nvPr>
+        </p:nvSpPr>
+        <p:spPr/>
+        <p:txBody>
+          <a:bodyPr/>
+          <a:lstStyle/>
+          <a:p>
+            <a:r>
+              <a:rPr lang="en-US" dirty="0"/>
+              <a:t>La corrida de CI ya pasa completa. Queda alinear la rama principal de SonarCloud con `main` y decidir el plan antes de que termine la prueba del plan Team (1 de noviembre de 2026).</a:t>
+            </a:r>
+            <a:endParaRPr lang="en-US" dirty="0"/>
+          </a:p>
+        </p:txBody>
+      </p:sp>
+      <p:sp>
+        <p:nvSpPr>
+          <p:cNvPr id="4" name="Slide Number Placeholder 3"/>
+          <p:cNvSpPr>
+            <a:spLocks noGrp="1"/>
+          </p:cNvSpPr>
+          <p:nvPr>
+            <p:ph type="sldNum" sz="quarter" idx="10"/>
+          </p:nvPr>
+        </p:nvSpPr>
+        <p:spPr/>
+        <p:txBody>
+          <a:bodyPr/>
+          <a:lstStyle/>
+          <a:p>
+            <a:fld id="{F7021451-1387-4CA6-816F-3879F97B5CBC}" type="slidenum">
+              <a:rPr lang="en-US"/>
+              <a:t>24</a:t>
+            </a:fld>
+            <a:endParaRPr lang="en-US"/>
+          </a:p>
+        </p:txBody>
+      </p:sp>
+    </p:spTree>
+    <p:extLst>
+      <p:ext uri="{BB962C8B-B14F-4D97-AF65-F5344CB8AC3E}">
+        <p14:creationId xmlns:p14="http://schemas.microsoft.com/office/powerpoint/2010/main" val="1024086991"/>
+      </p:ext>
+    </p:extLst>
+  </p:cSld>
+  <p:clrMapOvr>
+    <a:masterClrMapping/>
+  </p:clrMapOvr>
+</p:notes>
+</file>
+
+<file path=ppt/notesSlides/notesSlide25.xml><?xml version="1.0" encoding="utf-8"?>
+<p:notes xmlns:a="http://schemas.openxmlformats.org/drawingml/2006/main" xmlns:r="http://schemas.openxmlformats.org/officeDocument/2006/relationships" xmlns:p="http://schemas.openxmlformats.org/presentationml/2006/main">
+  <p:cSld>
+    <p:spTree>
+      <p:nvGrpSpPr>
+        <p:cNvPr id="1" name=""/>
+        <p:cNvGrpSpPr/>
+        <p:nvPr/>
+      </p:nvGrpSpPr>
+      <p:grpSpPr>
+        <a:xfrm>
+          <a:off x="0" y="0"/>
+          <a:ext cx="0" cy="0"/>
+          <a:chOff x="0" y="0"/>
+          <a:chExt cx="0" cy="0"/>
+        </a:xfrm>
+      </p:grpSpPr>
+      <p:sp>
+        <p:nvSpPr>
+          <p:cNvPr id="2" name="Slide Image Placeholder 1"/>
+          <p:cNvSpPr>
+            <a:spLocks noGrp="1" noRot="1" noChangeAspect="1"/>
+          </p:cNvSpPr>
+          <p:nvPr>
+            <p:ph type="sldImg"/>
+          </p:nvPr>
+        </p:nvSpPr>
+        <p:spPr/>
+      </p:sp>
+      <p:sp>
+        <p:nvSpPr>
+          <p:cNvPr id="3" name="Notes Placeholder 2"/>
+          <p:cNvSpPr>
+            <a:spLocks noGrp="1"/>
+          </p:cNvSpPr>
+          <p:nvPr>
+            <p:ph type="body" idx="1"/>
+          </p:nvPr>
+        </p:nvSpPr>
+        <p:spPr/>
+        <p:txBody>
+          <a:bodyPr/>
+          <a:lstStyle/>
+          <a:p>
+            <a:r>
+              <a:rPr lang="en-US" dirty="0"/>
+              <a:t/>
+            </a:r>
+            <a:endParaRPr lang="en-US" dirty="0"/>
+          </a:p>
+        </p:txBody>
+      </p:sp>
+      <p:sp>
+        <p:nvSpPr>
+          <p:cNvPr id="4" name="Slide Number Placeholder 3"/>
+          <p:cNvSpPr>
+            <a:spLocks noGrp="1"/>
+          </p:cNvSpPr>
+          <p:nvPr>
+            <p:ph type="sldNum" sz="quarter" idx="10"/>
+          </p:nvPr>
+        </p:nvSpPr>
+        <p:spPr/>
+        <p:txBody>
+          <a:bodyPr/>
+          <a:lstStyle/>
+          <a:p>
+            <a:fld id="{F7021451-1387-4CA6-816F-3879F97B5CBC}" type="slidenum">
+              <a:rPr lang="en-US"/>
+              <a:t>25</a:t>
             </a:fld>
             <a:endParaRPr lang="en-US"/>
           </a:p>
@@ -3918,49 +4548,46 @@
                   <a:schemeClr val="tx2"/>
                 </a:solidFill>
               </a:rPr>
-              <a:t>Quality Profile y métricas</a:t>
+              <a:t>Quality Gate en SonarCloud</a:t>
             </a:r>
             <a:endParaRPr lang="en-US" sz="3200" dirty="0"/>
           </a:p>
         </p:txBody>
       </p:sp>
-      <p:sp>
-        <p:nvSpPr>
-          <p:cNvPr id="4" name="Tarjeta Ciclomática"/>
-          <p:cNvSpPr/>
-          <p:nvPr/>
-        </p:nvSpPr>
-        <p:spPr>
-          <a:xfrm>
-            <a:off x="457200" y="1371600"/>
-            <a:ext cx="2560320" cy="2468880"/>
-          </a:xfrm>
-          <a:prstGeom prst="roundRect">
-            <a:avLst>
-              <a:gd name="adj" fmla="val 4444"/>
-            </a:avLst>
-          </a:prstGeom>
-          <a:solidFill>
-            <a:schemeClr val="bg2"/>
-          </a:solidFill>
-          <a:ln w="12700">
-            <a:solidFill>
-              <a:schemeClr val="bg2"/>
-            </a:solidFill>
-            <a:prstDash val="solid"/>
-          </a:ln>
-        </p:spPr>
-      </p:sp>
-      <p:sp>
-        <p:nvSpPr>
-          <p:cNvPr id="5" name="Métrica Ciclomática"/>
+      <p:pic>
+        <p:nvPicPr>
+          <p:cNvPr id="4" name="Image 0" descr="Calculadora Quality Gate con sus condiciones">    </p:cNvPr>
+          <p:cNvPicPr>
+            <a:picLocks noChangeAspect="1"/>
+          </p:cNvPicPr>
+          <p:nvPr/>
+        </p:nvPicPr>
+        <p:blipFill>
+          <a:blip r:embed="rId1"/>
+          <a:stretch>
+            <a:fillRect/>
+          </a:stretch>
+        </p:blipFill>
+        <p:spPr>
+          <a:xfrm>
+            <a:off x="457200" y="1188720"/>
+            <a:ext cx="3167139" cy="3246120"/>
+          </a:xfrm>
+          <a:prstGeom prst="rect">
+            <a:avLst/>
+          </a:prstGeom>
+        </p:spPr>
+      </p:pic>
+      <p:sp>
+        <p:nvSpPr>
+          <p:cNvPr id="5" name="Pie gate"/>
           <p:cNvSpPr txBox="1"/>
           <p:nvPr/>
         </p:nvSpPr>
         <p:spPr>
           <a:xfrm>
-            <a:off x="685800" y="1508760"/>
-            <a:ext cx="2103120" cy="411480"/>
+            <a:off x="457200" y="4480560"/>
+            <a:ext cx="3167139" cy="274320"/>
           </a:xfrm>
           <a:prstGeom prst="rect">
             <a:avLst/>
@@ -3969,37 +4596,61 @@
           <a:ln/>
         </p:spPr>
         <p:txBody>
-          <a:bodyPr wrap="square" lIns="0" tIns="0" rIns="0" bIns="0" rtlCol="0" anchor="ctr"/>
-          <a:lstStyle/>
-          <a:p>
-            <a:pPr indent="0" marL="0">
+          <a:bodyPr wrap="square" lIns="0" tIns="0" rIns="0" bIns="0" rtlCol="0" anchor="t"/>
+          <a:lstStyle/>
+          <a:p>
+            <a:pPr algn="ctr" indent="0" marL="0">
               <a:buNone/>
             </a:pPr>
             <a:r>
-              <a:rPr lang="en-US" sz="2000" b="1" dirty="0">
-                <a:solidFill>
-                  <a:schemeClr val="tx2"/>
+              <a:rPr lang="en-US" sz="1200" dirty="0">
+                <a:solidFill>
+                  <a:schemeClr val="accent5"/>
                 </a:solidFill>
                 <a:latin typeface="Calibri" pitchFamily="34" charset="0"/>
                 <a:ea typeface="Calibri" pitchFamily="34" charset="-122"/>
                 <a:cs typeface="Calibri" pitchFamily="34" charset="-120"/>
               </a:rPr>
-              <a:t>Ciclomática</a:t>
-            </a:r>
-            <a:endParaRPr lang="en-US" sz="2000" dirty="0"/>
-          </a:p>
-        </p:txBody>
-      </p:sp>
-      <p:sp>
-        <p:nvSpPr>
-          <p:cNvPr id="6" name="Umbral Ciclomática"/>
+              <a:t>7 condiciones en código nuevo · 3 en total</a:t>
+            </a:r>
+            <a:endParaRPr lang="en-US" sz="1200" dirty="0"/>
+          </a:p>
+        </p:txBody>
+      </p:sp>
+      <p:pic>
+        <p:nvPicPr>
+          <p:cNvPr id="6" name="Image 1" descr="Gate asignado al proyecto">    </p:cNvPr>
+          <p:cNvPicPr>
+            <a:picLocks noChangeAspect="1"/>
+          </p:cNvPicPr>
+          <p:nvPr/>
+        </p:nvPicPr>
+        <p:blipFill>
+          <a:blip r:embed="rId2"/>
+          <a:stretch>
+            <a:fillRect/>
+          </a:stretch>
+        </p:blipFill>
+        <p:spPr>
+          <a:xfrm>
+            <a:off x="4480560" y="1188720"/>
+            <a:ext cx="3840480" cy="2138328"/>
+          </a:xfrm>
+          <a:prstGeom prst="rect">
+            <a:avLst/>
+          </a:prstGeom>
+        </p:spPr>
+      </p:pic>
+      <p:sp>
+        <p:nvSpPr>
+          <p:cNvPr id="7" name="Pie asignación"/>
           <p:cNvSpPr txBox="1"/>
           <p:nvPr/>
         </p:nvSpPr>
         <p:spPr>
           <a:xfrm>
-            <a:off x="685800" y="1965960"/>
-            <a:ext cx="2103120" cy="822960"/>
+            <a:off x="4480560" y="3372768"/>
+            <a:ext cx="3840480" cy="274320"/>
           </a:xfrm>
           <a:prstGeom prst="rect">
             <a:avLst/>
@@ -4008,37 +4659,37 @@
           <a:ln/>
         </p:spPr>
         <p:txBody>
-          <a:bodyPr wrap="square" lIns="0" tIns="0" rIns="0" bIns="0" rtlCol="0" anchor="ctr"/>
-          <a:lstStyle/>
-          <a:p>
-            <a:pPr indent="0" marL="0">
+          <a:bodyPr wrap="square" lIns="0" tIns="0" rIns="0" bIns="0" rtlCol="0" anchor="t"/>
+          <a:lstStyle/>
+          <a:p>
+            <a:pPr algn="ctr" indent="0" marL="0">
               <a:buNone/>
             </a:pPr>
             <a:r>
-              <a:rPr lang="en-US" sz="4400" b="1" dirty="0">
-                <a:solidFill>
-                  <a:schemeClr val="accent1"/>
+              <a:rPr lang="en-US" sz="1200" dirty="0">
+                <a:solidFill>
+                  <a:schemeClr val="accent5"/>
                 </a:solidFill>
                 <a:latin typeface="Calibri" pitchFamily="34" charset="0"/>
                 <a:ea typeface="Calibri" pitchFamily="34" charset="-122"/>
                 <a:cs typeface="Calibri" pitchFamily="34" charset="-120"/>
               </a:rPr>
-              <a:t>≤ 10</a:t>
-            </a:r>
-            <a:endParaRPr lang="en-US" sz="4400" dirty="0"/>
-          </a:p>
-        </p:txBody>
-      </p:sp>
-      <p:sp>
-        <p:nvSpPr>
-          <p:cNvPr id="7" name="Alcance Ciclomática"/>
+              <a:t>El proyecto usa “Calculadora Quality Gate”</a:t>
+            </a:r>
+            <a:endParaRPr lang="en-US" sz="1200" dirty="0"/>
+          </a:p>
+        </p:txBody>
+      </p:sp>
+      <p:sp>
+        <p:nvSpPr>
+          <p:cNvPr id="8" name="Notas gate"/>
           <p:cNvSpPr txBox="1"/>
           <p:nvPr/>
         </p:nvSpPr>
         <p:spPr>
           <a:xfrm>
-            <a:off x="685800" y="2834640"/>
-            <a:ext cx="2103120" cy="320040"/>
+            <a:off x="4572000" y="3738528"/>
+            <a:ext cx="4023360" cy="1188720"/>
           </a:xfrm>
           <a:prstGeom prst="rect">
             <a:avLst/>
@@ -4047,14 +4698,18 @@
           <a:ln/>
         </p:spPr>
         <p:txBody>
-          <a:bodyPr wrap="square" lIns="0" tIns="0" rIns="0" bIns="0" rtlCol="0" anchor="ctr"/>
-          <a:lstStyle/>
-          <a:p>
-            <a:pPr indent="0" marL="0">
-              <a:buNone/>
-            </a:pPr>
-            <a:r>
-              <a:rPr lang="en-US" sz="1400" dirty="0">
+          <a:bodyPr wrap="square" lIns="0" tIns="0" rIns="0" bIns="0" rtlCol="0" anchor="t"/>
+          <a:lstStyle/>
+          <a:p>
+            <a:pPr marL="342900" indent="-342900">
+              <a:spcAft>
+                <a:spcPts val="800"/>
+              </a:spcAft>
+              <a:buSzPct val="100000"/>
+              <a:buChar char="•"/>
+            </a:pPr>
+            <a:r>
+              <a:rPr lang="en-US" sz="1200" dirty="0">
                 <a:solidFill>
                   <a:schemeClr val="tx1"/>
                 </a:solidFill>
@@ -4062,453 +4717,51 @@
                 <a:ea typeface="Calibri" pitchFamily="34" charset="-122"/>
                 <a:cs typeface="Calibri" pitchFamily="34" charset="-120"/>
               </a:rPr>
-              <a:t>por método</a:t>
-            </a:r>
-            <a:endParaRPr lang="en-US" sz="1400" dirty="0"/>
-          </a:p>
-        </p:txBody>
-      </p:sp>
-      <p:sp>
-        <p:nvSpPr>
-          <p:cNvPr id="8" name="Fuente Ciclomática"/>
-          <p:cNvSpPr txBox="1"/>
-          <p:nvPr/>
-        </p:nvSpPr>
-        <p:spPr>
-          <a:xfrm>
-            <a:off x="685800" y="3200400"/>
-            <a:ext cx="2103120" cy="457200"/>
-          </a:xfrm>
-          <a:prstGeom prst="rect">
-            <a:avLst/>
-          </a:prstGeom>
-          <a:noFill/>
-          <a:ln/>
-        </p:spPr>
-        <p:txBody>
-          <a:bodyPr wrap="square" lIns="0" tIns="0" rIns="0" bIns="0" rtlCol="0" anchor="ctr"/>
-          <a:lstStyle/>
-          <a:p>
-            <a:pPr indent="0" marL="0">
-              <a:buNone/>
+              <a:t>Cobertura &lt; 80 % o issues nuevos &gt; 0: el gate falla</a:t>
+            </a:r>
+            <a:endParaRPr lang="en-US" sz="1200" dirty="0"/>
+          </a:p>
+          <a:p>
+            <a:pPr marL="342900" indent="-342900">
+              <a:spcAft>
+                <a:spcPts val="800"/>
+              </a:spcAft>
+              <a:buSzPct val="100000"/>
+              <a:buChar char="•"/>
             </a:pPr>
             <a:r>
               <a:rPr lang="en-US" sz="1200" dirty="0">
                 <a:solidFill>
-                  <a:schemeClr val="accent5"/>
+                  <a:schemeClr val="tx1"/>
                 </a:solidFill>
                 <a:latin typeface="Calibri" pitchFamily="34" charset="0"/>
                 <a:ea typeface="Calibri" pitchFamily="34" charset="-122"/>
                 <a:cs typeface="Calibri" pitchFamily="34" charset="-120"/>
               </a:rPr>
-              <a:t>regla java:S1541 · Major</a:t>
+              <a:t>Complejidad total: ciclomática ≤ 250, cognitiva ≤ 120</a:t>
             </a:r>
             <a:endParaRPr lang="en-US" sz="1200" dirty="0"/>
           </a:p>
-        </p:txBody>
-      </p:sp>
-      <p:sp>
-        <p:nvSpPr>
-          <p:cNvPr id="9" name="Tarjeta Cognitiva"/>
-          <p:cNvSpPr/>
-          <p:nvPr/>
-        </p:nvSpPr>
-        <p:spPr>
-          <a:xfrm>
-            <a:off x="3291840" y="1371600"/>
-            <a:ext cx="2560320" cy="2468880"/>
-          </a:xfrm>
-          <a:prstGeom prst="roundRect">
-            <a:avLst>
-              <a:gd name="adj" fmla="val 4444"/>
-            </a:avLst>
-          </a:prstGeom>
-          <a:solidFill>
-            <a:schemeClr val="bg2"/>
-          </a:solidFill>
-          <a:ln w="12700">
-            <a:solidFill>
-              <a:schemeClr val="bg2"/>
-            </a:solidFill>
-            <a:prstDash val="solid"/>
-          </a:ln>
-        </p:spPr>
-      </p:sp>
-      <p:sp>
-        <p:nvSpPr>
-          <p:cNvPr id="10" name="Métrica Cognitiva"/>
-          <p:cNvSpPr txBox="1"/>
-          <p:nvPr/>
-        </p:nvSpPr>
-        <p:spPr>
-          <a:xfrm>
-            <a:off x="3520440" y="1508760"/>
-            <a:ext cx="2103120" cy="411480"/>
-          </a:xfrm>
-          <a:prstGeom prst="rect">
-            <a:avLst/>
-          </a:prstGeom>
-          <a:noFill/>
-          <a:ln/>
-        </p:spPr>
-        <p:txBody>
-          <a:bodyPr wrap="square" lIns="0" tIns="0" rIns="0" bIns="0" rtlCol="0" anchor="ctr"/>
-          <a:lstStyle/>
-          <a:p>
-            <a:pPr indent="0" marL="0">
-              <a:buNone/>
-            </a:pPr>
-            <a:r>
-              <a:rPr lang="en-US" sz="2000" b="1" dirty="0">
-                <a:solidFill>
-                  <a:schemeClr val="tx2"/>
+          <a:p>
+            <a:pPr marL="342900" indent="-342900">
+              <a:spcAft>
+                <a:spcPts val="800"/>
+              </a:spcAft>
+              <a:buSzPct val="100000"/>
+              <a:buChar char="•"/>
+            </a:pPr>
+            <a:r>
+              <a:rPr lang="en-US" sz="1200" dirty="0">
+                <a:solidFill>
+                  <a:schemeClr val="tx1"/>
                 </a:solidFill>
                 <a:latin typeface="Calibri" pitchFamily="34" charset="0"/>
                 <a:ea typeface="Calibri" pitchFamily="34" charset="-122"/>
                 <a:cs typeface="Calibri" pitchFamily="34" charset="-120"/>
               </a:rPr>
-              <a:t>Cognitiva</a:t>
-            </a:r>
-            <a:endParaRPr lang="en-US" sz="2000" dirty="0"/>
-          </a:p>
-        </p:txBody>
-      </p:sp>
-      <p:sp>
-        <p:nvSpPr>
-          <p:cNvPr id="11" name="Umbral Cognitiva"/>
-          <p:cNvSpPr txBox="1"/>
-          <p:nvPr/>
-        </p:nvSpPr>
-        <p:spPr>
-          <a:xfrm>
-            <a:off x="3520440" y="1965960"/>
-            <a:ext cx="2103120" cy="822960"/>
-          </a:xfrm>
-          <a:prstGeom prst="rect">
-            <a:avLst/>
-          </a:prstGeom>
-          <a:noFill/>
-          <a:ln/>
-        </p:spPr>
-        <p:txBody>
-          <a:bodyPr wrap="square" lIns="0" tIns="0" rIns="0" bIns="0" rtlCol="0" anchor="ctr"/>
-          <a:lstStyle/>
-          <a:p>
-            <a:pPr indent="0" marL="0">
-              <a:buNone/>
-            </a:pPr>
-            <a:r>
-              <a:rPr lang="en-US" sz="4400" b="1" dirty="0">
-                <a:solidFill>
-                  <a:schemeClr val="accent1"/>
-                </a:solidFill>
-                <a:latin typeface="Calibri" pitchFamily="34" charset="0"/>
-                <a:ea typeface="Calibri" pitchFamily="34" charset="-122"/>
-                <a:cs typeface="Calibri" pitchFamily="34" charset="-120"/>
-              </a:rPr>
-              <a:t>≤ 15</a:t>
-            </a:r>
-            <a:endParaRPr lang="en-US" sz="4400" dirty="0"/>
-          </a:p>
-        </p:txBody>
-      </p:sp>
-      <p:sp>
-        <p:nvSpPr>
-          <p:cNvPr id="12" name="Alcance Cognitiva"/>
-          <p:cNvSpPr txBox="1"/>
-          <p:nvPr/>
-        </p:nvSpPr>
-        <p:spPr>
-          <a:xfrm>
-            <a:off x="3520440" y="2834640"/>
-            <a:ext cx="2103120" cy="320040"/>
-          </a:xfrm>
-          <a:prstGeom prst="rect">
-            <a:avLst/>
-          </a:prstGeom>
-          <a:noFill/>
-          <a:ln/>
-        </p:spPr>
-        <p:txBody>
-          <a:bodyPr wrap="square" lIns="0" tIns="0" rIns="0" bIns="0" rtlCol="0" anchor="ctr"/>
-          <a:lstStyle/>
-          <a:p>
-            <a:pPr indent="0" marL="0">
-              <a:buNone/>
-            </a:pPr>
-            <a:r>
-              <a:rPr lang="en-US" sz="1400" dirty="0">
-                <a:solidFill>
-                  <a:schemeClr val="tx1"/>
-                </a:solidFill>
-                <a:latin typeface="Calibri" pitchFamily="34" charset="0"/>
-                <a:ea typeface="Calibri" pitchFamily="34" charset="-122"/>
-                <a:cs typeface="Calibri" pitchFamily="34" charset="-120"/>
-              </a:rPr>
-              <a:t>por método</a:t>
-            </a:r>
-            <a:endParaRPr lang="en-US" sz="1400" dirty="0"/>
-          </a:p>
-        </p:txBody>
-      </p:sp>
-      <p:sp>
-        <p:nvSpPr>
-          <p:cNvPr id="13" name="Fuente Cognitiva"/>
-          <p:cNvSpPr txBox="1"/>
-          <p:nvPr/>
-        </p:nvSpPr>
-        <p:spPr>
-          <a:xfrm>
-            <a:off x="3520440" y="3200400"/>
-            <a:ext cx="2103120" cy="457200"/>
-          </a:xfrm>
-          <a:prstGeom prst="rect">
-            <a:avLst/>
-          </a:prstGeom>
-          <a:noFill/>
-          <a:ln/>
-        </p:spPr>
-        <p:txBody>
-          <a:bodyPr wrap="square" lIns="0" tIns="0" rIns="0" bIns="0" rtlCol="0" anchor="ctr"/>
-          <a:lstStyle/>
-          <a:p>
-            <a:pPr indent="0" marL="0">
-              <a:buNone/>
-            </a:pPr>
-            <a:r>
-              <a:rPr lang="en-US" sz="1200" dirty="0">
-                <a:solidFill>
-                  <a:schemeClr val="accent5"/>
-                </a:solidFill>
-                <a:latin typeface="Calibri" pitchFamily="34" charset="0"/>
-                <a:ea typeface="Calibri" pitchFamily="34" charset="-122"/>
-                <a:cs typeface="Calibri" pitchFamily="34" charset="-120"/>
-              </a:rPr>
-              <a:t>regla java:S3776 · Critical</a:t>
+              <a:t>Asignación disponible durante la prueba del plan Team</a:t>
             </a:r>
             <a:endParaRPr lang="en-US" sz="1200" dirty="0"/>
-          </a:p>
-        </p:txBody>
-      </p:sp>
-      <p:sp>
-        <p:nvSpPr>
-          <p:cNvPr id="14" name="Tarjeta Cobertura"/>
-          <p:cNvSpPr/>
-          <p:nvPr/>
-        </p:nvSpPr>
-        <p:spPr>
-          <a:xfrm>
-            <a:off x="6126480" y="1371600"/>
-            <a:ext cx="2560320" cy="2468880"/>
-          </a:xfrm>
-          <a:prstGeom prst="roundRect">
-            <a:avLst>
-              <a:gd name="adj" fmla="val 4444"/>
-            </a:avLst>
-          </a:prstGeom>
-          <a:solidFill>
-            <a:schemeClr val="bg2"/>
-          </a:solidFill>
-          <a:ln w="12700">
-            <a:solidFill>
-              <a:schemeClr val="bg2"/>
-            </a:solidFill>
-            <a:prstDash val="solid"/>
-          </a:ln>
-        </p:spPr>
-      </p:sp>
-      <p:sp>
-        <p:nvSpPr>
-          <p:cNvPr id="15" name="Métrica Cobertura"/>
-          <p:cNvSpPr txBox="1"/>
-          <p:nvPr/>
-        </p:nvSpPr>
-        <p:spPr>
-          <a:xfrm>
-            <a:off x="6355080" y="1508760"/>
-            <a:ext cx="2103120" cy="411480"/>
-          </a:xfrm>
-          <a:prstGeom prst="rect">
-            <a:avLst/>
-          </a:prstGeom>
-          <a:noFill/>
-          <a:ln/>
-        </p:spPr>
-        <p:txBody>
-          <a:bodyPr wrap="square" lIns="0" tIns="0" rIns="0" bIns="0" rtlCol="0" anchor="ctr"/>
-          <a:lstStyle/>
-          <a:p>
-            <a:pPr indent="0" marL="0">
-              <a:buNone/>
-            </a:pPr>
-            <a:r>
-              <a:rPr lang="en-US" sz="2000" b="1" dirty="0">
-                <a:solidFill>
-                  <a:schemeClr val="tx2"/>
-                </a:solidFill>
-                <a:latin typeface="Calibri" pitchFamily="34" charset="0"/>
-                <a:ea typeface="Calibri" pitchFamily="34" charset="-122"/>
-                <a:cs typeface="Calibri" pitchFamily="34" charset="-120"/>
-              </a:rPr>
-              <a:t>Cobertura</a:t>
-            </a:r>
-            <a:endParaRPr lang="en-US" sz="2000" dirty="0"/>
-          </a:p>
-        </p:txBody>
-      </p:sp>
-      <p:sp>
-        <p:nvSpPr>
-          <p:cNvPr id="16" name="Umbral Cobertura"/>
-          <p:cNvSpPr txBox="1"/>
-          <p:nvPr/>
-        </p:nvSpPr>
-        <p:spPr>
-          <a:xfrm>
-            <a:off x="6355080" y="1965960"/>
-            <a:ext cx="2103120" cy="822960"/>
-          </a:xfrm>
-          <a:prstGeom prst="rect">
-            <a:avLst/>
-          </a:prstGeom>
-          <a:noFill/>
-          <a:ln/>
-        </p:spPr>
-        <p:txBody>
-          <a:bodyPr wrap="square" lIns="0" tIns="0" rIns="0" bIns="0" rtlCol="0" anchor="ctr"/>
-          <a:lstStyle/>
-          <a:p>
-            <a:pPr indent="0" marL="0">
-              <a:buNone/>
-            </a:pPr>
-            <a:r>
-              <a:rPr lang="en-US" sz="4400" b="1" dirty="0">
-                <a:solidFill>
-                  <a:schemeClr val="accent1"/>
-                </a:solidFill>
-                <a:latin typeface="Calibri" pitchFamily="34" charset="0"/>
-                <a:ea typeface="Calibri" pitchFamily="34" charset="-122"/>
-                <a:cs typeface="Calibri" pitchFamily="34" charset="-120"/>
-              </a:rPr>
-              <a:t>≥ 80 %</a:t>
-            </a:r>
-            <a:endParaRPr lang="en-US" sz="4400" dirty="0"/>
-          </a:p>
-        </p:txBody>
-      </p:sp>
-      <p:sp>
-        <p:nvSpPr>
-          <p:cNvPr id="17" name="Alcance Cobertura"/>
-          <p:cNvSpPr txBox="1"/>
-          <p:nvPr/>
-        </p:nvSpPr>
-        <p:spPr>
-          <a:xfrm>
-            <a:off x="6355080" y="2834640"/>
-            <a:ext cx="2103120" cy="320040"/>
-          </a:xfrm>
-          <a:prstGeom prst="rect">
-            <a:avLst/>
-          </a:prstGeom>
-          <a:noFill/>
-          <a:ln/>
-        </p:spPr>
-        <p:txBody>
-          <a:bodyPr wrap="square" lIns="0" tIns="0" rIns="0" bIns="0" rtlCol="0" anchor="ctr"/>
-          <a:lstStyle/>
-          <a:p>
-            <a:pPr indent="0" marL="0">
-              <a:buNone/>
-            </a:pPr>
-            <a:r>
-              <a:rPr lang="en-US" sz="1400" dirty="0">
-                <a:solidFill>
-                  <a:schemeClr val="tx1"/>
-                </a:solidFill>
-                <a:latin typeface="Calibri" pitchFamily="34" charset="0"/>
-                <a:ea typeface="Calibri" pitchFamily="34" charset="-122"/>
-                <a:cs typeface="Calibri" pitchFamily="34" charset="-120"/>
-              </a:rPr>
-              <a:t>total y código nuevo</a:t>
-            </a:r>
-            <a:endParaRPr lang="en-US" sz="1400" dirty="0"/>
-          </a:p>
-        </p:txBody>
-      </p:sp>
-      <p:sp>
-        <p:nvSpPr>
-          <p:cNvPr id="18" name="Fuente Cobertura"/>
-          <p:cNvSpPr txBox="1"/>
-          <p:nvPr/>
-        </p:nvSpPr>
-        <p:spPr>
-          <a:xfrm>
-            <a:off x="6355080" y="3200400"/>
-            <a:ext cx="2103120" cy="457200"/>
-          </a:xfrm>
-          <a:prstGeom prst="rect">
-            <a:avLst/>
-          </a:prstGeom>
-          <a:noFill/>
-          <a:ln/>
-        </p:spPr>
-        <p:txBody>
-          <a:bodyPr wrap="square" lIns="0" tIns="0" rIns="0" bIns="0" rtlCol="0" anchor="ctr"/>
-          <a:lstStyle/>
-          <a:p>
-            <a:pPr indent="0" marL="0">
-              <a:buNone/>
-            </a:pPr>
-            <a:r>
-              <a:rPr lang="en-US" sz="1200" dirty="0">
-                <a:solidFill>
-                  <a:schemeClr val="accent5"/>
-                </a:solidFill>
-                <a:latin typeface="Calibri" pitchFamily="34" charset="0"/>
-                <a:ea typeface="Calibri" pitchFamily="34" charset="-122"/>
-                <a:cs typeface="Calibri" pitchFamily="34" charset="-120"/>
-              </a:rPr>
-              <a:t>condición del Quality Gate</a:t>
-            </a:r>
-            <a:endParaRPr lang="en-US" sz="1200" dirty="0"/>
-          </a:p>
-        </p:txBody>
-      </p:sp>
-      <p:sp>
-        <p:nvSpPr>
-          <p:cNvPr id="19" name="Resumen perfil"/>
-          <p:cNvSpPr txBox="1"/>
-          <p:nvPr/>
-        </p:nvSpPr>
-        <p:spPr>
-          <a:xfrm>
-            <a:off x="457200" y="4114800"/>
-            <a:ext cx="8229600" cy="457200"/>
-          </a:xfrm>
-          <a:prstGeom prst="rect">
-            <a:avLst/>
-          </a:prstGeom>
-          <a:noFill/>
-          <a:ln/>
-        </p:spPr>
-        <p:txBody>
-          <a:bodyPr wrap="square" lIns="0" tIns="0" rIns="0" bIns="0" rtlCol="0" anchor="ctr"/>
-          <a:lstStyle/>
-          <a:p>
-            <a:pPr indent="0" marL="0">
-              <a:buNone/>
-            </a:pPr>
-            <a:r>
-              <a:rPr lang="en-US" sz="1600" dirty="0">
-                <a:solidFill>
-                  <a:schemeClr val="tx1"/>
-                </a:solidFill>
-                <a:latin typeface="Calibri" pitchFamily="34" charset="0"/>
-                <a:ea typeface="Calibri" pitchFamily="34" charset="-122"/>
-                <a:cs typeface="Calibri" pitchFamily="34" charset="-120"/>
-              </a:rPr>
-              <a:t>Perfil “Calculadora Java Profile” = copia de Sonar way comprehensive + reglas de complejidad con umbral propio.</a:t>
-            </a:r>
-            <a:endParaRPr lang="en-US" sz="1600" dirty="0"/>
           </a:p>
         </p:txBody>
       </p:sp>
@@ -4614,7 +4867,7 @@
                   <a:schemeClr val="tx2"/>
                 </a:solidFill>
               </a:rPr>
-              <a:t>El profile detecta, el gate bloquea</a:t>
+              <a:t>Quality Profile y métricas</a:t>
             </a:r>
             <a:endParaRPr lang="en-US" sz="3200" dirty="0"/>
           </a:p>
@@ -4622,18 +4875,18 @@
       </p:sp>
       <p:sp>
         <p:nvSpPr>
-          <p:cNvPr id="4" name="Etapa Quality Profile"/>
+          <p:cNvPr id="4" name="Tarjeta Ciclomática"/>
           <p:cNvSpPr/>
           <p:nvPr/>
         </p:nvSpPr>
         <p:spPr>
           <a:xfrm>
-            <a:off x="457200" y="1554480"/>
-            <a:ext cx="2377440" cy="2194560"/>
+            <a:off x="457200" y="1371600"/>
+            <a:ext cx="2560320" cy="2468880"/>
           </a:xfrm>
           <a:prstGeom prst="roundRect">
             <a:avLst>
-              <a:gd name="adj" fmla="val 5000"/>
+              <a:gd name="adj" fmla="val 4444"/>
             </a:avLst>
           </a:prstGeom>
           <a:solidFill>
@@ -4649,14 +4902,14 @@
       </p:sp>
       <p:sp>
         <p:nvSpPr>
-          <p:cNvPr id="5" name="Etapa título 1"/>
+          <p:cNvPr id="5" name="Métrica Ciclomática"/>
           <p:cNvSpPr txBox="1"/>
           <p:nvPr/>
         </p:nvSpPr>
         <p:spPr>
           <a:xfrm>
-            <a:off x="640080" y="1737360"/>
-            <a:ext cx="2011680" cy="411480"/>
+            <a:off x="685800" y="1508760"/>
+            <a:ext cx="2103120" cy="411480"/>
           </a:xfrm>
           <a:prstGeom prst="rect">
             <a:avLst/>
@@ -4668,7 +4921,7 @@
           <a:bodyPr wrap="square" lIns="0" tIns="0" rIns="0" bIns="0" rtlCol="0" anchor="ctr"/>
           <a:lstStyle/>
           <a:p>
-            <a:pPr algn="ctr" indent="0" marL="0">
+            <a:pPr indent="0" marL="0">
               <a:buNone/>
             </a:pPr>
             <a:r>
@@ -4680,7 +4933,7 @@
                 <a:ea typeface="Calibri" pitchFamily="34" charset="-122"/>
                 <a:cs typeface="Calibri" pitchFamily="34" charset="-120"/>
               </a:rPr>
-              <a:t>Quality Profile</a:t>
+              <a:t>Ciclomática</a:t>
             </a:r>
             <a:endParaRPr lang="en-US" sz="2000" dirty="0"/>
           </a:p>
@@ -4688,14 +4941,14 @@
       </p:sp>
       <p:sp>
         <p:nvSpPr>
-          <p:cNvPr id="6" name="Etapa verbo 1"/>
+          <p:cNvPr id="6" name="Umbral Ciclomática"/>
           <p:cNvSpPr txBox="1"/>
           <p:nvPr/>
         </p:nvSpPr>
         <p:spPr>
           <a:xfrm>
-            <a:off x="640080" y="2194560"/>
-            <a:ext cx="2011680" cy="274320"/>
+            <a:off x="685800" y="1965960"/>
+            <a:ext cx="2103120" cy="822960"/>
           </a:xfrm>
           <a:prstGeom prst="rect">
             <a:avLst/>
@@ -4707,34 +4960,34 @@
           <a:bodyPr wrap="square" lIns="0" tIns="0" rIns="0" bIns="0" rtlCol="0" anchor="ctr"/>
           <a:lstStyle/>
           <a:p>
-            <a:pPr algn="ctr" indent="0" marL="0">
+            <a:pPr indent="0" marL="0">
               <a:buNone/>
             </a:pPr>
             <a:r>
-              <a:rPr lang="en-US" sz="1200" b="1" dirty="0">
-                <a:solidFill>
-                  <a:schemeClr val="accent5"/>
+              <a:rPr lang="en-US" sz="4400" b="1" dirty="0">
+                <a:solidFill>
+                  <a:schemeClr val="accent1"/>
                 </a:solidFill>
                 <a:latin typeface="Calibri" pitchFamily="34" charset="0"/>
                 <a:ea typeface="Calibri" pitchFamily="34" charset="-122"/>
                 <a:cs typeface="Calibri" pitchFamily="34" charset="-120"/>
               </a:rPr>
-              <a:t>DETECTA</a:t>
-            </a:r>
-            <a:endParaRPr lang="en-US" sz="1200" dirty="0"/>
-          </a:p>
-        </p:txBody>
-      </p:sp>
-      <p:sp>
-        <p:nvSpPr>
-          <p:cNvPr id="7" name="Etapa detalle 1"/>
+              <a:t>≤ 10</a:t>
+            </a:r>
+            <a:endParaRPr lang="en-US" sz="4400" dirty="0"/>
+          </a:p>
+        </p:txBody>
+      </p:sp>
+      <p:sp>
+        <p:nvSpPr>
+          <p:cNvPr id="7" name="Alcance Ciclomática"/>
           <p:cNvSpPr txBox="1"/>
           <p:nvPr/>
         </p:nvSpPr>
         <p:spPr>
           <a:xfrm>
-            <a:off x="685800" y="2606040"/>
-            <a:ext cx="1920240" cy="914400"/>
+            <a:off x="685800" y="2834640"/>
+            <a:ext cx="2103120" cy="320040"/>
           </a:xfrm>
           <a:prstGeom prst="rect">
             <a:avLst/>
@@ -4743,10 +4996,10 @@
           <a:ln/>
         </p:spPr>
         <p:txBody>
-          <a:bodyPr wrap="square" lIns="0" tIns="0" rIns="0" bIns="0" rtlCol="0" anchor="t"/>
-          <a:lstStyle/>
-          <a:p>
-            <a:pPr algn="ctr" indent="0" marL="0">
+          <a:bodyPr wrap="square" lIns="0" tIns="0" rIns="0" bIns="0" rtlCol="0" anchor="ctr"/>
+          <a:lstStyle/>
+          <a:p>
+            <a:pPr indent="0" marL="0">
               <a:buNone/>
             </a:pPr>
             <a:r>
@@ -4758,7 +5011,7 @@
                 <a:ea typeface="Calibri" pitchFamily="34" charset="-122"/>
                 <a:cs typeface="Calibri" pitchFamily="34" charset="-120"/>
               </a:rPr>
-              <a:t>Método con ciclomática &gt; 10 o cognitiva &gt; 15</a:t>
+              <a:t>por método</a:t>
             </a:r>
             <a:endParaRPr lang="en-US" sz="1400" dirty="0"/>
           </a:p>
@@ -4766,14 +5019,14 @@
       </p:sp>
       <p:sp>
         <p:nvSpPr>
-          <p:cNvPr id="8" name="Flecha etapa 1"/>
+          <p:cNvPr id="8" name="Fuente Ciclomática"/>
           <p:cNvSpPr txBox="1"/>
           <p:nvPr/>
         </p:nvSpPr>
         <p:spPr>
           <a:xfrm>
-            <a:off x="2834640" y="2377440"/>
-            <a:ext cx="548640" cy="457200"/>
+            <a:off x="685800" y="3200400"/>
+            <a:ext cx="2103120" cy="457200"/>
           </a:xfrm>
           <a:prstGeom prst="rect">
             <a:avLst/>
@@ -4785,11 +5038,11 @@
           <a:bodyPr wrap="square" lIns="0" tIns="0" rIns="0" bIns="0" rtlCol="0" anchor="ctr"/>
           <a:lstStyle/>
           <a:p>
-            <a:pPr algn="ctr" indent="0" marL="0">
+            <a:pPr indent="0" marL="0">
               <a:buNone/>
             </a:pPr>
             <a:r>
-              <a:rPr lang="en-US" sz="2800" b="1" dirty="0">
+              <a:rPr lang="en-US" sz="1200" dirty="0">
                 <a:solidFill>
                   <a:schemeClr val="accent5"/>
                 </a:solidFill>
@@ -4797,26 +5050,26 @@
                 <a:ea typeface="Calibri" pitchFamily="34" charset="-122"/>
                 <a:cs typeface="Calibri" pitchFamily="34" charset="-120"/>
               </a:rPr>
-              <a:t>→</a:t>
-            </a:r>
-            <a:endParaRPr lang="en-US" sz="2800" dirty="0"/>
-          </a:p>
-        </p:txBody>
-      </p:sp>
-      <p:sp>
-        <p:nvSpPr>
-          <p:cNvPr id="9" name="Etapa Issue nuevo"/>
+              <a:t>regla java:S1541 · Major</a:t>
+            </a:r>
+            <a:endParaRPr lang="en-US" sz="1200" dirty="0"/>
+          </a:p>
+        </p:txBody>
+      </p:sp>
+      <p:sp>
+        <p:nvSpPr>
+          <p:cNvPr id="9" name="Tarjeta Cognitiva"/>
           <p:cNvSpPr/>
           <p:nvPr/>
         </p:nvSpPr>
         <p:spPr>
           <a:xfrm>
-            <a:off x="3383280" y="1554480"/>
-            <a:ext cx="2377440" cy="2194560"/>
+            <a:off x="3291840" y="1371600"/>
+            <a:ext cx="2560320" cy="2468880"/>
           </a:xfrm>
           <a:prstGeom prst="roundRect">
             <a:avLst>
-              <a:gd name="adj" fmla="val 5000"/>
+              <a:gd name="adj" fmla="val 4444"/>
             </a:avLst>
           </a:prstGeom>
           <a:solidFill>
@@ -4832,14 +5085,14 @@
       </p:sp>
       <p:sp>
         <p:nvSpPr>
-          <p:cNvPr id="10" name="Etapa título 2"/>
+          <p:cNvPr id="10" name="Métrica Cognitiva"/>
           <p:cNvSpPr txBox="1"/>
           <p:nvPr/>
         </p:nvSpPr>
         <p:spPr>
           <a:xfrm>
-            <a:off x="3566160" y="1737360"/>
-            <a:ext cx="2011680" cy="411480"/>
+            <a:off x="3520440" y="1508760"/>
+            <a:ext cx="2103120" cy="411480"/>
           </a:xfrm>
           <a:prstGeom prst="rect">
             <a:avLst/>
@@ -4851,19 +5104,19 @@
           <a:bodyPr wrap="square" lIns="0" tIns="0" rIns="0" bIns="0" rtlCol="0" anchor="ctr"/>
           <a:lstStyle/>
           <a:p>
-            <a:pPr algn="ctr" indent="0" marL="0">
+            <a:pPr indent="0" marL="0">
               <a:buNone/>
             </a:pPr>
             <a:r>
               <a:rPr lang="en-US" sz="2000" b="1" dirty="0">
                 <a:solidFill>
-                  <a:srgbClr val="A8680A"/>
+                  <a:schemeClr val="tx2"/>
                 </a:solidFill>
                 <a:latin typeface="Calibri" pitchFamily="34" charset="0"/>
                 <a:ea typeface="Calibri" pitchFamily="34" charset="-122"/>
                 <a:cs typeface="Calibri" pitchFamily="34" charset="-120"/>
               </a:rPr>
-              <a:t>Issue nuevo</a:t>
+              <a:t>Cognitiva</a:t>
             </a:r>
             <a:endParaRPr lang="en-US" sz="2000" dirty="0"/>
           </a:p>
@@ -4871,14 +5124,14 @@
       </p:sp>
       <p:sp>
         <p:nvSpPr>
-          <p:cNvPr id="11" name="Etapa verbo 2"/>
+          <p:cNvPr id="11" name="Umbral Cognitiva"/>
           <p:cNvSpPr txBox="1"/>
           <p:nvPr/>
         </p:nvSpPr>
         <p:spPr>
           <a:xfrm>
-            <a:off x="3566160" y="2194560"/>
-            <a:ext cx="2011680" cy="274320"/>
+            <a:off x="3520440" y="1965960"/>
+            <a:ext cx="2103120" cy="822960"/>
           </a:xfrm>
           <a:prstGeom prst="rect">
             <a:avLst/>
@@ -4890,34 +5143,34 @@
           <a:bodyPr wrap="square" lIns="0" tIns="0" rIns="0" bIns="0" rtlCol="0" anchor="ctr"/>
           <a:lstStyle/>
           <a:p>
-            <a:pPr algn="ctr" indent="0" marL="0">
+            <a:pPr indent="0" marL="0">
               <a:buNone/>
             </a:pPr>
             <a:r>
-              <a:rPr lang="en-US" sz="1200" b="1" dirty="0">
-                <a:solidFill>
-                  <a:schemeClr val="accent5"/>
+              <a:rPr lang="en-US" sz="4400" b="1" dirty="0">
+                <a:solidFill>
+                  <a:schemeClr val="accent1"/>
                 </a:solidFill>
                 <a:latin typeface="Calibri" pitchFamily="34" charset="0"/>
                 <a:ea typeface="Calibri" pitchFamily="34" charset="-122"/>
                 <a:cs typeface="Calibri" pitchFamily="34" charset="-120"/>
               </a:rPr>
-              <a:t>SE REPORTA</a:t>
-            </a:r>
-            <a:endParaRPr lang="en-US" sz="1200" dirty="0"/>
-          </a:p>
-        </p:txBody>
-      </p:sp>
-      <p:sp>
-        <p:nvSpPr>
-          <p:cNvPr id="12" name="Etapa detalle 2"/>
+              <a:t>≤ 15</a:t>
+            </a:r>
+            <a:endParaRPr lang="en-US" sz="4400" dirty="0"/>
+          </a:p>
+        </p:txBody>
+      </p:sp>
+      <p:sp>
+        <p:nvSpPr>
+          <p:cNvPr id="12" name="Alcance Cognitiva"/>
           <p:cNvSpPr txBox="1"/>
           <p:nvPr/>
         </p:nvSpPr>
         <p:spPr>
           <a:xfrm>
-            <a:off x="3611880" y="2606040"/>
-            <a:ext cx="1920240" cy="914400"/>
+            <a:off x="3520440" y="2834640"/>
+            <a:ext cx="2103120" cy="320040"/>
           </a:xfrm>
           <a:prstGeom prst="rect">
             <a:avLst/>
@@ -4926,10 +5179,10 @@
           <a:ln/>
         </p:spPr>
         <p:txBody>
-          <a:bodyPr wrap="square" lIns="0" tIns="0" rIns="0" bIns="0" rtlCol="0" anchor="t"/>
-          <a:lstStyle/>
-          <a:p>
-            <a:pPr algn="ctr" indent="0" marL="0">
+          <a:bodyPr wrap="square" lIns="0" tIns="0" rIns="0" bIns="0" rtlCol="0" anchor="ctr"/>
+          <a:lstStyle/>
+          <a:p>
+            <a:pPr indent="0" marL="0">
               <a:buNone/>
             </a:pPr>
             <a:r>
@@ -4941,7 +5194,7 @@
                 <a:ea typeface="Calibri" pitchFamily="34" charset="-122"/>
                 <a:cs typeface="Calibri" pitchFamily="34" charset="-120"/>
               </a:rPr>
-              <a:t>Incidencia en el código nuevo del análisis</a:t>
+              <a:t>por método</a:t>
             </a:r>
             <a:endParaRPr lang="en-US" sz="1400" dirty="0"/>
           </a:p>
@@ -4949,14 +5202,14 @@
       </p:sp>
       <p:sp>
         <p:nvSpPr>
-          <p:cNvPr id="13" name="Flecha etapa 2"/>
+          <p:cNvPr id="13" name="Fuente Cognitiva"/>
           <p:cNvSpPr txBox="1"/>
           <p:nvPr/>
         </p:nvSpPr>
         <p:spPr>
           <a:xfrm>
-            <a:off x="5760720" y="2377440"/>
-            <a:ext cx="548640" cy="457200"/>
+            <a:off x="3520440" y="3200400"/>
+            <a:ext cx="2103120" cy="457200"/>
           </a:xfrm>
           <a:prstGeom prst="rect">
             <a:avLst/>
@@ -4968,11 +5221,11 @@
           <a:bodyPr wrap="square" lIns="0" tIns="0" rIns="0" bIns="0" rtlCol="0" anchor="ctr"/>
           <a:lstStyle/>
           <a:p>
-            <a:pPr algn="ctr" indent="0" marL="0">
+            <a:pPr indent="0" marL="0">
               <a:buNone/>
             </a:pPr>
             <a:r>
-              <a:rPr lang="en-US" sz="2800" b="1" dirty="0">
+              <a:rPr lang="en-US" sz="1200" dirty="0">
                 <a:solidFill>
                   <a:schemeClr val="accent5"/>
                 </a:solidFill>
@@ -4980,34 +5233,34 @@
                 <a:ea typeface="Calibri" pitchFamily="34" charset="-122"/>
                 <a:cs typeface="Calibri" pitchFamily="34" charset="-120"/>
               </a:rPr>
-              <a:t>→</a:t>
-            </a:r>
-            <a:endParaRPr lang="en-US" sz="2800" dirty="0"/>
-          </a:p>
-        </p:txBody>
-      </p:sp>
-      <p:sp>
-        <p:nvSpPr>
-          <p:cNvPr id="14" name="Etapa Quality Gate"/>
+              <a:t>regla java:S3776 · Critical</a:t>
+            </a:r>
+            <a:endParaRPr lang="en-US" sz="1200" dirty="0"/>
+          </a:p>
+        </p:txBody>
+      </p:sp>
+      <p:sp>
+        <p:nvSpPr>
+          <p:cNvPr id="14" name="Tarjeta Cobertura"/>
           <p:cNvSpPr/>
           <p:nvPr/>
         </p:nvSpPr>
         <p:spPr>
           <a:xfrm>
-            <a:off x="6309360" y="1554480"/>
-            <a:ext cx="2377440" cy="2194560"/>
+            <a:off x="6126480" y="1371600"/>
+            <a:ext cx="2560320" cy="2468880"/>
           </a:xfrm>
           <a:prstGeom prst="roundRect">
             <a:avLst>
-              <a:gd name="adj" fmla="val 5000"/>
+              <a:gd name="adj" fmla="val 4444"/>
             </a:avLst>
           </a:prstGeom>
           <a:solidFill>
-            <a:schemeClr val="accent1"/>
+            <a:schemeClr val="bg2"/>
           </a:solidFill>
           <a:ln w="12700">
             <a:solidFill>
-              <a:schemeClr val="accent1"/>
+              <a:schemeClr val="bg2"/>
             </a:solidFill>
             <a:prstDash val="solid"/>
           </a:ln>
@@ -5015,14 +5268,14 @@
       </p:sp>
       <p:sp>
         <p:nvSpPr>
-          <p:cNvPr id="15" name="Etapa título 3"/>
+          <p:cNvPr id="15" name="Métrica Cobertura"/>
           <p:cNvSpPr txBox="1"/>
           <p:nvPr/>
         </p:nvSpPr>
         <p:spPr>
           <a:xfrm>
-            <a:off x="6492240" y="1737360"/>
-            <a:ext cx="2011680" cy="411480"/>
+            <a:off x="6355080" y="1508760"/>
+            <a:ext cx="2103120" cy="411480"/>
           </a:xfrm>
           <a:prstGeom prst="rect">
             <a:avLst/>
@@ -5034,19 +5287,19 @@
           <a:bodyPr wrap="square" lIns="0" tIns="0" rIns="0" bIns="0" rtlCol="0" anchor="ctr"/>
           <a:lstStyle/>
           <a:p>
-            <a:pPr algn="ctr" indent="0" marL="0">
+            <a:pPr indent="0" marL="0">
               <a:buNone/>
             </a:pPr>
             <a:r>
               <a:rPr lang="en-US" sz="2000" b="1" dirty="0">
                 <a:solidFill>
-                  <a:schemeClr val="bg1"/>
+                  <a:schemeClr val="tx2"/>
                 </a:solidFill>
                 <a:latin typeface="Calibri" pitchFamily="34" charset="0"/>
                 <a:ea typeface="Calibri" pitchFamily="34" charset="-122"/>
                 <a:cs typeface="Calibri" pitchFamily="34" charset="-120"/>
               </a:rPr>
-              <a:t>Quality Gate</a:t>
+              <a:t>Cobertura</a:t>
             </a:r>
             <a:endParaRPr lang="en-US" sz="2000" dirty="0"/>
           </a:p>
@@ -5054,14 +5307,14 @@
       </p:sp>
       <p:sp>
         <p:nvSpPr>
-          <p:cNvPr id="16" name="Etapa verbo 3"/>
+          <p:cNvPr id="16" name="Umbral Cobertura"/>
           <p:cNvSpPr txBox="1"/>
           <p:nvPr/>
         </p:nvSpPr>
         <p:spPr>
           <a:xfrm>
-            <a:off x="6492240" y="2194560"/>
-            <a:ext cx="2011680" cy="274320"/>
+            <a:off x="6355080" y="1965960"/>
+            <a:ext cx="2103120" cy="822960"/>
           </a:xfrm>
           <a:prstGeom prst="rect">
             <a:avLst/>
@@ -5073,34 +5326,34 @@
           <a:bodyPr wrap="square" lIns="0" tIns="0" rIns="0" bIns="0" rtlCol="0" anchor="ctr"/>
           <a:lstStyle/>
           <a:p>
-            <a:pPr algn="ctr" indent="0" marL="0">
+            <a:pPr indent="0" marL="0">
               <a:buNone/>
             </a:pPr>
             <a:r>
-              <a:rPr lang="en-US" sz="1200" b="1" dirty="0">
-                <a:solidFill>
-                  <a:srgbClr val="C9DDEE"/>
+              <a:rPr lang="en-US" sz="4400" b="1" dirty="0">
+                <a:solidFill>
+                  <a:schemeClr val="accent1"/>
                 </a:solidFill>
                 <a:latin typeface="Calibri" pitchFamily="34" charset="0"/>
                 <a:ea typeface="Calibri" pitchFamily="34" charset="-122"/>
                 <a:cs typeface="Calibri" pitchFamily="34" charset="-120"/>
               </a:rPr>
-              <a:t>BLOQUEA</a:t>
-            </a:r>
-            <a:endParaRPr lang="en-US" sz="1200" dirty="0"/>
-          </a:p>
-        </p:txBody>
-      </p:sp>
-      <p:sp>
-        <p:nvSpPr>
-          <p:cNvPr id="17" name="Etapa detalle 3"/>
+              <a:t>≥ 80 %</a:t>
+            </a:r>
+            <a:endParaRPr lang="en-US" sz="4400" dirty="0"/>
+          </a:p>
+        </p:txBody>
+      </p:sp>
+      <p:sp>
+        <p:nvSpPr>
+          <p:cNvPr id="17" name="Alcance Cobertura"/>
           <p:cNvSpPr txBox="1"/>
           <p:nvPr/>
         </p:nvSpPr>
         <p:spPr>
           <a:xfrm>
-            <a:off x="6537960" y="2606040"/>
-            <a:ext cx="1920240" cy="914400"/>
+            <a:off x="6355080" y="2834640"/>
+            <a:ext cx="2103120" cy="320040"/>
           </a:xfrm>
           <a:prstGeom prst="rect">
             <a:avLst/>
@@ -5109,22 +5362,22 @@
           <a:ln/>
         </p:spPr>
         <p:txBody>
-          <a:bodyPr wrap="square" lIns="0" tIns="0" rIns="0" bIns="0" rtlCol="0" anchor="t"/>
-          <a:lstStyle/>
-          <a:p>
-            <a:pPr algn="ctr" indent="0" marL="0">
+          <a:bodyPr wrap="square" lIns="0" tIns="0" rIns="0" bIns="0" rtlCol="0" anchor="ctr"/>
+          <a:lstStyle/>
+          <a:p>
+            <a:pPr indent="0" marL="0">
               <a:buNone/>
             </a:pPr>
             <a:r>
               <a:rPr lang="en-US" sz="1400" dirty="0">
                 <a:solidFill>
-                  <a:schemeClr val="bg1"/>
+                  <a:schemeClr val="tx1"/>
                 </a:solidFill>
                 <a:latin typeface="Calibri" pitchFamily="34" charset="0"/>
                 <a:ea typeface="Calibri" pitchFamily="34" charset="-122"/>
                 <a:cs typeface="Calibri" pitchFamily="34" charset="-120"/>
               </a:rPr>
-              <a:t>new_violations = 0 + topes globales 250 / 120 / 80 %</a:t>
+              <a:t>total y código nuevo</a:t>
             </a:r>
             <a:endParaRPr lang="en-US" sz="1400" dirty="0"/>
           </a:p>
@@ -5132,14 +5385,14 @@
       </p:sp>
       <p:sp>
         <p:nvSpPr>
-          <p:cNvPr id="18" name="Conclusión gate-profile"/>
+          <p:cNvPr id="18" name="Fuente Cobertura"/>
           <p:cNvSpPr txBox="1"/>
           <p:nvPr/>
         </p:nvSpPr>
         <p:spPr>
           <a:xfrm>
-            <a:off x="457200" y="4069080"/>
-            <a:ext cx="8229600" cy="365760"/>
+            <a:off x="6355080" y="3200400"/>
+            <a:ext cx="2103120" cy="457200"/>
           </a:xfrm>
           <a:prstGeom prst="rect">
             <a:avLst/>
@@ -5155,15 +5408,54 @@
               <a:buNone/>
             </a:pPr>
             <a:r>
-              <a:rPr lang="en-US" sz="1600" b="1" dirty="0">
-                <a:solidFill>
-                  <a:schemeClr val="tx2"/>
+              <a:rPr lang="en-US" sz="1200" dirty="0">
+                <a:solidFill>
+                  <a:schemeClr val="accent5"/>
                 </a:solidFill>
                 <a:latin typeface="Calibri" pitchFamily="34" charset="0"/>
                 <a:ea typeface="Calibri" pitchFamily="34" charset="-122"/>
                 <a:cs typeface="Calibri" pitchFamily="34" charset="-120"/>
               </a:rPr>
-              <a:t>Así la complejidad se controla método a método, y el total del sistema no crece sin control.</a:t>
+              <a:t>condición del Quality Gate</a:t>
+            </a:r>
+            <a:endParaRPr lang="en-US" sz="1200" dirty="0"/>
+          </a:p>
+        </p:txBody>
+      </p:sp>
+      <p:sp>
+        <p:nvSpPr>
+          <p:cNvPr id="19" name="Resumen perfil"/>
+          <p:cNvSpPr txBox="1"/>
+          <p:nvPr/>
+        </p:nvSpPr>
+        <p:spPr>
+          <a:xfrm>
+            <a:off x="457200" y="4114800"/>
+            <a:ext cx="8229600" cy="457200"/>
+          </a:xfrm>
+          <a:prstGeom prst="rect">
+            <a:avLst/>
+          </a:prstGeom>
+          <a:noFill/>
+          <a:ln/>
+        </p:spPr>
+        <p:txBody>
+          <a:bodyPr wrap="square" lIns="0" tIns="0" rIns="0" bIns="0" rtlCol="0" anchor="ctr"/>
+          <a:lstStyle/>
+          <a:p>
+            <a:pPr indent="0" marL="0">
+              <a:buNone/>
+            </a:pPr>
+            <a:r>
+              <a:rPr lang="en-US" sz="1600" dirty="0">
+                <a:solidFill>
+                  <a:schemeClr val="tx1"/>
+                </a:solidFill>
+                <a:latin typeface="Calibri" pitchFamily="34" charset="0"/>
+                <a:ea typeface="Calibri" pitchFamily="34" charset="-122"/>
+                <a:cs typeface="Calibri" pitchFamily="34" charset="-120"/>
+              </a:rPr>
+              <a:t>Perfil “Calculadora Java Profile” = copia de Sonar way comprehensive + reglas de complejidad con umbral propio.</a:t>
             </a:r>
             <a:endParaRPr lang="en-US" sz="1600" dirty="0"/>
           </a:p>
@@ -5271,49 +5563,46 @@
                   <a:schemeClr val="tx2"/>
                 </a:solidFill>
               </a:rPr>
-              <a:t>De dónde salen 250 y 120</a:t>
+              <a:t>Quality Profile en SonarCloud</a:t>
             </a:r>
             <a:endParaRPr lang="en-US" sz="3200" dirty="0"/>
           </a:p>
         </p:txBody>
       </p:sp>
-      <p:sp>
-        <p:nvSpPr>
-          <p:cNvPr id="4" name="Tarjeta cal 1"/>
-          <p:cNvSpPr/>
-          <p:nvPr/>
-        </p:nvSpPr>
-        <p:spPr>
-          <a:xfrm>
-            <a:off x="457200" y="1371600"/>
-            <a:ext cx="2560320" cy="1737360"/>
-          </a:xfrm>
-          <a:prstGeom prst="roundRect">
-            <a:avLst>
-              <a:gd name="adj" fmla="val 6316"/>
-            </a:avLst>
-          </a:prstGeom>
-          <a:solidFill>
-            <a:schemeClr val="bg2"/>
-          </a:solidFill>
-          <a:ln w="12700">
-            <a:solidFill>
-              <a:schemeClr val="bg2"/>
-            </a:solidFill>
-            <a:prstDash val="solid"/>
-          </a:ln>
-        </p:spPr>
-      </p:sp>
-      <p:sp>
-        <p:nvSpPr>
-          <p:cNvPr id="5" name="Cifra cal 1"/>
+      <p:pic>
+        <p:nvPicPr>
+          <p:cNvPr id="4" name="Image 0" descr="Calculadora Java Profile">    </p:cNvPr>
+          <p:cNvPicPr>
+            <a:picLocks noChangeAspect="1"/>
+          </p:cNvPicPr>
+          <p:nvPr/>
+        </p:nvPicPr>
+        <p:blipFill>
+          <a:blip r:embed="rId1"/>
+          <a:stretch>
+            <a:fillRect/>
+          </a:stretch>
+        </p:blipFill>
+        <p:spPr>
+          <a:xfrm>
+            <a:off x="457200" y="1234440"/>
+            <a:ext cx="5120640" cy="3332885"/>
+          </a:xfrm>
+          <a:prstGeom prst="rect">
+            <a:avLst/>
+          </a:prstGeom>
+        </p:spPr>
+      </p:pic>
+      <p:sp>
+        <p:nvSpPr>
+          <p:cNvPr id="5" name="Pie perfil"/>
           <p:cNvSpPr txBox="1"/>
           <p:nvPr/>
         </p:nvSpPr>
         <p:spPr>
           <a:xfrm>
-            <a:off x="640080" y="1463040"/>
-            <a:ext cx="2194560" cy="868680"/>
+            <a:off x="457200" y="4613045"/>
+            <a:ext cx="5120640" cy="274320"/>
           </a:xfrm>
           <a:prstGeom prst="rect">
             <a:avLst/>
@@ -5322,286 +5611,37 @@
           <a:ln/>
         </p:spPr>
         <p:txBody>
-          <a:bodyPr wrap="square" lIns="0" tIns="0" rIns="0" bIns="0" rtlCol="0" anchor="ctr"/>
+          <a:bodyPr wrap="square" lIns="0" tIns="0" rIns="0" bIns="0" rtlCol="0" anchor="t"/>
           <a:lstStyle/>
           <a:p>
             <a:pPr algn="ctr" indent="0" marL="0">
               <a:buNone/>
             </a:pPr>
             <a:r>
-              <a:rPr lang="en-US" sz="4800" b="1" dirty="0">
-                <a:solidFill>
-                  <a:schemeClr val="accent1"/>
+              <a:rPr lang="en-US" sz="1200" dirty="0">
+                <a:solidFill>
+                  <a:schemeClr val="accent5"/>
                 </a:solidFill>
                 <a:latin typeface="Calibri" pitchFamily="34" charset="0"/>
                 <a:ea typeface="Calibri" pitchFamily="34" charset="-122"/>
                 <a:cs typeface="Calibri" pitchFamily="34" charset="-120"/>
               </a:rPr>
-              <a:t>136</a:t>
-            </a:r>
-            <a:endParaRPr lang="en-US" sz="4800" dirty="0"/>
-          </a:p>
-        </p:txBody>
-      </p:sp>
-      <p:sp>
-        <p:nvSpPr>
-          <p:cNvPr id="6" name="Etiqueta cal 1"/>
+              <a:t>“Calculadora Java Profile”: 660 reglas activas, proyecto calidad-software asociado</a:t>
+            </a:r>
+            <a:endParaRPr lang="en-US" sz="1200" dirty="0"/>
+          </a:p>
+        </p:txBody>
+      </p:sp>
+      <p:sp>
+        <p:nvSpPr>
+          <p:cNvPr id="6" name="Notas perfil"/>
           <p:cNvSpPr txBox="1"/>
           <p:nvPr/>
         </p:nvSpPr>
         <p:spPr>
           <a:xfrm>
-            <a:off x="640080" y="2331720"/>
-            <a:ext cx="2194560" cy="640080"/>
-          </a:xfrm>
-          <a:prstGeom prst="rect">
-            <a:avLst/>
-          </a:prstGeom>
-          <a:noFill/>
-          <a:ln/>
-        </p:spPr>
-        <p:txBody>
-          <a:bodyPr wrap="square" lIns="0" tIns="0" rIns="0" bIns="0" rtlCol="0" anchor="t"/>
-          <a:lstStyle/>
-          <a:p>
-            <a:pPr algn="ctr" indent="0" marL="0">
-              <a:buNone/>
-            </a:pPr>
-            <a:r>
-              <a:rPr lang="en-US" sz="1400" dirty="0">
-                <a:solidFill>
-                  <a:schemeClr val="tx1"/>
-                </a:solidFill>
-                <a:latin typeface="Calibri" pitchFamily="34" charset="0"/>
-                <a:ea typeface="Calibri" pitchFamily="34" charset="-122"/>
-                <a:cs typeface="Calibri" pitchFamily="34" charset="-120"/>
-              </a:rPr>
-              <a:t>complejidad ciclomática total (tope 250)</a:t>
-            </a:r>
-            <a:endParaRPr lang="en-US" sz="1400" dirty="0"/>
-          </a:p>
-        </p:txBody>
-      </p:sp>
-      <p:sp>
-        <p:nvSpPr>
-          <p:cNvPr id="7" name="Tarjeta cal 2"/>
-          <p:cNvSpPr/>
-          <p:nvPr/>
-        </p:nvSpPr>
-        <p:spPr>
-          <a:xfrm>
-            <a:off x="3291840" y="1371600"/>
-            <a:ext cx="2560320" cy="1737360"/>
-          </a:xfrm>
-          <a:prstGeom prst="roundRect">
-            <a:avLst>
-              <a:gd name="adj" fmla="val 6316"/>
-            </a:avLst>
-          </a:prstGeom>
-          <a:solidFill>
-            <a:schemeClr val="bg2"/>
-          </a:solidFill>
-          <a:ln w="12700">
-            <a:solidFill>
-              <a:schemeClr val="bg2"/>
-            </a:solidFill>
-            <a:prstDash val="solid"/>
-          </a:ln>
-        </p:spPr>
-      </p:sp>
-      <p:sp>
-        <p:nvSpPr>
-          <p:cNvPr id="8" name="Cifra cal 2"/>
-          <p:cNvSpPr txBox="1"/>
-          <p:nvPr/>
-        </p:nvSpPr>
-        <p:spPr>
-          <a:xfrm>
-            <a:off x="3474720" y="1463040"/>
-            <a:ext cx="2194560" cy="868680"/>
-          </a:xfrm>
-          <a:prstGeom prst="rect">
-            <a:avLst/>
-          </a:prstGeom>
-          <a:noFill/>
-          <a:ln/>
-        </p:spPr>
-        <p:txBody>
-          <a:bodyPr wrap="square" lIns="0" tIns="0" rIns="0" bIns="0" rtlCol="0" anchor="ctr"/>
-          <a:lstStyle/>
-          <a:p>
-            <a:pPr algn="ctr" indent="0" marL="0">
-              <a:buNone/>
-            </a:pPr>
-            <a:r>
-              <a:rPr lang="en-US" sz="4800" b="1" dirty="0">
-                <a:solidFill>
-                  <a:schemeClr val="accent1"/>
-                </a:solidFill>
-                <a:latin typeface="Calibri" pitchFamily="34" charset="0"/>
-                <a:ea typeface="Calibri" pitchFamily="34" charset="-122"/>
-                <a:cs typeface="Calibri" pitchFamily="34" charset="-120"/>
-              </a:rPr>
-              <a:t>83</a:t>
-            </a:r>
-            <a:endParaRPr lang="en-US" sz="4800" dirty="0"/>
-          </a:p>
-        </p:txBody>
-      </p:sp>
-      <p:sp>
-        <p:nvSpPr>
-          <p:cNvPr id="9" name="Etiqueta cal 2"/>
-          <p:cNvSpPr txBox="1"/>
-          <p:nvPr/>
-        </p:nvSpPr>
-        <p:spPr>
-          <a:xfrm>
-            <a:off x="3474720" y="2331720"/>
-            <a:ext cx="2194560" cy="640080"/>
-          </a:xfrm>
-          <a:prstGeom prst="rect">
-            <a:avLst/>
-          </a:prstGeom>
-          <a:noFill/>
-          <a:ln/>
-        </p:spPr>
-        <p:txBody>
-          <a:bodyPr wrap="square" lIns="0" tIns="0" rIns="0" bIns="0" rtlCol="0" anchor="t"/>
-          <a:lstStyle/>
-          <a:p>
-            <a:pPr algn="ctr" indent="0" marL="0">
-              <a:buNone/>
-            </a:pPr>
-            <a:r>
-              <a:rPr lang="en-US" sz="1400" dirty="0">
-                <a:solidFill>
-                  <a:schemeClr val="tx1"/>
-                </a:solidFill>
-                <a:latin typeface="Calibri" pitchFamily="34" charset="0"/>
-                <a:ea typeface="Calibri" pitchFamily="34" charset="-122"/>
-                <a:cs typeface="Calibri" pitchFamily="34" charset="-120"/>
-              </a:rPr>
-              <a:t>complejidad cognitiva total (tope 120)</a:t>
-            </a:r>
-            <a:endParaRPr lang="en-US" sz="1400" dirty="0"/>
-          </a:p>
-        </p:txBody>
-      </p:sp>
-      <p:sp>
-        <p:nvSpPr>
-          <p:cNvPr id="10" name="Tarjeta cal 3"/>
-          <p:cNvSpPr/>
-          <p:nvPr/>
-        </p:nvSpPr>
-        <p:spPr>
-          <a:xfrm>
-            <a:off x="6126480" y="1371600"/>
-            <a:ext cx="2560320" cy="1737360"/>
-          </a:xfrm>
-          <a:prstGeom prst="roundRect">
-            <a:avLst>
-              <a:gd name="adj" fmla="val 6316"/>
-            </a:avLst>
-          </a:prstGeom>
-          <a:solidFill>
-            <a:schemeClr val="bg2"/>
-          </a:solidFill>
-          <a:ln w="12700">
-            <a:solidFill>
-              <a:schemeClr val="bg2"/>
-            </a:solidFill>
-            <a:prstDash val="solid"/>
-          </a:ln>
-        </p:spPr>
-      </p:sp>
-      <p:sp>
-        <p:nvSpPr>
-          <p:cNvPr id="11" name="Cifra cal 3"/>
-          <p:cNvSpPr txBox="1"/>
-          <p:nvPr/>
-        </p:nvSpPr>
-        <p:spPr>
-          <a:xfrm>
-            <a:off x="6309360" y="1463040"/>
-            <a:ext cx="2194560" cy="868680"/>
-          </a:xfrm>
-          <a:prstGeom prst="rect">
-            <a:avLst/>
-          </a:prstGeom>
-          <a:noFill/>
-          <a:ln/>
-        </p:spPr>
-        <p:txBody>
-          <a:bodyPr wrap="square" lIns="0" tIns="0" rIns="0" bIns="0" rtlCol="0" anchor="ctr"/>
-          <a:lstStyle/>
-          <a:p>
-            <a:pPr algn="ctr" indent="0" marL="0">
-              <a:buNone/>
-            </a:pPr>
-            <a:r>
-              <a:rPr lang="en-US" sz="4800" b="1" dirty="0">
-                <a:solidFill>
-                  <a:schemeClr val="accent1"/>
-                </a:solidFill>
-                <a:latin typeface="Calibri" pitchFamily="34" charset="0"/>
-                <a:ea typeface="Calibri" pitchFamily="34" charset="-122"/>
-                <a:cs typeface="Calibri" pitchFamily="34" charset="-120"/>
-              </a:rPr>
-              <a:t>10</a:t>
-            </a:r>
-            <a:endParaRPr lang="en-US" sz="4800" dirty="0"/>
-          </a:p>
-        </p:txBody>
-      </p:sp>
-      <p:sp>
-        <p:nvSpPr>
-          <p:cNvPr id="12" name="Etiqueta cal 3"/>
-          <p:cNvSpPr txBox="1"/>
-          <p:nvPr/>
-        </p:nvSpPr>
-        <p:spPr>
-          <a:xfrm>
-            <a:off x="6309360" y="2331720"/>
-            <a:ext cx="2194560" cy="640080"/>
-          </a:xfrm>
-          <a:prstGeom prst="rect">
-            <a:avLst/>
-          </a:prstGeom>
-          <a:noFill/>
-          <a:ln/>
-        </p:spPr>
-        <p:txBody>
-          <a:bodyPr wrap="square" lIns="0" tIns="0" rIns="0" bIns="0" rtlCol="0" anchor="t"/>
-          <a:lstStyle/>
-          <a:p>
-            <a:pPr algn="ctr" indent="0" marL="0">
-              <a:buNone/>
-            </a:pPr>
-            <a:r>
-              <a:rPr lang="en-US" sz="1400" dirty="0">
-                <a:solidFill>
-                  <a:schemeClr val="tx1"/>
-                </a:solidFill>
-                <a:latin typeface="Calibri" pitchFamily="34" charset="0"/>
-                <a:ea typeface="Calibri" pitchFamily="34" charset="-122"/>
-                <a:cs typeface="Calibri" pitchFamily="34" charset="-120"/>
-              </a:rPr>
-              <a:t>máximo por método: Main::runConsole</a:t>
-            </a:r>
-            <a:endParaRPr lang="en-US" sz="1400" dirty="0"/>
-          </a:p>
-        </p:txBody>
-      </p:sp>
-      <p:sp>
-        <p:nvSpPr>
-          <p:cNvPr id="13" name="Criterios calibración"/>
-          <p:cNvSpPr txBox="1"/>
-          <p:nvPr/>
-        </p:nvSpPr>
-        <p:spPr>
-          <a:xfrm>
-            <a:off x="457200" y="3337560"/>
-            <a:ext cx="8229600" cy="1280160"/>
+            <a:off x="5852160" y="1371600"/>
+            <a:ext cx="2834640" cy="2194560"/>
           </a:xfrm>
           <a:prstGeom prst="rect">
             <a:avLst/>
@@ -5621,7 +5661,7 @@
               <a:buChar char="•"/>
             </a:pPr>
             <a:r>
-              <a:rPr lang="en-US" sz="1500" dirty="0">
+              <a:rPr lang="en-US" sz="1400" dirty="0">
                 <a:solidFill>
                   <a:schemeClr val="tx1"/>
                 </a:solidFill>
@@ -5629,9 +5669,9 @@
                 <a:ea typeface="Calibri" pitchFamily="34" charset="-122"/>
                 <a:cs typeface="Calibri" pitchFamily="34" charset="-120"/>
               </a:rPr>
-              <a:t>Tope ciclomático 250: medido 136, margen de crecimiento cercano al 80 %</a:t>
-            </a:r>
-            <a:endParaRPr lang="en-US" sz="1500" dirty="0"/>
+              <a:t>Copia de “Sonar way comprehensive”</a:t>
+            </a:r>
+            <a:endParaRPr lang="en-US" sz="1400" dirty="0"/>
           </a:p>
           <a:p>
             <a:pPr marL="342900" indent="-342900">
@@ -5642,7 +5682,7 @@
               <a:buChar char="•"/>
             </a:pPr>
             <a:r>
-              <a:rPr lang="en-US" sz="1500" dirty="0">
+              <a:rPr lang="en-US" sz="1400" dirty="0">
                 <a:solidFill>
                   <a:schemeClr val="tx1"/>
                 </a:solidFill>
@@ -5650,9 +5690,9 @@
                 <a:ea typeface="Calibri" pitchFamily="34" charset="-122"/>
                 <a:cs typeface="Calibri" pitchFamily="34" charset="-120"/>
               </a:rPr>
-              <a:t>Tope cognitivo 120: medido 83, margen cercano al 45 %</a:t>
-            </a:r>
-            <a:endParaRPr lang="en-US" sz="1500" dirty="0"/>
+              <a:t>Se activan dos reglas con umbral propio</a:t>
+            </a:r>
+            <a:endParaRPr lang="en-US" sz="1400" dirty="0"/>
           </a:p>
           <a:p>
             <a:pPr marL="342900" indent="-342900">
@@ -5663,7 +5703,7 @@
               <a:buChar char="•"/>
             </a:pPr>
             <a:r>
-              <a:rPr lang="en-US" sz="1500" dirty="0">
+              <a:rPr lang="en-US" sz="1400" dirty="0">
                 <a:solidFill>
                   <a:schemeClr val="tx1"/>
                 </a:solidFill>
@@ -5671,9 +5711,9 @@
                 <a:ea typeface="Calibri" pitchFamily="34" charset="-122"/>
                 <a:cs typeface="Calibri" pitchFamily="34" charset="-120"/>
               </a:rPr>
-              <a:t>Por método: 10 y 15; hoy ningún método supera 10, y runConsole está justo en el límite</a:t>
-            </a:r>
-            <a:endParaRPr lang="en-US" sz="1500" dirty="0"/>
+              <a:t>Asignado al proyecto durante la prueba del plan Team</a:t>
+            </a:r>
+            <a:endParaRPr lang="en-US" sz="1400" dirty="0"/>
           </a:p>
         </p:txBody>
       </p:sp>
@@ -5779,70 +5819,46 @@
                   <a:schemeClr val="tx2"/>
                 </a:solidFill>
               </a:rPr>
-              <a:t>Del commit al semáforo</a:t>
+              <a:t>Reglas con umbral propio</a:t>
             </a:r>
             <a:endParaRPr lang="en-US" sz="3200" dirty="0"/>
           </a:p>
         </p:txBody>
       </p:sp>
-      <p:sp>
-        <p:nvSpPr>
-          <p:cNvPr id="4" name="Conector 1"/>
-          <p:cNvSpPr/>
-          <p:nvPr/>
-        </p:nvSpPr>
-        <p:spPr>
-          <a:xfrm>
-            <a:off x="1234440" y="1828800"/>
-            <a:ext cx="914400" cy="0"/>
-          </a:xfrm>
-          <a:prstGeom prst="line">
-            <a:avLst/>
-          </a:prstGeom>
-          <a:noFill/>
-          <a:ln w="25400">
-            <a:solidFill>
-              <a:schemeClr val="accent6"/>
-            </a:solidFill>
-            <a:prstDash val="solid"/>
-          </a:ln>
-        </p:spPr>
-      </p:sp>
-      <p:sp>
-        <p:nvSpPr>
-          <p:cNvPr id="5" name="Paso 1"/>
-          <p:cNvSpPr/>
-          <p:nvPr/>
-        </p:nvSpPr>
-        <p:spPr>
-          <a:xfrm>
-            <a:off x="685800" y="1508760"/>
-            <a:ext cx="640080" cy="640080"/>
-          </a:xfrm>
-          <a:prstGeom prst="ellipse">
-            <a:avLst/>
-          </a:prstGeom>
-          <a:solidFill>
-            <a:schemeClr val="accent1"/>
-          </a:solidFill>
-          <a:ln w="12700">
-            <a:solidFill>
-              <a:schemeClr val="accent1"/>
-            </a:solidFill>
-            <a:prstDash val="solid"/>
-          </a:ln>
-        </p:spPr>
-      </p:sp>
-      <p:sp>
-        <p:nvSpPr>
-          <p:cNvPr id="6" name="Número paso 1"/>
+      <p:pic>
+        <p:nvPicPr>
+          <p:cNvPr id="4" name="Image 0" descr="Regla S3776 con Threshold 15">    </p:cNvPr>
+          <p:cNvPicPr>
+            <a:picLocks noChangeAspect="1"/>
+          </p:cNvPicPr>
+          <p:nvPr/>
+        </p:nvPicPr>
+        <p:blipFill>
+          <a:blip r:embed="rId1"/>
+          <a:stretch>
+            <a:fillRect/>
+          </a:stretch>
+        </p:blipFill>
+        <p:spPr>
+          <a:xfrm>
+            <a:off x="457200" y="1188720"/>
+            <a:ext cx="3020172" cy="3246120"/>
+          </a:xfrm>
+          <a:prstGeom prst="rect">
+            <a:avLst/>
+          </a:prstGeom>
+        </p:spPr>
+      </p:pic>
+      <p:sp>
+        <p:nvSpPr>
+          <p:cNvPr id="5" name="Pie S3776"/>
           <p:cNvSpPr txBox="1"/>
           <p:nvPr/>
         </p:nvSpPr>
         <p:spPr>
           <a:xfrm>
-            <a:off x="685800" y="1508760"/>
-            <a:ext cx="640080" cy="640080"/>
+            <a:off x="457200" y="4480560"/>
+            <a:ext cx="3020172" cy="274320"/>
           </a:xfrm>
           <a:prstGeom prst="rect">
             <a:avLst/>
@@ -5851,37 +5867,61 @@
           <a:ln/>
         </p:spPr>
         <p:txBody>
-          <a:bodyPr wrap="square" lIns="0" tIns="0" rIns="0" bIns="0" rtlCol="0" anchor="ctr"/>
+          <a:bodyPr wrap="square" lIns="0" tIns="0" rIns="0" bIns="0" rtlCol="0" anchor="t"/>
           <a:lstStyle/>
           <a:p>
             <a:pPr algn="ctr" indent="0" marL="0">
               <a:buNone/>
             </a:pPr>
             <a:r>
-              <a:rPr lang="en-US" sz="2200" b="1" dirty="0">
-                <a:solidFill>
-                  <a:schemeClr val="bg1"/>
+              <a:rPr lang="en-US" sz="1200" dirty="0">
+                <a:solidFill>
+                  <a:schemeClr val="accent5"/>
                 </a:solidFill>
                 <a:latin typeface="Calibri" pitchFamily="34" charset="0"/>
                 <a:ea typeface="Calibri" pitchFamily="34" charset="-122"/>
                 <a:cs typeface="Calibri" pitchFamily="34" charset="-120"/>
               </a:rPr>
-              <a:t>1</a:t>
-            </a:r>
-            <a:endParaRPr lang="en-US" sz="2200" dirty="0"/>
-          </a:p>
-        </p:txBody>
-      </p:sp>
-      <p:sp>
-        <p:nvSpPr>
-          <p:cNvPr id="7" name="Etiqueta paso 1"/>
+              <a:t>java:S3776 · complejidad cognitiva ≤ 15</a:t>
+            </a:r>
+            <a:endParaRPr lang="en-US" sz="1200" dirty="0"/>
+          </a:p>
+        </p:txBody>
+      </p:sp>
+      <p:pic>
+        <p:nvPicPr>
+          <p:cNvPr id="6" name="Image 1" descr="Regla S1541 con Threshold 10">    </p:cNvPr>
+          <p:cNvPicPr>
+            <a:picLocks noChangeAspect="1"/>
+          </p:cNvPicPr>
+          <p:nvPr/>
+        </p:nvPicPr>
+        <p:blipFill>
+          <a:blip r:embed="rId2"/>
+          <a:stretch>
+            <a:fillRect/>
+          </a:stretch>
+        </p:blipFill>
+        <p:spPr>
+          <a:xfrm>
+            <a:off x="4846320" y="1188720"/>
+            <a:ext cx="3461952" cy="3246120"/>
+          </a:xfrm>
+          <a:prstGeom prst="rect">
+            <a:avLst/>
+          </a:prstGeom>
+        </p:spPr>
+      </p:pic>
+      <p:sp>
+        <p:nvSpPr>
+          <p:cNvPr id="7" name="Pie S1541"/>
           <p:cNvSpPr txBox="1"/>
           <p:nvPr/>
         </p:nvSpPr>
         <p:spPr>
           <a:xfrm>
-            <a:off x="457200" y="2331720"/>
-            <a:ext cx="1554480" cy="731520"/>
+            <a:off x="4846320" y="4480560"/>
+            <a:ext cx="3461952" cy="274320"/>
           </a:xfrm>
           <a:prstGeom prst="rect">
             <a:avLst/>
@@ -5897,664 +5937,17 @@
               <a:buNone/>
             </a:pPr>
             <a:r>
-              <a:rPr lang="en-US" sz="1400" dirty="0">
-                <a:solidFill>
-                  <a:schemeClr val="tx1"/>
+              <a:rPr lang="en-US" sz="1200" dirty="0">
+                <a:solidFill>
+                  <a:schemeClr val="accent5"/>
                 </a:solidFill>
                 <a:latin typeface="Calibri" pitchFamily="34" charset="0"/>
                 <a:ea typeface="Calibri" pitchFamily="34" charset="-122"/>
                 <a:cs typeface="Calibri" pitchFamily="34" charset="-120"/>
               </a:rPr>
-              <a:t>Push o pull request</a:t>
-            </a:r>
-            <a:endParaRPr lang="en-US" sz="1400" dirty="0"/>
-          </a:p>
-        </p:txBody>
-      </p:sp>
-      <p:sp>
-        <p:nvSpPr>
-          <p:cNvPr id="8" name="Conector 2"/>
-          <p:cNvSpPr/>
-          <p:nvPr/>
-        </p:nvSpPr>
-        <p:spPr>
-          <a:xfrm>
-            <a:off x="2926080" y="1828800"/>
-            <a:ext cx="914400" cy="0"/>
-          </a:xfrm>
-          <a:prstGeom prst="line">
-            <a:avLst/>
-          </a:prstGeom>
-          <a:noFill/>
-          <a:ln w="25400">
-            <a:solidFill>
-              <a:schemeClr val="accent6"/>
-            </a:solidFill>
-            <a:prstDash val="solid"/>
-          </a:ln>
-        </p:spPr>
-      </p:sp>
-      <p:sp>
-        <p:nvSpPr>
-          <p:cNvPr id="9" name="Paso 2"/>
-          <p:cNvSpPr/>
-          <p:nvPr/>
-        </p:nvSpPr>
-        <p:spPr>
-          <a:xfrm>
-            <a:off x="2377440" y="1508760"/>
-            <a:ext cx="640080" cy="640080"/>
-          </a:xfrm>
-          <a:prstGeom prst="ellipse">
-            <a:avLst/>
-          </a:prstGeom>
-          <a:solidFill>
-            <a:schemeClr val="accent1"/>
-          </a:solidFill>
-          <a:ln w="12700">
-            <a:solidFill>
-              <a:schemeClr val="accent1"/>
-            </a:solidFill>
-            <a:prstDash val="solid"/>
-          </a:ln>
-        </p:spPr>
-      </p:sp>
-      <p:sp>
-        <p:nvSpPr>
-          <p:cNvPr id="10" name="Número paso 2"/>
-          <p:cNvSpPr txBox="1"/>
-          <p:nvPr/>
-        </p:nvSpPr>
-        <p:spPr>
-          <a:xfrm>
-            <a:off x="2377440" y="1508760"/>
-            <a:ext cx="640080" cy="640080"/>
-          </a:xfrm>
-          <a:prstGeom prst="rect">
-            <a:avLst/>
-          </a:prstGeom>
-          <a:noFill/>
-          <a:ln/>
-        </p:spPr>
-        <p:txBody>
-          <a:bodyPr wrap="square" lIns="0" tIns="0" rIns="0" bIns="0" rtlCol="0" anchor="ctr"/>
-          <a:lstStyle/>
-          <a:p>
-            <a:pPr algn="ctr" indent="0" marL="0">
-              <a:buNone/>
-            </a:pPr>
-            <a:r>
-              <a:rPr lang="en-US" sz="2200" b="1" dirty="0">
-                <a:solidFill>
-                  <a:schemeClr val="bg1"/>
-                </a:solidFill>
-                <a:latin typeface="Calibri" pitchFamily="34" charset="0"/>
-                <a:ea typeface="Calibri" pitchFamily="34" charset="-122"/>
-                <a:cs typeface="Calibri" pitchFamily="34" charset="-120"/>
-              </a:rPr>
-              <a:t>2</a:t>
-            </a:r>
-            <a:endParaRPr lang="en-US" sz="2200" dirty="0"/>
-          </a:p>
-        </p:txBody>
-      </p:sp>
-      <p:sp>
-        <p:nvSpPr>
-          <p:cNvPr id="11" name="Etiqueta paso 2"/>
-          <p:cNvSpPr txBox="1"/>
-          <p:nvPr/>
-        </p:nvSpPr>
-        <p:spPr>
-          <a:xfrm>
-            <a:off x="2148840" y="2331720"/>
-            <a:ext cx="1554480" cy="731520"/>
-          </a:xfrm>
-          <a:prstGeom prst="rect">
-            <a:avLst/>
-          </a:prstGeom>
-          <a:noFill/>
-          <a:ln/>
-        </p:spPr>
-        <p:txBody>
-          <a:bodyPr wrap="square" lIns="0" tIns="0" rIns="0" bIns="0" rtlCol="0" anchor="t"/>
-          <a:lstStyle/>
-          <a:p>
-            <a:pPr algn="ctr" indent="0" marL="0">
-              <a:buNone/>
-            </a:pPr>
-            <a:r>
-              <a:rPr lang="en-US" sz="1400" dirty="0">
-                <a:solidFill>
-                  <a:schemeClr val="tx1"/>
-                </a:solidFill>
-                <a:latin typeface="Calibri" pitchFamily="34" charset="0"/>
-                <a:ea typeface="Calibri" pitchFamily="34" charset="-122"/>
-                <a:cs typeface="Calibri" pitchFamily="34" charset="-120"/>
-              </a:rPr>
-              <a:t>Pruebas unitarias y Karate</a:t>
-            </a:r>
-            <a:endParaRPr lang="en-US" sz="1400" dirty="0"/>
-          </a:p>
-        </p:txBody>
-      </p:sp>
-      <p:sp>
-        <p:nvSpPr>
-          <p:cNvPr id="12" name="Conector 3"/>
-          <p:cNvSpPr/>
-          <p:nvPr/>
-        </p:nvSpPr>
-        <p:spPr>
-          <a:xfrm>
-            <a:off x="4617720" y="1828800"/>
-            <a:ext cx="914400" cy="0"/>
-          </a:xfrm>
-          <a:prstGeom prst="line">
-            <a:avLst/>
-          </a:prstGeom>
-          <a:noFill/>
-          <a:ln w="25400">
-            <a:solidFill>
-              <a:schemeClr val="accent6"/>
-            </a:solidFill>
-            <a:prstDash val="solid"/>
-          </a:ln>
-        </p:spPr>
-      </p:sp>
-      <p:sp>
-        <p:nvSpPr>
-          <p:cNvPr id="13" name="Paso 3"/>
-          <p:cNvSpPr/>
-          <p:nvPr/>
-        </p:nvSpPr>
-        <p:spPr>
-          <a:xfrm>
-            <a:off x="4069080" y="1508760"/>
-            <a:ext cx="640080" cy="640080"/>
-          </a:xfrm>
-          <a:prstGeom prst="ellipse">
-            <a:avLst/>
-          </a:prstGeom>
-          <a:solidFill>
-            <a:schemeClr val="accent1"/>
-          </a:solidFill>
-          <a:ln w="12700">
-            <a:solidFill>
-              <a:schemeClr val="accent1"/>
-            </a:solidFill>
-            <a:prstDash val="solid"/>
-          </a:ln>
-        </p:spPr>
-      </p:sp>
-      <p:sp>
-        <p:nvSpPr>
-          <p:cNvPr id="14" name="Número paso 3"/>
-          <p:cNvSpPr txBox="1"/>
-          <p:nvPr/>
-        </p:nvSpPr>
-        <p:spPr>
-          <a:xfrm>
-            <a:off x="4069080" y="1508760"/>
-            <a:ext cx="640080" cy="640080"/>
-          </a:xfrm>
-          <a:prstGeom prst="rect">
-            <a:avLst/>
-          </a:prstGeom>
-          <a:noFill/>
-          <a:ln/>
-        </p:spPr>
-        <p:txBody>
-          <a:bodyPr wrap="square" lIns="0" tIns="0" rIns="0" bIns="0" rtlCol="0" anchor="ctr"/>
-          <a:lstStyle/>
-          <a:p>
-            <a:pPr algn="ctr" indent="0" marL="0">
-              <a:buNone/>
-            </a:pPr>
-            <a:r>
-              <a:rPr lang="en-US" sz="2200" b="1" dirty="0">
-                <a:solidFill>
-                  <a:schemeClr val="bg1"/>
-                </a:solidFill>
-                <a:latin typeface="Calibri" pitchFamily="34" charset="0"/>
-                <a:ea typeface="Calibri" pitchFamily="34" charset="-122"/>
-                <a:cs typeface="Calibri" pitchFamily="34" charset="-120"/>
-              </a:rPr>
-              <a:t>3</a:t>
-            </a:r>
-            <a:endParaRPr lang="en-US" sz="2200" dirty="0"/>
-          </a:p>
-        </p:txBody>
-      </p:sp>
-      <p:sp>
-        <p:nvSpPr>
-          <p:cNvPr id="15" name="Etiqueta paso 3"/>
-          <p:cNvSpPr txBox="1"/>
-          <p:nvPr/>
-        </p:nvSpPr>
-        <p:spPr>
-          <a:xfrm>
-            <a:off x="3840480" y="2331720"/>
-            <a:ext cx="1554480" cy="731520"/>
-          </a:xfrm>
-          <a:prstGeom prst="rect">
-            <a:avLst/>
-          </a:prstGeom>
-          <a:noFill/>
-          <a:ln/>
-        </p:spPr>
-        <p:txBody>
-          <a:bodyPr wrap="square" lIns="0" tIns="0" rIns="0" bIns="0" rtlCol="0" anchor="t"/>
-          <a:lstStyle/>
-          <a:p>
-            <a:pPr algn="ctr" indent="0" marL="0">
-              <a:buNone/>
-            </a:pPr>
-            <a:r>
-              <a:rPr lang="en-US" sz="1400" dirty="0">
-                <a:solidFill>
-                  <a:schemeClr val="tx1"/>
-                </a:solidFill>
-                <a:latin typeface="Calibri" pitchFamily="34" charset="0"/>
-                <a:ea typeface="Calibri" pitchFamily="34" charset="-122"/>
-                <a:cs typeface="Calibri" pitchFamily="34" charset="-120"/>
-              </a:rPr>
-              <a:t>Cobertura JaCoCo</a:t>
-            </a:r>
-            <a:endParaRPr lang="en-US" sz="1400" dirty="0"/>
-          </a:p>
-        </p:txBody>
-      </p:sp>
-      <p:sp>
-        <p:nvSpPr>
-          <p:cNvPr id="16" name="Conector 4"/>
-          <p:cNvSpPr/>
-          <p:nvPr/>
-        </p:nvSpPr>
-        <p:spPr>
-          <a:xfrm>
-            <a:off x="6309360" y="1828800"/>
-            <a:ext cx="914400" cy="0"/>
-          </a:xfrm>
-          <a:prstGeom prst="line">
-            <a:avLst/>
-          </a:prstGeom>
-          <a:noFill/>
-          <a:ln w="25400">
-            <a:solidFill>
-              <a:schemeClr val="accent6"/>
-            </a:solidFill>
-            <a:prstDash val="solid"/>
-          </a:ln>
-        </p:spPr>
-      </p:sp>
-      <p:sp>
-        <p:nvSpPr>
-          <p:cNvPr id="17" name="Paso 4"/>
-          <p:cNvSpPr/>
-          <p:nvPr/>
-        </p:nvSpPr>
-        <p:spPr>
-          <a:xfrm>
-            <a:off x="5760720" y="1508760"/>
-            <a:ext cx="640080" cy="640080"/>
-          </a:xfrm>
-          <a:prstGeom prst="ellipse">
-            <a:avLst/>
-          </a:prstGeom>
-          <a:solidFill>
-            <a:schemeClr val="accent1"/>
-          </a:solidFill>
-          <a:ln w="12700">
-            <a:solidFill>
-              <a:schemeClr val="accent1"/>
-            </a:solidFill>
-            <a:prstDash val="solid"/>
-          </a:ln>
-        </p:spPr>
-      </p:sp>
-      <p:sp>
-        <p:nvSpPr>
-          <p:cNvPr id="18" name="Número paso 4"/>
-          <p:cNvSpPr txBox="1"/>
-          <p:nvPr/>
-        </p:nvSpPr>
-        <p:spPr>
-          <a:xfrm>
-            <a:off x="5760720" y="1508760"/>
-            <a:ext cx="640080" cy="640080"/>
-          </a:xfrm>
-          <a:prstGeom prst="rect">
-            <a:avLst/>
-          </a:prstGeom>
-          <a:noFill/>
-          <a:ln/>
-        </p:spPr>
-        <p:txBody>
-          <a:bodyPr wrap="square" lIns="0" tIns="0" rIns="0" bIns="0" rtlCol="0" anchor="ctr"/>
-          <a:lstStyle/>
-          <a:p>
-            <a:pPr algn="ctr" indent="0" marL="0">
-              <a:buNone/>
-            </a:pPr>
-            <a:r>
-              <a:rPr lang="en-US" sz="2200" b="1" dirty="0">
-                <a:solidFill>
-                  <a:schemeClr val="bg1"/>
-                </a:solidFill>
-                <a:latin typeface="Calibri" pitchFamily="34" charset="0"/>
-                <a:ea typeface="Calibri" pitchFamily="34" charset="-122"/>
-                <a:cs typeface="Calibri" pitchFamily="34" charset="-120"/>
-              </a:rPr>
-              <a:t>4</a:t>
-            </a:r>
-            <a:endParaRPr lang="en-US" sz="2200" dirty="0"/>
-          </a:p>
-        </p:txBody>
-      </p:sp>
-      <p:sp>
-        <p:nvSpPr>
-          <p:cNvPr id="19" name="Etiqueta paso 4"/>
-          <p:cNvSpPr txBox="1"/>
-          <p:nvPr/>
-        </p:nvSpPr>
-        <p:spPr>
-          <a:xfrm>
-            <a:off x="5532120" y="2331720"/>
-            <a:ext cx="1554480" cy="731520"/>
-          </a:xfrm>
-          <a:prstGeom prst="rect">
-            <a:avLst/>
-          </a:prstGeom>
-          <a:noFill/>
-          <a:ln/>
-        </p:spPr>
-        <p:txBody>
-          <a:bodyPr wrap="square" lIns="0" tIns="0" rIns="0" bIns="0" rtlCol="0" anchor="t"/>
-          <a:lstStyle/>
-          <a:p>
-            <a:pPr algn="ctr" indent="0" marL="0">
-              <a:buNone/>
-            </a:pPr>
-            <a:r>
-              <a:rPr lang="en-US" sz="1400" dirty="0">
-                <a:solidFill>
-                  <a:schemeClr val="tx1"/>
-                </a:solidFill>
-                <a:latin typeface="Calibri" pitchFamily="34" charset="0"/>
-                <a:ea typeface="Calibri" pitchFamily="34" charset="-122"/>
-                <a:cs typeface="Calibri" pitchFamily="34" charset="-120"/>
-              </a:rPr>
-              <a:t>Análisis en SonarCloud</a:t>
-            </a:r>
-            <a:endParaRPr lang="en-US" sz="1400" dirty="0"/>
-          </a:p>
-        </p:txBody>
-      </p:sp>
-      <p:sp>
-        <p:nvSpPr>
-          <p:cNvPr id="20" name="Paso 5"/>
-          <p:cNvSpPr/>
-          <p:nvPr/>
-        </p:nvSpPr>
-        <p:spPr>
-          <a:xfrm>
-            <a:off x="7452360" y="1508760"/>
-            <a:ext cx="640080" cy="640080"/>
-          </a:xfrm>
-          <a:prstGeom prst="ellipse">
-            <a:avLst/>
-          </a:prstGeom>
-          <a:solidFill>
-            <a:schemeClr val="accent1"/>
-          </a:solidFill>
-          <a:ln w="12700">
-            <a:solidFill>
-              <a:schemeClr val="accent1"/>
-            </a:solidFill>
-            <a:prstDash val="solid"/>
-          </a:ln>
-        </p:spPr>
-      </p:sp>
-      <p:sp>
-        <p:nvSpPr>
-          <p:cNvPr id="21" name="Número paso 5"/>
-          <p:cNvSpPr txBox="1"/>
-          <p:nvPr/>
-        </p:nvSpPr>
-        <p:spPr>
-          <a:xfrm>
-            <a:off x="7452360" y="1508760"/>
-            <a:ext cx="640080" cy="640080"/>
-          </a:xfrm>
-          <a:prstGeom prst="rect">
-            <a:avLst/>
-          </a:prstGeom>
-          <a:noFill/>
-          <a:ln/>
-        </p:spPr>
-        <p:txBody>
-          <a:bodyPr wrap="square" lIns="0" tIns="0" rIns="0" bIns="0" rtlCol="0" anchor="ctr"/>
-          <a:lstStyle/>
-          <a:p>
-            <a:pPr algn="ctr" indent="0" marL="0">
-              <a:buNone/>
-            </a:pPr>
-            <a:r>
-              <a:rPr lang="en-US" sz="2200" b="1" dirty="0">
-                <a:solidFill>
-                  <a:schemeClr val="bg1"/>
-                </a:solidFill>
-                <a:latin typeface="Calibri" pitchFamily="34" charset="0"/>
-                <a:ea typeface="Calibri" pitchFamily="34" charset="-122"/>
-                <a:cs typeface="Calibri" pitchFamily="34" charset="-120"/>
-              </a:rPr>
-              <a:t>5</a:t>
-            </a:r>
-            <a:endParaRPr lang="en-US" sz="2200" dirty="0"/>
-          </a:p>
-        </p:txBody>
-      </p:sp>
-      <p:sp>
-        <p:nvSpPr>
-          <p:cNvPr id="22" name="Etiqueta paso 5"/>
-          <p:cNvSpPr txBox="1"/>
-          <p:nvPr/>
-        </p:nvSpPr>
-        <p:spPr>
-          <a:xfrm>
-            <a:off x="7223760" y="2331720"/>
-            <a:ext cx="1554480" cy="731520"/>
-          </a:xfrm>
-          <a:prstGeom prst="rect">
-            <a:avLst/>
-          </a:prstGeom>
-          <a:noFill/>
-          <a:ln/>
-        </p:spPr>
-        <p:txBody>
-          <a:bodyPr wrap="square" lIns="0" tIns="0" rIns="0" bIns="0" rtlCol="0" anchor="t"/>
-          <a:lstStyle/>
-          <a:p>
-            <a:pPr algn="ctr" indent="0" marL="0">
-              <a:buNone/>
-            </a:pPr>
-            <a:r>
-              <a:rPr lang="en-US" sz="1400" dirty="0">
-                <a:solidFill>
-                  <a:schemeClr val="tx1"/>
-                </a:solidFill>
-                <a:latin typeface="Calibri" pitchFamily="34" charset="0"/>
-                <a:ea typeface="Calibri" pitchFamily="34" charset="-122"/>
-                <a:cs typeface="Calibri" pitchFamily="34" charset="-120"/>
-              </a:rPr>
-              <a:t>Quality Gate</a:t>
-            </a:r>
-            <a:endParaRPr lang="en-US" sz="1400" dirty="0"/>
-          </a:p>
-        </p:txBody>
-      </p:sp>
-      <p:sp>
-        <p:nvSpPr>
-          <p:cNvPr id="23" name="Caja gate"/>
-          <p:cNvSpPr/>
-          <p:nvPr/>
-        </p:nvSpPr>
-        <p:spPr>
-          <a:xfrm>
-            <a:off x="457200" y="3200400"/>
-            <a:ext cx="4023360" cy="1280160"/>
-          </a:xfrm>
-          <a:prstGeom prst="roundRect">
-            <a:avLst>
-              <a:gd name="adj" fmla="val 8571"/>
-            </a:avLst>
-          </a:prstGeom>
-          <a:solidFill>
-            <a:schemeClr val="bg2"/>
-          </a:solidFill>
-          <a:ln w="12700">
-            <a:solidFill>
-              <a:schemeClr val="bg2"/>
-            </a:solidFill>
-            <a:prstDash val="solid"/>
-          </a:ln>
-        </p:spPr>
-      </p:sp>
-      <p:sp>
-        <p:nvSpPr>
-          <p:cNvPr id="24" name="Texto gate"/>
-          <p:cNvSpPr txBox="1"/>
-          <p:nvPr/>
-        </p:nvSpPr>
-        <p:spPr>
-          <a:xfrm>
-            <a:off x="640080" y="3246120"/>
-            <a:ext cx="3657600" cy="1188720"/>
-          </a:xfrm>
-          <a:prstGeom prst="rect">
-            <a:avLst/>
-          </a:prstGeom>
-          <a:noFill/>
-          <a:ln/>
-        </p:spPr>
-        <p:txBody>
-          <a:bodyPr wrap="square" lIns="0" tIns="0" rIns="0" bIns="0" rtlCol="0" anchor="ctr"/>
-          <a:lstStyle/>
-          <a:p>
-            <a:pPr indent="0" marL="0">
-              <a:buNone/>
-            </a:pPr>
-            <a:r>
-              <a:rPr lang="en-US" sz="1600" b="1" dirty="0">
-                <a:solidFill>
-                  <a:schemeClr val="tx2"/>
-                </a:solidFill>
-                <a:latin typeface="Calibri" pitchFamily="34" charset="0"/>
-                <a:ea typeface="Calibri" pitchFamily="34" charset="-122"/>
-                <a:cs typeface="Calibri" pitchFamily="34" charset="-120"/>
-              </a:rPr>
-              <a:t>Si el gate falla…</a:t>
-            </a:r>
-            <a:endParaRPr lang="en-US" sz="1600" dirty="0"/>
-          </a:p>
-          <a:p>
-            <a:pPr indent="0" marL="0">
-              <a:buNone/>
-            </a:pPr>
-            <a:r>
-              <a:rPr lang="en-US" sz="1400" dirty="0">
-                <a:solidFill>
-                  <a:schemeClr val="tx1"/>
-                </a:solidFill>
-                <a:latin typeface="Calibri" pitchFamily="34" charset="0"/>
-                <a:ea typeface="Calibri" pitchFamily="34" charset="-122"/>
-                <a:cs typeface="Calibri" pitchFamily="34" charset="-120"/>
-              </a:rPr>
-              <a:t>el pipeline falla y el cambio no se integra.</a:t>
-            </a:r>
-            <a:endParaRPr lang="en-US" sz="1600" dirty="0"/>
-          </a:p>
-        </p:txBody>
-      </p:sp>
-      <p:sp>
-        <p:nvSpPr>
-          <p:cNvPr id="25" name="Caja respaldo"/>
-          <p:cNvSpPr/>
-          <p:nvPr/>
-        </p:nvSpPr>
-        <p:spPr>
-          <a:xfrm>
-            <a:off x="4663440" y="3200400"/>
-            <a:ext cx="4023360" cy="1280160"/>
-          </a:xfrm>
-          <a:prstGeom prst="roundRect">
-            <a:avLst>
-              <a:gd name="adj" fmla="val 8571"/>
-            </a:avLst>
-          </a:prstGeom>
-          <a:solidFill>
-            <a:schemeClr val="bg2"/>
-          </a:solidFill>
-          <a:ln w="12700">
-            <a:solidFill>
-              <a:schemeClr val="bg2"/>
-            </a:solidFill>
-            <a:prstDash val="solid"/>
-          </a:ln>
-        </p:spPr>
-      </p:sp>
-      <p:sp>
-        <p:nvSpPr>
-          <p:cNvPr id="26" name="Texto respaldo"/>
-          <p:cNvSpPr txBox="1"/>
-          <p:nvPr/>
-        </p:nvSpPr>
-        <p:spPr>
-          <a:xfrm>
-            <a:off x="4846320" y="3246120"/>
-            <a:ext cx="3657600" cy="1188720"/>
-          </a:xfrm>
-          <a:prstGeom prst="rect">
-            <a:avLst/>
-          </a:prstGeom>
-          <a:noFill/>
-          <a:ln/>
-        </p:spPr>
-        <p:txBody>
-          <a:bodyPr wrap="square" lIns="0" tIns="0" rIns="0" bIns="0" rtlCol="0" anchor="ctr"/>
-          <a:lstStyle/>
-          <a:p>
-            <a:pPr indent="0" marL="0">
-              <a:buNone/>
-            </a:pPr>
-            <a:r>
-              <a:rPr lang="en-US" sz="1600" b="1" dirty="0">
-                <a:solidFill>
-                  <a:schemeClr val="tx2"/>
-                </a:solidFill>
-                <a:latin typeface="Calibri" pitchFamily="34" charset="0"/>
-                <a:ea typeface="Calibri" pitchFamily="34" charset="-122"/>
-                <a:cs typeface="Calibri" pitchFamily="34" charset="-120"/>
-              </a:rPr>
-              <a:t>check-metrics.sh</a:t>
-            </a:r>
-            <a:endParaRPr lang="en-US" sz="1600" dirty="0"/>
-          </a:p>
-          <a:p>
-            <a:pPr indent="0" marL="0">
-              <a:buNone/>
-            </a:pPr>
-            <a:r>
-              <a:rPr lang="en-US" sz="1400" dirty="0">
-                <a:solidFill>
-                  <a:schemeClr val="tx1"/>
-                </a:solidFill>
-                <a:latin typeface="Calibri" pitchFamily="34" charset="0"/>
-                <a:ea typeface="Calibri" pitchFamily="34" charset="-122"/>
-                <a:cs typeface="Calibri" pitchFamily="34" charset="-120"/>
-              </a:rPr>
-              <a:t>respalda los topes de complejidad y cobertura desde CI, y revisa cada método con lizard.</a:t>
-            </a:r>
-            <a:endParaRPr lang="en-US" sz="1600" dirty="0"/>
+              <a:t>java:S1541 · complejidad ciclomática ≤ 10</a:t>
+            </a:r>
+            <a:endParaRPr lang="en-US" sz="1200" dirty="0"/>
           </a:p>
         </p:txBody>
       </p:sp>
@@ -6660,6 +6053,2052 @@
                   <a:schemeClr val="tx2"/>
                 </a:solidFill>
               </a:rPr>
+              <a:t>El profile detecta, el gate bloquea</a:t>
+            </a:r>
+            <a:endParaRPr lang="en-US" sz="3200" dirty="0"/>
+          </a:p>
+        </p:txBody>
+      </p:sp>
+      <p:sp>
+        <p:nvSpPr>
+          <p:cNvPr id="4" name="Etapa Quality Profile"/>
+          <p:cNvSpPr/>
+          <p:nvPr/>
+        </p:nvSpPr>
+        <p:spPr>
+          <a:xfrm>
+            <a:off x="457200" y="1554480"/>
+            <a:ext cx="2377440" cy="2194560"/>
+          </a:xfrm>
+          <a:prstGeom prst="roundRect">
+            <a:avLst>
+              <a:gd name="adj" fmla="val 5000"/>
+            </a:avLst>
+          </a:prstGeom>
+          <a:solidFill>
+            <a:schemeClr val="bg2"/>
+          </a:solidFill>
+          <a:ln w="12700">
+            <a:solidFill>
+              <a:schemeClr val="bg2"/>
+            </a:solidFill>
+            <a:prstDash val="solid"/>
+          </a:ln>
+        </p:spPr>
+      </p:sp>
+      <p:sp>
+        <p:nvSpPr>
+          <p:cNvPr id="5" name="Etapa título 1"/>
+          <p:cNvSpPr txBox="1"/>
+          <p:nvPr/>
+        </p:nvSpPr>
+        <p:spPr>
+          <a:xfrm>
+            <a:off x="640080" y="1737360"/>
+            <a:ext cx="2011680" cy="411480"/>
+          </a:xfrm>
+          <a:prstGeom prst="rect">
+            <a:avLst/>
+          </a:prstGeom>
+          <a:noFill/>
+          <a:ln/>
+        </p:spPr>
+        <p:txBody>
+          <a:bodyPr wrap="square" lIns="0" tIns="0" rIns="0" bIns="0" rtlCol="0" anchor="ctr"/>
+          <a:lstStyle/>
+          <a:p>
+            <a:pPr algn="ctr" indent="0" marL="0">
+              <a:buNone/>
+            </a:pPr>
+            <a:r>
+              <a:rPr lang="en-US" sz="2000" b="1" dirty="0">
+                <a:solidFill>
+                  <a:schemeClr val="tx2"/>
+                </a:solidFill>
+                <a:latin typeface="Calibri" pitchFamily="34" charset="0"/>
+                <a:ea typeface="Calibri" pitchFamily="34" charset="-122"/>
+                <a:cs typeface="Calibri" pitchFamily="34" charset="-120"/>
+              </a:rPr>
+              <a:t>Quality Profile</a:t>
+            </a:r>
+            <a:endParaRPr lang="en-US" sz="2000" dirty="0"/>
+          </a:p>
+        </p:txBody>
+      </p:sp>
+      <p:sp>
+        <p:nvSpPr>
+          <p:cNvPr id="6" name="Etapa verbo 1"/>
+          <p:cNvSpPr txBox="1"/>
+          <p:nvPr/>
+        </p:nvSpPr>
+        <p:spPr>
+          <a:xfrm>
+            <a:off x="640080" y="2194560"/>
+            <a:ext cx="2011680" cy="274320"/>
+          </a:xfrm>
+          <a:prstGeom prst="rect">
+            <a:avLst/>
+          </a:prstGeom>
+          <a:noFill/>
+          <a:ln/>
+        </p:spPr>
+        <p:txBody>
+          <a:bodyPr wrap="square" lIns="0" tIns="0" rIns="0" bIns="0" rtlCol="0" anchor="ctr"/>
+          <a:lstStyle/>
+          <a:p>
+            <a:pPr algn="ctr" indent="0" marL="0">
+              <a:buNone/>
+            </a:pPr>
+            <a:r>
+              <a:rPr lang="en-US" sz="1200" b="1" dirty="0">
+                <a:solidFill>
+                  <a:schemeClr val="accent5"/>
+                </a:solidFill>
+                <a:latin typeface="Calibri" pitchFamily="34" charset="0"/>
+                <a:ea typeface="Calibri" pitchFamily="34" charset="-122"/>
+                <a:cs typeface="Calibri" pitchFamily="34" charset="-120"/>
+              </a:rPr>
+              <a:t>DETECTA</a:t>
+            </a:r>
+            <a:endParaRPr lang="en-US" sz="1200" dirty="0"/>
+          </a:p>
+        </p:txBody>
+      </p:sp>
+      <p:sp>
+        <p:nvSpPr>
+          <p:cNvPr id="7" name="Etapa detalle 1"/>
+          <p:cNvSpPr txBox="1"/>
+          <p:nvPr/>
+        </p:nvSpPr>
+        <p:spPr>
+          <a:xfrm>
+            <a:off x="685800" y="2606040"/>
+            <a:ext cx="1920240" cy="914400"/>
+          </a:xfrm>
+          <a:prstGeom prst="rect">
+            <a:avLst/>
+          </a:prstGeom>
+          <a:noFill/>
+          <a:ln/>
+        </p:spPr>
+        <p:txBody>
+          <a:bodyPr wrap="square" lIns="0" tIns="0" rIns="0" bIns="0" rtlCol="0" anchor="t"/>
+          <a:lstStyle/>
+          <a:p>
+            <a:pPr algn="ctr" indent="0" marL="0">
+              <a:buNone/>
+            </a:pPr>
+            <a:r>
+              <a:rPr lang="en-US" sz="1400" dirty="0">
+                <a:solidFill>
+                  <a:schemeClr val="tx1"/>
+                </a:solidFill>
+                <a:latin typeface="Calibri" pitchFamily="34" charset="0"/>
+                <a:ea typeface="Calibri" pitchFamily="34" charset="-122"/>
+                <a:cs typeface="Calibri" pitchFamily="34" charset="-120"/>
+              </a:rPr>
+              <a:t>Método con ciclomática &gt; 10 o cognitiva &gt; 15</a:t>
+            </a:r>
+            <a:endParaRPr lang="en-US" sz="1400" dirty="0"/>
+          </a:p>
+        </p:txBody>
+      </p:sp>
+      <p:sp>
+        <p:nvSpPr>
+          <p:cNvPr id="8" name="Flecha etapa 1"/>
+          <p:cNvSpPr txBox="1"/>
+          <p:nvPr/>
+        </p:nvSpPr>
+        <p:spPr>
+          <a:xfrm>
+            <a:off x="2834640" y="2377440"/>
+            <a:ext cx="548640" cy="457200"/>
+          </a:xfrm>
+          <a:prstGeom prst="rect">
+            <a:avLst/>
+          </a:prstGeom>
+          <a:noFill/>
+          <a:ln/>
+        </p:spPr>
+        <p:txBody>
+          <a:bodyPr wrap="square" lIns="0" tIns="0" rIns="0" bIns="0" rtlCol="0" anchor="ctr"/>
+          <a:lstStyle/>
+          <a:p>
+            <a:pPr algn="ctr" indent="0" marL="0">
+              <a:buNone/>
+            </a:pPr>
+            <a:r>
+              <a:rPr lang="en-US" sz="2800" b="1" dirty="0">
+                <a:solidFill>
+                  <a:schemeClr val="accent5"/>
+                </a:solidFill>
+                <a:latin typeface="Calibri" pitchFamily="34" charset="0"/>
+                <a:ea typeface="Calibri" pitchFamily="34" charset="-122"/>
+                <a:cs typeface="Calibri" pitchFamily="34" charset="-120"/>
+              </a:rPr>
+              <a:t>→</a:t>
+            </a:r>
+            <a:endParaRPr lang="en-US" sz="2800" dirty="0"/>
+          </a:p>
+        </p:txBody>
+      </p:sp>
+      <p:sp>
+        <p:nvSpPr>
+          <p:cNvPr id="9" name="Etapa Issue nuevo"/>
+          <p:cNvSpPr/>
+          <p:nvPr/>
+        </p:nvSpPr>
+        <p:spPr>
+          <a:xfrm>
+            <a:off x="3383280" y="1554480"/>
+            <a:ext cx="2377440" cy="2194560"/>
+          </a:xfrm>
+          <a:prstGeom prst="roundRect">
+            <a:avLst>
+              <a:gd name="adj" fmla="val 5000"/>
+            </a:avLst>
+          </a:prstGeom>
+          <a:solidFill>
+            <a:schemeClr val="bg2"/>
+          </a:solidFill>
+          <a:ln w="12700">
+            <a:solidFill>
+              <a:schemeClr val="bg2"/>
+            </a:solidFill>
+            <a:prstDash val="solid"/>
+          </a:ln>
+        </p:spPr>
+      </p:sp>
+      <p:sp>
+        <p:nvSpPr>
+          <p:cNvPr id="10" name="Etapa título 2"/>
+          <p:cNvSpPr txBox="1"/>
+          <p:nvPr/>
+        </p:nvSpPr>
+        <p:spPr>
+          <a:xfrm>
+            <a:off x="3566160" y="1737360"/>
+            <a:ext cx="2011680" cy="411480"/>
+          </a:xfrm>
+          <a:prstGeom prst="rect">
+            <a:avLst/>
+          </a:prstGeom>
+          <a:noFill/>
+          <a:ln/>
+        </p:spPr>
+        <p:txBody>
+          <a:bodyPr wrap="square" lIns="0" tIns="0" rIns="0" bIns="0" rtlCol="0" anchor="ctr"/>
+          <a:lstStyle/>
+          <a:p>
+            <a:pPr algn="ctr" indent="0" marL="0">
+              <a:buNone/>
+            </a:pPr>
+            <a:r>
+              <a:rPr lang="en-US" sz="2000" b="1" dirty="0">
+                <a:solidFill>
+                  <a:srgbClr val="A8680A"/>
+                </a:solidFill>
+                <a:latin typeface="Calibri" pitchFamily="34" charset="0"/>
+                <a:ea typeface="Calibri" pitchFamily="34" charset="-122"/>
+                <a:cs typeface="Calibri" pitchFamily="34" charset="-120"/>
+              </a:rPr>
+              <a:t>Issue nuevo</a:t>
+            </a:r>
+            <a:endParaRPr lang="en-US" sz="2000" dirty="0"/>
+          </a:p>
+        </p:txBody>
+      </p:sp>
+      <p:sp>
+        <p:nvSpPr>
+          <p:cNvPr id="11" name="Etapa verbo 2"/>
+          <p:cNvSpPr txBox="1"/>
+          <p:nvPr/>
+        </p:nvSpPr>
+        <p:spPr>
+          <a:xfrm>
+            <a:off x="3566160" y="2194560"/>
+            <a:ext cx="2011680" cy="274320"/>
+          </a:xfrm>
+          <a:prstGeom prst="rect">
+            <a:avLst/>
+          </a:prstGeom>
+          <a:noFill/>
+          <a:ln/>
+        </p:spPr>
+        <p:txBody>
+          <a:bodyPr wrap="square" lIns="0" tIns="0" rIns="0" bIns="0" rtlCol="0" anchor="ctr"/>
+          <a:lstStyle/>
+          <a:p>
+            <a:pPr algn="ctr" indent="0" marL="0">
+              <a:buNone/>
+            </a:pPr>
+            <a:r>
+              <a:rPr lang="en-US" sz="1200" b="1" dirty="0">
+                <a:solidFill>
+                  <a:schemeClr val="accent5"/>
+                </a:solidFill>
+                <a:latin typeface="Calibri" pitchFamily="34" charset="0"/>
+                <a:ea typeface="Calibri" pitchFamily="34" charset="-122"/>
+                <a:cs typeface="Calibri" pitchFamily="34" charset="-120"/>
+              </a:rPr>
+              <a:t>SE REPORTA</a:t>
+            </a:r>
+            <a:endParaRPr lang="en-US" sz="1200" dirty="0"/>
+          </a:p>
+        </p:txBody>
+      </p:sp>
+      <p:sp>
+        <p:nvSpPr>
+          <p:cNvPr id="12" name="Etapa detalle 2"/>
+          <p:cNvSpPr txBox="1"/>
+          <p:nvPr/>
+        </p:nvSpPr>
+        <p:spPr>
+          <a:xfrm>
+            <a:off x="3611880" y="2606040"/>
+            <a:ext cx="1920240" cy="914400"/>
+          </a:xfrm>
+          <a:prstGeom prst="rect">
+            <a:avLst/>
+          </a:prstGeom>
+          <a:noFill/>
+          <a:ln/>
+        </p:spPr>
+        <p:txBody>
+          <a:bodyPr wrap="square" lIns="0" tIns="0" rIns="0" bIns="0" rtlCol="0" anchor="t"/>
+          <a:lstStyle/>
+          <a:p>
+            <a:pPr algn="ctr" indent="0" marL="0">
+              <a:buNone/>
+            </a:pPr>
+            <a:r>
+              <a:rPr lang="en-US" sz="1400" dirty="0">
+                <a:solidFill>
+                  <a:schemeClr val="tx1"/>
+                </a:solidFill>
+                <a:latin typeface="Calibri" pitchFamily="34" charset="0"/>
+                <a:ea typeface="Calibri" pitchFamily="34" charset="-122"/>
+                <a:cs typeface="Calibri" pitchFamily="34" charset="-120"/>
+              </a:rPr>
+              <a:t>Incidencia en el código nuevo del análisis</a:t>
+            </a:r>
+            <a:endParaRPr lang="en-US" sz="1400" dirty="0"/>
+          </a:p>
+        </p:txBody>
+      </p:sp>
+      <p:sp>
+        <p:nvSpPr>
+          <p:cNvPr id="13" name="Flecha etapa 2"/>
+          <p:cNvSpPr txBox="1"/>
+          <p:nvPr/>
+        </p:nvSpPr>
+        <p:spPr>
+          <a:xfrm>
+            <a:off x="5760720" y="2377440"/>
+            <a:ext cx="548640" cy="457200"/>
+          </a:xfrm>
+          <a:prstGeom prst="rect">
+            <a:avLst/>
+          </a:prstGeom>
+          <a:noFill/>
+          <a:ln/>
+        </p:spPr>
+        <p:txBody>
+          <a:bodyPr wrap="square" lIns="0" tIns="0" rIns="0" bIns="0" rtlCol="0" anchor="ctr"/>
+          <a:lstStyle/>
+          <a:p>
+            <a:pPr algn="ctr" indent="0" marL="0">
+              <a:buNone/>
+            </a:pPr>
+            <a:r>
+              <a:rPr lang="en-US" sz="2800" b="1" dirty="0">
+                <a:solidFill>
+                  <a:schemeClr val="accent5"/>
+                </a:solidFill>
+                <a:latin typeface="Calibri" pitchFamily="34" charset="0"/>
+                <a:ea typeface="Calibri" pitchFamily="34" charset="-122"/>
+                <a:cs typeface="Calibri" pitchFamily="34" charset="-120"/>
+              </a:rPr>
+              <a:t>→</a:t>
+            </a:r>
+            <a:endParaRPr lang="en-US" sz="2800" dirty="0"/>
+          </a:p>
+        </p:txBody>
+      </p:sp>
+      <p:sp>
+        <p:nvSpPr>
+          <p:cNvPr id="14" name="Etapa Quality Gate"/>
+          <p:cNvSpPr/>
+          <p:nvPr/>
+        </p:nvSpPr>
+        <p:spPr>
+          <a:xfrm>
+            <a:off x="6309360" y="1554480"/>
+            <a:ext cx="2377440" cy="2194560"/>
+          </a:xfrm>
+          <a:prstGeom prst="roundRect">
+            <a:avLst>
+              <a:gd name="adj" fmla="val 5000"/>
+            </a:avLst>
+          </a:prstGeom>
+          <a:solidFill>
+            <a:schemeClr val="accent1"/>
+          </a:solidFill>
+          <a:ln w="12700">
+            <a:solidFill>
+              <a:schemeClr val="accent1"/>
+            </a:solidFill>
+            <a:prstDash val="solid"/>
+          </a:ln>
+        </p:spPr>
+      </p:sp>
+      <p:sp>
+        <p:nvSpPr>
+          <p:cNvPr id="15" name="Etapa título 3"/>
+          <p:cNvSpPr txBox="1"/>
+          <p:nvPr/>
+        </p:nvSpPr>
+        <p:spPr>
+          <a:xfrm>
+            <a:off x="6492240" y="1737360"/>
+            <a:ext cx="2011680" cy="411480"/>
+          </a:xfrm>
+          <a:prstGeom prst="rect">
+            <a:avLst/>
+          </a:prstGeom>
+          <a:noFill/>
+          <a:ln/>
+        </p:spPr>
+        <p:txBody>
+          <a:bodyPr wrap="square" lIns="0" tIns="0" rIns="0" bIns="0" rtlCol="0" anchor="ctr"/>
+          <a:lstStyle/>
+          <a:p>
+            <a:pPr algn="ctr" indent="0" marL="0">
+              <a:buNone/>
+            </a:pPr>
+            <a:r>
+              <a:rPr lang="en-US" sz="2000" b="1" dirty="0">
+                <a:solidFill>
+                  <a:schemeClr val="bg1"/>
+                </a:solidFill>
+                <a:latin typeface="Calibri" pitchFamily="34" charset="0"/>
+                <a:ea typeface="Calibri" pitchFamily="34" charset="-122"/>
+                <a:cs typeface="Calibri" pitchFamily="34" charset="-120"/>
+              </a:rPr>
+              <a:t>Quality Gate</a:t>
+            </a:r>
+            <a:endParaRPr lang="en-US" sz="2000" dirty="0"/>
+          </a:p>
+        </p:txBody>
+      </p:sp>
+      <p:sp>
+        <p:nvSpPr>
+          <p:cNvPr id="16" name="Etapa verbo 3"/>
+          <p:cNvSpPr txBox="1"/>
+          <p:nvPr/>
+        </p:nvSpPr>
+        <p:spPr>
+          <a:xfrm>
+            <a:off x="6492240" y="2194560"/>
+            <a:ext cx="2011680" cy="274320"/>
+          </a:xfrm>
+          <a:prstGeom prst="rect">
+            <a:avLst/>
+          </a:prstGeom>
+          <a:noFill/>
+          <a:ln/>
+        </p:spPr>
+        <p:txBody>
+          <a:bodyPr wrap="square" lIns="0" tIns="0" rIns="0" bIns="0" rtlCol="0" anchor="ctr"/>
+          <a:lstStyle/>
+          <a:p>
+            <a:pPr algn="ctr" indent="0" marL="0">
+              <a:buNone/>
+            </a:pPr>
+            <a:r>
+              <a:rPr lang="en-US" sz="1200" b="1" dirty="0">
+                <a:solidFill>
+                  <a:srgbClr val="C9DDEE"/>
+                </a:solidFill>
+                <a:latin typeface="Calibri" pitchFamily="34" charset="0"/>
+                <a:ea typeface="Calibri" pitchFamily="34" charset="-122"/>
+                <a:cs typeface="Calibri" pitchFamily="34" charset="-120"/>
+              </a:rPr>
+              <a:t>BLOQUEA</a:t>
+            </a:r>
+            <a:endParaRPr lang="en-US" sz="1200" dirty="0"/>
+          </a:p>
+        </p:txBody>
+      </p:sp>
+      <p:sp>
+        <p:nvSpPr>
+          <p:cNvPr id="17" name="Etapa detalle 3"/>
+          <p:cNvSpPr txBox="1"/>
+          <p:nvPr/>
+        </p:nvSpPr>
+        <p:spPr>
+          <a:xfrm>
+            <a:off x="6537960" y="2606040"/>
+            <a:ext cx="1920240" cy="914400"/>
+          </a:xfrm>
+          <a:prstGeom prst="rect">
+            <a:avLst/>
+          </a:prstGeom>
+          <a:noFill/>
+          <a:ln/>
+        </p:spPr>
+        <p:txBody>
+          <a:bodyPr wrap="square" lIns="0" tIns="0" rIns="0" bIns="0" rtlCol="0" anchor="t"/>
+          <a:lstStyle/>
+          <a:p>
+            <a:pPr algn="ctr" indent="0" marL="0">
+              <a:buNone/>
+            </a:pPr>
+            <a:r>
+              <a:rPr lang="en-US" sz="1400" dirty="0">
+                <a:solidFill>
+                  <a:schemeClr val="bg1"/>
+                </a:solidFill>
+                <a:latin typeface="Calibri" pitchFamily="34" charset="0"/>
+                <a:ea typeface="Calibri" pitchFamily="34" charset="-122"/>
+                <a:cs typeface="Calibri" pitchFamily="34" charset="-120"/>
+              </a:rPr>
+              <a:t>new_violations = 0 + topes globales 250 / 120 / 80 %</a:t>
+            </a:r>
+            <a:endParaRPr lang="en-US" sz="1400" dirty="0"/>
+          </a:p>
+        </p:txBody>
+      </p:sp>
+      <p:sp>
+        <p:nvSpPr>
+          <p:cNvPr id="18" name="Conclusión gate-profile"/>
+          <p:cNvSpPr txBox="1"/>
+          <p:nvPr/>
+        </p:nvSpPr>
+        <p:spPr>
+          <a:xfrm>
+            <a:off x="457200" y="4069080"/>
+            <a:ext cx="8229600" cy="365760"/>
+          </a:xfrm>
+          <a:prstGeom prst="rect">
+            <a:avLst/>
+          </a:prstGeom>
+          <a:noFill/>
+          <a:ln/>
+        </p:spPr>
+        <p:txBody>
+          <a:bodyPr wrap="square" lIns="0" tIns="0" rIns="0" bIns="0" rtlCol="0" anchor="ctr"/>
+          <a:lstStyle/>
+          <a:p>
+            <a:pPr indent="0" marL="0">
+              <a:buNone/>
+            </a:pPr>
+            <a:r>
+              <a:rPr lang="en-US" sz="1600" b="1" dirty="0">
+                <a:solidFill>
+                  <a:schemeClr val="tx2"/>
+                </a:solidFill>
+                <a:latin typeface="Calibri" pitchFamily="34" charset="0"/>
+                <a:ea typeface="Calibri" pitchFamily="34" charset="-122"/>
+                <a:cs typeface="Calibri" pitchFamily="34" charset="-120"/>
+              </a:rPr>
+              <a:t>Así la complejidad se controla método a método, y el total del sistema no crece sin control.</a:t>
+            </a:r>
+            <a:endParaRPr lang="en-US" sz="1600" dirty="0"/>
+          </a:p>
+        </p:txBody>
+      </p:sp>
+      <p:sp>
+        <p:nvSpPr>
+          <p:cNvPr id="25" name="Slide Number Placeholder 0"/>
+          <p:cNvSpPr>
+            <a:spLocks noGrp="1"/>
+          </p:cNvSpPr>
+          <p:nvPr>
+            <p:ph type="sldNum" sz="quarter" idx="4294967295"/>
+          </p:nvPr>
+        </p:nvSpPr>
+        <p:spPr>
+          <a:xfrm>
+            <a:off x="8229600" y="4754880"/>
+            <a:ext cx="457200" cy="274320"/>
+          </a:xfrm>
+          <a:prstGeom prst="rect">
+            <a:avLst/>
+          </a:prstGeom>
+          <a:extLst>
+            <a:ext uri="{C572A759-6A51-4108-AA02-DFA0A04FC94B}">
+              <ma14:wrappingTextBoxFlag xmlns:ma14="http://schemas.microsoft.com/office/mac/drawingml/2011/main" val="0"/>
+            </a:ext>
+          </a:extLst>
+        </p:spPr>
+        <p:txBody>
+          <a:bodyPr/>
+          <a:lstStyle>
+            <a:lvl1pPr>
+              <a:defRPr sz="1000">
+                <a:solidFill>
+                  <a:schemeClr val="accent5"/>
+                </a:solidFill>
+              </a:defRPr>
+            </a:lvl1pPr>
+          </a:lstStyle>
+          <a:p>
+            <a:pPr algn="l"/>
+            <a:fld id="{F7021451-1387-4CA6-816F-3879F97B5CBC}" type="slidenum">
+              <a:rPr b="0" lang="en-US"/>
+              <a:t>15</a:t>
+            </a:fld>
+            <a:endParaRPr lang="en-US"/>
+          </a:p>
+        </p:txBody>
+      </p:sp>
+    </p:spTree>
+  </p:cSld>
+  <p:clrMapOvr>
+    <a:masterClrMapping/>
+  </p:clrMapOvr>
+</p:sld>
+</file>
+
+<file path=ppt/slides/slide16.xml><?xml version="1.0" encoding="utf-8"?>
+<p:sld xmlns:a="http://schemas.openxmlformats.org/drawingml/2006/main" xmlns:r="http://schemas.openxmlformats.org/officeDocument/2006/relationships" xmlns:p="http://schemas.openxmlformats.org/presentationml/2006/main">
+  <p:cSld name="Slide 16">
+    <p:spTree>
+      <p:nvGrpSpPr>
+        <p:cNvPr id="1" name=""/>
+        <p:cNvGrpSpPr/>
+        <p:nvPr/>
+      </p:nvGrpSpPr>
+      <p:grpSpPr>
+        <a:xfrm>
+          <a:off x="0" y="0"/>
+          <a:ext cx="0" cy="0"/>
+          <a:chOff x="0" y="0"/>
+          <a:chExt cx="0" cy="0"/>
+        </a:xfrm>
+      </p:grpSpPr>
+      <p:sp>
+        <p:nvSpPr>
+          <p:cNvPr id="2" name="Text 0"/>
+          <p:cNvSpPr/>
+          <p:nvPr>
+            <p:ph idx="100" type="title" hasCustomPrompt="1"/>
+          </p:nvPr>
+        </p:nvSpPr>
+        <p:spPr>
+          <a:xfrm>
+            <a:off x="457200" y="320040"/>
+            <a:ext cx="8229600" cy="731520"/>
+          </a:xfrm>
+          <a:prstGeom prst="rect">
+            <a:avLst/>
+          </a:prstGeom>
+          <a:noFill/>
+          <a:ln/>
+        </p:spPr>
+        <p:txBody>
+          <a:bodyPr wrap="square" lIns="0" tIns="0" rIns="0" bIns="0" rtlCol="0" anchor="t"/>
+          <a:lstStyle/>
+          <a:p>
+            <a:pPr algn="l" indent="0" marL="0">
+              <a:buNone/>
+            </a:pPr>
+            <a:r>
+              <a:rPr lang="en-US" sz="3200" b="1" dirty="0">
+                <a:solidFill>
+                  <a:schemeClr val="tx2"/>
+                </a:solidFill>
+              </a:rPr>
+              <a:t>De dónde salen 250 y 120</a:t>
+            </a:r>
+            <a:endParaRPr lang="en-US" sz="3200" dirty="0"/>
+          </a:p>
+        </p:txBody>
+      </p:sp>
+      <p:sp>
+        <p:nvSpPr>
+          <p:cNvPr id="4" name="Tarjeta cal 1"/>
+          <p:cNvSpPr/>
+          <p:nvPr/>
+        </p:nvSpPr>
+        <p:spPr>
+          <a:xfrm>
+            <a:off x="457200" y="1371600"/>
+            <a:ext cx="2560320" cy="1737360"/>
+          </a:xfrm>
+          <a:prstGeom prst="roundRect">
+            <a:avLst>
+              <a:gd name="adj" fmla="val 6316"/>
+            </a:avLst>
+          </a:prstGeom>
+          <a:solidFill>
+            <a:schemeClr val="bg2"/>
+          </a:solidFill>
+          <a:ln w="12700">
+            <a:solidFill>
+              <a:schemeClr val="bg2"/>
+            </a:solidFill>
+            <a:prstDash val="solid"/>
+          </a:ln>
+        </p:spPr>
+      </p:sp>
+      <p:sp>
+        <p:nvSpPr>
+          <p:cNvPr id="5" name="Cifra cal 1"/>
+          <p:cNvSpPr txBox="1"/>
+          <p:nvPr/>
+        </p:nvSpPr>
+        <p:spPr>
+          <a:xfrm>
+            <a:off x="640080" y="1463040"/>
+            <a:ext cx="2194560" cy="868680"/>
+          </a:xfrm>
+          <a:prstGeom prst="rect">
+            <a:avLst/>
+          </a:prstGeom>
+          <a:noFill/>
+          <a:ln/>
+        </p:spPr>
+        <p:txBody>
+          <a:bodyPr wrap="square" lIns="0" tIns="0" rIns="0" bIns="0" rtlCol="0" anchor="ctr"/>
+          <a:lstStyle/>
+          <a:p>
+            <a:pPr algn="ctr" indent="0" marL="0">
+              <a:buNone/>
+            </a:pPr>
+            <a:r>
+              <a:rPr lang="en-US" sz="4800" b="1" dirty="0">
+                <a:solidFill>
+                  <a:schemeClr val="accent1"/>
+                </a:solidFill>
+                <a:latin typeface="Calibri" pitchFamily="34" charset="0"/>
+                <a:ea typeface="Calibri" pitchFamily="34" charset="-122"/>
+                <a:cs typeface="Calibri" pitchFamily="34" charset="-120"/>
+              </a:rPr>
+              <a:t>136</a:t>
+            </a:r>
+            <a:endParaRPr lang="en-US" sz="4800" dirty="0"/>
+          </a:p>
+        </p:txBody>
+      </p:sp>
+      <p:sp>
+        <p:nvSpPr>
+          <p:cNvPr id="6" name="Etiqueta cal 1"/>
+          <p:cNvSpPr txBox="1"/>
+          <p:nvPr/>
+        </p:nvSpPr>
+        <p:spPr>
+          <a:xfrm>
+            <a:off x="640080" y="2331720"/>
+            <a:ext cx="2194560" cy="640080"/>
+          </a:xfrm>
+          <a:prstGeom prst="rect">
+            <a:avLst/>
+          </a:prstGeom>
+          <a:noFill/>
+          <a:ln/>
+        </p:spPr>
+        <p:txBody>
+          <a:bodyPr wrap="square" lIns="0" tIns="0" rIns="0" bIns="0" rtlCol="0" anchor="t"/>
+          <a:lstStyle/>
+          <a:p>
+            <a:pPr algn="ctr" indent="0" marL="0">
+              <a:buNone/>
+            </a:pPr>
+            <a:r>
+              <a:rPr lang="en-US" sz="1400" dirty="0">
+                <a:solidFill>
+                  <a:schemeClr val="tx1"/>
+                </a:solidFill>
+                <a:latin typeface="Calibri" pitchFamily="34" charset="0"/>
+                <a:ea typeface="Calibri" pitchFamily="34" charset="-122"/>
+                <a:cs typeface="Calibri" pitchFamily="34" charset="-120"/>
+              </a:rPr>
+              <a:t>complejidad ciclomática total (tope 250)</a:t>
+            </a:r>
+            <a:endParaRPr lang="en-US" sz="1400" dirty="0"/>
+          </a:p>
+        </p:txBody>
+      </p:sp>
+      <p:sp>
+        <p:nvSpPr>
+          <p:cNvPr id="7" name="Tarjeta cal 2"/>
+          <p:cNvSpPr/>
+          <p:nvPr/>
+        </p:nvSpPr>
+        <p:spPr>
+          <a:xfrm>
+            <a:off x="3291840" y="1371600"/>
+            <a:ext cx="2560320" cy="1737360"/>
+          </a:xfrm>
+          <a:prstGeom prst="roundRect">
+            <a:avLst>
+              <a:gd name="adj" fmla="val 6316"/>
+            </a:avLst>
+          </a:prstGeom>
+          <a:solidFill>
+            <a:schemeClr val="bg2"/>
+          </a:solidFill>
+          <a:ln w="12700">
+            <a:solidFill>
+              <a:schemeClr val="bg2"/>
+            </a:solidFill>
+            <a:prstDash val="solid"/>
+          </a:ln>
+        </p:spPr>
+      </p:sp>
+      <p:sp>
+        <p:nvSpPr>
+          <p:cNvPr id="8" name="Cifra cal 2"/>
+          <p:cNvSpPr txBox="1"/>
+          <p:nvPr/>
+        </p:nvSpPr>
+        <p:spPr>
+          <a:xfrm>
+            <a:off x="3474720" y="1463040"/>
+            <a:ext cx="2194560" cy="868680"/>
+          </a:xfrm>
+          <a:prstGeom prst="rect">
+            <a:avLst/>
+          </a:prstGeom>
+          <a:noFill/>
+          <a:ln/>
+        </p:spPr>
+        <p:txBody>
+          <a:bodyPr wrap="square" lIns="0" tIns="0" rIns="0" bIns="0" rtlCol="0" anchor="ctr"/>
+          <a:lstStyle/>
+          <a:p>
+            <a:pPr algn="ctr" indent="0" marL="0">
+              <a:buNone/>
+            </a:pPr>
+            <a:r>
+              <a:rPr lang="en-US" sz="4800" b="1" dirty="0">
+                <a:solidFill>
+                  <a:schemeClr val="accent1"/>
+                </a:solidFill>
+                <a:latin typeface="Calibri" pitchFamily="34" charset="0"/>
+                <a:ea typeface="Calibri" pitchFamily="34" charset="-122"/>
+                <a:cs typeface="Calibri" pitchFamily="34" charset="-120"/>
+              </a:rPr>
+              <a:t>83</a:t>
+            </a:r>
+            <a:endParaRPr lang="en-US" sz="4800" dirty="0"/>
+          </a:p>
+        </p:txBody>
+      </p:sp>
+      <p:sp>
+        <p:nvSpPr>
+          <p:cNvPr id="9" name="Etiqueta cal 2"/>
+          <p:cNvSpPr txBox="1"/>
+          <p:nvPr/>
+        </p:nvSpPr>
+        <p:spPr>
+          <a:xfrm>
+            <a:off x="3474720" y="2331720"/>
+            <a:ext cx="2194560" cy="640080"/>
+          </a:xfrm>
+          <a:prstGeom prst="rect">
+            <a:avLst/>
+          </a:prstGeom>
+          <a:noFill/>
+          <a:ln/>
+        </p:spPr>
+        <p:txBody>
+          <a:bodyPr wrap="square" lIns="0" tIns="0" rIns="0" bIns="0" rtlCol="0" anchor="t"/>
+          <a:lstStyle/>
+          <a:p>
+            <a:pPr algn="ctr" indent="0" marL="0">
+              <a:buNone/>
+            </a:pPr>
+            <a:r>
+              <a:rPr lang="en-US" sz="1400" dirty="0">
+                <a:solidFill>
+                  <a:schemeClr val="tx1"/>
+                </a:solidFill>
+                <a:latin typeface="Calibri" pitchFamily="34" charset="0"/>
+                <a:ea typeface="Calibri" pitchFamily="34" charset="-122"/>
+                <a:cs typeface="Calibri" pitchFamily="34" charset="-120"/>
+              </a:rPr>
+              <a:t>complejidad cognitiva total (tope 120)</a:t>
+            </a:r>
+            <a:endParaRPr lang="en-US" sz="1400" dirty="0"/>
+          </a:p>
+        </p:txBody>
+      </p:sp>
+      <p:sp>
+        <p:nvSpPr>
+          <p:cNvPr id="10" name="Tarjeta cal 3"/>
+          <p:cNvSpPr/>
+          <p:nvPr/>
+        </p:nvSpPr>
+        <p:spPr>
+          <a:xfrm>
+            <a:off x="6126480" y="1371600"/>
+            <a:ext cx="2560320" cy="1737360"/>
+          </a:xfrm>
+          <a:prstGeom prst="roundRect">
+            <a:avLst>
+              <a:gd name="adj" fmla="val 6316"/>
+            </a:avLst>
+          </a:prstGeom>
+          <a:solidFill>
+            <a:schemeClr val="bg2"/>
+          </a:solidFill>
+          <a:ln w="12700">
+            <a:solidFill>
+              <a:schemeClr val="bg2"/>
+            </a:solidFill>
+            <a:prstDash val="solid"/>
+          </a:ln>
+        </p:spPr>
+      </p:sp>
+      <p:sp>
+        <p:nvSpPr>
+          <p:cNvPr id="11" name="Cifra cal 3"/>
+          <p:cNvSpPr txBox="1"/>
+          <p:nvPr/>
+        </p:nvSpPr>
+        <p:spPr>
+          <a:xfrm>
+            <a:off x="6309360" y="1463040"/>
+            <a:ext cx="2194560" cy="868680"/>
+          </a:xfrm>
+          <a:prstGeom prst="rect">
+            <a:avLst/>
+          </a:prstGeom>
+          <a:noFill/>
+          <a:ln/>
+        </p:spPr>
+        <p:txBody>
+          <a:bodyPr wrap="square" lIns="0" tIns="0" rIns="0" bIns="0" rtlCol="0" anchor="ctr"/>
+          <a:lstStyle/>
+          <a:p>
+            <a:pPr algn="ctr" indent="0" marL="0">
+              <a:buNone/>
+            </a:pPr>
+            <a:r>
+              <a:rPr lang="en-US" sz="4800" b="1" dirty="0">
+                <a:solidFill>
+                  <a:schemeClr val="accent1"/>
+                </a:solidFill>
+                <a:latin typeface="Calibri" pitchFamily="34" charset="0"/>
+                <a:ea typeface="Calibri" pitchFamily="34" charset="-122"/>
+                <a:cs typeface="Calibri" pitchFamily="34" charset="-120"/>
+              </a:rPr>
+              <a:t>10</a:t>
+            </a:r>
+            <a:endParaRPr lang="en-US" sz="4800" dirty="0"/>
+          </a:p>
+        </p:txBody>
+      </p:sp>
+      <p:sp>
+        <p:nvSpPr>
+          <p:cNvPr id="12" name="Etiqueta cal 3"/>
+          <p:cNvSpPr txBox="1"/>
+          <p:nvPr/>
+        </p:nvSpPr>
+        <p:spPr>
+          <a:xfrm>
+            <a:off x="6309360" y="2331720"/>
+            <a:ext cx="2194560" cy="640080"/>
+          </a:xfrm>
+          <a:prstGeom prst="rect">
+            <a:avLst/>
+          </a:prstGeom>
+          <a:noFill/>
+          <a:ln/>
+        </p:spPr>
+        <p:txBody>
+          <a:bodyPr wrap="square" lIns="0" tIns="0" rIns="0" bIns="0" rtlCol="0" anchor="t"/>
+          <a:lstStyle/>
+          <a:p>
+            <a:pPr algn="ctr" indent="0" marL="0">
+              <a:buNone/>
+            </a:pPr>
+            <a:r>
+              <a:rPr lang="en-US" sz="1400" dirty="0">
+                <a:solidFill>
+                  <a:schemeClr val="tx1"/>
+                </a:solidFill>
+                <a:latin typeface="Calibri" pitchFamily="34" charset="0"/>
+                <a:ea typeface="Calibri" pitchFamily="34" charset="-122"/>
+                <a:cs typeface="Calibri" pitchFamily="34" charset="-120"/>
+              </a:rPr>
+              <a:t>máximo por método: Main::runConsole</a:t>
+            </a:r>
+            <a:endParaRPr lang="en-US" sz="1400" dirty="0"/>
+          </a:p>
+        </p:txBody>
+      </p:sp>
+      <p:sp>
+        <p:nvSpPr>
+          <p:cNvPr id="13" name="Criterios calibración"/>
+          <p:cNvSpPr txBox="1"/>
+          <p:nvPr/>
+        </p:nvSpPr>
+        <p:spPr>
+          <a:xfrm>
+            <a:off x="457200" y="3337560"/>
+            <a:ext cx="8229600" cy="1280160"/>
+          </a:xfrm>
+          <a:prstGeom prst="rect">
+            <a:avLst/>
+          </a:prstGeom>
+          <a:noFill/>
+          <a:ln/>
+        </p:spPr>
+        <p:txBody>
+          <a:bodyPr wrap="square" lIns="0" tIns="0" rIns="0" bIns="0" rtlCol="0" anchor="t"/>
+          <a:lstStyle/>
+          <a:p>
+            <a:pPr marL="342900" indent="-342900">
+              <a:spcAft>
+                <a:spcPts val="800"/>
+              </a:spcAft>
+              <a:buSzPct val="100000"/>
+              <a:buChar char="•"/>
+            </a:pPr>
+            <a:r>
+              <a:rPr lang="en-US" sz="1500" dirty="0">
+                <a:solidFill>
+                  <a:schemeClr val="tx1"/>
+                </a:solidFill>
+                <a:latin typeface="Calibri" pitchFamily="34" charset="0"/>
+                <a:ea typeface="Calibri" pitchFamily="34" charset="-122"/>
+                <a:cs typeface="Calibri" pitchFamily="34" charset="-120"/>
+              </a:rPr>
+              <a:t>Tope ciclomático 250: medido 136, margen de crecimiento cercano al 80 %</a:t>
+            </a:r>
+            <a:endParaRPr lang="en-US" sz="1500" dirty="0"/>
+          </a:p>
+          <a:p>
+            <a:pPr marL="342900" indent="-342900">
+              <a:spcAft>
+                <a:spcPts val="800"/>
+              </a:spcAft>
+              <a:buSzPct val="100000"/>
+              <a:buChar char="•"/>
+            </a:pPr>
+            <a:r>
+              <a:rPr lang="en-US" sz="1500" dirty="0">
+                <a:solidFill>
+                  <a:schemeClr val="tx1"/>
+                </a:solidFill>
+                <a:latin typeface="Calibri" pitchFamily="34" charset="0"/>
+                <a:ea typeface="Calibri" pitchFamily="34" charset="-122"/>
+                <a:cs typeface="Calibri" pitchFamily="34" charset="-120"/>
+              </a:rPr>
+              <a:t>Tope cognitivo 120: medido 83, margen cercano al 45 %</a:t>
+            </a:r>
+            <a:endParaRPr lang="en-US" sz="1500" dirty="0"/>
+          </a:p>
+          <a:p>
+            <a:pPr marL="342900" indent="-342900">
+              <a:spcAft>
+                <a:spcPts val="800"/>
+              </a:spcAft>
+              <a:buSzPct val="100000"/>
+              <a:buChar char="•"/>
+            </a:pPr>
+            <a:r>
+              <a:rPr lang="en-US" sz="1500" dirty="0">
+                <a:solidFill>
+                  <a:schemeClr val="tx1"/>
+                </a:solidFill>
+                <a:latin typeface="Calibri" pitchFamily="34" charset="0"/>
+                <a:ea typeface="Calibri" pitchFamily="34" charset="-122"/>
+                <a:cs typeface="Calibri" pitchFamily="34" charset="-120"/>
+              </a:rPr>
+              <a:t>Por método: 10 y 15; hoy ningún método supera 10, y runConsole está justo en el límite</a:t>
+            </a:r>
+            <a:endParaRPr lang="en-US" sz="1500" dirty="0"/>
+          </a:p>
+        </p:txBody>
+      </p:sp>
+      <p:sp>
+        <p:nvSpPr>
+          <p:cNvPr id="25" name="Slide Number Placeholder 0"/>
+          <p:cNvSpPr>
+            <a:spLocks noGrp="1"/>
+          </p:cNvSpPr>
+          <p:nvPr>
+            <p:ph type="sldNum" sz="quarter" idx="4294967295"/>
+          </p:nvPr>
+        </p:nvSpPr>
+        <p:spPr>
+          <a:xfrm>
+            <a:off x="8229600" y="4754880"/>
+            <a:ext cx="457200" cy="274320"/>
+          </a:xfrm>
+          <a:prstGeom prst="rect">
+            <a:avLst/>
+          </a:prstGeom>
+          <a:extLst>
+            <a:ext uri="{C572A759-6A51-4108-AA02-DFA0A04FC94B}">
+              <ma14:wrappingTextBoxFlag xmlns:ma14="http://schemas.microsoft.com/office/mac/drawingml/2011/main" val="0"/>
+            </a:ext>
+          </a:extLst>
+        </p:spPr>
+        <p:txBody>
+          <a:bodyPr/>
+          <a:lstStyle>
+            <a:lvl1pPr>
+              <a:defRPr sz="1000">
+                <a:solidFill>
+                  <a:schemeClr val="accent5"/>
+                </a:solidFill>
+              </a:defRPr>
+            </a:lvl1pPr>
+          </a:lstStyle>
+          <a:p>
+            <a:pPr algn="l"/>
+            <a:fld id="{F7021451-1387-4CA6-816F-3879F97B5CBC}" type="slidenum">
+              <a:rPr b="0" lang="en-US"/>
+              <a:t>16</a:t>
+            </a:fld>
+            <a:endParaRPr lang="en-US"/>
+          </a:p>
+        </p:txBody>
+      </p:sp>
+    </p:spTree>
+  </p:cSld>
+  <p:clrMapOvr>
+    <a:masterClrMapping/>
+  </p:clrMapOvr>
+</p:sld>
+</file>
+
+<file path=ppt/slides/slide17.xml><?xml version="1.0" encoding="utf-8"?>
+<p:sld xmlns:a="http://schemas.openxmlformats.org/drawingml/2006/main" xmlns:r="http://schemas.openxmlformats.org/officeDocument/2006/relationships" xmlns:p="http://schemas.openxmlformats.org/presentationml/2006/main">
+  <p:cSld name="Slide 17">
+    <p:spTree>
+      <p:nvGrpSpPr>
+        <p:cNvPr id="1" name=""/>
+        <p:cNvGrpSpPr/>
+        <p:nvPr/>
+      </p:nvGrpSpPr>
+      <p:grpSpPr>
+        <a:xfrm>
+          <a:off x="0" y="0"/>
+          <a:ext cx="0" cy="0"/>
+          <a:chOff x="0" y="0"/>
+          <a:chExt cx="0" cy="0"/>
+        </a:xfrm>
+      </p:grpSpPr>
+      <p:sp>
+        <p:nvSpPr>
+          <p:cNvPr id="2" name="Text 0"/>
+          <p:cNvSpPr/>
+          <p:nvPr>
+            <p:ph idx="100" type="title" hasCustomPrompt="1"/>
+          </p:nvPr>
+        </p:nvSpPr>
+        <p:spPr>
+          <a:xfrm>
+            <a:off x="457200" y="320040"/>
+            <a:ext cx="8229600" cy="731520"/>
+          </a:xfrm>
+          <a:prstGeom prst="rect">
+            <a:avLst/>
+          </a:prstGeom>
+          <a:noFill/>
+          <a:ln/>
+        </p:spPr>
+        <p:txBody>
+          <a:bodyPr wrap="square" lIns="0" tIns="0" rIns="0" bIns="0" rtlCol="0" anchor="t"/>
+          <a:lstStyle/>
+          <a:p>
+            <a:pPr algn="l" indent="0" marL="0">
+              <a:buNone/>
+            </a:pPr>
+            <a:r>
+              <a:rPr lang="en-US" sz="3200" b="1" dirty="0">
+                <a:solidFill>
+                  <a:schemeClr val="tx2"/>
+                </a:solidFill>
+              </a:rPr>
+              <a:t>Del commit al semáforo</a:t>
+            </a:r>
+            <a:endParaRPr lang="en-US" sz="3200" dirty="0"/>
+          </a:p>
+        </p:txBody>
+      </p:sp>
+      <p:sp>
+        <p:nvSpPr>
+          <p:cNvPr id="4" name="Conector 1"/>
+          <p:cNvSpPr/>
+          <p:nvPr/>
+        </p:nvSpPr>
+        <p:spPr>
+          <a:xfrm>
+            <a:off x="1234440" y="1828800"/>
+            <a:ext cx="914400" cy="0"/>
+          </a:xfrm>
+          <a:prstGeom prst="line">
+            <a:avLst/>
+          </a:prstGeom>
+          <a:noFill/>
+          <a:ln w="25400">
+            <a:solidFill>
+              <a:schemeClr val="accent6"/>
+            </a:solidFill>
+            <a:prstDash val="solid"/>
+          </a:ln>
+        </p:spPr>
+      </p:sp>
+      <p:sp>
+        <p:nvSpPr>
+          <p:cNvPr id="5" name="Paso 1"/>
+          <p:cNvSpPr/>
+          <p:nvPr/>
+        </p:nvSpPr>
+        <p:spPr>
+          <a:xfrm>
+            <a:off x="685800" y="1508760"/>
+            <a:ext cx="640080" cy="640080"/>
+          </a:xfrm>
+          <a:prstGeom prst="ellipse">
+            <a:avLst/>
+          </a:prstGeom>
+          <a:solidFill>
+            <a:schemeClr val="accent1"/>
+          </a:solidFill>
+          <a:ln w="12700">
+            <a:solidFill>
+              <a:schemeClr val="accent1"/>
+            </a:solidFill>
+            <a:prstDash val="solid"/>
+          </a:ln>
+        </p:spPr>
+      </p:sp>
+      <p:sp>
+        <p:nvSpPr>
+          <p:cNvPr id="6" name="Número paso 1"/>
+          <p:cNvSpPr txBox="1"/>
+          <p:nvPr/>
+        </p:nvSpPr>
+        <p:spPr>
+          <a:xfrm>
+            <a:off x="685800" y="1508760"/>
+            <a:ext cx="640080" cy="640080"/>
+          </a:xfrm>
+          <a:prstGeom prst="rect">
+            <a:avLst/>
+          </a:prstGeom>
+          <a:noFill/>
+          <a:ln/>
+        </p:spPr>
+        <p:txBody>
+          <a:bodyPr wrap="square" lIns="0" tIns="0" rIns="0" bIns="0" rtlCol="0" anchor="ctr"/>
+          <a:lstStyle/>
+          <a:p>
+            <a:pPr algn="ctr" indent="0" marL="0">
+              <a:buNone/>
+            </a:pPr>
+            <a:r>
+              <a:rPr lang="en-US" sz="2200" b="1" dirty="0">
+                <a:solidFill>
+                  <a:schemeClr val="bg1"/>
+                </a:solidFill>
+                <a:latin typeface="Calibri" pitchFamily="34" charset="0"/>
+                <a:ea typeface="Calibri" pitchFamily="34" charset="-122"/>
+                <a:cs typeface="Calibri" pitchFamily="34" charset="-120"/>
+              </a:rPr>
+              <a:t>1</a:t>
+            </a:r>
+            <a:endParaRPr lang="en-US" sz="2200" dirty="0"/>
+          </a:p>
+        </p:txBody>
+      </p:sp>
+      <p:sp>
+        <p:nvSpPr>
+          <p:cNvPr id="7" name="Etiqueta paso 1"/>
+          <p:cNvSpPr txBox="1"/>
+          <p:nvPr/>
+        </p:nvSpPr>
+        <p:spPr>
+          <a:xfrm>
+            <a:off x="457200" y="2331720"/>
+            <a:ext cx="1554480" cy="731520"/>
+          </a:xfrm>
+          <a:prstGeom prst="rect">
+            <a:avLst/>
+          </a:prstGeom>
+          <a:noFill/>
+          <a:ln/>
+        </p:spPr>
+        <p:txBody>
+          <a:bodyPr wrap="square" lIns="0" tIns="0" rIns="0" bIns="0" rtlCol="0" anchor="t"/>
+          <a:lstStyle/>
+          <a:p>
+            <a:pPr algn="ctr" indent="0" marL="0">
+              <a:buNone/>
+            </a:pPr>
+            <a:r>
+              <a:rPr lang="en-US" sz="1400" dirty="0">
+                <a:solidFill>
+                  <a:schemeClr val="tx1"/>
+                </a:solidFill>
+                <a:latin typeface="Calibri" pitchFamily="34" charset="0"/>
+                <a:ea typeface="Calibri" pitchFamily="34" charset="-122"/>
+                <a:cs typeface="Calibri" pitchFamily="34" charset="-120"/>
+              </a:rPr>
+              <a:t>Push o pull request</a:t>
+            </a:r>
+            <a:endParaRPr lang="en-US" sz="1400" dirty="0"/>
+          </a:p>
+        </p:txBody>
+      </p:sp>
+      <p:sp>
+        <p:nvSpPr>
+          <p:cNvPr id="8" name="Conector 2"/>
+          <p:cNvSpPr/>
+          <p:nvPr/>
+        </p:nvSpPr>
+        <p:spPr>
+          <a:xfrm>
+            <a:off x="2926080" y="1828800"/>
+            <a:ext cx="914400" cy="0"/>
+          </a:xfrm>
+          <a:prstGeom prst="line">
+            <a:avLst/>
+          </a:prstGeom>
+          <a:noFill/>
+          <a:ln w="25400">
+            <a:solidFill>
+              <a:schemeClr val="accent6"/>
+            </a:solidFill>
+            <a:prstDash val="solid"/>
+          </a:ln>
+        </p:spPr>
+      </p:sp>
+      <p:sp>
+        <p:nvSpPr>
+          <p:cNvPr id="9" name="Paso 2"/>
+          <p:cNvSpPr/>
+          <p:nvPr/>
+        </p:nvSpPr>
+        <p:spPr>
+          <a:xfrm>
+            <a:off x="2377440" y="1508760"/>
+            <a:ext cx="640080" cy="640080"/>
+          </a:xfrm>
+          <a:prstGeom prst="ellipse">
+            <a:avLst/>
+          </a:prstGeom>
+          <a:solidFill>
+            <a:schemeClr val="accent1"/>
+          </a:solidFill>
+          <a:ln w="12700">
+            <a:solidFill>
+              <a:schemeClr val="accent1"/>
+            </a:solidFill>
+            <a:prstDash val="solid"/>
+          </a:ln>
+        </p:spPr>
+      </p:sp>
+      <p:sp>
+        <p:nvSpPr>
+          <p:cNvPr id="10" name="Número paso 2"/>
+          <p:cNvSpPr txBox="1"/>
+          <p:nvPr/>
+        </p:nvSpPr>
+        <p:spPr>
+          <a:xfrm>
+            <a:off x="2377440" y="1508760"/>
+            <a:ext cx="640080" cy="640080"/>
+          </a:xfrm>
+          <a:prstGeom prst="rect">
+            <a:avLst/>
+          </a:prstGeom>
+          <a:noFill/>
+          <a:ln/>
+        </p:spPr>
+        <p:txBody>
+          <a:bodyPr wrap="square" lIns="0" tIns="0" rIns="0" bIns="0" rtlCol="0" anchor="ctr"/>
+          <a:lstStyle/>
+          <a:p>
+            <a:pPr algn="ctr" indent="0" marL="0">
+              <a:buNone/>
+            </a:pPr>
+            <a:r>
+              <a:rPr lang="en-US" sz="2200" b="1" dirty="0">
+                <a:solidFill>
+                  <a:schemeClr val="bg1"/>
+                </a:solidFill>
+                <a:latin typeface="Calibri" pitchFamily="34" charset="0"/>
+                <a:ea typeface="Calibri" pitchFamily="34" charset="-122"/>
+                <a:cs typeface="Calibri" pitchFamily="34" charset="-120"/>
+              </a:rPr>
+              <a:t>2</a:t>
+            </a:r>
+            <a:endParaRPr lang="en-US" sz="2200" dirty="0"/>
+          </a:p>
+        </p:txBody>
+      </p:sp>
+      <p:sp>
+        <p:nvSpPr>
+          <p:cNvPr id="11" name="Etiqueta paso 2"/>
+          <p:cNvSpPr txBox="1"/>
+          <p:nvPr/>
+        </p:nvSpPr>
+        <p:spPr>
+          <a:xfrm>
+            <a:off x="2148840" y="2331720"/>
+            <a:ext cx="1554480" cy="731520"/>
+          </a:xfrm>
+          <a:prstGeom prst="rect">
+            <a:avLst/>
+          </a:prstGeom>
+          <a:noFill/>
+          <a:ln/>
+        </p:spPr>
+        <p:txBody>
+          <a:bodyPr wrap="square" lIns="0" tIns="0" rIns="0" bIns="0" rtlCol="0" anchor="t"/>
+          <a:lstStyle/>
+          <a:p>
+            <a:pPr algn="ctr" indent="0" marL="0">
+              <a:buNone/>
+            </a:pPr>
+            <a:r>
+              <a:rPr lang="en-US" sz="1400" dirty="0">
+                <a:solidFill>
+                  <a:schemeClr val="tx1"/>
+                </a:solidFill>
+                <a:latin typeface="Calibri" pitchFamily="34" charset="0"/>
+                <a:ea typeface="Calibri" pitchFamily="34" charset="-122"/>
+                <a:cs typeface="Calibri" pitchFamily="34" charset="-120"/>
+              </a:rPr>
+              <a:t>Pruebas unitarias y Karate</a:t>
+            </a:r>
+            <a:endParaRPr lang="en-US" sz="1400" dirty="0"/>
+          </a:p>
+        </p:txBody>
+      </p:sp>
+      <p:sp>
+        <p:nvSpPr>
+          <p:cNvPr id="12" name="Conector 3"/>
+          <p:cNvSpPr/>
+          <p:nvPr/>
+        </p:nvSpPr>
+        <p:spPr>
+          <a:xfrm>
+            <a:off x="4617720" y="1828800"/>
+            <a:ext cx="914400" cy="0"/>
+          </a:xfrm>
+          <a:prstGeom prst="line">
+            <a:avLst/>
+          </a:prstGeom>
+          <a:noFill/>
+          <a:ln w="25400">
+            <a:solidFill>
+              <a:schemeClr val="accent6"/>
+            </a:solidFill>
+            <a:prstDash val="solid"/>
+          </a:ln>
+        </p:spPr>
+      </p:sp>
+      <p:sp>
+        <p:nvSpPr>
+          <p:cNvPr id="13" name="Paso 3"/>
+          <p:cNvSpPr/>
+          <p:nvPr/>
+        </p:nvSpPr>
+        <p:spPr>
+          <a:xfrm>
+            <a:off x="4069080" y="1508760"/>
+            <a:ext cx="640080" cy="640080"/>
+          </a:xfrm>
+          <a:prstGeom prst="ellipse">
+            <a:avLst/>
+          </a:prstGeom>
+          <a:solidFill>
+            <a:schemeClr val="accent1"/>
+          </a:solidFill>
+          <a:ln w="12700">
+            <a:solidFill>
+              <a:schemeClr val="accent1"/>
+            </a:solidFill>
+            <a:prstDash val="solid"/>
+          </a:ln>
+        </p:spPr>
+      </p:sp>
+      <p:sp>
+        <p:nvSpPr>
+          <p:cNvPr id="14" name="Número paso 3"/>
+          <p:cNvSpPr txBox="1"/>
+          <p:nvPr/>
+        </p:nvSpPr>
+        <p:spPr>
+          <a:xfrm>
+            <a:off x="4069080" y="1508760"/>
+            <a:ext cx="640080" cy="640080"/>
+          </a:xfrm>
+          <a:prstGeom prst="rect">
+            <a:avLst/>
+          </a:prstGeom>
+          <a:noFill/>
+          <a:ln/>
+        </p:spPr>
+        <p:txBody>
+          <a:bodyPr wrap="square" lIns="0" tIns="0" rIns="0" bIns="0" rtlCol="0" anchor="ctr"/>
+          <a:lstStyle/>
+          <a:p>
+            <a:pPr algn="ctr" indent="0" marL="0">
+              <a:buNone/>
+            </a:pPr>
+            <a:r>
+              <a:rPr lang="en-US" sz="2200" b="1" dirty="0">
+                <a:solidFill>
+                  <a:schemeClr val="bg1"/>
+                </a:solidFill>
+                <a:latin typeface="Calibri" pitchFamily="34" charset="0"/>
+                <a:ea typeface="Calibri" pitchFamily="34" charset="-122"/>
+                <a:cs typeface="Calibri" pitchFamily="34" charset="-120"/>
+              </a:rPr>
+              <a:t>3</a:t>
+            </a:r>
+            <a:endParaRPr lang="en-US" sz="2200" dirty="0"/>
+          </a:p>
+        </p:txBody>
+      </p:sp>
+      <p:sp>
+        <p:nvSpPr>
+          <p:cNvPr id="15" name="Etiqueta paso 3"/>
+          <p:cNvSpPr txBox="1"/>
+          <p:nvPr/>
+        </p:nvSpPr>
+        <p:spPr>
+          <a:xfrm>
+            <a:off x="3840480" y="2331720"/>
+            <a:ext cx="1554480" cy="731520"/>
+          </a:xfrm>
+          <a:prstGeom prst="rect">
+            <a:avLst/>
+          </a:prstGeom>
+          <a:noFill/>
+          <a:ln/>
+        </p:spPr>
+        <p:txBody>
+          <a:bodyPr wrap="square" lIns="0" tIns="0" rIns="0" bIns="0" rtlCol="0" anchor="t"/>
+          <a:lstStyle/>
+          <a:p>
+            <a:pPr algn="ctr" indent="0" marL="0">
+              <a:buNone/>
+            </a:pPr>
+            <a:r>
+              <a:rPr lang="en-US" sz="1400" dirty="0">
+                <a:solidFill>
+                  <a:schemeClr val="tx1"/>
+                </a:solidFill>
+                <a:latin typeface="Calibri" pitchFamily="34" charset="0"/>
+                <a:ea typeface="Calibri" pitchFamily="34" charset="-122"/>
+                <a:cs typeface="Calibri" pitchFamily="34" charset="-120"/>
+              </a:rPr>
+              <a:t>Cobertura JaCoCo</a:t>
+            </a:r>
+            <a:endParaRPr lang="en-US" sz="1400" dirty="0"/>
+          </a:p>
+        </p:txBody>
+      </p:sp>
+      <p:sp>
+        <p:nvSpPr>
+          <p:cNvPr id="16" name="Conector 4"/>
+          <p:cNvSpPr/>
+          <p:nvPr/>
+        </p:nvSpPr>
+        <p:spPr>
+          <a:xfrm>
+            <a:off x="6309360" y="1828800"/>
+            <a:ext cx="914400" cy="0"/>
+          </a:xfrm>
+          <a:prstGeom prst="line">
+            <a:avLst/>
+          </a:prstGeom>
+          <a:noFill/>
+          <a:ln w="25400">
+            <a:solidFill>
+              <a:schemeClr val="accent6"/>
+            </a:solidFill>
+            <a:prstDash val="solid"/>
+          </a:ln>
+        </p:spPr>
+      </p:sp>
+      <p:sp>
+        <p:nvSpPr>
+          <p:cNvPr id="17" name="Paso 4"/>
+          <p:cNvSpPr/>
+          <p:nvPr/>
+        </p:nvSpPr>
+        <p:spPr>
+          <a:xfrm>
+            <a:off x="5760720" y="1508760"/>
+            <a:ext cx="640080" cy="640080"/>
+          </a:xfrm>
+          <a:prstGeom prst="ellipse">
+            <a:avLst/>
+          </a:prstGeom>
+          <a:solidFill>
+            <a:schemeClr val="accent1"/>
+          </a:solidFill>
+          <a:ln w="12700">
+            <a:solidFill>
+              <a:schemeClr val="accent1"/>
+            </a:solidFill>
+            <a:prstDash val="solid"/>
+          </a:ln>
+        </p:spPr>
+      </p:sp>
+      <p:sp>
+        <p:nvSpPr>
+          <p:cNvPr id="18" name="Número paso 4"/>
+          <p:cNvSpPr txBox="1"/>
+          <p:nvPr/>
+        </p:nvSpPr>
+        <p:spPr>
+          <a:xfrm>
+            <a:off x="5760720" y="1508760"/>
+            <a:ext cx="640080" cy="640080"/>
+          </a:xfrm>
+          <a:prstGeom prst="rect">
+            <a:avLst/>
+          </a:prstGeom>
+          <a:noFill/>
+          <a:ln/>
+        </p:spPr>
+        <p:txBody>
+          <a:bodyPr wrap="square" lIns="0" tIns="0" rIns="0" bIns="0" rtlCol="0" anchor="ctr"/>
+          <a:lstStyle/>
+          <a:p>
+            <a:pPr algn="ctr" indent="0" marL="0">
+              <a:buNone/>
+            </a:pPr>
+            <a:r>
+              <a:rPr lang="en-US" sz="2200" b="1" dirty="0">
+                <a:solidFill>
+                  <a:schemeClr val="bg1"/>
+                </a:solidFill>
+                <a:latin typeface="Calibri" pitchFamily="34" charset="0"/>
+                <a:ea typeface="Calibri" pitchFamily="34" charset="-122"/>
+                <a:cs typeface="Calibri" pitchFamily="34" charset="-120"/>
+              </a:rPr>
+              <a:t>4</a:t>
+            </a:r>
+            <a:endParaRPr lang="en-US" sz="2200" dirty="0"/>
+          </a:p>
+        </p:txBody>
+      </p:sp>
+      <p:sp>
+        <p:nvSpPr>
+          <p:cNvPr id="19" name="Etiqueta paso 4"/>
+          <p:cNvSpPr txBox="1"/>
+          <p:nvPr/>
+        </p:nvSpPr>
+        <p:spPr>
+          <a:xfrm>
+            <a:off x="5532120" y="2331720"/>
+            <a:ext cx="1554480" cy="731520"/>
+          </a:xfrm>
+          <a:prstGeom prst="rect">
+            <a:avLst/>
+          </a:prstGeom>
+          <a:noFill/>
+          <a:ln/>
+        </p:spPr>
+        <p:txBody>
+          <a:bodyPr wrap="square" lIns="0" tIns="0" rIns="0" bIns="0" rtlCol="0" anchor="t"/>
+          <a:lstStyle/>
+          <a:p>
+            <a:pPr algn="ctr" indent="0" marL="0">
+              <a:buNone/>
+            </a:pPr>
+            <a:r>
+              <a:rPr lang="en-US" sz="1400" dirty="0">
+                <a:solidFill>
+                  <a:schemeClr val="tx1"/>
+                </a:solidFill>
+                <a:latin typeface="Calibri" pitchFamily="34" charset="0"/>
+                <a:ea typeface="Calibri" pitchFamily="34" charset="-122"/>
+                <a:cs typeface="Calibri" pitchFamily="34" charset="-120"/>
+              </a:rPr>
+              <a:t>Análisis en SonarCloud</a:t>
+            </a:r>
+            <a:endParaRPr lang="en-US" sz="1400" dirty="0"/>
+          </a:p>
+        </p:txBody>
+      </p:sp>
+      <p:sp>
+        <p:nvSpPr>
+          <p:cNvPr id="20" name="Paso 5"/>
+          <p:cNvSpPr/>
+          <p:nvPr/>
+        </p:nvSpPr>
+        <p:spPr>
+          <a:xfrm>
+            <a:off x="7452360" y="1508760"/>
+            <a:ext cx="640080" cy="640080"/>
+          </a:xfrm>
+          <a:prstGeom prst="ellipse">
+            <a:avLst/>
+          </a:prstGeom>
+          <a:solidFill>
+            <a:schemeClr val="accent1"/>
+          </a:solidFill>
+          <a:ln w="12700">
+            <a:solidFill>
+              <a:schemeClr val="accent1"/>
+            </a:solidFill>
+            <a:prstDash val="solid"/>
+          </a:ln>
+        </p:spPr>
+      </p:sp>
+      <p:sp>
+        <p:nvSpPr>
+          <p:cNvPr id="21" name="Número paso 5"/>
+          <p:cNvSpPr txBox="1"/>
+          <p:nvPr/>
+        </p:nvSpPr>
+        <p:spPr>
+          <a:xfrm>
+            <a:off x="7452360" y="1508760"/>
+            <a:ext cx="640080" cy="640080"/>
+          </a:xfrm>
+          <a:prstGeom prst="rect">
+            <a:avLst/>
+          </a:prstGeom>
+          <a:noFill/>
+          <a:ln/>
+        </p:spPr>
+        <p:txBody>
+          <a:bodyPr wrap="square" lIns="0" tIns="0" rIns="0" bIns="0" rtlCol="0" anchor="ctr"/>
+          <a:lstStyle/>
+          <a:p>
+            <a:pPr algn="ctr" indent="0" marL="0">
+              <a:buNone/>
+            </a:pPr>
+            <a:r>
+              <a:rPr lang="en-US" sz="2200" b="1" dirty="0">
+                <a:solidFill>
+                  <a:schemeClr val="bg1"/>
+                </a:solidFill>
+                <a:latin typeface="Calibri" pitchFamily="34" charset="0"/>
+                <a:ea typeface="Calibri" pitchFamily="34" charset="-122"/>
+                <a:cs typeface="Calibri" pitchFamily="34" charset="-120"/>
+              </a:rPr>
+              <a:t>5</a:t>
+            </a:r>
+            <a:endParaRPr lang="en-US" sz="2200" dirty="0"/>
+          </a:p>
+        </p:txBody>
+      </p:sp>
+      <p:sp>
+        <p:nvSpPr>
+          <p:cNvPr id="22" name="Etiqueta paso 5"/>
+          <p:cNvSpPr txBox="1"/>
+          <p:nvPr/>
+        </p:nvSpPr>
+        <p:spPr>
+          <a:xfrm>
+            <a:off x="7223760" y="2331720"/>
+            <a:ext cx="1554480" cy="731520"/>
+          </a:xfrm>
+          <a:prstGeom prst="rect">
+            <a:avLst/>
+          </a:prstGeom>
+          <a:noFill/>
+          <a:ln/>
+        </p:spPr>
+        <p:txBody>
+          <a:bodyPr wrap="square" lIns="0" tIns="0" rIns="0" bIns="0" rtlCol="0" anchor="t"/>
+          <a:lstStyle/>
+          <a:p>
+            <a:pPr algn="ctr" indent="0" marL="0">
+              <a:buNone/>
+            </a:pPr>
+            <a:r>
+              <a:rPr lang="en-US" sz="1400" dirty="0">
+                <a:solidFill>
+                  <a:schemeClr val="tx1"/>
+                </a:solidFill>
+                <a:latin typeface="Calibri" pitchFamily="34" charset="0"/>
+                <a:ea typeface="Calibri" pitchFamily="34" charset="-122"/>
+                <a:cs typeface="Calibri" pitchFamily="34" charset="-120"/>
+              </a:rPr>
+              <a:t>Quality Gate</a:t>
+            </a:r>
+            <a:endParaRPr lang="en-US" sz="1400" dirty="0"/>
+          </a:p>
+        </p:txBody>
+      </p:sp>
+      <p:sp>
+        <p:nvSpPr>
+          <p:cNvPr id="23" name="Caja gate"/>
+          <p:cNvSpPr/>
+          <p:nvPr/>
+        </p:nvSpPr>
+        <p:spPr>
+          <a:xfrm>
+            <a:off x="457200" y="3200400"/>
+            <a:ext cx="4023360" cy="1280160"/>
+          </a:xfrm>
+          <a:prstGeom prst="roundRect">
+            <a:avLst>
+              <a:gd name="adj" fmla="val 8571"/>
+            </a:avLst>
+          </a:prstGeom>
+          <a:solidFill>
+            <a:schemeClr val="bg2"/>
+          </a:solidFill>
+          <a:ln w="12700">
+            <a:solidFill>
+              <a:schemeClr val="bg2"/>
+            </a:solidFill>
+            <a:prstDash val="solid"/>
+          </a:ln>
+        </p:spPr>
+      </p:sp>
+      <p:sp>
+        <p:nvSpPr>
+          <p:cNvPr id="24" name="Texto gate"/>
+          <p:cNvSpPr txBox="1"/>
+          <p:nvPr/>
+        </p:nvSpPr>
+        <p:spPr>
+          <a:xfrm>
+            <a:off x="640080" y="3246120"/>
+            <a:ext cx="3657600" cy="1188720"/>
+          </a:xfrm>
+          <a:prstGeom prst="rect">
+            <a:avLst/>
+          </a:prstGeom>
+          <a:noFill/>
+          <a:ln/>
+        </p:spPr>
+        <p:txBody>
+          <a:bodyPr wrap="square" lIns="0" tIns="0" rIns="0" bIns="0" rtlCol="0" anchor="ctr"/>
+          <a:lstStyle/>
+          <a:p>
+            <a:pPr indent="0" marL="0">
+              <a:buNone/>
+            </a:pPr>
+            <a:r>
+              <a:rPr lang="en-US" sz="1600" b="1" dirty="0">
+                <a:solidFill>
+                  <a:schemeClr val="tx2"/>
+                </a:solidFill>
+                <a:latin typeface="Calibri" pitchFamily="34" charset="0"/>
+                <a:ea typeface="Calibri" pitchFamily="34" charset="-122"/>
+                <a:cs typeface="Calibri" pitchFamily="34" charset="-120"/>
+              </a:rPr>
+              <a:t>Si el gate falla…</a:t>
+            </a:r>
+            <a:endParaRPr lang="en-US" sz="1600" dirty="0"/>
+          </a:p>
+          <a:p>
+            <a:pPr indent="0" marL="0">
+              <a:buNone/>
+            </a:pPr>
+            <a:r>
+              <a:rPr lang="en-US" sz="1400" dirty="0">
+                <a:solidFill>
+                  <a:schemeClr val="tx1"/>
+                </a:solidFill>
+                <a:latin typeface="Calibri" pitchFamily="34" charset="0"/>
+                <a:ea typeface="Calibri" pitchFamily="34" charset="-122"/>
+                <a:cs typeface="Calibri" pitchFamily="34" charset="-120"/>
+              </a:rPr>
+              <a:t>el pipeline falla y el cambio no se integra.</a:t>
+            </a:r>
+            <a:endParaRPr lang="en-US" sz="1600" dirty="0"/>
+          </a:p>
+        </p:txBody>
+      </p:sp>
+      <p:sp>
+        <p:nvSpPr>
+          <p:cNvPr id="25" name="Caja respaldo"/>
+          <p:cNvSpPr/>
+          <p:nvPr/>
+        </p:nvSpPr>
+        <p:spPr>
+          <a:xfrm>
+            <a:off x="4663440" y="3200400"/>
+            <a:ext cx="4023360" cy="1280160"/>
+          </a:xfrm>
+          <a:prstGeom prst="roundRect">
+            <a:avLst>
+              <a:gd name="adj" fmla="val 8571"/>
+            </a:avLst>
+          </a:prstGeom>
+          <a:solidFill>
+            <a:schemeClr val="bg2"/>
+          </a:solidFill>
+          <a:ln w="12700">
+            <a:solidFill>
+              <a:schemeClr val="bg2"/>
+            </a:solidFill>
+            <a:prstDash val="solid"/>
+          </a:ln>
+        </p:spPr>
+      </p:sp>
+      <p:sp>
+        <p:nvSpPr>
+          <p:cNvPr id="26" name="Texto respaldo"/>
+          <p:cNvSpPr txBox="1"/>
+          <p:nvPr/>
+        </p:nvSpPr>
+        <p:spPr>
+          <a:xfrm>
+            <a:off x="4846320" y="3246120"/>
+            <a:ext cx="3657600" cy="1188720"/>
+          </a:xfrm>
+          <a:prstGeom prst="rect">
+            <a:avLst/>
+          </a:prstGeom>
+          <a:noFill/>
+          <a:ln/>
+        </p:spPr>
+        <p:txBody>
+          <a:bodyPr wrap="square" lIns="0" tIns="0" rIns="0" bIns="0" rtlCol="0" anchor="ctr"/>
+          <a:lstStyle/>
+          <a:p>
+            <a:pPr indent="0" marL="0">
+              <a:buNone/>
+            </a:pPr>
+            <a:r>
+              <a:rPr lang="en-US" sz="1600" b="1" dirty="0">
+                <a:solidFill>
+                  <a:schemeClr val="tx2"/>
+                </a:solidFill>
+                <a:latin typeface="Calibri" pitchFamily="34" charset="0"/>
+                <a:ea typeface="Calibri" pitchFamily="34" charset="-122"/>
+                <a:cs typeface="Calibri" pitchFamily="34" charset="-120"/>
+              </a:rPr>
+              <a:t>check-metrics.sh</a:t>
+            </a:r>
+            <a:endParaRPr lang="en-US" sz="1600" dirty="0"/>
+          </a:p>
+          <a:p>
+            <a:pPr indent="0" marL="0">
+              <a:buNone/>
+            </a:pPr>
+            <a:r>
+              <a:rPr lang="en-US" sz="1400" dirty="0">
+                <a:solidFill>
+                  <a:schemeClr val="tx1"/>
+                </a:solidFill>
+                <a:latin typeface="Calibri" pitchFamily="34" charset="0"/>
+                <a:ea typeface="Calibri" pitchFamily="34" charset="-122"/>
+                <a:cs typeface="Calibri" pitchFamily="34" charset="-120"/>
+              </a:rPr>
+              <a:t>respalda los topes de complejidad y cobertura desde CI, y revisa cada método con lizard.</a:t>
+            </a:r>
+            <a:endParaRPr lang="en-US" sz="1600" dirty="0"/>
+          </a:p>
+        </p:txBody>
+      </p:sp>
+      <p:sp>
+        <p:nvSpPr>
+          <p:cNvPr id="25" name="Slide Number Placeholder 0"/>
+          <p:cNvSpPr>
+            <a:spLocks noGrp="1"/>
+          </p:cNvSpPr>
+          <p:nvPr>
+            <p:ph type="sldNum" sz="quarter" idx="4294967295"/>
+          </p:nvPr>
+        </p:nvSpPr>
+        <p:spPr>
+          <a:xfrm>
+            <a:off x="8229600" y="4754880"/>
+            <a:ext cx="457200" cy="274320"/>
+          </a:xfrm>
+          <a:prstGeom prst="rect">
+            <a:avLst/>
+          </a:prstGeom>
+          <a:extLst>
+            <a:ext uri="{C572A759-6A51-4108-AA02-DFA0A04FC94B}">
+              <ma14:wrappingTextBoxFlag xmlns:ma14="http://schemas.microsoft.com/office/mac/drawingml/2011/main" val="0"/>
+            </a:ext>
+          </a:extLst>
+        </p:spPr>
+        <p:txBody>
+          <a:bodyPr/>
+          <a:lstStyle>
+            <a:lvl1pPr>
+              <a:defRPr sz="1000">
+                <a:solidFill>
+                  <a:schemeClr val="accent5"/>
+                </a:solidFill>
+              </a:defRPr>
+            </a:lvl1pPr>
+          </a:lstStyle>
+          <a:p>
+            <a:pPr algn="l"/>
+            <a:fld id="{F7021451-1387-4CA6-816F-3879F97B5CBC}" type="slidenum">
+              <a:rPr b="0" lang="en-US"/>
+              <a:t>17</a:t>
+            </a:fld>
+            <a:endParaRPr lang="en-US"/>
+          </a:p>
+        </p:txBody>
+      </p:sp>
+    </p:spTree>
+  </p:cSld>
+  <p:clrMapOvr>
+    <a:masterClrMapping/>
+  </p:clrMapOvr>
+</p:sld>
+</file>
+
+<file path=ppt/slides/slide18.xml><?xml version="1.0" encoding="utf-8"?>
+<p:sld xmlns:a="http://schemas.openxmlformats.org/drawingml/2006/main" xmlns:r="http://schemas.openxmlformats.org/officeDocument/2006/relationships" xmlns:p="http://schemas.openxmlformats.org/presentationml/2006/main">
+  <p:cSld name="Slide 18">
+    <p:spTree>
+      <p:nvGrpSpPr>
+        <p:cNvPr id="1" name=""/>
+        <p:cNvGrpSpPr/>
+        <p:nvPr/>
+      </p:nvGrpSpPr>
+      <p:grpSpPr>
+        <a:xfrm>
+          <a:off x="0" y="0"/>
+          <a:ext cx="0" cy="0"/>
+          <a:chOff x="0" y="0"/>
+          <a:chExt cx="0" cy="0"/>
+        </a:xfrm>
+      </p:grpSpPr>
+      <p:sp>
+        <p:nvSpPr>
+          <p:cNvPr id="2" name="Text 0"/>
+          <p:cNvSpPr/>
+          <p:nvPr>
+            <p:ph idx="100" type="title" hasCustomPrompt="1"/>
+          </p:nvPr>
+        </p:nvSpPr>
+        <p:spPr>
+          <a:xfrm>
+            <a:off x="457200" y="320040"/>
+            <a:ext cx="8229600" cy="731520"/>
+          </a:xfrm>
+          <a:prstGeom prst="rect">
+            <a:avLst/>
+          </a:prstGeom>
+          <a:noFill/>
+          <a:ln/>
+        </p:spPr>
+        <p:txBody>
+          <a:bodyPr wrap="square" lIns="0" tIns="0" rIns="0" bIns="0" rtlCol="0" anchor="t"/>
+          <a:lstStyle/>
+          <a:p>
+            <a:pPr algn="l" indent="0" marL="0">
+              <a:buNone/>
+            </a:pPr>
+            <a:r>
+              <a:rPr lang="en-US" sz="3200" b="1" dirty="0">
+                <a:solidFill>
+                  <a:schemeClr val="tx2"/>
+                </a:solidFill>
+              </a:rPr>
               <a:t>Estado actual</a:t>
             </a:r>
             <a:endParaRPr lang="en-US" sz="3200" dirty="0"/>
@@ -6668,7 +8107,7 @@
       </p:sp>
       <p:graphicFrame>
         <p:nvGraphicFramePr>
-          <p:cNvPr id="16" name="Tabla estado"/>
+          <p:cNvPr id="19" name="Tabla estado"/>
           <p:cNvGraphicFramePr>
             <a:graphicFrameLocks noGrp="1"/>
           </p:cNvGraphicFramePr>
@@ -6681,7 +8120,7 @@
           </p:nvPr>
         </p:nvGraphicFramePr>
         <p:xfrm>
-          <a:off x="457200" y="1280160"/>
+          <a:off x="457200" y="1234440"/>
           <a:ext cx="8229600" cy="914400"/>
         </p:xfrm>
         <a:graphic>
@@ -6692,7 +8131,7 @@
                 <a:gridCol w="5852160"/>
                 <a:gridCol w="2377440"/>
               </a:tblGrid>
-              <a:tr h="384048">
+              <a:tr h="338328">
                 <a:tc>
                   <a:txBody>
                     <a:bodyPr/>
@@ -6830,7 +8269,7 @@
                   </a:tcPr>
                 </a:tc>
               </a:tr>
-              <a:tr h="384048">
+              <a:tr h="338328">
                 <a:tc>
                   <a:txBody>
                     <a:bodyPr/>
@@ -6965,7 +8404,7 @@
                   </a:tcPr>
                 </a:tc>
               </a:tr>
-              <a:tr h="384048">
+              <a:tr h="338328">
                 <a:tc>
                   <a:txBody>
                     <a:bodyPr/>
@@ -7100,7 +8539,7 @@
                   </a:tcPr>
                 </a:tc>
               </a:tr>
-              <a:tr h="384048">
+              <a:tr h="338328">
                 <a:tc>
                   <a:txBody>
                     <a:bodyPr/>
@@ -7235,7 +8674,7 @@
                   </a:tcPr>
                 </a:tc>
               </a:tr>
-              <a:tr h="384048">
+              <a:tr h="338328">
                 <a:tc>
                   <a:txBody>
                     <a:bodyPr/>
@@ -7370,7 +8809,7 @@
                   </a:tcPr>
                 </a:tc>
               </a:tr>
-              <a:tr h="384048">
+              <a:tr h="338328">
                 <a:tc>
                   <a:txBody>
                     <a:bodyPr/>
@@ -7505,7 +8944,7 @@
                   </a:tcPr>
                 </a:tc>
               </a:tr>
-              <a:tr h="384048">
+              <a:tr h="338328">
                 <a:tc>
                   <a:txBody>
                     <a:bodyPr/>
@@ -7640,7 +9079,7 @@
                   </a:tcPr>
                 </a:tc>
               </a:tr>
-              <a:tr h="384048">
+              <a:tr h="338328">
                 <a:tc>
                   <a:txBody>
                     <a:bodyPr/>
@@ -7658,7 +9097,7 @@
                           <a:ea typeface="Calibri" pitchFamily="34" charset="-122"/>
                           <a:cs typeface="Calibri" pitchFamily="34" charset="-120"/>
                         </a:rPr>
-                        <a:t>Rama principal en SonarCloud (master → main)</a:t>
+                        <a:t>Análisis en la rama principal de SonarCloud</a:t>
                       </a:r>
                       <a:endParaRPr lang="en-US" sz="1300" dirty="0">
                         <a:latin typeface="Calibri" charset="0"/>
@@ -7723,7 +9162,7 @@
                           <a:ea typeface="Calibri" pitchFamily="34" charset="-122"/>
                           <a:cs typeface="Calibri" pitchFamily="34" charset="-120"/>
                         </a:rPr>
-                        <a:t>Por hacer</a:t>
+                        <a:t>En verificación</a:t>
                       </a:r>
                       <a:endParaRPr lang="en-US" sz="1200" dirty="0">
                         <a:latin typeface="Calibri" charset="0"/>
@@ -7775,7 +9214,7 @@
                   </a:tcPr>
                 </a:tc>
               </a:tr>
-              <a:tr h="384048">
+              <a:tr h="338328">
                 <a:tc>
                   <a:txBody>
                     <a:bodyPr/>
@@ -7858,7 +9297,142 @@
                           <a:ea typeface="Calibri" pitchFamily="34" charset="-122"/>
                           <a:cs typeface="Calibri" pitchFamily="34" charset="-120"/>
                         </a:rPr>
-                        <a:t>Listo · CI en verde</a:t>
+                        <a:t>Listo · CI en verde (#5)</a:t>
+                      </a:r>
+                      <a:endParaRPr lang="en-US" sz="1200" dirty="0">
+                        <a:latin typeface="Calibri" charset="0"/>
+                        <a:ea typeface="Calibri" charset="0"/>
+                        <a:cs typeface="Calibri" charset="0"/>
+                      </a:endParaRPr>
+                    </a:p>
+                  </a:txBody>
+                  <a:tcPr marL="91440" marR="91440" marT="0" marB="0" anchor="ctr">
+                    <a:lnL w="6350" cap="flat" cmpd="sng" algn="ctr">
+                      <a:solidFill>
+                        <a:srgbClr val="D5D9DD"/>
+                      </a:solidFill>
+                      <a:prstDash val="solid"/>
+                      <a:round/>
+                      <a:headEnd type="none" w="med" len="med"/>
+                      <a:tailEnd type="none" w="med" len="med"/>
+                    </a:lnL>
+                    <a:lnR w="6350" cap="flat" cmpd="sng" algn="ctr">
+                      <a:solidFill>
+                        <a:srgbClr val="D5D9DD"/>
+                      </a:solidFill>
+                      <a:prstDash val="solid"/>
+                      <a:round/>
+                      <a:headEnd type="none" w="med" len="med"/>
+                      <a:tailEnd type="none" w="med" len="med"/>
+                    </a:lnR>
+                    <a:lnT w="6350" cap="flat" cmpd="sng" algn="ctr">
+                      <a:solidFill>
+                        <a:srgbClr val="D5D9DD"/>
+                      </a:solidFill>
+                      <a:prstDash val="solid"/>
+                      <a:round/>
+                      <a:headEnd type="none" w="med" len="med"/>
+                      <a:tailEnd type="none" w="med" len="med"/>
+                    </a:lnT>
+                    <a:lnB w="6350" cap="flat" cmpd="sng" algn="ctr">
+                      <a:solidFill>
+                        <a:srgbClr val="D5D9DD"/>
+                      </a:solidFill>
+                      <a:prstDash val="solid"/>
+                      <a:round/>
+                      <a:headEnd type="none" w="med" len="med"/>
+                      <a:tailEnd type="none" w="med" len="med"/>
+                    </a:lnB>
+                    <a:solidFill>
+                      <a:srgbClr val="D8F0EC"/>
+                    </a:solidFill>
+                  </a:tcPr>
+                </a:tc>
+              </a:tr>
+              <a:tr h="338328">
+                <a:tc>
+                  <a:txBody>
+                    <a:bodyPr/>
+                    <a:lstStyle/>
+                    <a:p>
+                      <a:pPr indent="0" marL="0">
+                        <a:buNone/>
+                      </a:pPr>
+                      <a:r>
+                        <a:rPr lang="en-US" sz="1300" dirty="0">
+                          <a:solidFill>
+                            <a:srgbClr val="1F2933"/>
+                          </a:solidFill>
+                          <a:latin typeface="Calibri" pitchFamily="34" charset="0"/>
+                          <a:ea typeface="Calibri" pitchFamily="34" charset="-122"/>
+                          <a:cs typeface="Calibri" pitchFamily="34" charset="-120"/>
+                        </a:rPr>
+                        <a:t>Riesgos de dependencias (84 iniciales)</a:t>
+                      </a:r>
+                      <a:endParaRPr lang="en-US" sz="1300" dirty="0">
+                        <a:latin typeface="Calibri" charset="0"/>
+                        <a:ea typeface="Calibri" charset="0"/>
+                        <a:cs typeface="Calibri" charset="0"/>
+                      </a:endParaRPr>
+                    </a:p>
+                  </a:txBody>
+                  <a:tcPr marL="91440" marR="91440" marT="0" marB="0" anchor="ctr">
+                    <a:lnL w="6350" cap="flat" cmpd="sng" algn="ctr">
+                      <a:solidFill>
+                        <a:srgbClr val="D5D9DD"/>
+                      </a:solidFill>
+                      <a:prstDash val="solid"/>
+                      <a:round/>
+                      <a:headEnd type="none" w="med" len="med"/>
+                      <a:tailEnd type="none" w="med" len="med"/>
+                    </a:lnL>
+                    <a:lnR w="6350" cap="flat" cmpd="sng" algn="ctr">
+                      <a:solidFill>
+                        <a:srgbClr val="D5D9DD"/>
+                      </a:solidFill>
+                      <a:prstDash val="solid"/>
+                      <a:round/>
+                      <a:headEnd type="none" w="med" len="med"/>
+                      <a:tailEnd type="none" w="med" len="med"/>
+                    </a:lnR>
+                    <a:lnT w="6350" cap="flat" cmpd="sng" algn="ctr">
+                      <a:solidFill>
+                        <a:srgbClr val="D5D9DD"/>
+                      </a:solidFill>
+                      <a:prstDash val="solid"/>
+                      <a:round/>
+                      <a:headEnd type="none" w="med" len="med"/>
+                      <a:tailEnd type="none" w="med" len="med"/>
+                    </a:lnT>
+                    <a:lnB w="6350" cap="flat" cmpd="sng" algn="ctr">
+                      <a:solidFill>
+                        <a:srgbClr val="D5D9DD"/>
+                      </a:solidFill>
+                      <a:prstDash val="solid"/>
+                      <a:round/>
+                      <a:headEnd type="none" w="med" len="med"/>
+                      <a:tailEnd type="none" w="med" len="med"/>
+                    </a:lnB>
+                  </a:tcPr>
+                </a:tc>
+                <a:tc>
+                  <a:txBody>
+                    <a:bodyPr/>
+                    <a:lstStyle/>
+                    <a:p>
+                      <a:pPr algn="ctr" indent="0" marL="0">
+                        <a:buNone/>
+                      </a:pPr>
+                      <a:r>
+                        <a:rPr lang="en-US" sz="1200" b="1" dirty="0">
+                          <a:solidFill>
+                            <a:srgbClr val="1B6F65"/>
+                          </a:solidFill>
+                          <a:latin typeface="Calibri" pitchFamily="34" charset="0"/>
+                          <a:ea typeface="Calibri" pitchFamily="34" charset="-122"/>
+                          <a:cs typeface="Calibri" pitchFamily="34" charset="-120"/>
+                        </a:rPr>
+                        <a:t>Listo · 0 riesgos</a:t>
                       </a:r>
                       <a:endParaRPr lang="en-US" sz="1200" dirty="0">
                         <a:latin typeface="Calibri" charset="0"/>
@@ -7953,7 +9527,7 @@
             <a:pPr algn="l"/>
             <a:fld id="{F7021451-1387-4CA6-816F-3879F97B5CBC}" type="slidenum">
               <a:rPr b="0" lang="en-US"/>
-              <a:t>15</a:t>
+              <a:t>18</a:t>
             </a:fld>
             <a:endParaRPr lang="en-US"/>
           </a:p>
@@ -7967,9 +9541,9 @@
 </p:sld>
 </file>
 
-<file path=ppt/slides/slide16.xml><?xml version="1.0" encoding="utf-8"?>
+<file path=ppt/slides/slide19.xml><?xml version="1.0" encoding="utf-8"?>
 <p:sld xmlns:a="http://schemas.openxmlformats.org/drawingml/2006/main" xmlns:r="http://schemas.openxmlformats.org/officeDocument/2006/relationships" xmlns:p="http://schemas.openxmlformats.org/presentationml/2006/main">
-  <p:cSld name="Slide 16">
+  <p:cSld name="Slide 19">
     <p:spTree>
       <p:nvGrpSpPr>
         <p:cNvPr id="1" name=""/>
@@ -8024,7 +9598,7 @@
       </p:sp>
       <p:graphicFrame>
         <p:nvGraphicFramePr>
-          <p:cNvPr id="17" name="Tabla métricas reales"/>
+          <p:cNvPr id="20" name="Tabla métricas reales"/>
           <p:cNvGraphicFramePr>
             <a:graphicFrameLocks noGrp="1"/>
           </p:cNvGraphicFramePr>
@@ -9874,594 +11448,9 @@
             <a:pPr algn="l"/>
             <a:fld id="{F7021451-1387-4CA6-816F-3879F97B5CBC}" type="slidenum">
               <a:rPr b="0" lang="en-US"/>
-              <a:t>16</a:t>
+              <a:t>19</a:t>
             </a:fld>
             <a:endParaRPr lang="en-US"/>
-          </a:p>
-        </p:txBody>
-      </p:sp>
-    </p:spTree>
-  </p:cSld>
-  <p:clrMapOvr>
-    <a:masterClrMapping/>
-  </p:clrMapOvr>
-</p:sld>
-</file>
-
-<file path=ppt/slides/slide17.xml><?xml version="1.0" encoding="utf-8"?>
-<p:sld xmlns:a="http://schemas.openxmlformats.org/drawingml/2006/main" xmlns:r="http://schemas.openxmlformats.org/officeDocument/2006/relationships" xmlns:p="http://schemas.openxmlformats.org/presentationml/2006/main">
-  <p:cSld name="Slide 17">
-    <p:spTree>
-      <p:nvGrpSpPr>
-        <p:cNvPr id="1" name=""/>
-        <p:cNvGrpSpPr/>
-        <p:nvPr/>
-      </p:nvGrpSpPr>
-      <p:grpSpPr>
-        <a:xfrm>
-          <a:off x="0" y="0"/>
-          <a:ext cx="0" cy="0"/>
-          <a:chOff x="0" y="0"/>
-          <a:chExt cx="0" cy="0"/>
-        </a:xfrm>
-      </p:grpSpPr>
-      <p:sp>
-        <p:nvSpPr>
-          <p:cNvPr id="2" name="Text 0"/>
-          <p:cNvSpPr/>
-          <p:nvPr>
-            <p:ph idx="100" type="title" hasCustomPrompt="1"/>
-          </p:nvPr>
-        </p:nvSpPr>
-        <p:spPr>
-          <a:xfrm>
-            <a:off x="457200" y="320040"/>
-            <a:ext cx="8229600" cy="731520"/>
-          </a:xfrm>
-          <a:prstGeom prst="rect">
-            <a:avLst/>
-          </a:prstGeom>
-          <a:noFill/>
-          <a:ln/>
-        </p:spPr>
-        <p:txBody>
-          <a:bodyPr wrap="square" lIns="0" tIns="0" rIns="0" bIns="0" rtlCol="0" anchor="t"/>
-          <a:lstStyle/>
-          <a:p>
-            <a:pPr algn="l" indent="0" marL="0">
-              <a:buNone/>
-            </a:pPr>
-            <a:r>
-              <a:rPr lang="en-US" sz="3200" b="1" dirty="0">
-                <a:solidFill>
-                  <a:schemeClr val="tx2"/>
-                </a:solidFill>
-              </a:rPr>
-              <a:t>Límites y próximos pasos</a:t>
-            </a:r>
-            <a:endParaRPr lang="en-US" sz="3200" dirty="0"/>
-          </a:p>
-        </p:txBody>
-      </p:sp>
-      <p:sp>
-        <p:nvSpPr>
-          <p:cNvPr id="4" name="Título límites"/>
-          <p:cNvSpPr txBox="1"/>
-          <p:nvPr/>
-        </p:nvSpPr>
-        <p:spPr>
-          <a:xfrm>
-            <a:off x="457200" y="1325880"/>
-            <a:ext cx="3931920" cy="411480"/>
-          </a:xfrm>
-          <a:prstGeom prst="rect">
-            <a:avLst/>
-          </a:prstGeom>
-          <a:noFill/>
-          <a:ln/>
-        </p:spPr>
-        <p:txBody>
-          <a:bodyPr wrap="square" lIns="0" tIns="0" rIns="0" bIns="0" rtlCol="0" anchor="ctr"/>
-          <a:lstStyle/>
-          <a:p>
-            <a:pPr indent="0" marL="0">
-              <a:buNone/>
-            </a:pPr>
-            <a:r>
-              <a:rPr lang="en-US" sz="2200" b="1" dirty="0">
-                <a:solidFill>
-                  <a:schemeClr val="tx2"/>
-                </a:solidFill>
-                <a:latin typeface="Calibri" pitchFamily="34" charset="0"/>
-                <a:ea typeface="Calibri" pitchFamily="34" charset="-122"/>
-                <a:cs typeface="Calibri" pitchFamily="34" charset="-120"/>
-              </a:rPr>
-              <a:t>Límites actuales</a:t>
-            </a:r>
-            <a:endParaRPr lang="en-US" sz="2200" dirty="0"/>
-          </a:p>
-        </p:txBody>
-      </p:sp>
-      <p:sp>
-        <p:nvSpPr>
-          <p:cNvPr id="5" name="Lista límites"/>
-          <p:cNvSpPr txBox="1"/>
-          <p:nvPr/>
-        </p:nvSpPr>
-        <p:spPr>
-          <a:xfrm>
-            <a:off x="457200" y="1828800"/>
-            <a:ext cx="3931920" cy="2743200"/>
-          </a:xfrm>
-          <a:prstGeom prst="rect">
-            <a:avLst/>
-          </a:prstGeom>
-          <a:noFill/>
-          <a:ln/>
-        </p:spPr>
-        <p:txBody>
-          <a:bodyPr wrap="square" lIns="0" tIns="0" rIns="0" bIns="0" rtlCol="0" anchor="t"/>
-          <a:lstStyle/>
-          <a:p>
-            <a:pPr marL="342900" indent="-342900">
-              <a:spcAft>
-                <a:spcPts val="800"/>
-              </a:spcAft>
-              <a:buSzPct val="100000"/>
-              <a:buChar char="•"/>
-            </a:pPr>
-            <a:r>
-              <a:rPr lang="en-US" sz="1400" dirty="0">
-                <a:solidFill>
-                  <a:schemeClr val="tx1"/>
-                </a:solidFill>
-                <a:latin typeface="Calibri" pitchFamily="34" charset="0"/>
-                <a:ea typeface="Calibri" pitchFamily="34" charset="-122"/>
-                <a:cs typeface="Calibri" pitchFamily="34" charset="-120"/>
-              </a:rPr>
-              <a:t>Rama principal de SonarCloud aún es master; el análisis quedó en una rama corta main</a:t>
-            </a:r>
-            <a:endParaRPr lang="en-US" sz="1400" dirty="0"/>
-          </a:p>
-          <a:p>
-            <a:pPr marL="342900" indent="-342900">
-              <a:spcAft>
-                <a:spcPts val="800"/>
-              </a:spcAft>
-              <a:buSzPct val="100000"/>
-              <a:buChar char="•"/>
-            </a:pPr>
-            <a:r>
-              <a:rPr lang="en-US" sz="1400" dirty="0">
-                <a:solidFill>
-                  <a:schemeClr val="tx1"/>
-                </a:solidFill>
-                <a:latin typeface="Calibri" pitchFamily="34" charset="0"/>
-                <a:ea typeface="Calibri" pitchFamily="34" charset="-122"/>
-                <a:cs typeface="Calibri" pitchFamily="34" charset="-120"/>
-              </a:rPr>
-              <a:t>Gate y profile propios: asignados solo durante la prueba del plan Team (hasta el 1 nov.)</a:t>
-            </a:r>
-            <a:endParaRPr lang="en-US" sz="1400" dirty="0"/>
-          </a:p>
-          <a:p>
-            <a:pPr marL="342900" indent="-342900">
-              <a:spcAft>
-                <a:spcPts val="800"/>
-              </a:spcAft>
-              <a:buSzPct val="100000"/>
-              <a:buChar char="•"/>
-            </a:pPr>
-            <a:r>
-              <a:rPr lang="en-US" sz="1400" dirty="0">
-                <a:solidFill>
-                  <a:schemeClr val="tx1"/>
-                </a:solidFill>
-                <a:latin typeface="Calibri" pitchFamily="34" charset="0"/>
-                <a:ea typeface="Calibri" pitchFamily="34" charset="-122"/>
-                <a:cs typeface="Calibri" pitchFamily="34" charset="-120"/>
-              </a:rPr>
-              <a:t>Ventana Swing sin prueba visual</a:t>
-            </a:r>
-            <a:endParaRPr lang="en-US" sz="1400" dirty="0"/>
-          </a:p>
-        </p:txBody>
-      </p:sp>
-      <p:sp>
-        <p:nvSpPr>
-          <p:cNvPr id="6" name="Título pasos"/>
-          <p:cNvSpPr txBox="1"/>
-          <p:nvPr/>
-        </p:nvSpPr>
-        <p:spPr>
-          <a:xfrm>
-            <a:off x="4754880" y="1325880"/>
-            <a:ext cx="3931920" cy="411480"/>
-          </a:xfrm>
-          <a:prstGeom prst="rect">
-            <a:avLst/>
-          </a:prstGeom>
-          <a:noFill/>
-          <a:ln/>
-        </p:spPr>
-        <p:txBody>
-          <a:bodyPr wrap="square" lIns="0" tIns="0" rIns="0" bIns="0" rtlCol="0" anchor="ctr"/>
-          <a:lstStyle/>
-          <a:p>
-            <a:pPr indent="0" marL="0">
-              <a:buNone/>
-            </a:pPr>
-            <a:r>
-              <a:rPr lang="en-US" sz="2200" b="1" dirty="0">
-                <a:solidFill>
-                  <a:schemeClr val="tx2"/>
-                </a:solidFill>
-                <a:latin typeface="Calibri" pitchFamily="34" charset="0"/>
-                <a:ea typeface="Calibri" pitchFamily="34" charset="-122"/>
-                <a:cs typeface="Calibri" pitchFamily="34" charset="-120"/>
-              </a:rPr>
-              <a:t>Próximos pasos</a:t>
-            </a:r>
-            <a:endParaRPr lang="en-US" sz="2200" dirty="0"/>
-          </a:p>
-        </p:txBody>
-      </p:sp>
-      <p:sp>
-        <p:nvSpPr>
-          <p:cNvPr id="7" name="Lista pasos"/>
-          <p:cNvSpPr txBox="1"/>
-          <p:nvPr/>
-        </p:nvSpPr>
-        <p:spPr>
-          <a:xfrm>
-            <a:off x="4754880" y="1828800"/>
-            <a:ext cx="3931920" cy="2743200"/>
-          </a:xfrm>
-          <a:prstGeom prst="rect">
-            <a:avLst/>
-          </a:prstGeom>
-          <a:noFill/>
-          <a:ln/>
-        </p:spPr>
-        <p:txBody>
-          <a:bodyPr wrap="square" lIns="0" tIns="0" rIns="0" bIns="0" rtlCol="0" anchor="t"/>
-          <a:lstStyle/>
-          <a:p>
-            <a:pPr marL="342900" indent="-342900">
-              <a:spcAft>
-                <a:spcPts val="800"/>
-              </a:spcAft>
-              <a:buSzPct val="100000"/>
-              <a:buFont typeface="+mj-lt"/>
-              <a:buAutoNum type="arabicPeriod" startAt="1"/>
-            </a:pPr>
-            <a:r>
-              <a:rPr lang="en-US" sz="1400" dirty="0">
-                <a:solidFill>
-                  <a:schemeClr val="tx1"/>
-                </a:solidFill>
-                <a:latin typeface="Calibri" pitchFamily="34" charset="0"/>
-                <a:ea typeface="Calibri" pitchFamily="34" charset="-122"/>
-                <a:cs typeface="Calibri" pitchFamily="34" charset="-120"/>
-              </a:rPr>
-              <a:t>Borrar la rama corta main y renombrar master a main en SonarCloud</a:t>
-            </a:r>
-            <a:endParaRPr lang="en-US" sz="1400" dirty="0"/>
-          </a:p>
-          <a:p>
-            <a:pPr marL="342900" indent="-342900">
-              <a:spcAft>
-                <a:spcPts val="800"/>
-              </a:spcAft>
-              <a:buSzPct val="100000"/>
-              <a:buFont typeface="+mj-lt"/>
-              <a:buAutoNum type="arabicPeriod" startAt="1"/>
-            </a:pPr>
-            <a:r>
-              <a:rPr lang="en-US" sz="1400" dirty="0">
-                <a:solidFill>
-                  <a:schemeClr val="tx1"/>
-                </a:solidFill>
-                <a:latin typeface="Calibri" pitchFamily="34" charset="0"/>
-                <a:ea typeface="Calibri" pitchFamily="34" charset="-122"/>
-                <a:cs typeface="Calibri" pitchFamily="34" charset="-120"/>
-              </a:rPr>
-              <a:t>Volver a ejecutar el workflow y revisar el gate en la rama principal</a:t>
-            </a:r>
-            <a:endParaRPr lang="en-US" sz="1400" dirty="0"/>
-          </a:p>
-          <a:p>
-            <a:pPr marL="342900" indent="-342900">
-              <a:spcAft>
-                <a:spcPts val="800"/>
-              </a:spcAft>
-              <a:buSzPct val="100000"/>
-              <a:buFont typeface="+mj-lt"/>
-              <a:buAutoNum type="arabicPeriod" startAt="1"/>
-            </a:pPr>
-            <a:r>
-              <a:rPr lang="en-US" sz="1400" dirty="0">
-                <a:solidFill>
-                  <a:schemeClr val="tx1"/>
-                </a:solidFill>
-                <a:latin typeface="Calibri" pitchFamily="34" charset="0"/>
-                <a:ea typeface="Calibri" pitchFamily="34" charset="-122"/>
-                <a:cs typeface="Calibri" pitchFamily="34" charset="-120"/>
-              </a:rPr>
-              <a:t>Antes del 1 nov.: plan de pago o check-metrics.sh en plan gratuito</a:t>
-            </a:r>
-            <a:endParaRPr lang="en-US" sz="1400" dirty="0"/>
-          </a:p>
-          <a:p>
-            <a:pPr marL="342900" indent="-342900">
-              <a:spcAft>
-                <a:spcPts val="800"/>
-              </a:spcAft>
-              <a:buSzPct val="100000"/>
-              <a:buFont typeface="+mj-lt"/>
-              <a:buAutoNum type="arabicPeriod" startAt="1"/>
-            </a:pPr>
-            <a:r>
-              <a:rPr lang="en-US" sz="1400" dirty="0">
-                <a:solidFill>
-                  <a:schemeClr val="tx1"/>
-                </a:solidFill>
-                <a:latin typeface="Calibri" pitchFamily="34" charset="0"/>
-                <a:ea typeface="Calibri" pitchFamily="34" charset="-122"/>
-                <a:cs typeface="Calibri" pitchFamily="34" charset="-120"/>
-              </a:rPr>
-              <a:t>Ajustar los topes de complejidad si se desea</a:t>
-            </a:r>
-            <a:endParaRPr lang="en-US" sz="1400" dirty="0"/>
-          </a:p>
-        </p:txBody>
-      </p:sp>
-      <p:sp>
-        <p:nvSpPr>
-          <p:cNvPr id="25" name="Slide Number Placeholder 0"/>
-          <p:cNvSpPr>
-            <a:spLocks noGrp="1"/>
-          </p:cNvSpPr>
-          <p:nvPr>
-            <p:ph type="sldNum" sz="quarter" idx="4294967295"/>
-          </p:nvPr>
-        </p:nvSpPr>
-        <p:spPr>
-          <a:xfrm>
-            <a:off x="8229600" y="4754880"/>
-            <a:ext cx="457200" cy="274320"/>
-          </a:xfrm>
-          <a:prstGeom prst="rect">
-            <a:avLst/>
-          </a:prstGeom>
-          <a:extLst>
-            <a:ext uri="{C572A759-6A51-4108-AA02-DFA0A04FC94B}">
-              <ma14:wrappingTextBoxFlag xmlns:ma14="http://schemas.microsoft.com/office/mac/drawingml/2011/main" val="0"/>
-            </a:ext>
-          </a:extLst>
-        </p:spPr>
-        <p:txBody>
-          <a:bodyPr/>
-          <a:lstStyle>
-            <a:lvl1pPr>
-              <a:defRPr sz="1000">
-                <a:solidFill>
-                  <a:schemeClr val="accent5"/>
-                </a:solidFill>
-              </a:defRPr>
-            </a:lvl1pPr>
-          </a:lstStyle>
-          <a:p>
-            <a:pPr algn="l"/>
-            <a:fld id="{F7021451-1387-4CA6-816F-3879F97B5CBC}" type="slidenum">
-              <a:rPr b="0" lang="en-US"/>
-              <a:t>17</a:t>
-            </a:fld>
-            <a:endParaRPr lang="en-US"/>
-          </a:p>
-        </p:txBody>
-      </p:sp>
-    </p:spTree>
-  </p:cSld>
-  <p:clrMapOvr>
-    <a:masterClrMapping/>
-  </p:clrMapOvr>
-</p:sld>
-</file>
-
-<file path=ppt/slides/slide18.xml><?xml version="1.0" encoding="utf-8"?>
-<p:sld xmlns:a="http://schemas.openxmlformats.org/drawingml/2006/main" xmlns:r="http://schemas.openxmlformats.org/officeDocument/2006/relationships" xmlns:p="http://schemas.openxmlformats.org/presentationml/2006/main">
-  <p:cSld name="Slide 18">
-    <p:spTree>
-      <p:nvGrpSpPr>
-        <p:cNvPr id="1" name=""/>
-        <p:cNvGrpSpPr/>
-        <p:nvPr/>
-      </p:nvGrpSpPr>
-      <p:grpSpPr>
-        <a:xfrm>
-          <a:off x="0" y="0"/>
-          <a:ext cx="0" cy="0"/>
-          <a:chOff x="0" y="0"/>
-          <a:chExt cx="0" cy="0"/>
-        </a:xfrm>
-      </p:grpSpPr>
-      <p:sp>
-        <p:nvSpPr>
-          <p:cNvPr id="2" name="Text 0"/>
-          <p:cNvSpPr/>
-          <p:nvPr>
-            <p:ph idx="100" type="title" hasCustomPrompt="1"/>
-          </p:nvPr>
-        </p:nvSpPr>
-        <p:spPr>
-          <a:xfrm>
-            <a:off x="640080" y="1371600"/>
-            <a:ext cx="7863840" cy="914400"/>
-          </a:xfrm>
-          <a:prstGeom prst="rect">
-            <a:avLst/>
-          </a:prstGeom>
-          <a:noFill/>
-          <a:ln/>
-        </p:spPr>
-        <p:txBody>
-          <a:bodyPr wrap="square" lIns="0" tIns="0" rIns="0" bIns="0" rtlCol="0" anchor="t"/>
-          <a:lstStyle/>
-          <a:p>
-            <a:pPr algn="l" indent="0" marL="0">
-              <a:buNone/>
-            </a:pPr>
-            <a:r>
-              <a:rPr lang="en-US" sz="4400" b="1" dirty="0">
-                <a:solidFill>
-                  <a:schemeClr val="tx2"/>
-                </a:solidFill>
-              </a:rPr>
-              <a:t>Preguntas</a:t>
-            </a:r>
-            <a:endParaRPr lang="en-US" sz="4400" dirty="0"/>
-          </a:p>
-        </p:txBody>
-      </p:sp>
-      <p:sp>
-        <p:nvSpPr>
-          <p:cNvPr id="3" name="Text 0"/>
-          <p:cNvSpPr/>
-          <p:nvPr>
-            <p:ph idx="101" type="body" hasCustomPrompt="1"/>
-          </p:nvPr>
-        </p:nvSpPr>
-        <p:spPr>
-          <a:xfrm>
-            <a:off x="640080" y="2468880"/>
-            <a:ext cx="7863840" cy="822960"/>
-          </a:xfrm>
-          <a:prstGeom prst="rect">
-            <a:avLst/>
-          </a:prstGeom>
-          <a:noFill/>
-          <a:ln/>
-        </p:spPr>
-        <p:txBody>
-          <a:bodyPr wrap="square" lIns="0" tIns="0" rIns="0" bIns="0" rtlCol="0" anchor="t"/>
-          <a:lstStyle/>
-          <a:p>
-            <a:pPr algn="l" indent="0" marL="0">
-              <a:buNone/>
-            </a:pPr>
-            <a:r>
-              <a:rPr lang="en-US" sz="2200" dirty="0">
-                <a:solidFill>
-                  <a:schemeClr val="tx1"/>
-                </a:solidFill>
-              </a:rPr>
-              <a:t>Karate valida lo que el usuario espera; Sonar cuida que el código siga sano.</a:t>
-            </a:r>
-            <a:endParaRPr lang="en-US" sz="2200" dirty="0"/>
-          </a:p>
-        </p:txBody>
-      </p:sp>
-      <p:sp>
-        <p:nvSpPr>
-          <p:cNvPr id="4" name="Acento cierre"/>
-          <p:cNvSpPr/>
-          <p:nvPr/>
-        </p:nvSpPr>
-        <p:spPr>
-          <a:xfrm>
-            <a:off x="640080" y="1143000"/>
-            <a:ext cx="822960" cy="64008"/>
-          </a:xfrm>
-          <a:prstGeom prst="rect">
-            <a:avLst/>
-          </a:prstGeom>
-          <a:solidFill>
-            <a:schemeClr val="accent1"/>
-          </a:solidFill>
-          <a:ln w="12700">
-            <a:solidFill>
-              <a:schemeClr val="accent1"/>
-            </a:solidFill>
-            <a:prstDash val="solid"/>
-          </a:ln>
-        </p:spPr>
-      </p:sp>
-      <p:sp>
-        <p:nvSpPr>
-          <p:cNvPr id="5" name="Entregables"/>
-          <p:cNvSpPr txBox="1"/>
-          <p:nvPr/>
-        </p:nvSpPr>
-        <p:spPr>
-          <a:xfrm>
-            <a:off x="640080" y="3977640"/>
-            <a:ext cx="7863840" cy="320040"/>
-          </a:xfrm>
-          <a:prstGeom prst="rect">
-            <a:avLst/>
-          </a:prstGeom>
-          <a:noFill/>
-          <a:ln/>
-        </p:spPr>
-        <p:txBody>
-          <a:bodyPr wrap="square" lIns="0" tIns="0" rIns="0" bIns="0" rtlCol="0" anchor="ctr"/>
-          <a:lstStyle/>
-          <a:p>
-            <a:pPr indent="0" marL="0">
-              <a:buNone/>
-            </a:pPr>
-            <a:r>
-              <a:rPr lang="en-US" sz="1400" dirty="0">
-                <a:solidFill>
-                  <a:schemeClr val="accent5"/>
-                </a:solidFill>
-                <a:latin typeface="Calibri" pitchFamily="34" charset="0"/>
-                <a:ea typeface="Calibri" pitchFamily="34" charset="-122"/>
-                <a:cs typeface="Calibri" pitchFamily="34" charset="-120"/>
-              </a:rPr>
-              <a:t>pruebas-aceptacion/ · sonar/ · docs/</a:t>
-            </a:r>
-            <a:endParaRPr lang="en-US" sz="1400" dirty="0"/>
-          </a:p>
-        </p:txBody>
-      </p:sp>
-      <p:sp>
-        <p:nvSpPr>
-          <p:cNvPr id="6" name="Repositorio final"/>
-          <p:cNvSpPr txBox="1"/>
-          <p:nvPr/>
-        </p:nvSpPr>
-        <p:spPr>
-          <a:xfrm>
-            <a:off x="640080" y="4297680"/>
-            <a:ext cx="7863840" cy="320040"/>
-          </a:xfrm>
-          <a:prstGeom prst="rect">
-            <a:avLst/>
-          </a:prstGeom>
-          <a:noFill/>
-          <a:ln/>
-        </p:spPr>
-        <p:txBody>
-          <a:bodyPr wrap="square" lIns="0" tIns="0" rIns="0" bIns="0" rtlCol="0" anchor="ctr"/>
-          <a:lstStyle/>
-          <a:p>
-            <a:pPr indent="0" marL="0">
-              <a:buNone/>
-            </a:pPr>
-            <a:r>
-              <a:rPr lang="en-US" sz="1200" dirty="0">
-                <a:solidFill>
-                  <a:schemeClr val="accent5"/>
-                </a:solidFill>
-                <a:latin typeface="Calibri" pitchFamily="34" charset="0"/>
-                <a:ea typeface="Calibri" pitchFamily="34" charset="-122"/>
-                <a:cs typeface="Calibri" pitchFamily="34" charset="-120"/>
-              </a:rPr>
-              <a:t>https://github.com/carolinacardonaUdeA/calidad-software</a:t>
-            </a:r>
-            <a:endParaRPr lang="en-US" sz="1200" dirty="0"/>
           </a:p>
         </p:txBody>
       </p:sp>
@@ -11170,6 +12159,3413 @@
               <a:t>2</a:t>
             </a:fld>
             <a:endParaRPr lang="en-US"/>
+          </a:p>
+        </p:txBody>
+      </p:sp>
+    </p:spTree>
+  </p:cSld>
+  <p:clrMapOvr>
+    <a:masterClrMapping/>
+  </p:clrMapOvr>
+</p:sld>
+</file>
+
+<file path=ppt/slides/slide20.xml><?xml version="1.0" encoding="utf-8"?>
+<p:sld xmlns:a="http://schemas.openxmlformats.org/drawingml/2006/main" xmlns:r="http://schemas.openxmlformats.org/officeDocument/2006/relationships" xmlns:p="http://schemas.openxmlformats.org/presentationml/2006/main">
+  <p:cSld name="Slide 20">
+    <p:spTree>
+      <p:nvGrpSpPr>
+        <p:cNvPr id="1" name=""/>
+        <p:cNvGrpSpPr/>
+        <p:nvPr/>
+      </p:nvGrpSpPr>
+      <p:grpSpPr>
+        <a:xfrm>
+          <a:off x="0" y="0"/>
+          <a:ext cx="0" cy="0"/>
+          <a:chOff x="0" y="0"/>
+          <a:chExt cx="0" cy="0"/>
+        </a:xfrm>
+      </p:grpSpPr>
+      <p:sp>
+        <p:nvSpPr>
+          <p:cNvPr id="2" name="Text 0"/>
+          <p:cNvSpPr/>
+          <p:nvPr>
+            <p:ph idx="100" type="title" hasCustomPrompt="1"/>
+          </p:nvPr>
+        </p:nvSpPr>
+        <p:spPr>
+          <a:xfrm>
+            <a:off x="457200" y="320040"/>
+            <a:ext cx="8229600" cy="731520"/>
+          </a:xfrm>
+          <a:prstGeom prst="rect">
+            <a:avLst/>
+          </a:prstGeom>
+          <a:noFill/>
+          <a:ln/>
+        </p:spPr>
+        <p:txBody>
+          <a:bodyPr wrap="square" lIns="0" tIns="0" rIns="0" bIns="0" rtlCol="0" anchor="t"/>
+          <a:lstStyle/>
+          <a:p>
+            <a:pPr algn="l" indent="0" marL="0">
+              <a:buNone/>
+            </a:pPr>
+            <a:r>
+              <a:rPr lang="en-US" sz="3200" b="1" dirty="0">
+                <a:solidFill>
+                  <a:schemeClr val="tx2"/>
+                </a:solidFill>
+              </a:rPr>
+              <a:t>Resultado del análisis</a:t>
+            </a:r>
+            <a:endParaRPr lang="en-US" sz="3200" dirty="0"/>
+          </a:p>
+        </p:txBody>
+      </p:sp>
+      <p:pic>
+        <p:nvPicPr>
+          <p:cNvPr id="4" name="Image 0" descr="Resumen del análisis en SonarCloud">    </p:cNvPr>
+          <p:cNvPicPr>
+            <a:picLocks noChangeAspect="1"/>
+          </p:cNvPicPr>
+          <p:nvPr/>
+        </p:nvPicPr>
+        <p:blipFill>
+          <a:blip r:embed="rId1"/>
+          <a:stretch>
+            <a:fillRect/>
+          </a:stretch>
+        </p:blipFill>
+        <p:spPr>
+          <a:xfrm>
+            <a:off x="457200" y="1188720"/>
+            <a:ext cx="5394960" cy="3370168"/>
+          </a:xfrm>
+          <a:prstGeom prst="rect">
+            <a:avLst/>
+          </a:prstGeom>
+        </p:spPr>
+      </p:pic>
+      <p:sp>
+        <p:nvSpPr>
+          <p:cNvPr id="5" name="Pie resultado"/>
+          <p:cNvSpPr txBox="1"/>
+          <p:nvPr/>
+        </p:nvSpPr>
+        <p:spPr>
+          <a:xfrm>
+            <a:off x="457200" y="4604608"/>
+            <a:ext cx="5394960" cy="274320"/>
+          </a:xfrm>
+          <a:prstGeom prst="rect">
+            <a:avLst/>
+          </a:prstGeom>
+          <a:noFill/>
+          <a:ln/>
+        </p:spPr>
+        <p:txBody>
+          <a:bodyPr wrap="square" lIns="0" tIns="0" rIns="0" bIns="0" rtlCol="0" anchor="t"/>
+          <a:lstStyle/>
+          <a:p>
+            <a:pPr algn="ctr" indent="0" marL="0">
+              <a:buNone/>
+            </a:pPr>
+            <a:r>
+              <a:rPr lang="en-US" sz="1200" dirty="0">
+                <a:solidFill>
+                  <a:schemeClr val="accent5"/>
+                </a:solidFill>
+                <a:latin typeface="Calibri" pitchFamily="34" charset="0"/>
+                <a:ea typeface="Calibri" pitchFamily="34" charset="-122"/>
+                <a:cs typeface="Calibri" pitchFamily="34" charset="-120"/>
+              </a:rPr>
+              <a:t>Rama main · Quality Gate “Calculadora Quality Gate”</a:t>
+            </a:r>
+            <a:endParaRPr lang="en-US" sz="1200" dirty="0"/>
+          </a:p>
+        </p:txBody>
+      </p:sp>
+      <p:sp>
+        <p:nvSpPr>
+          <p:cNvPr id="6" name="Tarjeta resultado 1"/>
+          <p:cNvSpPr/>
+          <p:nvPr/>
+        </p:nvSpPr>
+        <p:spPr>
+          <a:xfrm>
+            <a:off x="6126480" y="1234440"/>
+            <a:ext cx="2560320" cy="914400"/>
+          </a:xfrm>
+          <a:prstGeom prst="roundRect">
+            <a:avLst>
+              <a:gd name="adj" fmla="val 12000"/>
+            </a:avLst>
+          </a:prstGeom>
+          <a:solidFill>
+            <a:schemeClr val="bg2"/>
+          </a:solidFill>
+          <a:ln w="12700">
+            <a:solidFill>
+              <a:schemeClr val="bg2"/>
+            </a:solidFill>
+            <a:prstDash val="solid"/>
+          </a:ln>
+        </p:spPr>
+      </p:sp>
+      <p:sp>
+        <p:nvSpPr>
+          <p:cNvPr id="7" name="Cifra resultado 1"/>
+          <p:cNvSpPr txBox="1"/>
+          <p:nvPr/>
+        </p:nvSpPr>
+        <p:spPr>
+          <a:xfrm>
+            <a:off x="6263640" y="1234440"/>
+            <a:ext cx="1188720" cy="914400"/>
+          </a:xfrm>
+          <a:prstGeom prst="rect">
+            <a:avLst/>
+          </a:prstGeom>
+          <a:noFill/>
+          <a:ln/>
+        </p:spPr>
+        <p:txBody>
+          <a:bodyPr wrap="square" lIns="0" tIns="0" rIns="0" bIns="0" rtlCol="0" anchor="ctr"/>
+          <a:lstStyle/>
+          <a:p>
+            <a:pPr indent="0" marL="0">
+              <a:buNone/>
+            </a:pPr>
+            <a:r>
+              <a:rPr lang="en-US" sz="2400" b="1" dirty="0">
+                <a:solidFill>
+                  <a:schemeClr val="accent1"/>
+                </a:solidFill>
+                <a:latin typeface="Calibri" pitchFamily="34" charset="0"/>
+                <a:ea typeface="Calibri" pitchFamily="34" charset="-122"/>
+                <a:cs typeface="Calibri" pitchFamily="34" charset="-120"/>
+              </a:rPr>
+              <a:t>Passed</a:t>
+            </a:r>
+            <a:endParaRPr lang="en-US" sz="2400" dirty="0"/>
+          </a:p>
+        </p:txBody>
+      </p:sp>
+      <p:sp>
+        <p:nvSpPr>
+          <p:cNvPr id="8" name="Etiqueta resultado 1"/>
+          <p:cNvSpPr txBox="1"/>
+          <p:nvPr/>
+        </p:nvSpPr>
+        <p:spPr>
+          <a:xfrm>
+            <a:off x="7406640" y="1234440"/>
+            <a:ext cx="1188720" cy="914400"/>
+          </a:xfrm>
+          <a:prstGeom prst="rect">
+            <a:avLst/>
+          </a:prstGeom>
+          <a:noFill/>
+          <a:ln/>
+        </p:spPr>
+        <p:txBody>
+          <a:bodyPr wrap="square" lIns="0" tIns="0" rIns="0" bIns="0" rtlCol="0" anchor="ctr"/>
+          <a:lstStyle/>
+          <a:p>
+            <a:pPr indent="0" marL="0">
+              <a:buNone/>
+            </a:pPr>
+            <a:r>
+              <a:rPr lang="en-US" sz="1200" dirty="0">
+                <a:solidFill>
+                  <a:schemeClr val="tx1"/>
+                </a:solidFill>
+                <a:latin typeface="Calibri" pitchFamily="34" charset="0"/>
+                <a:ea typeface="Calibri" pitchFamily="34" charset="-122"/>
+                <a:cs typeface="Calibri" pitchFamily="34" charset="-120"/>
+              </a:rPr>
+              <a:t>Quality Gate</a:t>
+            </a:r>
+            <a:endParaRPr lang="en-US" sz="1200" dirty="0"/>
+          </a:p>
+        </p:txBody>
+      </p:sp>
+      <p:sp>
+        <p:nvSpPr>
+          <p:cNvPr id="9" name="Tarjeta resultado 2"/>
+          <p:cNvSpPr/>
+          <p:nvPr/>
+        </p:nvSpPr>
+        <p:spPr>
+          <a:xfrm>
+            <a:off x="6126480" y="2286000"/>
+            <a:ext cx="2560320" cy="914400"/>
+          </a:xfrm>
+          <a:prstGeom prst="roundRect">
+            <a:avLst>
+              <a:gd name="adj" fmla="val 12000"/>
+            </a:avLst>
+          </a:prstGeom>
+          <a:solidFill>
+            <a:schemeClr val="bg2"/>
+          </a:solidFill>
+          <a:ln w="12700">
+            <a:solidFill>
+              <a:schemeClr val="bg2"/>
+            </a:solidFill>
+            <a:prstDash val="solid"/>
+          </a:ln>
+        </p:spPr>
+      </p:sp>
+      <p:sp>
+        <p:nvSpPr>
+          <p:cNvPr id="10" name="Cifra resultado 2"/>
+          <p:cNvSpPr txBox="1"/>
+          <p:nvPr/>
+        </p:nvSpPr>
+        <p:spPr>
+          <a:xfrm>
+            <a:off x="6263640" y="2286000"/>
+            <a:ext cx="1188720" cy="914400"/>
+          </a:xfrm>
+          <a:prstGeom prst="rect">
+            <a:avLst/>
+          </a:prstGeom>
+          <a:noFill/>
+          <a:ln/>
+        </p:spPr>
+        <p:txBody>
+          <a:bodyPr wrap="square" lIns="0" tIns="0" rIns="0" bIns="0" rtlCol="0" anchor="ctr"/>
+          <a:lstStyle/>
+          <a:p>
+            <a:pPr indent="0" marL="0">
+              <a:buNone/>
+            </a:pPr>
+            <a:r>
+              <a:rPr lang="en-US" sz="2400" b="1" dirty="0">
+                <a:solidFill>
+                  <a:schemeClr val="accent1"/>
+                </a:solidFill>
+                <a:latin typeface="Calibri" pitchFamily="34" charset="0"/>
+                <a:ea typeface="Calibri" pitchFamily="34" charset="-122"/>
+                <a:cs typeface="Calibri" pitchFamily="34" charset="-120"/>
+              </a:rPr>
+              <a:t>93,7 %</a:t>
+            </a:r>
+            <a:endParaRPr lang="en-US" sz="2400" dirty="0"/>
+          </a:p>
+        </p:txBody>
+      </p:sp>
+      <p:sp>
+        <p:nvSpPr>
+          <p:cNvPr id="11" name="Etiqueta resultado 2"/>
+          <p:cNvSpPr txBox="1"/>
+          <p:nvPr/>
+        </p:nvSpPr>
+        <p:spPr>
+          <a:xfrm>
+            <a:off x="7406640" y="2286000"/>
+            <a:ext cx="1188720" cy="914400"/>
+          </a:xfrm>
+          <a:prstGeom prst="rect">
+            <a:avLst/>
+          </a:prstGeom>
+          <a:noFill/>
+          <a:ln/>
+        </p:spPr>
+        <p:txBody>
+          <a:bodyPr wrap="square" lIns="0" tIns="0" rIns="0" bIns="0" rtlCol="0" anchor="ctr"/>
+          <a:lstStyle/>
+          <a:p>
+            <a:pPr indent="0" marL="0">
+              <a:buNone/>
+            </a:pPr>
+            <a:r>
+              <a:rPr lang="en-US" sz="1200" dirty="0">
+                <a:solidFill>
+                  <a:schemeClr val="tx1"/>
+                </a:solidFill>
+                <a:latin typeface="Calibri" pitchFamily="34" charset="0"/>
+                <a:ea typeface="Calibri" pitchFamily="34" charset="-122"/>
+                <a:cs typeface="Calibri" pitchFamily="34" charset="-120"/>
+              </a:rPr>
+              <a:t>cobertura</a:t>
+            </a:r>
+            <a:endParaRPr lang="en-US" sz="1200" dirty="0"/>
+          </a:p>
+        </p:txBody>
+      </p:sp>
+      <p:sp>
+        <p:nvSpPr>
+          <p:cNvPr id="12" name="Tarjeta resultado 3"/>
+          <p:cNvSpPr/>
+          <p:nvPr/>
+        </p:nvSpPr>
+        <p:spPr>
+          <a:xfrm>
+            <a:off x="6126480" y="3337560"/>
+            <a:ext cx="2560320" cy="914400"/>
+          </a:xfrm>
+          <a:prstGeom prst="roundRect">
+            <a:avLst>
+              <a:gd name="adj" fmla="val 12000"/>
+            </a:avLst>
+          </a:prstGeom>
+          <a:solidFill>
+            <a:schemeClr val="bg2"/>
+          </a:solidFill>
+          <a:ln w="12700">
+            <a:solidFill>
+              <a:schemeClr val="bg2"/>
+            </a:solidFill>
+            <a:prstDash val="solid"/>
+          </a:ln>
+        </p:spPr>
+      </p:sp>
+      <p:sp>
+        <p:nvSpPr>
+          <p:cNvPr id="13" name="Cifra resultado 3"/>
+          <p:cNvSpPr txBox="1"/>
+          <p:nvPr/>
+        </p:nvSpPr>
+        <p:spPr>
+          <a:xfrm>
+            <a:off x="6263640" y="3337560"/>
+            <a:ext cx="1188720" cy="914400"/>
+          </a:xfrm>
+          <a:prstGeom prst="rect">
+            <a:avLst/>
+          </a:prstGeom>
+          <a:noFill/>
+          <a:ln/>
+        </p:spPr>
+        <p:txBody>
+          <a:bodyPr wrap="square" lIns="0" tIns="0" rIns="0" bIns="0" rtlCol="0" anchor="ctr"/>
+          <a:lstStyle/>
+          <a:p>
+            <a:pPr indent="0" marL="0">
+              <a:buNone/>
+            </a:pPr>
+            <a:r>
+              <a:rPr lang="en-US" sz="2400" b="1" dirty="0">
+                <a:solidFill>
+                  <a:schemeClr val="accent1"/>
+                </a:solidFill>
+                <a:latin typeface="Calibri" pitchFamily="34" charset="0"/>
+                <a:ea typeface="Calibri" pitchFamily="34" charset="-122"/>
+                <a:cs typeface="Calibri" pitchFamily="34" charset="-120"/>
+              </a:rPr>
+              <a:t>0</a:t>
+            </a:r>
+            <a:endParaRPr lang="en-US" sz="2400" dirty="0"/>
+          </a:p>
+        </p:txBody>
+      </p:sp>
+      <p:sp>
+        <p:nvSpPr>
+          <p:cNvPr id="14" name="Etiqueta resultado 3"/>
+          <p:cNvSpPr txBox="1"/>
+          <p:nvPr/>
+        </p:nvSpPr>
+        <p:spPr>
+          <a:xfrm>
+            <a:off x="7406640" y="3337560"/>
+            <a:ext cx="1188720" cy="914400"/>
+          </a:xfrm>
+          <a:prstGeom prst="rect">
+            <a:avLst/>
+          </a:prstGeom>
+          <a:noFill/>
+          <a:ln/>
+        </p:spPr>
+        <p:txBody>
+          <a:bodyPr wrap="square" lIns="0" tIns="0" rIns="0" bIns="0" rtlCol="0" anchor="ctr"/>
+          <a:lstStyle/>
+          <a:p>
+            <a:pPr indent="0" marL="0">
+              <a:buNone/>
+            </a:pPr>
+            <a:r>
+              <a:rPr lang="en-US" sz="1200" dirty="0">
+                <a:solidFill>
+                  <a:schemeClr val="tx1"/>
+                </a:solidFill>
+                <a:latin typeface="Calibri" pitchFamily="34" charset="0"/>
+                <a:ea typeface="Calibri" pitchFamily="34" charset="-122"/>
+                <a:cs typeface="Calibri" pitchFamily="34" charset="-120"/>
+              </a:rPr>
+              <a:t>issues · duplicación 0,0 %</a:t>
+            </a:r>
+            <a:endParaRPr lang="en-US" sz="1200" dirty="0"/>
+          </a:p>
+        </p:txBody>
+      </p:sp>
+      <p:sp>
+        <p:nvSpPr>
+          <p:cNvPr id="25" name="Slide Number Placeholder 0"/>
+          <p:cNvSpPr>
+            <a:spLocks noGrp="1"/>
+          </p:cNvSpPr>
+          <p:nvPr>
+            <p:ph type="sldNum" sz="quarter" idx="4294967295"/>
+          </p:nvPr>
+        </p:nvSpPr>
+        <p:spPr>
+          <a:xfrm>
+            <a:off x="8229600" y="4754880"/>
+            <a:ext cx="457200" cy="274320"/>
+          </a:xfrm>
+          <a:prstGeom prst="rect">
+            <a:avLst/>
+          </a:prstGeom>
+          <a:extLst>
+            <a:ext uri="{C572A759-6A51-4108-AA02-DFA0A04FC94B}">
+              <ma14:wrappingTextBoxFlag xmlns:ma14="http://schemas.microsoft.com/office/mac/drawingml/2011/main" val="0"/>
+            </a:ext>
+          </a:extLst>
+        </p:spPr>
+        <p:txBody>
+          <a:bodyPr/>
+          <a:lstStyle>
+            <a:lvl1pPr>
+              <a:defRPr sz="1000">
+                <a:solidFill>
+                  <a:schemeClr val="accent5"/>
+                </a:solidFill>
+              </a:defRPr>
+            </a:lvl1pPr>
+          </a:lstStyle>
+          <a:p>
+            <a:pPr algn="l"/>
+            <a:fld id="{F7021451-1387-4CA6-816F-3879F97B5CBC}" type="slidenum">
+              <a:rPr b="0" lang="en-US"/>
+              <a:t>20</a:t>
+            </a:fld>
+            <a:endParaRPr lang="en-US"/>
+          </a:p>
+        </p:txBody>
+      </p:sp>
+    </p:spTree>
+  </p:cSld>
+  <p:clrMapOvr>
+    <a:masterClrMapping/>
+  </p:clrMapOvr>
+</p:sld>
+</file>
+
+<file path=ppt/slides/slide21.xml><?xml version="1.0" encoding="utf-8"?>
+<p:sld xmlns:a="http://schemas.openxmlformats.org/drawingml/2006/main" xmlns:r="http://schemas.openxmlformats.org/officeDocument/2006/relationships" xmlns:p="http://schemas.openxmlformats.org/presentationml/2006/main">
+  <p:cSld name="Slide 21">
+    <p:spTree>
+      <p:nvGrpSpPr>
+        <p:cNvPr id="1" name=""/>
+        <p:cNvGrpSpPr/>
+        <p:nvPr/>
+      </p:nvGrpSpPr>
+      <p:grpSpPr>
+        <a:xfrm>
+          <a:off x="0" y="0"/>
+          <a:ext cx="0" cy="0"/>
+          <a:chOff x="0" y="0"/>
+          <a:chExt cx="0" cy="0"/>
+        </a:xfrm>
+      </p:grpSpPr>
+      <p:sp>
+        <p:nvSpPr>
+          <p:cNvPr id="2" name="Text 0"/>
+          <p:cNvSpPr/>
+          <p:nvPr>
+            <p:ph idx="100" type="title" hasCustomPrompt="1"/>
+          </p:nvPr>
+        </p:nvSpPr>
+        <p:spPr>
+          <a:xfrm>
+            <a:off x="457200" y="320040"/>
+            <a:ext cx="8229600" cy="731520"/>
+          </a:xfrm>
+          <a:prstGeom prst="rect">
+            <a:avLst/>
+          </a:prstGeom>
+          <a:noFill/>
+          <a:ln/>
+        </p:spPr>
+        <p:txBody>
+          <a:bodyPr wrap="square" lIns="0" tIns="0" rIns="0" bIns="0" rtlCol="0" anchor="t"/>
+          <a:lstStyle/>
+          <a:p>
+            <a:pPr algn="l" indent="0" marL="0">
+              <a:buNone/>
+            </a:pPr>
+            <a:r>
+              <a:rPr lang="en-US" sz="3200" b="1" dirty="0">
+                <a:solidFill>
+                  <a:schemeClr val="tx2"/>
+                </a:solidFill>
+              </a:rPr>
+              <a:t>GitHub Actions en verde</a:t>
+            </a:r>
+            <a:endParaRPr lang="en-US" sz="3200" dirty="0"/>
+          </a:p>
+        </p:txBody>
+      </p:sp>
+      <p:pic>
+        <p:nvPicPr>
+          <p:cNvPr id="4" name="Image 0" descr="Corrida de GitHub Actions en verde">    </p:cNvPr>
+          <p:cNvPicPr>
+            <a:picLocks noChangeAspect="1"/>
+          </p:cNvPicPr>
+          <p:nvPr/>
+        </p:nvPicPr>
+        <p:blipFill>
+          <a:blip r:embed="rId1"/>
+          <a:stretch>
+            <a:fillRect/>
+          </a:stretch>
+        </p:blipFill>
+        <p:spPr>
+          <a:xfrm>
+            <a:off x="457200" y="1188720"/>
+            <a:ext cx="5303142" cy="3200400"/>
+          </a:xfrm>
+          <a:prstGeom prst="rect">
+            <a:avLst/>
+          </a:prstGeom>
+        </p:spPr>
+      </p:pic>
+      <p:sp>
+        <p:nvSpPr>
+          <p:cNvPr id="5" name="Pie Actions"/>
+          <p:cNvSpPr txBox="1"/>
+          <p:nvPr/>
+        </p:nvSpPr>
+        <p:spPr>
+          <a:xfrm>
+            <a:off x="457200" y="4434840"/>
+            <a:ext cx="5303142" cy="274320"/>
+          </a:xfrm>
+          <a:prstGeom prst="rect">
+            <a:avLst/>
+          </a:prstGeom>
+          <a:noFill/>
+          <a:ln/>
+        </p:spPr>
+        <p:txBody>
+          <a:bodyPr wrap="square" lIns="0" tIns="0" rIns="0" bIns="0" rtlCol="0" anchor="t"/>
+          <a:lstStyle/>
+          <a:p>
+            <a:pPr algn="ctr" indent="0" marL="0">
+              <a:buNone/>
+            </a:pPr>
+            <a:r>
+              <a:rPr lang="en-US" sz="1200" dirty="0">
+                <a:solidFill>
+                  <a:schemeClr val="accent5"/>
+                </a:solidFill>
+                <a:latin typeface="Calibri" pitchFamily="34" charset="0"/>
+                <a:ea typeface="Calibri" pitchFamily="34" charset="-122"/>
+                <a:cs typeface="Calibri" pitchFamily="34" charset="-120"/>
+              </a:rPr>
+              <a:t>Workflow “Calidad - pruebas + SonarCloud”: pruebas, análisis y Quality Gate en una sola corrida</a:t>
+            </a:r>
+            <a:endParaRPr lang="en-US" sz="1200" dirty="0"/>
+          </a:p>
+        </p:txBody>
+      </p:sp>
+      <p:sp>
+        <p:nvSpPr>
+          <p:cNvPr id="25" name="Slide Number Placeholder 0"/>
+          <p:cNvSpPr>
+            <a:spLocks noGrp="1"/>
+          </p:cNvSpPr>
+          <p:nvPr>
+            <p:ph type="sldNum" sz="quarter" idx="4294967295"/>
+          </p:nvPr>
+        </p:nvSpPr>
+        <p:spPr>
+          <a:xfrm>
+            <a:off x="8229600" y="4754880"/>
+            <a:ext cx="457200" cy="274320"/>
+          </a:xfrm>
+          <a:prstGeom prst="rect">
+            <a:avLst/>
+          </a:prstGeom>
+          <a:extLst>
+            <a:ext uri="{C572A759-6A51-4108-AA02-DFA0A04FC94B}">
+              <ma14:wrappingTextBoxFlag xmlns:ma14="http://schemas.microsoft.com/office/mac/drawingml/2011/main" val="0"/>
+            </a:ext>
+          </a:extLst>
+        </p:spPr>
+        <p:txBody>
+          <a:bodyPr/>
+          <a:lstStyle>
+            <a:lvl1pPr>
+              <a:defRPr sz="1000">
+                <a:solidFill>
+                  <a:schemeClr val="accent5"/>
+                </a:solidFill>
+              </a:defRPr>
+            </a:lvl1pPr>
+          </a:lstStyle>
+          <a:p>
+            <a:pPr algn="l"/>
+            <a:fld id="{F7021451-1387-4CA6-816F-3879F97B5CBC}" type="slidenum">
+              <a:rPr b="0" lang="en-US"/>
+              <a:t>21</a:t>
+            </a:fld>
+            <a:endParaRPr lang="en-US"/>
+          </a:p>
+        </p:txBody>
+      </p:sp>
+    </p:spTree>
+  </p:cSld>
+  <p:clrMapOvr>
+    <a:masterClrMapping/>
+  </p:clrMapOvr>
+</p:sld>
+</file>
+
+<file path=ppt/slides/slide22.xml><?xml version="1.0" encoding="utf-8"?>
+<p:sld xmlns:a="http://schemas.openxmlformats.org/drawingml/2006/main" xmlns:r="http://schemas.openxmlformats.org/officeDocument/2006/relationships" xmlns:p="http://schemas.openxmlformats.org/presentationml/2006/main">
+  <p:cSld name="Slide 22">
+    <p:spTree>
+      <p:nvGrpSpPr>
+        <p:cNvPr id="1" name=""/>
+        <p:cNvGrpSpPr/>
+        <p:nvPr/>
+      </p:nvGrpSpPr>
+      <p:grpSpPr>
+        <a:xfrm>
+          <a:off x="0" y="0"/>
+          <a:ext cx="0" cy="0"/>
+          <a:chOff x="0" y="0"/>
+          <a:chExt cx="0" cy="0"/>
+        </a:xfrm>
+      </p:grpSpPr>
+      <p:sp>
+        <p:nvSpPr>
+          <p:cNvPr id="2" name="Text 0"/>
+          <p:cNvSpPr/>
+          <p:nvPr>
+            <p:ph idx="100" type="title" hasCustomPrompt="1"/>
+          </p:nvPr>
+        </p:nvSpPr>
+        <p:spPr>
+          <a:xfrm>
+            <a:off x="457200" y="320040"/>
+            <a:ext cx="8229600" cy="731520"/>
+          </a:xfrm>
+          <a:prstGeom prst="rect">
+            <a:avLst/>
+          </a:prstGeom>
+          <a:noFill/>
+          <a:ln/>
+        </p:spPr>
+        <p:txBody>
+          <a:bodyPr wrap="square" lIns="0" tIns="0" rIns="0" bIns="0" rtlCol="0" anchor="t"/>
+          <a:lstStyle/>
+          <a:p>
+            <a:pPr algn="l" indent="0" marL="0">
+              <a:buNone/>
+            </a:pPr>
+            <a:r>
+              <a:rPr lang="en-US" sz="3200" b="1" dirty="0">
+                <a:solidFill>
+                  <a:schemeClr val="tx2"/>
+                </a:solidFill>
+              </a:rPr>
+              <a:t>Riesgos de dependencias</a:t>
+            </a:r>
+            <a:endParaRPr lang="en-US" sz="3200" dirty="0"/>
+          </a:p>
+        </p:txBody>
+      </p:sp>
+      <p:pic>
+        <p:nvPicPr>
+          <p:cNvPr id="4" name="Image 0" descr="Dependency risks antes de la corrección">    </p:cNvPr>
+          <p:cNvPicPr>
+            <a:picLocks noChangeAspect="1"/>
+          </p:cNvPicPr>
+          <p:nvPr/>
+        </p:nvPicPr>
+        <p:blipFill>
+          <a:blip r:embed="rId1"/>
+          <a:stretch>
+            <a:fillRect/>
+          </a:stretch>
+        </p:blipFill>
+        <p:spPr>
+          <a:xfrm>
+            <a:off x="457200" y="1188720"/>
+            <a:ext cx="2968516" cy="3246120"/>
+          </a:xfrm>
+          <a:prstGeom prst="rect">
+            <a:avLst/>
+          </a:prstGeom>
+        </p:spPr>
+      </p:pic>
+      <p:sp>
+        <p:nvSpPr>
+          <p:cNvPr id="5" name="Pie antes"/>
+          <p:cNvSpPr txBox="1"/>
+          <p:nvPr/>
+        </p:nvSpPr>
+        <p:spPr>
+          <a:xfrm>
+            <a:off x="457200" y="4480560"/>
+            <a:ext cx="2968516" cy="274320"/>
+          </a:xfrm>
+          <a:prstGeom prst="rect">
+            <a:avLst/>
+          </a:prstGeom>
+          <a:noFill/>
+          <a:ln/>
+        </p:spPr>
+        <p:txBody>
+          <a:bodyPr wrap="square" lIns="0" tIns="0" rIns="0" bIns="0" rtlCol="0" anchor="t"/>
+          <a:lstStyle/>
+          <a:p>
+            <a:pPr algn="ctr" indent="0" marL="0">
+              <a:buNone/>
+            </a:pPr>
+            <a:r>
+              <a:rPr lang="en-US" sz="1200" dirty="0">
+                <a:solidFill>
+                  <a:schemeClr val="accent5"/>
+                </a:solidFill>
+                <a:latin typeface="Calibri" pitchFamily="34" charset="0"/>
+                <a:ea typeface="Calibri" pitchFamily="34" charset="-122"/>
+                <a:cs typeface="Calibri" pitchFamily="34" charset="-120"/>
+              </a:rPr>
+              <a:t>Antes: 84 riesgos en 89 dependencias</a:t>
+            </a:r>
+            <a:endParaRPr lang="en-US" sz="1200" dirty="0"/>
+          </a:p>
+        </p:txBody>
+      </p:sp>
+      <p:sp>
+        <p:nvSpPr>
+          <p:cNvPr id="6" name="Texto dependencias"/>
+          <p:cNvSpPr txBox="1"/>
+          <p:nvPr/>
+        </p:nvSpPr>
+        <p:spPr>
+          <a:xfrm>
+            <a:off x="3931920" y="1188720"/>
+            <a:ext cx="4754880" cy="640080"/>
+          </a:xfrm>
+          <a:prstGeom prst="rect">
+            <a:avLst/>
+          </a:prstGeom>
+          <a:noFill/>
+          <a:ln/>
+        </p:spPr>
+        <p:txBody>
+          <a:bodyPr wrap="square" lIns="0" tIns="0" rIns="0" bIns="0" rtlCol="0" anchor="t"/>
+          <a:lstStyle/>
+          <a:p>
+            <a:pPr indent="0" marL="0">
+              <a:buNone/>
+            </a:pPr>
+            <a:r>
+              <a:rPr lang="en-US" sz="1300" dirty="0">
+                <a:solidFill>
+                  <a:schemeClr val="tx1"/>
+                </a:solidFill>
+                <a:latin typeface="Calibri" pitchFamily="34" charset="0"/>
+                <a:ea typeface="Calibri" pitchFamily="34" charset="-122"/>
+                <a:cs typeface="Calibri" pitchFamily="34" charset="-120"/>
+              </a:rPr>
+              <a:t>Todos vienen de librerías transitivas de Karate; el código propio tiene 0 vulnerabilidades. Versiones forzadas en build.gradle:</a:t>
+            </a:r>
+            <a:endParaRPr lang="en-US" sz="1300" dirty="0"/>
+          </a:p>
+        </p:txBody>
+      </p:sp>
+      <p:graphicFrame>
+        <p:nvGraphicFramePr>
+          <p:cNvPr id="23" name="Tabla versiones"/>
+          <p:cNvGraphicFramePr>
+            <a:graphicFrameLocks noGrp="1"/>
+          </p:cNvGraphicFramePr>
+          <p:nvPr>
+            <p:extLst>
+              <p:ext uri="{D42A27DB-BD31-4B8C-83A1-F6EECF244321}">
+                <p14:modId xmlns:p14="http://schemas.microsoft.com/office/powerpoint/2010/main" val="1579011935"/>
+              </p:ext>
+            </p:extLst>
+          </p:nvPr>
+        </p:nvGraphicFramePr>
+        <p:xfrm>
+          <a:off x="3931920" y="1874520"/>
+          <a:ext cx="4754880" cy="914400"/>
+        </p:xfrm>
+        <a:graphic>
+          <a:graphicData uri="http://schemas.openxmlformats.org/drawingml/2006/table">
+            <a:tbl>
+              <a:tblPr/>
+              <a:tblGrid>
+                <a:gridCol w="2194560"/>
+                <a:gridCol w="1371600"/>
+                <a:gridCol w="1188720"/>
+              </a:tblGrid>
+              <a:tr h="301752">
+                <a:tc>
+                  <a:txBody>
+                    <a:bodyPr/>
+                    <a:lstStyle/>
+                    <a:p>
+                      <a:pPr indent="0" marL="0">
+                        <a:buNone/>
+                      </a:pPr>
+                      <a:r>
+                        <a:rPr lang="en-US" sz="1200" b="1" dirty="0">
+                          <a:solidFill>
+                            <a:srgbClr val="FFFFFF"/>
+                          </a:solidFill>
+                          <a:latin typeface="Calibri" pitchFamily="34" charset="0"/>
+                          <a:ea typeface="Calibri" pitchFamily="34" charset="-122"/>
+                          <a:cs typeface="Calibri" pitchFamily="34" charset="-120"/>
+                        </a:rPr>
+                        <a:t>Librería</a:t>
+                      </a:r>
+                      <a:endParaRPr lang="en-US" sz="1200" dirty="0">
+                        <a:latin typeface="Calibri" charset="0"/>
+                        <a:ea typeface="Calibri" charset="0"/>
+                        <a:cs typeface="Calibri" charset="0"/>
+                      </a:endParaRPr>
+                    </a:p>
+                  </a:txBody>
+                  <a:tcPr marL="73152" marR="73152" marT="0" marB="0" anchor="ctr">
+                    <a:lnL w="6350" cap="flat" cmpd="sng" algn="ctr">
+                      <a:solidFill>
+                        <a:srgbClr val="D5D9DD"/>
+                      </a:solidFill>
+                      <a:prstDash val="solid"/>
+                      <a:round/>
+                      <a:headEnd type="none" w="med" len="med"/>
+                      <a:tailEnd type="none" w="med" len="med"/>
+                    </a:lnL>
+                    <a:lnR w="6350" cap="flat" cmpd="sng" algn="ctr">
+                      <a:solidFill>
+                        <a:srgbClr val="D5D9DD"/>
+                      </a:solidFill>
+                      <a:prstDash val="solid"/>
+                      <a:round/>
+                      <a:headEnd type="none" w="med" len="med"/>
+                      <a:tailEnd type="none" w="med" len="med"/>
+                    </a:lnR>
+                    <a:lnT w="6350" cap="flat" cmpd="sng" algn="ctr">
+                      <a:solidFill>
+                        <a:srgbClr val="D5D9DD"/>
+                      </a:solidFill>
+                      <a:prstDash val="solid"/>
+                      <a:round/>
+                      <a:headEnd type="none" w="med" len="med"/>
+                      <a:tailEnd type="none" w="med" len="med"/>
+                    </a:lnT>
+                    <a:lnB w="6350" cap="flat" cmpd="sng" algn="ctr">
+                      <a:solidFill>
+                        <a:srgbClr val="D5D9DD"/>
+                      </a:solidFill>
+                      <a:prstDash val="solid"/>
+                      <a:round/>
+                      <a:headEnd type="none" w="med" len="med"/>
+                      <a:tailEnd type="none" w="med" len="med"/>
+                    </a:lnB>
+                    <a:solidFill>
+                      <a:srgbClr val="1F5E8C"/>
+                    </a:solidFill>
+                  </a:tcPr>
+                </a:tc>
+                <a:tc>
+                  <a:txBody>
+                    <a:bodyPr/>
+                    <a:lstStyle/>
+                    <a:p>
+                      <a:pPr indent="0" marL="0">
+                        <a:buNone/>
+                      </a:pPr>
+                      <a:r>
+                        <a:rPr lang="en-US" sz="1200" b="1" dirty="0">
+                          <a:solidFill>
+                            <a:srgbClr val="FFFFFF"/>
+                          </a:solidFill>
+                          <a:latin typeface="Calibri" pitchFamily="34" charset="0"/>
+                          <a:ea typeface="Calibri" pitchFamily="34" charset="-122"/>
+                          <a:cs typeface="Calibri" pitchFamily="34" charset="-120"/>
+                        </a:rPr>
+                        <a:t>Antes</a:t>
+                      </a:r>
+                      <a:endParaRPr lang="en-US" sz="1200" dirty="0">
+                        <a:latin typeface="Calibri" charset="0"/>
+                        <a:ea typeface="Calibri" charset="0"/>
+                        <a:cs typeface="Calibri" charset="0"/>
+                      </a:endParaRPr>
+                    </a:p>
+                  </a:txBody>
+                  <a:tcPr marL="73152" marR="73152" marT="0" marB="0" anchor="ctr">
+                    <a:lnL w="6350" cap="flat" cmpd="sng" algn="ctr">
+                      <a:solidFill>
+                        <a:srgbClr val="D5D9DD"/>
+                      </a:solidFill>
+                      <a:prstDash val="solid"/>
+                      <a:round/>
+                      <a:headEnd type="none" w="med" len="med"/>
+                      <a:tailEnd type="none" w="med" len="med"/>
+                    </a:lnL>
+                    <a:lnR w="6350" cap="flat" cmpd="sng" algn="ctr">
+                      <a:solidFill>
+                        <a:srgbClr val="D5D9DD"/>
+                      </a:solidFill>
+                      <a:prstDash val="solid"/>
+                      <a:round/>
+                      <a:headEnd type="none" w="med" len="med"/>
+                      <a:tailEnd type="none" w="med" len="med"/>
+                    </a:lnR>
+                    <a:lnT w="6350" cap="flat" cmpd="sng" algn="ctr">
+                      <a:solidFill>
+                        <a:srgbClr val="D5D9DD"/>
+                      </a:solidFill>
+                      <a:prstDash val="solid"/>
+                      <a:round/>
+                      <a:headEnd type="none" w="med" len="med"/>
+                      <a:tailEnd type="none" w="med" len="med"/>
+                    </a:lnT>
+                    <a:lnB w="6350" cap="flat" cmpd="sng" algn="ctr">
+                      <a:solidFill>
+                        <a:srgbClr val="D5D9DD"/>
+                      </a:solidFill>
+                      <a:prstDash val="solid"/>
+                      <a:round/>
+                      <a:headEnd type="none" w="med" len="med"/>
+                      <a:tailEnd type="none" w="med" len="med"/>
+                    </a:lnB>
+                    <a:solidFill>
+                      <a:srgbClr val="1F5E8C"/>
+                    </a:solidFill>
+                  </a:tcPr>
+                </a:tc>
+                <a:tc>
+                  <a:txBody>
+                    <a:bodyPr/>
+                    <a:lstStyle/>
+                    <a:p>
+                      <a:pPr indent="0" marL="0">
+                        <a:buNone/>
+                      </a:pPr>
+                      <a:r>
+                        <a:rPr lang="en-US" sz="1200" b="1" dirty="0">
+                          <a:solidFill>
+                            <a:srgbClr val="FFFFFF"/>
+                          </a:solidFill>
+                          <a:latin typeface="Calibri" pitchFamily="34" charset="0"/>
+                          <a:ea typeface="Calibri" pitchFamily="34" charset="-122"/>
+                          <a:cs typeface="Calibri" pitchFamily="34" charset="-120"/>
+                        </a:rPr>
+                        <a:t>Después</a:t>
+                      </a:r>
+                      <a:endParaRPr lang="en-US" sz="1200" dirty="0">
+                        <a:latin typeface="Calibri" charset="0"/>
+                        <a:ea typeface="Calibri" charset="0"/>
+                        <a:cs typeface="Calibri" charset="0"/>
+                      </a:endParaRPr>
+                    </a:p>
+                  </a:txBody>
+                  <a:tcPr marL="73152" marR="73152" marT="0" marB="0" anchor="ctr">
+                    <a:lnL w="6350" cap="flat" cmpd="sng" algn="ctr">
+                      <a:solidFill>
+                        <a:srgbClr val="D5D9DD"/>
+                      </a:solidFill>
+                      <a:prstDash val="solid"/>
+                      <a:round/>
+                      <a:headEnd type="none" w="med" len="med"/>
+                      <a:tailEnd type="none" w="med" len="med"/>
+                    </a:lnL>
+                    <a:lnR w="6350" cap="flat" cmpd="sng" algn="ctr">
+                      <a:solidFill>
+                        <a:srgbClr val="D5D9DD"/>
+                      </a:solidFill>
+                      <a:prstDash val="solid"/>
+                      <a:round/>
+                      <a:headEnd type="none" w="med" len="med"/>
+                      <a:tailEnd type="none" w="med" len="med"/>
+                    </a:lnR>
+                    <a:lnT w="6350" cap="flat" cmpd="sng" algn="ctr">
+                      <a:solidFill>
+                        <a:srgbClr val="D5D9DD"/>
+                      </a:solidFill>
+                      <a:prstDash val="solid"/>
+                      <a:round/>
+                      <a:headEnd type="none" w="med" len="med"/>
+                      <a:tailEnd type="none" w="med" len="med"/>
+                    </a:lnT>
+                    <a:lnB w="6350" cap="flat" cmpd="sng" algn="ctr">
+                      <a:solidFill>
+                        <a:srgbClr val="D5D9DD"/>
+                      </a:solidFill>
+                      <a:prstDash val="solid"/>
+                      <a:round/>
+                      <a:headEnd type="none" w="med" len="med"/>
+                      <a:tailEnd type="none" w="med" len="med"/>
+                    </a:lnB>
+                    <a:solidFill>
+                      <a:srgbClr val="1F5E8C"/>
+                    </a:solidFill>
+                  </a:tcPr>
+                </a:tc>
+              </a:tr>
+              <a:tr h="301752">
+                <a:tc>
+                  <a:txBody>
+                    <a:bodyPr/>
+                    <a:lstStyle/>
+                    <a:p>
+                      <a:pPr indent="0" marL="0">
+                        <a:buNone/>
+                      </a:pPr>
+                      <a:r>
+                        <a:rPr lang="en-US" sz="1200" dirty="0">
+                          <a:solidFill>
+                            <a:srgbClr val="1F2933"/>
+                          </a:solidFill>
+                          <a:latin typeface="Calibri" pitchFamily="34" charset="0"/>
+                          <a:ea typeface="Calibri" pitchFamily="34" charset="-122"/>
+                          <a:cs typeface="Calibri" pitchFamily="34" charset="-120"/>
+                        </a:rPr>
+                        <a:t>Netty</a:t>
+                      </a:r>
+                      <a:endParaRPr lang="en-US" sz="1200" dirty="0">
+                        <a:latin typeface="Calibri" charset="0"/>
+                        <a:ea typeface="Calibri" charset="0"/>
+                        <a:cs typeface="Calibri" charset="0"/>
+                      </a:endParaRPr>
+                    </a:p>
+                  </a:txBody>
+                  <a:tcPr marL="73152" marR="73152" marT="0" marB="0" anchor="ctr">
+                    <a:lnL w="6350" cap="flat" cmpd="sng" algn="ctr">
+                      <a:solidFill>
+                        <a:srgbClr val="D5D9DD"/>
+                      </a:solidFill>
+                      <a:prstDash val="solid"/>
+                      <a:round/>
+                      <a:headEnd type="none" w="med" len="med"/>
+                      <a:tailEnd type="none" w="med" len="med"/>
+                    </a:lnL>
+                    <a:lnR w="6350" cap="flat" cmpd="sng" algn="ctr">
+                      <a:solidFill>
+                        <a:srgbClr val="D5D9DD"/>
+                      </a:solidFill>
+                      <a:prstDash val="solid"/>
+                      <a:round/>
+                      <a:headEnd type="none" w="med" len="med"/>
+                      <a:tailEnd type="none" w="med" len="med"/>
+                    </a:lnR>
+                    <a:lnT w="6350" cap="flat" cmpd="sng" algn="ctr">
+                      <a:solidFill>
+                        <a:srgbClr val="D5D9DD"/>
+                      </a:solidFill>
+                      <a:prstDash val="solid"/>
+                      <a:round/>
+                      <a:headEnd type="none" w="med" len="med"/>
+                      <a:tailEnd type="none" w="med" len="med"/>
+                    </a:lnT>
+                    <a:lnB w="6350" cap="flat" cmpd="sng" algn="ctr">
+                      <a:solidFill>
+                        <a:srgbClr val="D5D9DD"/>
+                      </a:solidFill>
+                      <a:prstDash val="solid"/>
+                      <a:round/>
+                      <a:headEnd type="none" w="med" len="med"/>
+                      <a:tailEnd type="none" w="med" len="med"/>
+                    </a:lnB>
+                  </a:tcPr>
+                </a:tc>
+                <a:tc>
+                  <a:txBody>
+                    <a:bodyPr/>
+                    <a:lstStyle/>
+                    <a:p>
+                      <a:pPr indent="0" marL="0">
+                        <a:buNone/>
+                      </a:pPr>
+                      <a:r>
+                        <a:rPr lang="en-US" sz="1200" dirty="0">
+                          <a:solidFill>
+                            <a:srgbClr val="1F2933"/>
+                          </a:solidFill>
+                          <a:latin typeface="Calibri" pitchFamily="34" charset="0"/>
+                          <a:ea typeface="Calibri" pitchFamily="34" charset="-122"/>
+                          <a:cs typeface="Calibri" pitchFamily="34" charset="-120"/>
+                        </a:rPr>
+                        <a:t>4.1.115</a:t>
+                      </a:r>
+                      <a:endParaRPr lang="en-US" sz="1200" dirty="0">
+                        <a:latin typeface="Calibri" charset="0"/>
+                        <a:ea typeface="Calibri" charset="0"/>
+                        <a:cs typeface="Calibri" charset="0"/>
+                      </a:endParaRPr>
+                    </a:p>
+                  </a:txBody>
+                  <a:tcPr marL="73152" marR="73152" marT="0" marB="0" anchor="ctr">
+                    <a:lnL w="6350" cap="flat" cmpd="sng" algn="ctr">
+                      <a:solidFill>
+                        <a:srgbClr val="D5D9DD"/>
+                      </a:solidFill>
+                      <a:prstDash val="solid"/>
+                      <a:round/>
+                      <a:headEnd type="none" w="med" len="med"/>
+                      <a:tailEnd type="none" w="med" len="med"/>
+                    </a:lnL>
+                    <a:lnR w="6350" cap="flat" cmpd="sng" algn="ctr">
+                      <a:solidFill>
+                        <a:srgbClr val="D5D9DD"/>
+                      </a:solidFill>
+                      <a:prstDash val="solid"/>
+                      <a:round/>
+                      <a:headEnd type="none" w="med" len="med"/>
+                      <a:tailEnd type="none" w="med" len="med"/>
+                    </a:lnR>
+                    <a:lnT w="6350" cap="flat" cmpd="sng" algn="ctr">
+                      <a:solidFill>
+                        <a:srgbClr val="D5D9DD"/>
+                      </a:solidFill>
+                      <a:prstDash val="solid"/>
+                      <a:round/>
+                      <a:headEnd type="none" w="med" len="med"/>
+                      <a:tailEnd type="none" w="med" len="med"/>
+                    </a:lnT>
+                    <a:lnB w="6350" cap="flat" cmpd="sng" algn="ctr">
+                      <a:solidFill>
+                        <a:srgbClr val="D5D9DD"/>
+                      </a:solidFill>
+                      <a:prstDash val="solid"/>
+                      <a:round/>
+                      <a:headEnd type="none" w="med" len="med"/>
+                      <a:tailEnd type="none" w="med" len="med"/>
+                    </a:lnB>
+                  </a:tcPr>
+                </a:tc>
+                <a:tc>
+                  <a:txBody>
+                    <a:bodyPr/>
+                    <a:lstStyle/>
+                    <a:p>
+                      <a:pPr indent="0" marL="0">
+                        <a:buNone/>
+                      </a:pPr>
+                      <a:r>
+                        <a:rPr lang="en-US" sz="1200" b="1" dirty="0">
+                          <a:solidFill>
+                            <a:srgbClr val="1F2933"/>
+                          </a:solidFill>
+                          <a:latin typeface="Calibri" pitchFamily="34" charset="0"/>
+                          <a:ea typeface="Calibri" pitchFamily="34" charset="-122"/>
+                          <a:cs typeface="Calibri" pitchFamily="34" charset="-120"/>
+                        </a:rPr>
+                        <a:t>4.1.139</a:t>
+                      </a:r>
+                      <a:endParaRPr lang="en-US" sz="1200" dirty="0">
+                        <a:latin typeface="Calibri" charset="0"/>
+                        <a:ea typeface="Calibri" charset="0"/>
+                        <a:cs typeface="Calibri" charset="0"/>
+                      </a:endParaRPr>
+                    </a:p>
+                  </a:txBody>
+                  <a:tcPr marL="73152" marR="73152" marT="0" marB="0" anchor="ctr">
+                    <a:lnL w="6350" cap="flat" cmpd="sng" algn="ctr">
+                      <a:solidFill>
+                        <a:srgbClr val="D5D9DD"/>
+                      </a:solidFill>
+                      <a:prstDash val="solid"/>
+                      <a:round/>
+                      <a:headEnd type="none" w="med" len="med"/>
+                      <a:tailEnd type="none" w="med" len="med"/>
+                    </a:lnL>
+                    <a:lnR w="6350" cap="flat" cmpd="sng" algn="ctr">
+                      <a:solidFill>
+                        <a:srgbClr val="D5D9DD"/>
+                      </a:solidFill>
+                      <a:prstDash val="solid"/>
+                      <a:round/>
+                      <a:headEnd type="none" w="med" len="med"/>
+                      <a:tailEnd type="none" w="med" len="med"/>
+                    </a:lnR>
+                    <a:lnT w="6350" cap="flat" cmpd="sng" algn="ctr">
+                      <a:solidFill>
+                        <a:srgbClr val="D5D9DD"/>
+                      </a:solidFill>
+                      <a:prstDash val="solid"/>
+                      <a:round/>
+                      <a:headEnd type="none" w="med" len="med"/>
+                      <a:tailEnd type="none" w="med" len="med"/>
+                    </a:lnT>
+                    <a:lnB w="6350" cap="flat" cmpd="sng" algn="ctr">
+                      <a:solidFill>
+                        <a:srgbClr val="D5D9DD"/>
+                      </a:solidFill>
+                      <a:prstDash val="solid"/>
+                      <a:round/>
+                      <a:headEnd type="none" w="med" len="med"/>
+                      <a:tailEnd type="none" w="med" len="med"/>
+                    </a:lnB>
+                  </a:tcPr>
+                </a:tc>
+              </a:tr>
+              <a:tr h="301752">
+                <a:tc>
+                  <a:txBody>
+                    <a:bodyPr/>
+                    <a:lstStyle/>
+                    <a:p>
+                      <a:pPr indent="0" marL="0">
+                        <a:buNone/>
+                      </a:pPr>
+                      <a:r>
+                        <a:rPr lang="en-US" sz="1200" dirty="0">
+                          <a:solidFill>
+                            <a:srgbClr val="1F2933"/>
+                          </a:solidFill>
+                          <a:latin typeface="Calibri" pitchFamily="34" charset="0"/>
+                          <a:ea typeface="Calibri" pitchFamily="34" charset="-122"/>
+                          <a:cs typeface="Calibri" pitchFamily="34" charset="-120"/>
+                        </a:rPr>
+                        <a:t>Jackson</a:t>
+                      </a:r>
+                      <a:endParaRPr lang="en-US" sz="1200" dirty="0">
+                        <a:latin typeface="Calibri" charset="0"/>
+                        <a:ea typeface="Calibri" charset="0"/>
+                        <a:cs typeface="Calibri" charset="0"/>
+                      </a:endParaRPr>
+                    </a:p>
+                  </a:txBody>
+                  <a:tcPr marL="73152" marR="73152" marT="0" marB="0" anchor="ctr">
+                    <a:lnL w="6350" cap="flat" cmpd="sng" algn="ctr">
+                      <a:solidFill>
+                        <a:srgbClr val="D5D9DD"/>
+                      </a:solidFill>
+                      <a:prstDash val="solid"/>
+                      <a:round/>
+                      <a:headEnd type="none" w="med" len="med"/>
+                      <a:tailEnd type="none" w="med" len="med"/>
+                    </a:lnL>
+                    <a:lnR w="6350" cap="flat" cmpd="sng" algn="ctr">
+                      <a:solidFill>
+                        <a:srgbClr val="D5D9DD"/>
+                      </a:solidFill>
+                      <a:prstDash val="solid"/>
+                      <a:round/>
+                      <a:headEnd type="none" w="med" len="med"/>
+                      <a:tailEnd type="none" w="med" len="med"/>
+                    </a:lnR>
+                    <a:lnT w="6350" cap="flat" cmpd="sng" algn="ctr">
+                      <a:solidFill>
+                        <a:srgbClr val="D5D9DD"/>
+                      </a:solidFill>
+                      <a:prstDash val="solid"/>
+                      <a:round/>
+                      <a:headEnd type="none" w="med" len="med"/>
+                      <a:tailEnd type="none" w="med" len="med"/>
+                    </a:lnT>
+                    <a:lnB w="6350" cap="flat" cmpd="sng" algn="ctr">
+                      <a:solidFill>
+                        <a:srgbClr val="D5D9DD"/>
+                      </a:solidFill>
+                      <a:prstDash val="solid"/>
+                      <a:round/>
+                      <a:headEnd type="none" w="med" len="med"/>
+                      <a:tailEnd type="none" w="med" len="med"/>
+                    </a:lnB>
+                  </a:tcPr>
+                </a:tc>
+                <a:tc>
+                  <a:txBody>
+                    <a:bodyPr/>
+                    <a:lstStyle/>
+                    <a:p>
+                      <a:pPr indent="0" marL="0">
+                        <a:buNone/>
+                      </a:pPr>
+                      <a:r>
+                        <a:rPr lang="en-US" sz="1200" dirty="0">
+                          <a:solidFill>
+                            <a:srgbClr val="1F2933"/>
+                          </a:solidFill>
+                          <a:latin typeface="Calibri" pitchFamily="34" charset="0"/>
+                          <a:ea typeface="Calibri" pitchFamily="34" charset="-122"/>
+                          <a:cs typeface="Calibri" pitchFamily="34" charset="-120"/>
+                        </a:rPr>
+                        <a:t>2.18.1</a:t>
+                      </a:r>
+                      <a:endParaRPr lang="en-US" sz="1200" dirty="0">
+                        <a:latin typeface="Calibri" charset="0"/>
+                        <a:ea typeface="Calibri" charset="0"/>
+                        <a:cs typeface="Calibri" charset="0"/>
+                      </a:endParaRPr>
+                    </a:p>
+                  </a:txBody>
+                  <a:tcPr marL="73152" marR="73152" marT="0" marB="0" anchor="ctr">
+                    <a:lnL w="6350" cap="flat" cmpd="sng" algn="ctr">
+                      <a:solidFill>
+                        <a:srgbClr val="D5D9DD"/>
+                      </a:solidFill>
+                      <a:prstDash val="solid"/>
+                      <a:round/>
+                      <a:headEnd type="none" w="med" len="med"/>
+                      <a:tailEnd type="none" w="med" len="med"/>
+                    </a:lnL>
+                    <a:lnR w="6350" cap="flat" cmpd="sng" algn="ctr">
+                      <a:solidFill>
+                        <a:srgbClr val="D5D9DD"/>
+                      </a:solidFill>
+                      <a:prstDash val="solid"/>
+                      <a:round/>
+                      <a:headEnd type="none" w="med" len="med"/>
+                      <a:tailEnd type="none" w="med" len="med"/>
+                    </a:lnR>
+                    <a:lnT w="6350" cap="flat" cmpd="sng" algn="ctr">
+                      <a:solidFill>
+                        <a:srgbClr val="D5D9DD"/>
+                      </a:solidFill>
+                      <a:prstDash val="solid"/>
+                      <a:round/>
+                      <a:headEnd type="none" w="med" len="med"/>
+                      <a:tailEnd type="none" w="med" len="med"/>
+                    </a:lnT>
+                    <a:lnB w="6350" cap="flat" cmpd="sng" algn="ctr">
+                      <a:solidFill>
+                        <a:srgbClr val="D5D9DD"/>
+                      </a:solidFill>
+                      <a:prstDash val="solid"/>
+                      <a:round/>
+                      <a:headEnd type="none" w="med" len="med"/>
+                      <a:tailEnd type="none" w="med" len="med"/>
+                    </a:lnB>
+                  </a:tcPr>
+                </a:tc>
+                <a:tc>
+                  <a:txBody>
+                    <a:bodyPr/>
+                    <a:lstStyle/>
+                    <a:p>
+                      <a:pPr indent="0" marL="0">
+                        <a:buNone/>
+                      </a:pPr>
+                      <a:r>
+                        <a:rPr lang="en-US" sz="1200" b="1" dirty="0">
+                          <a:solidFill>
+                            <a:srgbClr val="1F2933"/>
+                          </a:solidFill>
+                          <a:latin typeface="Calibri" pitchFamily="34" charset="0"/>
+                          <a:ea typeface="Calibri" pitchFamily="34" charset="-122"/>
+                          <a:cs typeface="Calibri" pitchFamily="34" charset="-120"/>
+                        </a:rPr>
+                        <a:t>2.22.4</a:t>
+                      </a:r>
+                      <a:endParaRPr lang="en-US" sz="1200" dirty="0">
+                        <a:latin typeface="Calibri" charset="0"/>
+                        <a:ea typeface="Calibri" charset="0"/>
+                        <a:cs typeface="Calibri" charset="0"/>
+                      </a:endParaRPr>
+                    </a:p>
+                  </a:txBody>
+                  <a:tcPr marL="73152" marR="73152" marT="0" marB="0" anchor="ctr">
+                    <a:lnL w="6350" cap="flat" cmpd="sng" algn="ctr">
+                      <a:solidFill>
+                        <a:srgbClr val="D5D9DD"/>
+                      </a:solidFill>
+                      <a:prstDash val="solid"/>
+                      <a:round/>
+                      <a:headEnd type="none" w="med" len="med"/>
+                      <a:tailEnd type="none" w="med" len="med"/>
+                    </a:lnL>
+                    <a:lnR w="6350" cap="flat" cmpd="sng" algn="ctr">
+                      <a:solidFill>
+                        <a:srgbClr val="D5D9DD"/>
+                      </a:solidFill>
+                      <a:prstDash val="solid"/>
+                      <a:round/>
+                      <a:headEnd type="none" w="med" len="med"/>
+                      <a:tailEnd type="none" w="med" len="med"/>
+                    </a:lnR>
+                    <a:lnT w="6350" cap="flat" cmpd="sng" algn="ctr">
+                      <a:solidFill>
+                        <a:srgbClr val="D5D9DD"/>
+                      </a:solidFill>
+                      <a:prstDash val="solid"/>
+                      <a:round/>
+                      <a:headEnd type="none" w="med" len="med"/>
+                      <a:tailEnd type="none" w="med" len="med"/>
+                    </a:lnT>
+                    <a:lnB w="6350" cap="flat" cmpd="sng" algn="ctr">
+                      <a:solidFill>
+                        <a:srgbClr val="D5D9DD"/>
+                      </a:solidFill>
+                      <a:prstDash val="solid"/>
+                      <a:round/>
+                      <a:headEnd type="none" w="med" len="med"/>
+                      <a:tailEnd type="none" w="med" len="med"/>
+                    </a:lnB>
+                  </a:tcPr>
+                </a:tc>
+              </a:tr>
+              <a:tr h="301752">
+                <a:tc>
+                  <a:txBody>
+                    <a:bodyPr/>
+                    <a:lstStyle/>
+                    <a:p>
+                      <a:pPr indent="0" marL="0">
+                        <a:buNone/>
+                      </a:pPr>
+                      <a:r>
+                        <a:rPr lang="en-US" sz="1200" dirty="0">
+                          <a:solidFill>
+                            <a:srgbClr val="1F2933"/>
+                          </a:solidFill>
+                          <a:latin typeface="Calibri" pitchFamily="34" charset="0"/>
+                          <a:ea typeface="Calibri" pitchFamily="34" charset="-122"/>
+                          <a:cs typeface="Calibri" pitchFamily="34" charset="-120"/>
+                        </a:rPr>
+                        <a:t>Thymeleaf (CVSS 9.1)</a:t>
+                      </a:r>
+                      <a:endParaRPr lang="en-US" sz="1200" dirty="0">
+                        <a:latin typeface="Calibri" charset="0"/>
+                        <a:ea typeface="Calibri" charset="0"/>
+                        <a:cs typeface="Calibri" charset="0"/>
+                      </a:endParaRPr>
+                    </a:p>
+                  </a:txBody>
+                  <a:tcPr marL="73152" marR="73152" marT="0" marB="0" anchor="ctr">
+                    <a:lnL w="6350" cap="flat" cmpd="sng" algn="ctr">
+                      <a:solidFill>
+                        <a:srgbClr val="D5D9DD"/>
+                      </a:solidFill>
+                      <a:prstDash val="solid"/>
+                      <a:round/>
+                      <a:headEnd type="none" w="med" len="med"/>
+                      <a:tailEnd type="none" w="med" len="med"/>
+                    </a:lnL>
+                    <a:lnR w="6350" cap="flat" cmpd="sng" algn="ctr">
+                      <a:solidFill>
+                        <a:srgbClr val="D5D9DD"/>
+                      </a:solidFill>
+                      <a:prstDash val="solid"/>
+                      <a:round/>
+                      <a:headEnd type="none" w="med" len="med"/>
+                      <a:tailEnd type="none" w="med" len="med"/>
+                    </a:lnR>
+                    <a:lnT w="6350" cap="flat" cmpd="sng" algn="ctr">
+                      <a:solidFill>
+                        <a:srgbClr val="D5D9DD"/>
+                      </a:solidFill>
+                      <a:prstDash val="solid"/>
+                      <a:round/>
+                      <a:headEnd type="none" w="med" len="med"/>
+                      <a:tailEnd type="none" w="med" len="med"/>
+                    </a:lnT>
+                    <a:lnB w="6350" cap="flat" cmpd="sng" algn="ctr">
+                      <a:solidFill>
+                        <a:srgbClr val="D5D9DD"/>
+                      </a:solidFill>
+                      <a:prstDash val="solid"/>
+                      <a:round/>
+                      <a:headEnd type="none" w="med" len="med"/>
+                      <a:tailEnd type="none" w="med" len="med"/>
+                    </a:lnB>
+                  </a:tcPr>
+                </a:tc>
+                <a:tc>
+                  <a:txBody>
+                    <a:bodyPr/>
+                    <a:lstStyle/>
+                    <a:p>
+                      <a:pPr indent="0" marL="0">
+                        <a:buNone/>
+                      </a:pPr>
+                      <a:r>
+                        <a:rPr lang="en-US" sz="1200" dirty="0">
+                          <a:solidFill>
+                            <a:srgbClr val="1F2933"/>
+                          </a:solidFill>
+                          <a:latin typeface="Calibri" pitchFamily="34" charset="0"/>
+                          <a:ea typeface="Calibri" pitchFamily="34" charset="-122"/>
+                          <a:cs typeface="Calibri" pitchFamily="34" charset="-120"/>
+                        </a:rPr>
+                        <a:t>3.1.2</a:t>
+                      </a:r>
+                      <a:endParaRPr lang="en-US" sz="1200" dirty="0">
+                        <a:latin typeface="Calibri" charset="0"/>
+                        <a:ea typeface="Calibri" charset="0"/>
+                        <a:cs typeface="Calibri" charset="0"/>
+                      </a:endParaRPr>
+                    </a:p>
+                  </a:txBody>
+                  <a:tcPr marL="73152" marR="73152" marT="0" marB="0" anchor="ctr">
+                    <a:lnL w="6350" cap="flat" cmpd="sng" algn="ctr">
+                      <a:solidFill>
+                        <a:srgbClr val="D5D9DD"/>
+                      </a:solidFill>
+                      <a:prstDash val="solid"/>
+                      <a:round/>
+                      <a:headEnd type="none" w="med" len="med"/>
+                      <a:tailEnd type="none" w="med" len="med"/>
+                    </a:lnL>
+                    <a:lnR w="6350" cap="flat" cmpd="sng" algn="ctr">
+                      <a:solidFill>
+                        <a:srgbClr val="D5D9DD"/>
+                      </a:solidFill>
+                      <a:prstDash val="solid"/>
+                      <a:round/>
+                      <a:headEnd type="none" w="med" len="med"/>
+                      <a:tailEnd type="none" w="med" len="med"/>
+                    </a:lnR>
+                    <a:lnT w="6350" cap="flat" cmpd="sng" algn="ctr">
+                      <a:solidFill>
+                        <a:srgbClr val="D5D9DD"/>
+                      </a:solidFill>
+                      <a:prstDash val="solid"/>
+                      <a:round/>
+                      <a:headEnd type="none" w="med" len="med"/>
+                      <a:tailEnd type="none" w="med" len="med"/>
+                    </a:lnT>
+                    <a:lnB w="6350" cap="flat" cmpd="sng" algn="ctr">
+                      <a:solidFill>
+                        <a:srgbClr val="D5D9DD"/>
+                      </a:solidFill>
+                      <a:prstDash val="solid"/>
+                      <a:round/>
+                      <a:headEnd type="none" w="med" len="med"/>
+                      <a:tailEnd type="none" w="med" len="med"/>
+                    </a:lnB>
+                  </a:tcPr>
+                </a:tc>
+                <a:tc>
+                  <a:txBody>
+                    <a:bodyPr/>
+                    <a:lstStyle/>
+                    <a:p>
+                      <a:pPr indent="0" marL="0">
+                        <a:buNone/>
+                      </a:pPr>
+                      <a:r>
+                        <a:rPr lang="en-US" sz="1200" b="1" dirty="0">
+                          <a:solidFill>
+                            <a:srgbClr val="1F2933"/>
+                          </a:solidFill>
+                          <a:latin typeface="Calibri" pitchFamily="34" charset="0"/>
+                          <a:ea typeface="Calibri" pitchFamily="34" charset="-122"/>
+                          <a:cs typeface="Calibri" pitchFamily="34" charset="-120"/>
+                        </a:rPr>
+                        <a:t>3.1.5</a:t>
+                      </a:r>
+                      <a:endParaRPr lang="en-US" sz="1200" dirty="0">
+                        <a:latin typeface="Calibri" charset="0"/>
+                        <a:ea typeface="Calibri" charset="0"/>
+                        <a:cs typeface="Calibri" charset="0"/>
+                      </a:endParaRPr>
+                    </a:p>
+                  </a:txBody>
+                  <a:tcPr marL="73152" marR="73152" marT="0" marB="0" anchor="ctr">
+                    <a:lnL w="6350" cap="flat" cmpd="sng" algn="ctr">
+                      <a:solidFill>
+                        <a:srgbClr val="D5D9DD"/>
+                      </a:solidFill>
+                      <a:prstDash val="solid"/>
+                      <a:round/>
+                      <a:headEnd type="none" w="med" len="med"/>
+                      <a:tailEnd type="none" w="med" len="med"/>
+                    </a:lnL>
+                    <a:lnR w="6350" cap="flat" cmpd="sng" algn="ctr">
+                      <a:solidFill>
+                        <a:srgbClr val="D5D9DD"/>
+                      </a:solidFill>
+                      <a:prstDash val="solid"/>
+                      <a:round/>
+                      <a:headEnd type="none" w="med" len="med"/>
+                      <a:tailEnd type="none" w="med" len="med"/>
+                    </a:lnR>
+                    <a:lnT w="6350" cap="flat" cmpd="sng" algn="ctr">
+                      <a:solidFill>
+                        <a:srgbClr val="D5D9DD"/>
+                      </a:solidFill>
+                      <a:prstDash val="solid"/>
+                      <a:round/>
+                      <a:headEnd type="none" w="med" len="med"/>
+                      <a:tailEnd type="none" w="med" len="med"/>
+                    </a:lnT>
+                    <a:lnB w="6350" cap="flat" cmpd="sng" algn="ctr">
+                      <a:solidFill>
+                        <a:srgbClr val="D5D9DD"/>
+                      </a:solidFill>
+                      <a:prstDash val="solid"/>
+                      <a:round/>
+                      <a:headEnd type="none" w="med" len="med"/>
+                      <a:tailEnd type="none" w="med" len="med"/>
+                    </a:lnB>
+                  </a:tcPr>
+                </a:tc>
+              </a:tr>
+              <a:tr h="301752">
+                <a:tc>
+                  <a:txBody>
+                    <a:bodyPr/>
+                    <a:lstStyle/>
+                    <a:p>
+                      <a:pPr indent="0" marL="0">
+                        <a:buNone/>
+                      </a:pPr>
+                      <a:r>
+                        <a:rPr lang="en-US" sz="1200" dirty="0">
+                          <a:solidFill>
+                            <a:srgbClr val="1F2933"/>
+                          </a:solidFill>
+                          <a:latin typeface="Calibri" pitchFamily="34" charset="0"/>
+                          <a:ea typeface="Calibri" pitchFamily="34" charset="-122"/>
+                          <a:cs typeface="Calibri" pitchFamily="34" charset="-120"/>
+                        </a:rPr>
+                        <a:t>Logback</a:t>
+                      </a:r>
+                      <a:endParaRPr lang="en-US" sz="1200" dirty="0">
+                        <a:latin typeface="Calibri" charset="0"/>
+                        <a:ea typeface="Calibri" charset="0"/>
+                        <a:cs typeface="Calibri" charset="0"/>
+                      </a:endParaRPr>
+                    </a:p>
+                  </a:txBody>
+                  <a:tcPr marL="73152" marR="73152" marT="0" marB="0" anchor="ctr">
+                    <a:lnL w="6350" cap="flat" cmpd="sng" algn="ctr">
+                      <a:solidFill>
+                        <a:srgbClr val="D5D9DD"/>
+                      </a:solidFill>
+                      <a:prstDash val="solid"/>
+                      <a:round/>
+                      <a:headEnd type="none" w="med" len="med"/>
+                      <a:tailEnd type="none" w="med" len="med"/>
+                    </a:lnL>
+                    <a:lnR w="6350" cap="flat" cmpd="sng" algn="ctr">
+                      <a:solidFill>
+                        <a:srgbClr val="D5D9DD"/>
+                      </a:solidFill>
+                      <a:prstDash val="solid"/>
+                      <a:round/>
+                      <a:headEnd type="none" w="med" len="med"/>
+                      <a:tailEnd type="none" w="med" len="med"/>
+                    </a:lnR>
+                    <a:lnT w="6350" cap="flat" cmpd="sng" algn="ctr">
+                      <a:solidFill>
+                        <a:srgbClr val="D5D9DD"/>
+                      </a:solidFill>
+                      <a:prstDash val="solid"/>
+                      <a:round/>
+                      <a:headEnd type="none" w="med" len="med"/>
+                      <a:tailEnd type="none" w="med" len="med"/>
+                    </a:lnT>
+                    <a:lnB w="6350" cap="flat" cmpd="sng" algn="ctr">
+                      <a:solidFill>
+                        <a:srgbClr val="D5D9DD"/>
+                      </a:solidFill>
+                      <a:prstDash val="solid"/>
+                      <a:round/>
+                      <a:headEnd type="none" w="med" len="med"/>
+                      <a:tailEnd type="none" w="med" len="med"/>
+                    </a:lnB>
+                  </a:tcPr>
+                </a:tc>
+                <a:tc>
+                  <a:txBody>
+                    <a:bodyPr/>
+                    <a:lstStyle/>
+                    <a:p>
+                      <a:pPr indent="0" marL="0">
+                        <a:buNone/>
+                      </a:pPr>
+                      <a:r>
+                        <a:rPr lang="en-US" sz="1200" dirty="0">
+                          <a:solidFill>
+                            <a:srgbClr val="1F2933"/>
+                          </a:solidFill>
+                          <a:latin typeface="Calibri" pitchFamily="34" charset="0"/>
+                          <a:ea typeface="Calibri" pitchFamily="34" charset="-122"/>
+                          <a:cs typeface="Calibri" pitchFamily="34" charset="-120"/>
+                        </a:rPr>
+                        <a:t>1.5.4</a:t>
+                      </a:r>
+                      <a:endParaRPr lang="en-US" sz="1200" dirty="0">
+                        <a:latin typeface="Calibri" charset="0"/>
+                        <a:ea typeface="Calibri" charset="0"/>
+                        <a:cs typeface="Calibri" charset="0"/>
+                      </a:endParaRPr>
+                    </a:p>
+                  </a:txBody>
+                  <a:tcPr marL="73152" marR="73152" marT="0" marB="0" anchor="ctr">
+                    <a:lnL w="6350" cap="flat" cmpd="sng" algn="ctr">
+                      <a:solidFill>
+                        <a:srgbClr val="D5D9DD"/>
+                      </a:solidFill>
+                      <a:prstDash val="solid"/>
+                      <a:round/>
+                      <a:headEnd type="none" w="med" len="med"/>
+                      <a:tailEnd type="none" w="med" len="med"/>
+                    </a:lnL>
+                    <a:lnR w="6350" cap="flat" cmpd="sng" algn="ctr">
+                      <a:solidFill>
+                        <a:srgbClr val="D5D9DD"/>
+                      </a:solidFill>
+                      <a:prstDash val="solid"/>
+                      <a:round/>
+                      <a:headEnd type="none" w="med" len="med"/>
+                      <a:tailEnd type="none" w="med" len="med"/>
+                    </a:lnR>
+                    <a:lnT w="6350" cap="flat" cmpd="sng" algn="ctr">
+                      <a:solidFill>
+                        <a:srgbClr val="D5D9DD"/>
+                      </a:solidFill>
+                      <a:prstDash val="solid"/>
+                      <a:round/>
+                      <a:headEnd type="none" w="med" len="med"/>
+                      <a:tailEnd type="none" w="med" len="med"/>
+                    </a:lnT>
+                    <a:lnB w="6350" cap="flat" cmpd="sng" algn="ctr">
+                      <a:solidFill>
+                        <a:srgbClr val="D5D9DD"/>
+                      </a:solidFill>
+                      <a:prstDash val="solid"/>
+                      <a:round/>
+                      <a:headEnd type="none" w="med" len="med"/>
+                      <a:tailEnd type="none" w="med" len="med"/>
+                    </a:lnB>
+                  </a:tcPr>
+                </a:tc>
+                <a:tc>
+                  <a:txBody>
+                    <a:bodyPr/>
+                    <a:lstStyle/>
+                    <a:p>
+                      <a:pPr indent="0" marL="0">
+                        <a:buNone/>
+                      </a:pPr>
+                      <a:r>
+                        <a:rPr lang="en-US" sz="1200" b="1" dirty="0">
+                          <a:solidFill>
+                            <a:srgbClr val="1F2933"/>
+                          </a:solidFill>
+                          <a:latin typeface="Calibri" pitchFamily="34" charset="0"/>
+                          <a:ea typeface="Calibri" pitchFamily="34" charset="-122"/>
+                          <a:cs typeface="Calibri" pitchFamily="34" charset="-120"/>
+                        </a:rPr>
+                        <a:t>1.6.5</a:t>
+                      </a:r>
+                      <a:endParaRPr lang="en-US" sz="1200" dirty="0">
+                        <a:latin typeface="Calibri" charset="0"/>
+                        <a:ea typeface="Calibri" charset="0"/>
+                        <a:cs typeface="Calibri" charset="0"/>
+                      </a:endParaRPr>
+                    </a:p>
+                  </a:txBody>
+                  <a:tcPr marL="73152" marR="73152" marT="0" marB="0" anchor="ctr">
+                    <a:lnL w="6350" cap="flat" cmpd="sng" algn="ctr">
+                      <a:solidFill>
+                        <a:srgbClr val="D5D9DD"/>
+                      </a:solidFill>
+                      <a:prstDash val="solid"/>
+                      <a:round/>
+                      <a:headEnd type="none" w="med" len="med"/>
+                      <a:tailEnd type="none" w="med" len="med"/>
+                    </a:lnL>
+                    <a:lnR w="6350" cap="flat" cmpd="sng" algn="ctr">
+                      <a:solidFill>
+                        <a:srgbClr val="D5D9DD"/>
+                      </a:solidFill>
+                      <a:prstDash val="solid"/>
+                      <a:round/>
+                      <a:headEnd type="none" w="med" len="med"/>
+                      <a:tailEnd type="none" w="med" len="med"/>
+                    </a:lnR>
+                    <a:lnT w="6350" cap="flat" cmpd="sng" algn="ctr">
+                      <a:solidFill>
+                        <a:srgbClr val="D5D9DD"/>
+                      </a:solidFill>
+                      <a:prstDash val="solid"/>
+                      <a:round/>
+                      <a:headEnd type="none" w="med" len="med"/>
+                      <a:tailEnd type="none" w="med" len="med"/>
+                    </a:lnT>
+                    <a:lnB w="6350" cap="flat" cmpd="sng" algn="ctr">
+                      <a:solidFill>
+                        <a:srgbClr val="D5D9DD"/>
+                      </a:solidFill>
+                      <a:prstDash val="solid"/>
+                      <a:round/>
+                      <a:headEnd type="none" w="med" len="med"/>
+                      <a:tailEnd type="none" w="med" len="med"/>
+                    </a:lnB>
+                  </a:tcPr>
+                </a:tc>
+              </a:tr>
+              <a:tr h="301752">
+                <a:tc>
+                  <a:txBody>
+                    <a:bodyPr/>
+                    <a:lstStyle/>
+                    <a:p>
+                      <a:pPr indent="0" marL="0">
+                        <a:buNone/>
+                      </a:pPr>
+                      <a:r>
+                        <a:rPr lang="en-US" sz="1200" dirty="0">
+                          <a:solidFill>
+                            <a:srgbClr val="1F2933"/>
+                          </a:solidFill>
+                          <a:latin typeface="Calibri" pitchFamily="34" charset="0"/>
+                          <a:ea typeface="Calibri" pitchFamily="34" charset="-122"/>
+                          <a:cs typeface="Calibri" pitchFamily="34" charset="-120"/>
+                        </a:rPr>
+                        <a:t>json-smart</a:t>
+                      </a:r>
+                      <a:endParaRPr lang="en-US" sz="1200" dirty="0">
+                        <a:latin typeface="Calibri" charset="0"/>
+                        <a:ea typeface="Calibri" charset="0"/>
+                        <a:cs typeface="Calibri" charset="0"/>
+                      </a:endParaRPr>
+                    </a:p>
+                  </a:txBody>
+                  <a:tcPr marL="73152" marR="73152" marT="0" marB="0" anchor="ctr">
+                    <a:lnL w="6350" cap="flat" cmpd="sng" algn="ctr">
+                      <a:solidFill>
+                        <a:srgbClr val="D5D9DD"/>
+                      </a:solidFill>
+                      <a:prstDash val="solid"/>
+                      <a:round/>
+                      <a:headEnd type="none" w="med" len="med"/>
+                      <a:tailEnd type="none" w="med" len="med"/>
+                    </a:lnL>
+                    <a:lnR w="6350" cap="flat" cmpd="sng" algn="ctr">
+                      <a:solidFill>
+                        <a:srgbClr val="D5D9DD"/>
+                      </a:solidFill>
+                      <a:prstDash val="solid"/>
+                      <a:round/>
+                      <a:headEnd type="none" w="med" len="med"/>
+                      <a:tailEnd type="none" w="med" len="med"/>
+                    </a:lnR>
+                    <a:lnT w="6350" cap="flat" cmpd="sng" algn="ctr">
+                      <a:solidFill>
+                        <a:srgbClr val="D5D9DD"/>
+                      </a:solidFill>
+                      <a:prstDash val="solid"/>
+                      <a:round/>
+                      <a:headEnd type="none" w="med" len="med"/>
+                      <a:tailEnd type="none" w="med" len="med"/>
+                    </a:lnT>
+                    <a:lnB w="6350" cap="flat" cmpd="sng" algn="ctr">
+                      <a:solidFill>
+                        <a:srgbClr val="D5D9DD"/>
+                      </a:solidFill>
+                      <a:prstDash val="solid"/>
+                      <a:round/>
+                      <a:headEnd type="none" w="med" len="med"/>
+                      <a:tailEnd type="none" w="med" len="med"/>
+                    </a:lnB>
+                  </a:tcPr>
+                </a:tc>
+                <a:tc>
+                  <a:txBody>
+                    <a:bodyPr/>
+                    <a:lstStyle/>
+                    <a:p>
+                      <a:pPr indent="0" marL="0">
+                        <a:buNone/>
+                      </a:pPr>
+                      <a:r>
+                        <a:rPr lang="en-US" sz="1200" dirty="0">
+                          <a:solidFill>
+                            <a:srgbClr val="1F2933"/>
+                          </a:solidFill>
+                          <a:latin typeface="Calibri" pitchFamily="34" charset="0"/>
+                          <a:ea typeface="Calibri" pitchFamily="34" charset="-122"/>
+                          <a:cs typeface="Calibri" pitchFamily="34" charset="-120"/>
+                        </a:rPr>
+                        <a:t>2.5.1</a:t>
+                      </a:r>
+                      <a:endParaRPr lang="en-US" sz="1200" dirty="0">
+                        <a:latin typeface="Calibri" charset="0"/>
+                        <a:ea typeface="Calibri" charset="0"/>
+                        <a:cs typeface="Calibri" charset="0"/>
+                      </a:endParaRPr>
+                    </a:p>
+                  </a:txBody>
+                  <a:tcPr marL="73152" marR="73152" marT="0" marB="0" anchor="ctr">
+                    <a:lnL w="6350" cap="flat" cmpd="sng" algn="ctr">
+                      <a:solidFill>
+                        <a:srgbClr val="D5D9DD"/>
+                      </a:solidFill>
+                      <a:prstDash val="solid"/>
+                      <a:round/>
+                      <a:headEnd type="none" w="med" len="med"/>
+                      <a:tailEnd type="none" w="med" len="med"/>
+                    </a:lnL>
+                    <a:lnR w="6350" cap="flat" cmpd="sng" algn="ctr">
+                      <a:solidFill>
+                        <a:srgbClr val="D5D9DD"/>
+                      </a:solidFill>
+                      <a:prstDash val="solid"/>
+                      <a:round/>
+                      <a:headEnd type="none" w="med" len="med"/>
+                      <a:tailEnd type="none" w="med" len="med"/>
+                    </a:lnR>
+                    <a:lnT w="6350" cap="flat" cmpd="sng" algn="ctr">
+                      <a:solidFill>
+                        <a:srgbClr val="D5D9DD"/>
+                      </a:solidFill>
+                      <a:prstDash val="solid"/>
+                      <a:round/>
+                      <a:headEnd type="none" w="med" len="med"/>
+                      <a:tailEnd type="none" w="med" len="med"/>
+                    </a:lnT>
+                    <a:lnB w="6350" cap="flat" cmpd="sng" algn="ctr">
+                      <a:solidFill>
+                        <a:srgbClr val="D5D9DD"/>
+                      </a:solidFill>
+                      <a:prstDash val="solid"/>
+                      <a:round/>
+                      <a:headEnd type="none" w="med" len="med"/>
+                      <a:tailEnd type="none" w="med" len="med"/>
+                    </a:lnB>
+                  </a:tcPr>
+                </a:tc>
+                <a:tc>
+                  <a:txBody>
+                    <a:bodyPr/>
+                    <a:lstStyle/>
+                    <a:p>
+                      <a:pPr indent="0" marL="0">
+                        <a:buNone/>
+                      </a:pPr>
+                      <a:r>
+                        <a:rPr lang="en-US" sz="1200" b="1" dirty="0">
+                          <a:solidFill>
+                            <a:srgbClr val="1F2933"/>
+                          </a:solidFill>
+                          <a:latin typeface="Calibri" pitchFamily="34" charset="0"/>
+                          <a:ea typeface="Calibri" pitchFamily="34" charset="-122"/>
+                          <a:cs typeface="Calibri" pitchFamily="34" charset="-120"/>
+                        </a:rPr>
+                        <a:t>2.5.2</a:t>
+                      </a:r>
+                      <a:endParaRPr lang="en-US" sz="1200" dirty="0">
+                        <a:latin typeface="Calibri" charset="0"/>
+                        <a:ea typeface="Calibri" charset="0"/>
+                        <a:cs typeface="Calibri" charset="0"/>
+                      </a:endParaRPr>
+                    </a:p>
+                  </a:txBody>
+                  <a:tcPr marL="73152" marR="73152" marT="0" marB="0" anchor="ctr">
+                    <a:lnL w="6350" cap="flat" cmpd="sng" algn="ctr">
+                      <a:solidFill>
+                        <a:srgbClr val="D5D9DD"/>
+                      </a:solidFill>
+                      <a:prstDash val="solid"/>
+                      <a:round/>
+                      <a:headEnd type="none" w="med" len="med"/>
+                      <a:tailEnd type="none" w="med" len="med"/>
+                    </a:lnL>
+                    <a:lnR w="6350" cap="flat" cmpd="sng" algn="ctr">
+                      <a:solidFill>
+                        <a:srgbClr val="D5D9DD"/>
+                      </a:solidFill>
+                      <a:prstDash val="solid"/>
+                      <a:round/>
+                      <a:headEnd type="none" w="med" len="med"/>
+                      <a:tailEnd type="none" w="med" len="med"/>
+                    </a:lnR>
+                    <a:lnT w="6350" cap="flat" cmpd="sng" algn="ctr">
+                      <a:solidFill>
+                        <a:srgbClr val="D5D9DD"/>
+                      </a:solidFill>
+                      <a:prstDash val="solid"/>
+                      <a:round/>
+                      <a:headEnd type="none" w="med" len="med"/>
+                      <a:tailEnd type="none" w="med" len="med"/>
+                    </a:lnT>
+                    <a:lnB w="6350" cap="flat" cmpd="sng" algn="ctr">
+                      <a:solidFill>
+                        <a:srgbClr val="D5D9DD"/>
+                      </a:solidFill>
+                      <a:prstDash val="solid"/>
+                      <a:round/>
+                      <a:headEnd type="none" w="med" len="med"/>
+                      <a:tailEnd type="none" w="med" len="med"/>
+                    </a:lnB>
+                  </a:tcPr>
+                </a:tc>
+              </a:tr>
+              <a:tr h="301752">
+                <a:tc>
+                  <a:txBody>
+                    <a:bodyPr/>
+                    <a:lstStyle/>
+                    <a:p>
+                      <a:pPr indent="0" marL="0">
+                        <a:buNone/>
+                      </a:pPr>
+                      <a:r>
+                        <a:rPr lang="en-US" sz="1200" dirty="0">
+                          <a:solidFill>
+                            <a:srgbClr val="1F2933"/>
+                          </a:solidFill>
+                          <a:latin typeface="Calibri" pitchFamily="34" charset="0"/>
+                          <a:ea typeface="Calibri" pitchFamily="34" charset="-122"/>
+                          <a:cs typeface="Calibri" pitchFamily="34" charset="-120"/>
+                        </a:rPr>
+                        <a:t>Micrometer</a:t>
+                      </a:r>
+                      <a:endParaRPr lang="en-US" sz="1200" dirty="0">
+                        <a:latin typeface="Calibri" charset="0"/>
+                        <a:ea typeface="Calibri" charset="0"/>
+                        <a:cs typeface="Calibri" charset="0"/>
+                      </a:endParaRPr>
+                    </a:p>
+                  </a:txBody>
+                  <a:tcPr marL="73152" marR="73152" marT="0" marB="0" anchor="ctr">
+                    <a:lnL w="6350" cap="flat" cmpd="sng" algn="ctr">
+                      <a:solidFill>
+                        <a:srgbClr val="D5D9DD"/>
+                      </a:solidFill>
+                      <a:prstDash val="solid"/>
+                      <a:round/>
+                      <a:headEnd type="none" w="med" len="med"/>
+                      <a:tailEnd type="none" w="med" len="med"/>
+                    </a:lnL>
+                    <a:lnR w="6350" cap="flat" cmpd="sng" algn="ctr">
+                      <a:solidFill>
+                        <a:srgbClr val="D5D9DD"/>
+                      </a:solidFill>
+                      <a:prstDash val="solid"/>
+                      <a:round/>
+                      <a:headEnd type="none" w="med" len="med"/>
+                      <a:tailEnd type="none" w="med" len="med"/>
+                    </a:lnR>
+                    <a:lnT w="6350" cap="flat" cmpd="sng" algn="ctr">
+                      <a:solidFill>
+                        <a:srgbClr val="D5D9DD"/>
+                      </a:solidFill>
+                      <a:prstDash val="solid"/>
+                      <a:round/>
+                      <a:headEnd type="none" w="med" len="med"/>
+                      <a:tailEnd type="none" w="med" len="med"/>
+                    </a:lnT>
+                    <a:lnB w="6350" cap="flat" cmpd="sng" algn="ctr">
+                      <a:solidFill>
+                        <a:srgbClr val="D5D9DD"/>
+                      </a:solidFill>
+                      <a:prstDash val="solid"/>
+                      <a:round/>
+                      <a:headEnd type="none" w="med" len="med"/>
+                      <a:tailEnd type="none" w="med" len="med"/>
+                    </a:lnB>
+                  </a:tcPr>
+                </a:tc>
+                <a:tc>
+                  <a:txBody>
+                    <a:bodyPr/>
+                    <a:lstStyle/>
+                    <a:p>
+                      <a:pPr indent="0" marL="0">
+                        <a:buNone/>
+                      </a:pPr>
+                      <a:r>
+                        <a:rPr lang="en-US" sz="1200" dirty="0">
+                          <a:solidFill>
+                            <a:srgbClr val="1F2933"/>
+                          </a:solidFill>
+                          <a:latin typeface="Calibri" pitchFamily="34" charset="0"/>
+                          <a:ea typeface="Calibri" pitchFamily="34" charset="-122"/>
+                          <a:cs typeface="Calibri" pitchFamily="34" charset="-120"/>
+                        </a:rPr>
+                        <a:t>1.13.6</a:t>
+                      </a:r>
+                      <a:endParaRPr lang="en-US" sz="1200" dirty="0">
+                        <a:latin typeface="Calibri" charset="0"/>
+                        <a:ea typeface="Calibri" charset="0"/>
+                        <a:cs typeface="Calibri" charset="0"/>
+                      </a:endParaRPr>
+                    </a:p>
+                  </a:txBody>
+                  <a:tcPr marL="73152" marR="73152" marT="0" marB="0" anchor="ctr">
+                    <a:lnL w="6350" cap="flat" cmpd="sng" algn="ctr">
+                      <a:solidFill>
+                        <a:srgbClr val="D5D9DD"/>
+                      </a:solidFill>
+                      <a:prstDash val="solid"/>
+                      <a:round/>
+                      <a:headEnd type="none" w="med" len="med"/>
+                      <a:tailEnd type="none" w="med" len="med"/>
+                    </a:lnL>
+                    <a:lnR w="6350" cap="flat" cmpd="sng" algn="ctr">
+                      <a:solidFill>
+                        <a:srgbClr val="D5D9DD"/>
+                      </a:solidFill>
+                      <a:prstDash val="solid"/>
+                      <a:round/>
+                      <a:headEnd type="none" w="med" len="med"/>
+                      <a:tailEnd type="none" w="med" len="med"/>
+                    </a:lnR>
+                    <a:lnT w="6350" cap="flat" cmpd="sng" algn="ctr">
+                      <a:solidFill>
+                        <a:srgbClr val="D5D9DD"/>
+                      </a:solidFill>
+                      <a:prstDash val="solid"/>
+                      <a:round/>
+                      <a:headEnd type="none" w="med" len="med"/>
+                      <a:tailEnd type="none" w="med" len="med"/>
+                    </a:lnT>
+                    <a:lnB w="6350" cap="flat" cmpd="sng" algn="ctr">
+                      <a:solidFill>
+                        <a:srgbClr val="D5D9DD"/>
+                      </a:solidFill>
+                      <a:prstDash val="solid"/>
+                      <a:round/>
+                      <a:headEnd type="none" w="med" len="med"/>
+                      <a:tailEnd type="none" w="med" len="med"/>
+                    </a:lnB>
+                  </a:tcPr>
+                </a:tc>
+                <a:tc>
+                  <a:txBody>
+                    <a:bodyPr/>
+                    <a:lstStyle/>
+                    <a:p>
+                      <a:pPr indent="0" marL="0">
+                        <a:buNone/>
+                      </a:pPr>
+                      <a:r>
+                        <a:rPr lang="en-US" sz="1200" b="1" dirty="0">
+                          <a:solidFill>
+                            <a:srgbClr val="1F2933"/>
+                          </a:solidFill>
+                          <a:latin typeface="Calibri" pitchFamily="34" charset="0"/>
+                          <a:ea typeface="Calibri" pitchFamily="34" charset="-122"/>
+                          <a:cs typeface="Calibri" pitchFamily="34" charset="-120"/>
+                        </a:rPr>
+                        <a:t>1.17.1</a:t>
+                      </a:r>
+                      <a:endParaRPr lang="en-US" sz="1200" dirty="0">
+                        <a:latin typeface="Calibri" charset="0"/>
+                        <a:ea typeface="Calibri" charset="0"/>
+                        <a:cs typeface="Calibri" charset="0"/>
+                      </a:endParaRPr>
+                    </a:p>
+                  </a:txBody>
+                  <a:tcPr marL="73152" marR="73152" marT="0" marB="0" anchor="ctr">
+                    <a:lnL w="6350" cap="flat" cmpd="sng" algn="ctr">
+                      <a:solidFill>
+                        <a:srgbClr val="D5D9DD"/>
+                      </a:solidFill>
+                      <a:prstDash val="solid"/>
+                      <a:round/>
+                      <a:headEnd type="none" w="med" len="med"/>
+                      <a:tailEnd type="none" w="med" len="med"/>
+                    </a:lnL>
+                    <a:lnR w="6350" cap="flat" cmpd="sng" algn="ctr">
+                      <a:solidFill>
+                        <a:srgbClr val="D5D9DD"/>
+                      </a:solidFill>
+                      <a:prstDash val="solid"/>
+                      <a:round/>
+                      <a:headEnd type="none" w="med" len="med"/>
+                      <a:tailEnd type="none" w="med" len="med"/>
+                    </a:lnR>
+                    <a:lnT w="6350" cap="flat" cmpd="sng" algn="ctr">
+                      <a:solidFill>
+                        <a:srgbClr val="D5D9DD"/>
+                      </a:solidFill>
+                      <a:prstDash val="solid"/>
+                      <a:round/>
+                      <a:headEnd type="none" w="med" len="med"/>
+                      <a:tailEnd type="none" w="med" len="med"/>
+                    </a:lnT>
+                    <a:lnB w="6350" cap="flat" cmpd="sng" algn="ctr">
+                      <a:solidFill>
+                        <a:srgbClr val="D5D9DD"/>
+                      </a:solidFill>
+                      <a:prstDash val="solid"/>
+                      <a:round/>
+                      <a:headEnd type="none" w="med" len="med"/>
+                      <a:tailEnd type="none" w="med" len="med"/>
+                    </a:lnB>
+                  </a:tcPr>
+                </a:tc>
+              </a:tr>
+              <a:tr h="301752">
+                <a:tc>
+                  <a:txBody>
+                    <a:bodyPr/>
+                    <a:lstStyle/>
+                    <a:p>
+                      <a:pPr indent="0" marL="0">
+                        <a:buNone/>
+                      </a:pPr>
+                      <a:r>
+                        <a:rPr lang="en-US" sz="1200" dirty="0">
+                          <a:solidFill>
+                            <a:srgbClr val="1F2933"/>
+                          </a:solidFill>
+                          <a:latin typeface="Calibri" pitchFamily="34" charset="0"/>
+                          <a:ea typeface="Calibri" pitchFamily="34" charset="-122"/>
+                          <a:cs typeface="Calibri" pitchFamily="34" charset="-120"/>
+                        </a:rPr>
+                        <a:t>HdrHistogram · LatencyUtils</a:t>
+                      </a:r>
+                      <a:endParaRPr lang="en-US" sz="1200" dirty="0">
+                        <a:latin typeface="Calibri" charset="0"/>
+                        <a:ea typeface="Calibri" charset="0"/>
+                        <a:cs typeface="Calibri" charset="0"/>
+                      </a:endParaRPr>
+                    </a:p>
+                  </a:txBody>
+                  <a:tcPr marL="73152" marR="73152" marT="0" marB="0" anchor="ctr">
+                    <a:lnL w="6350" cap="flat" cmpd="sng" algn="ctr">
+                      <a:solidFill>
+                        <a:srgbClr val="D5D9DD"/>
+                      </a:solidFill>
+                      <a:prstDash val="solid"/>
+                      <a:round/>
+                      <a:headEnd type="none" w="med" len="med"/>
+                      <a:tailEnd type="none" w="med" len="med"/>
+                    </a:lnL>
+                    <a:lnR w="6350" cap="flat" cmpd="sng" algn="ctr">
+                      <a:solidFill>
+                        <a:srgbClr val="D5D9DD"/>
+                      </a:solidFill>
+                      <a:prstDash val="solid"/>
+                      <a:round/>
+                      <a:headEnd type="none" w="med" len="med"/>
+                      <a:tailEnd type="none" w="med" len="med"/>
+                    </a:lnR>
+                    <a:lnT w="6350" cap="flat" cmpd="sng" algn="ctr">
+                      <a:solidFill>
+                        <a:srgbClr val="D5D9DD"/>
+                      </a:solidFill>
+                      <a:prstDash val="solid"/>
+                      <a:round/>
+                      <a:headEnd type="none" w="med" len="med"/>
+                      <a:tailEnd type="none" w="med" len="med"/>
+                    </a:lnT>
+                    <a:lnB w="6350" cap="flat" cmpd="sng" algn="ctr">
+                      <a:solidFill>
+                        <a:srgbClr val="D5D9DD"/>
+                      </a:solidFill>
+                      <a:prstDash val="solid"/>
+                      <a:round/>
+                      <a:headEnd type="none" w="med" len="med"/>
+                      <a:tailEnd type="none" w="med" len="med"/>
+                    </a:lnB>
+                  </a:tcPr>
+                </a:tc>
+                <a:tc>
+                  <a:txBody>
+                    <a:bodyPr/>
+                    <a:lstStyle/>
+                    <a:p>
+                      <a:pPr indent="0" marL="0">
+                        <a:buNone/>
+                      </a:pPr>
+                      <a:r>
+                        <a:rPr lang="en-US" sz="1200" dirty="0">
+                          <a:solidFill>
+                            <a:srgbClr val="1F2933"/>
+                          </a:solidFill>
+                          <a:latin typeface="Calibri" pitchFamily="34" charset="0"/>
+                          <a:ea typeface="Calibri" pitchFamily="34" charset="-122"/>
+                          <a:cs typeface="Calibri" pitchFamily="34" charset="-120"/>
+                        </a:rPr>
+                        <a:t>2.2.2 · 2.0.3</a:t>
+                      </a:r>
+                      <a:endParaRPr lang="en-US" sz="1200" dirty="0">
+                        <a:latin typeface="Calibri" charset="0"/>
+                        <a:ea typeface="Calibri" charset="0"/>
+                        <a:cs typeface="Calibri" charset="0"/>
+                      </a:endParaRPr>
+                    </a:p>
+                  </a:txBody>
+                  <a:tcPr marL="73152" marR="73152" marT="0" marB="0" anchor="ctr">
+                    <a:lnL w="6350" cap="flat" cmpd="sng" algn="ctr">
+                      <a:solidFill>
+                        <a:srgbClr val="D5D9DD"/>
+                      </a:solidFill>
+                      <a:prstDash val="solid"/>
+                      <a:round/>
+                      <a:headEnd type="none" w="med" len="med"/>
+                      <a:tailEnd type="none" w="med" len="med"/>
+                    </a:lnL>
+                    <a:lnR w="6350" cap="flat" cmpd="sng" algn="ctr">
+                      <a:solidFill>
+                        <a:srgbClr val="D5D9DD"/>
+                      </a:solidFill>
+                      <a:prstDash val="solid"/>
+                      <a:round/>
+                      <a:headEnd type="none" w="med" len="med"/>
+                      <a:tailEnd type="none" w="med" len="med"/>
+                    </a:lnR>
+                    <a:lnT w="6350" cap="flat" cmpd="sng" algn="ctr">
+                      <a:solidFill>
+                        <a:srgbClr val="D5D9DD"/>
+                      </a:solidFill>
+                      <a:prstDash val="solid"/>
+                      <a:round/>
+                      <a:headEnd type="none" w="med" len="med"/>
+                      <a:tailEnd type="none" w="med" len="med"/>
+                    </a:lnT>
+                    <a:lnB w="6350" cap="flat" cmpd="sng" algn="ctr">
+                      <a:solidFill>
+                        <a:srgbClr val="D5D9DD"/>
+                      </a:solidFill>
+                      <a:prstDash val="solid"/>
+                      <a:round/>
+                      <a:headEnd type="none" w="med" len="med"/>
+                      <a:tailEnd type="none" w="med" len="med"/>
+                    </a:lnB>
+                  </a:tcPr>
+                </a:tc>
+                <a:tc>
+                  <a:txBody>
+                    <a:bodyPr/>
+                    <a:lstStyle/>
+                    <a:p>
+                      <a:pPr indent="0" marL="0">
+                        <a:buNone/>
+                      </a:pPr>
+                      <a:r>
+                        <a:rPr lang="en-US" sz="1200" b="1" dirty="0">
+                          <a:solidFill>
+                            <a:srgbClr val="1F2933"/>
+                          </a:solidFill>
+                          <a:latin typeface="Calibri" pitchFamily="34" charset="0"/>
+                          <a:ea typeface="Calibri" pitchFamily="34" charset="-122"/>
+                          <a:cs typeface="Calibri" pitchFamily="34" charset="-120"/>
+                        </a:rPr>
+                        <a:t>excluidas</a:t>
+                      </a:r>
+                      <a:endParaRPr lang="en-US" sz="1200" dirty="0">
+                        <a:latin typeface="Calibri" charset="0"/>
+                        <a:ea typeface="Calibri" charset="0"/>
+                        <a:cs typeface="Calibri" charset="0"/>
+                      </a:endParaRPr>
+                    </a:p>
+                  </a:txBody>
+                  <a:tcPr marL="73152" marR="73152" marT="0" marB="0" anchor="ctr">
+                    <a:lnL w="6350" cap="flat" cmpd="sng" algn="ctr">
+                      <a:solidFill>
+                        <a:srgbClr val="D5D9DD"/>
+                      </a:solidFill>
+                      <a:prstDash val="solid"/>
+                      <a:round/>
+                      <a:headEnd type="none" w="med" len="med"/>
+                      <a:tailEnd type="none" w="med" len="med"/>
+                    </a:lnL>
+                    <a:lnR w="6350" cap="flat" cmpd="sng" algn="ctr">
+                      <a:solidFill>
+                        <a:srgbClr val="D5D9DD"/>
+                      </a:solidFill>
+                      <a:prstDash val="solid"/>
+                      <a:round/>
+                      <a:headEnd type="none" w="med" len="med"/>
+                      <a:tailEnd type="none" w="med" len="med"/>
+                    </a:lnR>
+                    <a:lnT w="6350" cap="flat" cmpd="sng" algn="ctr">
+                      <a:solidFill>
+                        <a:srgbClr val="D5D9DD"/>
+                      </a:solidFill>
+                      <a:prstDash val="solid"/>
+                      <a:round/>
+                      <a:headEnd type="none" w="med" len="med"/>
+                      <a:tailEnd type="none" w="med" len="med"/>
+                    </a:lnT>
+                    <a:lnB w="6350" cap="flat" cmpd="sng" algn="ctr">
+                      <a:solidFill>
+                        <a:srgbClr val="D5D9DD"/>
+                      </a:solidFill>
+                      <a:prstDash val="solid"/>
+                      <a:round/>
+                      <a:headEnd type="none" w="med" len="med"/>
+                      <a:tailEnd type="none" w="med" len="med"/>
+                    </a:lnB>
+                  </a:tcPr>
+                </a:tc>
+              </a:tr>
+            </a:tbl>
+          </a:graphicData>
+        </a:graphic>
+      </p:graphicFrame>
+      <p:sp>
+        <p:nvSpPr>
+          <p:cNvPr id="25" name="Slide Number Placeholder 0"/>
+          <p:cNvSpPr>
+            <a:spLocks noGrp="1"/>
+          </p:cNvSpPr>
+          <p:nvPr>
+            <p:ph type="sldNum" sz="quarter" idx="4294967295"/>
+          </p:nvPr>
+        </p:nvSpPr>
+        <p:spPr>
+          <a:xfrm>
+            <a:off x="8229600" y="4754880"/>
+            <a:ext cx="457200" cy="274320"/>
+          </a:xfrm>
+          <a:prstGeom prst="rect">
+            <a:avLst/>
+          </a:prstGeom>
+          <a:extLst>
+            <a:ext uri="{C572A759-6A51-4108-AA02-DFA0A04FC94B}">
+              <ma14:wrappingTextBoxFlag xmlns:ma14="http://schemas.microsoft.com/office/mac/drawingml/2011/main" val="0"/>
+            </a:ext>
+          </a:extLst>
+        </p:spPr>
+        <p:txBody>
+          <a:bodyPr/>
+          <a:lstStyle>
+            <a:lvl1pPr>
+              <a:defRPr sz="1000">
+                <a:solidFill>
+                  <a:schemeClr val="accent5"/>
+                </a:solidFill>
+              </a:defRPr>
+            </a:lvl1pPr>
+          </a:lstStyle>
+          <a:p>
+            <a:pPr algn="l"/>
+            <a:fld id="{F7021451-1387-4CA6-816F-3879F97B5CBC}" type="slidenum">
+              <a:rPr b="0" lang="en-US"/>
+              <a:t>22</a:t>
+            </a:fld>
+            <a:endParaRPr lang="en-US"/>
+          </a:p>
+        </p:txBody>
+      </p:sp>
+    </p:spTree>
+  </p:cSld>
+  <p:clrMapOvr>
+    <a:masterClrMapping/>
+  </p:clrMapOvr>
+</p:sld>
+</file>
+
+<file path=ppt/slides/slide23.xml><?xml version="1.0" encoding="utf-8"?>
+<p:sld xmlns:a="http://schemas.openxmlformats.org/drawingml/2006/main" xmlns:r="http://schemas.openxmlformats.org/officeDocument/2006/relationships" xmlns:p="http://schemas.openxmlformats.org/presentationml/2006/main">
+  <p:cSld name="Slide 23">
+    <p:spTree>
+      <p:nvGrpSpPr>
+        <p:cNvPr id="1" name=""/>
+        <p:cNvGrpSpPr/>
+        <p:nvPr/>
+      </p:nvGrpSpPr>
+      <p:grpSpPr>
+        <a:xfrm>
+          <a:off x="0" y="0"/>
+          <a:ext cx="0" cy="0"/>
+          <a:chOff x="0" y="0"/>
+          <a:chExt cx="0" cy="0"/>
+        </a:xfrm>
+      </p:grpSpPr>
+      <p:sp>
+        <p:nvSpPr>
+          <p:cNvPr id="2" name="Text 0"/>
+          <p:cNvSpPr/>
+          <p:nvPr>
+            <p:ph idx="100" type="title" hasCustomPrompt="1"/>
+          </p:nvPr>
+        </p:nvSpPr>
+        <p:spPr>
+          <a:xfrm>
+            <a:off x="457200" y="320040"/>
+            <a:ext cx="8229600" cy="731520"/>
+          </a:xfrm>
+          <a:prstGeom prst="rect">
+            <a:avLst/>
+          </a:prstGeom>
+          <a:noFill/>
+          <a:ln/>
+        </p:spPr>
+        <p:txBody>
+          <a:bodyPr wrap="square" lIns="0" tIns="0" rIns="0" bIns="0" rtlCol="0" anchor="t"/>
+          <a:lstStyle/>
+          <a:p>
+            <a:pPr algn="l" indent="0" marL="0">
+              <a:buNone/>
+            </a:pPr>
+            <a:r>
+              <a:rPr lang="en-US" sz="3200" b="1" dirty="0">
+                <a:solidFill>
+                  <a:schemeClr val="tx2"/>
+                </a:solidFill>
+              </a:rPr>
+              <a:t>Dependencias tras la corrección</a:t>
+            </a:r>
+            <a:endParaRPr lang="en-US" sz="3200" dirty="0"/>
+          </a:p>
+        </p:txBody>
+      </p:sp>
+      <p:pic>
+        <p:nvPicPr>
+          <p:cNvPr id="4" name="Image 0" descr="Dependency risks después de la corrección">    </p:cNvPr>
+          <p:cNvPicPr>
+            <a:picLocks noChangeAspect="1"/>
+          </p:cNvPicPr>
+          <p:nvPr/>
+        </p:nvPicPr>
+        <p:blipFill>
+          <a:blip r:embed="rId1"/>
+          <a:stretch>
+            <a:fillRect/>
+          </a:stretch>
+        </p:blipFill>
+        <p:spPr>
+          <a:xfrm>
+            <a:off x="457200" y="1188720"/>
+            <a:ext cx="2968516" cy="3246120"/>
+          </a:xfrm>
+          <a:prstGeom prst="rect">
+            <a:avLst/>
+          </a:prstGeom>
+        </p:spPr>
+      </p:pic>
+      <p:sp>
+        <p:nvSpPr>
+          <p:cNvPr id="5" name="Pie después"/>
+          <p:cNvSpPr txBox="1"/>
+          <p:nvPr/>
+        </p:nvSpPr>
+        <p:spPr>
+          <a:xfrm>
+            <a:off x="457200" y="4480560"/>
+            <a:ext cx="2968516" cy="274320"/>
+          </a:xfrm>
+          <a:prstGeom prst="rect">
+            <a:avLst/>
+          </a:prstGeom>
+          <a:noFill/>
+          <a:ln/>
+        </p:spPr>
+        <p:txBody>
+          <a:bodyPr wrap="square" lIns="0" tIns="0" rIns="0" bIns="0" rtlCol="0" anchor="t"/>
+          <a:lstStyle/>
+          <a:p>
+            <a:pPr algn="ctr" indent="0" marL="0">
+              <a:buNone/>
+            </a:pPr>
+            <a:r>
+              <a:rPr lang="en-US" sz="1200" dirty="0">
+                <a:solidFill>
+                  <a:schemeClr val="accent5"/>
+                </a:solidFill>
+                <a:latin typeface="Calibri" pitchFamily="34" charset="0"/>
+                <a:ea typeface="Calibri" pitchFamily="34" charset="-122"/>
+                <a:cs typeface="Calibri" pitchFamily="34" charset="-120"/>
+              </a:rPr>
+              <a:t>Después: los 84 riesgos en estado Fixed</a:t>
+            </a:r>
+            <a:endParaRPr lang="en-US" sz="1200" dirty="0"/>
+          </a:p>
+        </p:txBody>
+      </p:sp>
+      <p:sp>
+        <p:nvSpPr>
+          <p:cNvPr id="6" name="Tarjeta antes-después"/>
+          <p:cNvSpPr/>
+          <p:nvPr/>
+        </p:nvSpPr>
+        <p:spPr>
+          <a:xfrm>
+            <a:off x="4846320" y="1188720"/>
+            <a:ext cx="3840480" cy="1188720"/>
+          </a:xfrm>
+          <a:prstGeom prst="roundRect">
+            <a:avLst>
+              <a:gd name="adj" fmla="val 9231"/>
+            </a:avLst>
+          </a:prstGeom>
+          <a:solidFill>
+            <a:schemeClr val="bg2"/>
+          </a:solidFill>
+          <a:ln w="12700">
+            <a:solidFill>
+              <a:schemeClr val="bg2"/>
+            </a:solidFill>
+            <a:prstDash val="solid"/>
+          </a:ln>
+        </p:spPr>
+      </p:sp>
+      <p:sp>
+        <p:nvSpPr>
+          <p:cNvPr id="7" name="Cifra antes-después"/>
+          <p:cNvSpPr txBox="1"/>
+          <p:nvPr/>
+        </p:nvSpPr>
+        <p:spPr>
+          <a:xfrm>
+            <a:off x="5029200" y="1188720"/>
+            <a:ext cx="3474720" cy="822960"/>
+          </a:xfrm>
+          <a:prstGeom prst="rect">
+            <a:avLst/>
+          </a:prstGeom>
+          <a:noFill/>
+          <a:ln/>
+        </p:spPr>
+        <p:txBody>
+          <a:bodyPr wrap="square" lIns="0" tIns="0" rIns="0" bIns="0" rtlCol="0" anchor="ctr"/>
+          <a:lstStyle/>
+          <a:p>
+            <a:pPr indent="0" marL="0">
+              <a:buNone/>
+            </a:pPr>
+            <a:r>
+              <a:rPr lang="en-US" sz="4000" b="1" dirty="0">
+                <a:solidFill>
+                  <a:schemeClr val="accent1"/>
+                </a:solidFill>
+                <a:latin typeface="Calibri" pitchFamily="34" charset="0"/>
+                <a:ea typeface="Calibri" pitchFamily="34" charset="-122"/>
+                <a:cs typeface="Calibri" pitchFamily="34" charset="-120"/>
+              </a:rPr>
+              <a:t>84 → 0</a:t>
+            </a:r>
+            <a:endParaRPr lang="en-US" sz="4000" dirty="0"/>
+          </a:p>
+        </p:txBody>
+      </p:sp>
+      <p:sp>
+        <p:nvSpPr>
+          <p:cNvPr id="8" name="Etiqueta antes-después"/>
+          <p:cNvSpPr txBox="1"/>
+          <p:nvPr/>
+        </p:nvSpPr>
+        <p:spPr>
+          <a:xfrm>
+            <a:off x="5029200" y="2011680"/>
+            <a:ext cx="3474720" cy="274320"/>
+          </a:xfrm>
+          <a:prstGeom prst="rect">
+            <a:avLst/>
+          </a:prstGeom>
+          <a:noFill/>
+          <a:ln/>
+        </p:spPr>
+        <p:txBody>
+          <a:bodyPr wrap="square" lIns="0" tIns="0" rIns="0" bIns="0" rtlCol="0" anchor="ctr"/>
+          <a:lstStyle/>
+          <a:p>
+            <a:pPr indent="0" marL="0">
+              <a:buNone/>
+            </a:pPr>
+            <a:r>
+              <a:rPr lang="en-US" sz="1400" dirty="0">
+                <a:solidFill>
+                  <a:schemeClr val="tx1"/>
+                </a:solidFill>
+                <a:latin typeface="Calibri" pitchFamily="34" charset="0"/>
+                <a:ea typeface="Calibri" pitchFamily="34" charset="-122"/>
+                <a:cs typeface="Calibri" pitchFamily="34" charset="-120"/>
+              </a:rPr>
+              <a:t>riesgos de dependencias abiertos</a:t>
+            </a:r>
+            <a:endParaRPr lang="en-US" sz="1400" dirty="0"/>
+          </a:p>
+        </p:txBody>
+      </p:sp>
+      <p:pic>
+        <p:nvPicPr>
+          <p:cNvPr id="9" name="Image 1" descr="Resumen de la rama main tras la corrección">    </p:cNvPr>
+          <p:cNvPicPr>
+            <a:picLocks noChangeAspect="1"/>
+          </p:cNvPicPr>
+          <p:nvPr/>
+        </p:nvPicPr>
+        <p:blipFill>
+          <a:blip r:embed="rId2"/>
+          <a:stretch>
+            <a:fillRect/>
+          </a:stretch>
+        </p:blipFill>
+        <p:spPr>
+          <a:xfrm>
+            <a:off x="4846320" y="2514600"/>
+            <a:ext cx="3412770" cy="1965960"/>
+          </a:xfrm>
+          <a:prstGeom prst="rect">
+            <a:avLst/>
+          </a:prstGeom>
+        </p:spPr>
+      </p:pic>
+      <p:sp>
+        <p:nvSpPr>
+          <p:cNvPr id="10" name="Pie resumen después"/>
+          <p:cNvSpPr txBox="1"/>
+          <p:nvPr/>
+        </p:nvSpPr>
+        <p:spPr>
+          <a:xfrm>
+            <a:off x="4846320" y="4507992"/>
+            <a:ext cx="3412770" cy="274320"/>
+          </a:xfrm>
+          <a:prstGeom prst="rect">
+            <a:avLst/>
+          </a:prstGeom>
+          <a:noFill/>
+          <a:ln/>
+        </p:spPr>
+        <p:txBody>
+          <a:bodyPr wrap="square" lIns="0" tIns="0" rIns="0" bIns="0" rtlCol="0" anchor="t"/>
+          <a:lstStyle/>
+          <a:p>
+            <a:pPr algn="ctr" indent="0" marL="0">
+              <a:buNone/>
+            </a:pPr>
+            <a:r>
+              <a:rPr lang="en-US" sz="1200" dirty="0">
+                <a:solidFill>
+                  <a:schemeClr val="accent5"/>
+                </a:solidFill>
+                <a:latin typeface="Calibri" pitchFamily="34" charset="0"/>
+                <a:ea typeface="Calibri" pitchFamily="34" charset="-122"/>
+                <a:cs typeface="Calibri" pitchFamily="34" charset="-120"/>
+              </a:rPr>
+              <a:t>Resumen de main: Dependency Risks = 0</a:t>
+            </a:r>
+            <a:endParaRPr lang="en-US" sz="1200" dirty="0"/>
+          </a:p>
+        </p:txBody>
+      </p:sp>
+      <p:sp>
+        <p:nvSpPr>
+          <p:cNvPr id="25" name="Slide Number Placeholder 0"/>
+          <p:cNvSpPr>
+            <a:spLocks noGrp="1"/>
+          </p:cNvSpPr>
+          <p:nvPr>
+            <p:ph type="sldNum" sz="quarter" idx="4294967295"/>
+          </p:nvPr>
+        </p:nvSpPr>
+        <p:spPr>
+          <a:xfrm>
+            <a:off x="8229600" y="4754880"/>
+            <a:ext cx="457200" cy="274320"/>
+          </a:xfrm>
+          <a:prstGeom prst="rect">
+            <a:avLst/>
+          </a:prstGeom>
+          <a:extLst>
+            <a:ext uri="{C572A759-6A51-4108-AA02-DFA0A04FC94B}">
+              <ma14:wrappingTextBoxFlag xmlns:ma14="http://schemas.microsoft.com/office/mac/drawingml/2011/main" val="0"/>
+            </a:ext>
+          </a:extLst>
+        </p:spPr>
+        <p:txBody>
+          <a:bodyPr/>
+          <a:lstStyle>
+            <a:lvl1pPr>
+              <a:defRPr sz="1000">
+                <a:solidFill>
+                  <a:schemeClr val="accent5"/>
+                </a:solidFill>
+              </a:defRPr>
+            </a:lvl1pPr>
+          </a:lstStyle>
+          <a:p>
+            <a:pPr algn="l"/>
+            <a:fld id="{F7021451-1387-4CA6-816F-3879F97B5CBC}" type="slidenum">
+              <a:rPr b="0" lang="en-US"/>
+              <a:t>23</a:t>
+            </a:fld>
+            <a:endParaRPr lang="en-US"/>
+          </a:p>
+        </p:txBody>
+      </p:sp>
+    </p:spTree>
+  </p:cSld>
+  <p:clrMapOvr>
+    <a:masterClrMapping/>
+  </p:clrMapOvr>
+</p:sld>
+</file>
+
+<file path=ppt/slides/slide24.xml><?xml version="1.0" encoding="utf-8"?>
+<p:sld xmlns:a="http://schemas.openxmlformats.org/drawingml/2006/main" xmlns:r="http://schemas.openxmlformats.org/officeDocument/2006/relationships" xmlns:p="http://schemas.openxmlformats.org/presentationml/2006/main">
+  <p:cSld name="Slide 24">
+    <p:spTree>
+      <p:nvGrpSpPr>
+        <p:cNvPr id="1" name=""/>
+        <p:cNvGrpSpPr/>
+        <p:nvPr/>
+      </p:nvGrpSpPr>
+      <p:grpSpPr>
+        <a:xfrm>
+          <a:off x="0" y="0"/>
+          <a:ext cx="0" cy="0"/>
+          <a:chOff x="0" y="0"/>
+          <a:chExt cx="0" cy="0"/>
+        </a:xfrm>
+      </p:grpSpPr>
+      <p:sp>
+        <p:nvSpPr>
+          <p:cNvPr id="2" name="Text 0"/>
+          <p:cNvSpPr/>
+          <p:nvPr>
+            <p:ph idx="100" type="title" hasCustomPrompt="1"/>
+          </p:nvPr>
+        </p:nvSpPr>
+        <p:spPr>
+          <a:xfrm>
+            <a:off x="457200" y="320040"/>
+            <a:ext cx="8229600" cy="731520"/>
+          </a:xfrm>
+          <a:prstGeom prst="rect">
+            <a:avLst/>
+          </a:prstGeom>
+          <a:noFill/>
+          <a:ln/>
+        </p:spPr>
+        <p:txBody>
+          <a:bodyPr wrap="square" lIns="0" tIns="0" rIns="0" bIns="0" rtlCol="0" anchor="t"/>
+          <a:lstStyle/>
+          <a:p>
+            <a:pPr algn="l" indent="0" marL="0">
+              <a:buNone/>
+            </a:pPr>
+            <a:r>
+              <a:rPr lang="en-US" sz="3200" b="1" dirty="0">
+                <a:solidFill>
+                  <a:schemeClr val="tx2"/>
+                </a:solidFill>
+              </a:rPr>
+              <a:t>Límites y próximos pasos</a:t>
+            </a:r>
+            <a:endParaRPr lang="en-US" sz="3200" dirty="0"/>
+          </a:p>
+        </p:txBody>
+      </p:sp>
+      <p:sp>
+        <p:nvSpPr>
+          <p:cNvPr id="4" name="Título límites"/>
+          <p:cNvSpPr txBox="1"/>
+          <p:nvPr/>
+        </p:nvSpPr>
+        <p:spPr>
+          <a:xfrm>
+            <a:off x="457200" y="1325880"/>
+            <a:ext cx="3931920" cy="411480"/>
+          </a:xfrm>
+          <a:prstGeom prst="rect">
+            <a:avLst/>
+          </a:prstGeom>
+          <a:noFill/>
+          <a:ln/>
+        </p:spPr>
+        <p:txBody>
+          <a:bodyPr wrap="square" lIns="0" tIns="0" rIns="0" bIns="0" rtlCol="0" anchor="ctr"/>
+          <a:lstStyle/>
+          <a:p>
+            <a:pPr indent="0" marL="0">
+              <a:buNone/>
+            </a:pPr>
+            <a:r>
+              <a:rPr lang="en-US" sz="2200" b="1" dirty="0">
+                <a:solidFill>
+                  <a:schemeClr val="tx2"/>
+                </a:solidFill>
+                <a:latin typeface="Calibri" pitchFamily="34" charset="0"/>
+                <a:ea typeface="Calibri" pitchFamily="34" charset="-122"/>
+                <a:cs typeface="Calibri" pitchFamily="34" charset="-120"/>
+              </a:rPr>
+              <a:t>Límites actuales</a:t>
+            </a:r>
+            <a:endParaRPr lang="en-US" sz="2200" dirty="0"/>
+          </a:p>
+        </p:txBody>
+      </p:sp>
+      <p:sp>
+        <p:nvSpPr>
+          <p:cNvPr id="5" name="Lista límites"/>
+          <p:cNvSpPr txBox="1"/>
+          <p:nvPr/>
+        </p:nvSpPr>
+        <p:spPr>
+          <a:xfrm>
+            <a:off x="457200" y="1828800"/>
+            <a:ext cx="3931920" cy="2743200"/>
+          </a:xfrm>
+          <a:prstGeom prst="rect">
+            <a:avLst/>
+          </a:prstGeom>
+          <a:noFill/>
+          <a:ln/>
+        </p:spPr>
+        <p:txBody>
+          <a:bodyPr wrap="square" lIns="0" tIns="0" rIns="0" bIns="0" rtlCol="0" anchor="t"/>
+          <a:lstStyle/>
+          <a:p>
+            <a:pPr marL="342900" indent="-342900">
+              <a:spcAft>
+                <a:spcPts val="800"/>
+              </a:spcAft>
+              <a:buSzPct val="100000"/>
+              <a:buChar char="•"/>
+            </a:pPr>
+            <a:r>
+              <a:rPr lang="en-US" sz="1400" dirty="0">
+                <a:solidFill>
+                  <a:schemeClr val="tx1"/>
+                </a:solidFill>
+                <a:latin typeface="Calibri" pitchFamily="34" charset="0"/>
+                <a:ea typeface="Calibri" pitchFamily="34" charset="-122"/>
+                <a:cs typeface="Calibri" pitchFamily="34" charset="-120"/>
+              </a:rPr>
+              <a:t>Análisis publicado en la rama principal master; la rama corta main anterior queda obsoleta</a:t>
+            </a:r>
+            <a:endParaRPr lang="en-US" sz="1400" dirty="0"/>
+          </a:p>
+          <a:p>
+            <a:pPr marL="342900" indent="-342900">
+              <a:spcAft>
+                <a:spcPts val="800"/>
+              </a:spcAft>
+              <a:buSzPct val="100000"/>
+              <a:buChar char="•"/>
+            </a:pPr>
+            <a:r>
+              <a:rPr lang="en-US" sz="1400" dirty="0">
+                <a:solidFill>
+                  <a:schemeClr val="tx1"/>
+                </a:solidFill>
+                <a:latin typeface="Calibri" pitchFamily="34" charset="0"/>
+                <a:ea typeface="Calibri" pitchFamily="34" charset="-122"/>
+                <a:cs typeface="Calibri" pitchFamily="34" charset="-120"/>
+              </a:rPr>
+              <a:t>Gate y profile propios: asignados solo durante la prueba del plan Team (hasta el 1 nov.)</a:t>
+            </a:r>
+            <a:endParaRPr lang="en-US" sz="1400" dirty="0"/>
+          </a:p>
+          <a:p>
+            <a:pPr marL="342900" indent="-342900">
+              <a:spcAft>
+                <a:spcPts val="800"/>
+              </a:spcAft>
+              <a:buSzPct val="100000"/>
+              <a:buChar char="•"/>
+            </a:pPr>
+            <a:r>
+              <a:rPr lang="en-US" sz="1400" dirty="0">
+                <a:solidFill>
+                  <a:schemeClr val="tx1"/>
+                </a:solidFill>
+                <a:latin typeface="Calibri" pitchFamily="34" charset="0"/>
+                <a:ea typeface="Calibri" pitchFamily="34" charset="-122"/>
+                <a:cs typeface="Calibri" pitchFamily="34" charset="-120"/>
+              </a:rPr>
+              <a:t>Ventana Swing sin prueba visual</a:t>
+            </a:r>
+            <a:endParaRPr lang="en-US" sz="1400" dirty="0"/>
+          </a:p>
+        </p:txBody>
+      </p:sp>
+      <p:sp>
+        <p:nvSpPr>
+          <p:cNvPr id="6" name="Título pasos"/>
+          <p:cNvSpPr txBox="1"/>
+          <p:nvPr/>
+        </p:nvSpPr>
+        <p:spPr>
+          <a:xfrm>
+            <a:off x="4754880" y="1325880"/>
+            <a:ext cx="3931920" cy="411480"/>
+          </a:xfrm>
+          <a:prstGeom prst="rect">
+            <a:avLst/>
+          </a:prstGeom>
+          <a:noFill/>
+          <a:ln/>
+        </p:spPr>
+        <p:txBody>
+          <a:bodyPr wrap="square" lIns="0" tIns="0" rIns="0" bIns="0" rtlCol="0" anchor="ctr"/>
+          <a:lstStyle/>
+          <a:p>
+            <a:pPr indent="0" marL="0">
+              <a:buNone/>
+            </a:pPr>
+            <a:r>
+              <a:rPr lang="en-US" sz="2200" b="1" dirty="0">
+                <a:solidFill>
+                  <a:schemeClr val="tx2"/>
+                </a:solidFill>
+                <a:latin typeface="Calibri" pitchFamily="34" charset="0"/>
+                <a:ea typeface="Calibri" pitchFamily="34" charset="-122"/>
+                <a:cs typeface="Calibri" pitchFamily="34" charset="-120"/>
+              </a:rPr>
+              <a:t>Próximos pasos</a:t>
+            </a:r>
+            <a:endParaRPr lang="en-US" sz="2200" dirty="0"/>
+          </a:p>
+        </p:txBody>
+      </p:sp>
+      <p:sp>
+        <p:nvSpPr>
+          <p:cNvPr id="7" name="Lista pasos"/>
+          <p:cNvSpPr txBox="1"/>
+          <p:nvPr/>
+        </p:nvSpPr>
+        <p:spPr>
+          <a:xfrm>
+            <a:off x="4754880" y="1828800"/>
+            <a:ext cx="3931920" cy="2743200"/>
+          </a:xfrm>
+          <a:prstGeom prst="rect">
+            <a:avLst/>
+          </a:prstGeom>
+          <a:noFill/>
+          <a:ln/>
+        </p:spPr>
+        <p:txBody>
+          <a:bodyPr wrap="square" lIns="0" tIns="0" rIns="0" bIns="0" rtlCol="0" anchor="t"/>
+          <a:lstStyle/>
+          <a:p>
+            <a:pPr marL="342900" indent="-342900">
+              <a:spcAft>
+                <a:spcPts val="800"/>
+              </a:spcAft>
+              <a:buSzPct val="100000"/>
+              <a:buFont typeface="+mj-lt"/>
+              <a:buAutoNum type="arabicPeriod" startAt="1"/>
+            </a:pPr>
+            <a:r>
+              <a:rPr lang="en-US" sz="1400" dirty="0">
+                <a:solidFill>
+                  <a:schemeClr val="tx1"/>
+                </a:solidFill>
+                <a:latin typeface="Calibri" pitchFamily="34" charset="0"/>
+                <a:ea typeface="Calibri" pitchFamily="34" charset="-122"/>
+                <a:cs typeface="Calibri" pitchFamily="34" charset="-120"/>
+              </a:rPr>
+              <a:t>Opcional: borrar la rama corta main y renombrar master a main (variable SONAR_MAIN_BRANCH)</a:t>
+            </a:r>
+            <a:endParaRPr lang="en-US" sz="1400" dirty="0"/>
+          </a:p>
+          <a:p>
+            <a:pPr marL="342900" indent="-342900">
+              <a:spcAft>
+                <a:spcPts val="800"/>
+              </a:spcAft>
+              <a:buSzPct val="100000"/>
+              <a:buFont typeface="+mj-lt"/>
+              <a:buAutoNum type="arabicPeriod" startAt="1"/>
+            </a:pPr>
+            <a:r>
+              <a:rPr lang="en-US" sz="1400" dirty="0">
+                <a:solidFill>
+                  <a:schemeClr val="tx1"/>
+                </a:solidFill>
+                <a:latin typeface="Calibri" pitchFamily="34" charset="0"/>
+                <a:ea typeface="Calibri" pitchFamily="34" charset="-122"/>
+                <a:cs typeface="Calibri" pitchFamily="34" charset="-120"/>
+              </a:rPr>
+              <a:t>Revisar la cobertura total y el gate en la rama principal de SonarCloud</a:t>
+            </a:r>
+            <a:endParaRPr lang="en-US" sz="1400" dirty="0"/>
+          </a:p>
+          <a:p>
+            <a:pPr marL="342900" indent="-342900">
+              <a:spcAft>
+                <a:spcPts val="800"/>
+              </a:spcAft>
+              <a:buSzPct val="100000"/>
+              <a:buFont typeface="+mj-lt"/>
+              <a:buAutoNum type="arabicPeriod" startAt="1"/>
+            </a:pPr>
+            <a:r>
+              <a:rPr lang="en-US" sz="1400" dirty="0">
+                <a:solidFill>
+                  <a:schemeClr val="tx1"/>
+                </a:solidFill>
+                <a:latin typeface="Calibri" pitchFamily="34" charset="0"/>
+                <a:ea typeface="Calibri" pitchFamily="34" charset="-122"/>
+                <a:cs typeface="Calibri" pitchFamily="34" charset="-120"/>
+              </a:rPr>
+              <a:t>Antes del 1 nov.: plan de pago o check-metrics.sh en plan gratuito</a:t>
+            </a:r>
+            <a:endParaRPr lang="en-US" sz="1400" dirty="0"/>
+          </a:p>
+          <a:p>
+            <a:pPr marL="342900" indent="-342900">
+              <a:spcAft>
+                <a:spcPts val="800"/>
+              </a:spcAft>
+              <a:buSzPct val="100000"/>
+              <a:buFont typeface="+mj-lt"/>
+              <a:buAutoNum type="arabicPeriod" startAt="1"/>
+            </a:pPr>
+            <a:r>
+              <a:rPr lang="en-US" sz="1400" dirty="0">
+                <a:solidFill>
+                  <a:schemeClr val="tx1"/>
+                </a:solidFill>
+                <a:latin typeface="Calibri" pitchFamily="34" charset="0"/>
+                <a:ea typeface="Calibri" pitchFamily="34" charset="-122"/>
+                <a:cs typeface="Calibri" pitchFamily="34" charset="-120"/>
+              </a:rPr>
+              <a:t>Ajustar los topes de complejidad si se desea</a:t>
+            </a:r>
+            <a:endParaRPr lang="en-US" sz="1400" dirty="0"/>
+          </a:p>
+        </p:txBody>
+      </p:sp>
+      <p:sp>
+        <p:nvSpPr>
+          <p:cNvPr id="25" name="Slide Number Placeholder 0"/>
+          <p:cNvSpPr>
+            <a:spLocks noGrp="1"/>
+          </p:cNvSpPr>
+          <p:nvPr>
+            <p:ph type="sldNum" sz="quarter" idx="4294967295"/>
+          </p:nvPr>
+        </p:nvSpPr>
+        <p:spPr>
+          <a:xfrm>
+            <a:off x="8229600" y="4754880"/>
+            <a:ext cx="457200" cy="274320"/>
+          </a:xfrm>
+          <a:prstGeom prst="rect">
+            <a:avLst/>
+          </a:prstGeom>
+          <a:extLst>
+            <a:ext uri="{C572A759-6A51-4108-AA02-DFA0A04FC94B}">
+              <ma14:wrappingTextBoxFlag xmlns:ma14="http://schemas.microsoft.com/office/mac/drawingml/2011/main" val="0"/>
+            </a:ext>
+          </a:extLst>
+        </p:spPr>
+        <p:txBody>
+          <a:bodyPr/>
+          <a:lstStyle>
+            <a:lvl1pPr>
+              <a:defRPr sz="1000">
+                <a:solidFill>
+                  <a:schemeClr val="accent5"/>
+                </a:solidFill>
+              </a:defRPr>
+            </a:lvl1pPr>
+          </a:lstStyle>
+          <a:p>
+            <a:pPr algn="l"/>
+            <a:fld id="{F7021451-1387-4CA6-816F-3879F97B5CBC}" type="slidenum">
+              <a:rPr b="0" lang="en-US"/>
+              <a:t>24</a:t>
+            </a:fld>
+            <a:endParaRPr lang="en-US"/>
+          </a:p>
+        </p:txBody>
+      </p:sp>
+    </p:spTree>
+  </p:cSld>
+  <p:clrMapOvr>
+    <a:masterClrMapping/>
+  </p:clrMapOvr>
+</p:sld>
+</file>
+
+<file path=ppt/slides/slide25.xml><?xml version="1.0" encoding="utf-8"?>
+<p:sld xmlns:a="http://schemas.openxmlformats.org/drawingml/2006/main" xmlns:r="http://schemas.openxmlformats.org/officeDocument/2006/relationships" xmlns:p="http://schemas.openxmlformats.org/presentationml/2006/main">
+  <p:cSld name="Slide 25">
+    <p:spTree>
+      <p:nvGrpSpPr>
+        <p:cNvPr id="1" name=""/>
+        <p:cNvGrpSpPr/>
+        <p:nvPr/>
+      </p:nvGrpSpPr>
+      <p:grpSpPr>
+        <a:xfrm>
+          <a:off x="0" y="0"/>
+          <a:ext cx="0" cy="0"/>
+          <a:chOff x="0" y="0"/>
+          <a:chExt cx="0" cy="0"/>
+        </a:xfrm>
+      </p:grpSpPr>
+      <p:sp>
+        <p:nvSpPr>
+          <p:cNvPr id="2" name="Text 0"/>
+          <p:cNvSpPr/>
+          <p:nvPr>
+            <p:ph idx="100" type="title" hasCustomPrompt="1"/>
+          </p:nvPr>
+        </p:nvSpPr>
+        <p:spPr>
+          <a:xfrm>
+            <a:off x="640080" y="1371600"/>
+            <a:ext cx="7863840" cy="914400"/>
+          </a:xfrm>
+          <a:prstGeom prst="rect">
+            <a:avLst/>
+          </a:prstGeom>
+          <a:noFill/>
+          <a:ln/>
+        </p:spPr>
+        <p:txBody>
+          <a:bodyPr wrap="square" lIns="0" tIns="0" rIns="0" bIns="0" rtlCol="0" anchor="t"/>
+          <a:lstStyle/>
+          <a:p>
+            <a:pPr algn="l" indent="0" marL="0">
+              <a:buNone/>
+            </a:pPr>
+            <a:r>
+              <a:rPr lang="en-US" sz="4400" b="1" dirty="0">
+                <a:solidFill>
+                  <a:schemeClr val="tx2"/>
+                </a:solidFill>
+              </a:rPr>
+              <a:t>Preguntas</a:t>
+            </a:r>
+            <a:endParaRPr lang="en-US" sz="4400" dirty="0"/>
+          </a:p>
+        </p:txBody>
+      </p:sp>
+      <p:sp>
+        <p:nvSpPr>
+          <p:cNvPr id="3" name="Text 0"/>
+          <p:cNvSpPr/>
+          <p:nvPr>
+            <p:ph idx="101" type="body" hasCustomPrompt="1"/>
+          </p:nvPr>
+        </p:nvSpPr>
+        <p:spPr>
+          <a:xfrm>
+            <a:off x="640080" y="2468880"/>
+            <a:ext cx="7863840" cy="822960"/>
+          </a:xfrm>
+          <a:prstGeom prst="rect">
+            <a:avLst/>
+          </a:prstGeom>
+          <a:noFill/>
+          <a:ln/>
+        </p:spPr>
+        <p:txBody>
+          <a:bodyPr wrap="square" lIns="0" tIns="0" rIns="0" bIns="0" rtlCol="0" anchor="t"/>
+          <a:lstStyle/>
+          <a:p>
+            <a:pPr algn="l" indent="0" marL="0">
+              <a:buNone/>
+            </a:pPr>
+            <a:r>
+              <a:rPr lang="en-US" sz="2200" dirty="0">
+                <a:solidFill>
+                  <a:schemeClr val="tx1"/>
+                </a:solidFill>
+              </a:rPr>
+              <a:t>Karate valida lo que el usuario espera; Sonar cuida que el código siga sano.</a:t>
+            </a:r>
+            <a:endParaRPr lang="en-US" sz="2200" dirty="0"/>
+          </a:p>
+        </p:txBody>
+      </p:sp>
+      <p:sp>
+        <p:nvSpPr>
+          <p:cNvPr id="4" name="Acento cierre"/>
+          <p:cNvSpPr/>
+          <p:nvPr/>
+        </p:nvSpPr>
+        <p:spPr>
+          <a:xfrm>
+            <a:off x="640080" y="1143000"/>
+            <a:ext cx="822960" cy="64008"/>
+          </a:xfrm>
+          <a:prstGeom prst="rect">
+            <a:avLst/>
+          </a:prstGeom>
+          <a:solidFill>
+            <a:schemeClr val="accent1"/>
+          </a:solidFill>
+          <a:ln w="12700">
+            <a:solidFill>
+              <a:schemeClr val="accent1"/>
+            </a:solidFill>
+            <a:prstDash val="solid"/>
+          </a:ln>
+        </p:spPr>
+      </p:sp>
+      <p:sp>
+        <p:nvSpPr>
+          <p:cNvPr id="5" name="Entregables"/>
+          <p:cNvSpPr txBox="1"/>
+          <p:nvPr/>
+        </p:nvSpPr>
+        <p:spPr>
+          <a:xfrm>
+            <a:off x="640080" y="3977640"/>
+            <a:ext cx="7863840" cy="320040"/>
+          </a:xfrm>
+          <a:prstGeom prst="rect">
+            <a:avLst/>
+          </a:prstGeom>
+          <a:noFill/>
+          <a:ln/>
+        </p:spPr>
+        <p:txBody>
+          <a:bodyPr wrap="square" lIns="0" tIns="0" rIns="0" bIns="0" rtlCol="0" anchor="ctr"/>
+          <a:lstStyle/>
+          <a:p>
+            <a:pPr indent="0" marL="0">
+              <a:buNone/>
+            </a:pPr>
+            <a:r>
+              <a:rPr lang="en-US" sz="1400" dirty="0">
+                <a:solidFill>
+                  <a:schemeClr val="accent5"/>
+                </a:solidFill>
+                <a:latin typeface="Calibri" pitchFamily="34" charset="0"/>
+                <a:ea typeface="Calibri" pitchFamily="34" charset="-122"/>
+                <a:cs typeface="Calibri" pitchFamily="34" charset="-120"/>
+              </a:rPr>
+              <a:t>pruebas-aceptacion/ · sonar/ · docs/</a:t>
+            </a:r>
+            <a:endParaRPr lang="en-US" sz="1400" dirty="0"/>
+          </a:p>
+        </p:txBody>
+      </p:sp>
+      <p:sp>
+        <p:nvSpPr>
+          <p:cNvPr id="6" name="Repositorio final"/>
+          <p:cNvSpPr txBox="1"/>
+          <p:nvPr/>
+        </p:nvSpPr>
+        <p:spPr>
+          <a:xfrm>
+            <a:off x="640080" y="4297680"/>
+            <a:ext cx="7863840" cy="320040"/>
+          </a:xfrm>
+          <a:prstGeom prst="rect">
+            <a:avLst/>
+          </a:prstGeom>
+          <a:noFill/>
+          <a:ln/>
+        </p:spPr>
+        <p:txBody>
+          <a:bodyPr wrap="square" lIns="0" tIns="0" rIns="0" bIns="0" rtlCol="0" anchor="ctr"/>
+          <a:lstStyle/>
+          <a:p>
+            <a:pPr indent="0" marL="0">
+              <a:buNone/>
+            </a:pPr>
+            <a:r>
+              <a:rPr lang="en-US" sz="1200" dirty="0">
+                <a:solidFill>
+                  <a:schemeClr val="accent5"/>
+                </a:solidFill>
+                <a:latin typeface="Calibri" pitchFamily="34" charset="0"/>
+                <a:ea typeface="Calibri" pitchFamily="34" charset="-122"/>
+                <a:cs typeface="Calibri" pitchFamily="34" charset="-120"/>
+              </a:rPr>
+              <a:t>https://github.com/carolinacardonaUdeA/calidad-software</a:t>
+            </a:r>
+            <a:endParaRPr lang="en-US" sz="1200" dirty="0"/>
           </a:p>
         </p:txBody>
       </p:sp>
